--- a/docs/onboarding/claude-code-onboarding.pptx
+++ b/docs/onboarding/claude-code-onboarding.pptx
@@ -141,6 +141,3091 @@
     </a:lvl9pPr>
   </p:defaultTextStyle>
 </p:presentation>
+</file>
+
+<file path=ppt/notesMasters/notesMaster1.xml><?xml version="1.0" encoding="utf-8"?>
+<p:notesMaster xmlns:a="http://schemas.openxmlformats.org/drawingml/2006/main" xmlns:p="http://schemas.openxmlformats.org/presentationml/2006/main" xmlns:r="http://schemas.openxmlformats.org/officeDocument/2006/relationships">
+  <p:cSld>
+    <p:bg>
+      <p:bgRef idx="1001">
+        <a:schemeClr val="bg1"/>
+      </p:bgRef>
+    </p:bg>
+    <p:spTree>
+      <p:nvGrpSpPr>
+        <p:cNvPr id="1" name=""/>
+        <p:cNvGrpSpPr/>
+        <p:nvPr/>
+      </p:nvGrpSpPr>
+      <p:grpSpPr>
+        <a:xfrm>
+          <a:off x="0" y="0"/>
+          <a:ext cx="0" cy="0"/>
+          <a:chOff x="0" y="0"/>
+          <a:chExt cx="0" cy="0"/>
+        </a:xfrm>
+      </p:grpSpPr>
+      <p:sp>
+        <p:nvSpPr>
+          <p:cNvPr id="2" name="Header Placeholder 1"/>
+          <p:cNvSpPr>
+            <a:spLocks noGrp="1"/>
+          </p:cNvSpPr>
+          <p:nvPr>
+            <p:ph type="hdr" sz="quarter"/>
+          </p:nvPr>
+        </p:nvSpPr>
+        <p:spPr>
+          <a:xfrm>
+            <a:off x="0" y="0"/>
+            <a:ext cx="2971800" cy="457200"/>
+          </a:xfrm>
+          <a:prstGeom prst="rect">
+            <a:avLst/>
+          </a:prstGeom>
+        </p:spPr>
+        <p:txBody>
+          <a:bodyPr vert="horz" lIns="91440" tIns="45720" rIns="91440" bIns="45720" rtlCol="0"/>
+          <a:lstStyle>
+            <a:lvl1pPr algn="l">
+              <a:defRPr sz="1200"/>
+            </a:lvl1pPr>
+          </a:lstStyle>
+          <a:p>
+            <a:endParaRPr lang="en-US"/>
+          </a:p>
+        </p:txBody>
+      </p:sp>
+      <p:sp>
+        <p:nvSpPr>
+          <p:cNvPr id="3" name="Date Placeholder 2"/>
+          <p:cNvSpPr>
+            <a:spLocks noGrp="1"/>
+          </p:cNvSpPr>
+          <p:nvPr>
+            <p:ph type="dt" idx="1"/>
+          </p:nvPr>
+        </p:nvSpPr>
+        <p:spPr>
+          <a:xfrm>
+            <a:off x="3884613" y="0"/>
+            <a:ext cx="2971800" cy="457200"/>
+          </a:xfrm>
+          <a:prstGeom prst="rect">
+            <a:avLst/>
+          </a:prstGeom>
+        </p:spPr>
+        <p:txBody>
+          <a:bodyPr vert="horz" lIns="91440" tIns="45720" rIns="91440" bIns="45720" rtlCol="0"/>
+          <a:lstStyle>
+            <a:lvl1pPr algn="r">
+              <a:defRPr sz="1200"/>
+            </a:lvl1pPr>
+          </a:lstStyle>
+          <a:p>
+            <a:fld id="{0F89C1C7-3DCD-1040-A9CF-14679D8B5DDD}" type="datetimeFigureOut">
+              <a:rPr lang="en-US" smtClean="0"/>
+              <a:t>10/17/16</a:t>
+            </a:fld>
+            <a:endParaRPr lang="en-US"/>
+          </a:p>
+        </p:txBody>
+      </p:sp>
+      <p:sp>
+        <p:nvSpPr>
+          <p:cNvPr id="4" name="Slide Image Placeholder 3"/>
+          <p:cNvSpPr>
+            <a:spLocks noGrp="1" noRot="1" noChangeAspect="1"/>
+          </p:cNvSpPr>
+          <p:nvPr>
+            <p:ph type="sldImg" idx="2"/>
+          </p:nvPr>
+        </p:nvSpPr>
+        <p:spPr>
+          <a:xfrm>
+            <a:off x="1143000" y="685800"/>
+            <a:ext cx="4572000" cy="3429000"/>
+          </a:xfrm>
+          <a:prstGeom prst="rect">
+            <a:avLst/>
+          </a:prstGeom>
+          <a:noFill/>
+          <a:ln w="12700">
+            <a:solidFill>
+              <a:prstClr val="black"/>
+            </a:solidFill>
+          </a:ln>
+        </p:spPr>
+        <p:txBody>
+          <a:bodyPr vert="horz" lIns="91440" tIns="45720" rIns="91440" bIns="45720" rtlCol="0" anchor="ctr"/>
+          <a:lstStyle/>
+          <a:p>
+            <a:endParaRPr lang="en-US"/>
+          </a:p>
+        </p:txBody>
+      </p:sp>
+      <p:sp>
+        <p:nvSpPr>
+          <p:cNvPr id="5" name="Notes Placeholder 4"/>
+          <p:cNvSpPr>
+            <a:spLocks noGrp="1"/>
+          </p:cNvSpPr>
+          <p:nvPr>
+            <p:ph type="body" sz="quarter" idx="3"/>
+          </p:nvPr>
+        </p:nvSpPr>
+        <p:spPr>
+          <a:xfrm>
+            <a:off x="685800" y="4343400"/>
+            <a:ext cx="5486400" cy="4114800"/>
+          </a:xfrm>
+          <a:prstGeom prst="rect">
+            <a:avLst/>
+          </a:prstGeom>
+        </p:spPr>
+        <p:txBody>
+          <a:bodyPr vert="horz" lIns="91440" tIns="45720" rIns="91440" bIns="45720" rtlCol="0"/>
+          <a:lstStyle/>
+          <a:p>
+            <a:pPr lvl="0"/>
+            <a:r>
+              <a:rPr lang="en-US" smtClean="0"/>
+              <a:t>Click to edit Master text styles</a:t>
+            </a:r>
+          </a:p>
+          <a:p>
+            <a:pPr lvl="1"/>
+            <a:r>
+              <a:rPr lang="en-US" smtClean="0"/>
+              <a:t>Second level</a:t>
+            </a:r>
+          </a:p>
+          <a:p>
+            <a:pPr lvl="2"/>
+            <a:r>
+              <a:rPr lang="en-US" smtClean="0"/>
+              <a:t>Third level</a:t>
+            </a:r>
+          </a:p>
+          <a:p>
+            <a:pPr lvl="3"/>
+            <a:r>
+              <a:rPr lang="en-US" smtClean="0"/>
+              <a:t>Fourth level</a:t>
+            </a:r>
+          </a:p>
+          <a:p>
+            <a:pPr lvl="4"/>
+            <a:r>
+              <a:rPr lang="en-US" smtClean="0"/>
+              <a:t>Fifth level</a:t>
+            </a:r>
+            <a:endParaRPr lang="en-US"/>
+          </a:p>
+        </p:txBody>
+      </p:sp>
+      <p:sp>
+        <p:nvSpPr>
+          <p:cNvPr id="6" name="Footer Placeholder 5"/>
+          <p:cNvSpPr>
+            <a:spLocks noGrp="1"/>
+          </p:cNvSpPr>
+          <p:nvPr>
+            <p:ph type="ftr" sz="quarter" idx="4"/>
+          </p:nvPr>
+        </p:nvSpPr>
+        <p:spPr>
+          <a:xfrm>
+            <a:off x="0" y="8685213"/>
+            <a:ext cx="2971800" cy="457200"/>
+          </a:xfrm>
+          <a:prstGeom prst="rect">
+            <a:avLst/>
+          </a:prstGeom>
+        </p:spPr>
+        <p:txBody>
+          <a:bodyPr vert="horz" lIns="91440" tIns="45720" rIns="91440" bIns="45720" rtlCol="0" anchor="b"/>
+          <a:lstStyle>
+            <a:lvl1pPr algn="l">
+              <a:defRPr sz="1200"/>
+            </a:lvl1pPr>
+          </a:lstStyle>
+          <a:p>
+            <a:endParaRPr lang="en-US"/>
+          </a:p>
+        </p:txBody>
+      </p:sp>
+      <p:sp>
+        <p:nvSpPr>
+          <p:cNvPr id="7" name="Slide Number Placeholder 6"/>
+          <p:cNvSpPr>
+            <a:spLocks noGrp="1"/>
+          </p:cNvSpPr>
+          <p:nvPr>
+            <p:ph type="sldNum" sz="quarter" idx="5"/>
+          </p:nvPr>
+        </p:nvSpPr>
+        <p:spPr>
+          <a:xfrm>
+            <a:off x="3884613" y="8685213"/>
+            <a:ext cx="2971800" cy="457200"/>
+          </a:xfrm>
+          <a:prstGeom prst="rect">
+            <a:avLst/>
+          </a:prstGeom>
+        </p:spPr>
+        <p:txBody>
+          <a:bodyPr vert="horz" lIns="91440" tIns="45720" rIns="91440" bIns="45720" rtlCol="0" anchor="b"/>
+          <a:lstStyle>
+            <a:lvl1pPr algn="r">
+              <a:defRPr sz="1200"/>
+            </a:lvl1pPr>
+          </a:lstStyle>
+          <a:p>
+            <a:fld id="{BB5E49A5-4136-284D-997B-48E1D791AD67}" type="slidenum">
+              <a:rPr lang="en-US" smtClean="0"/>
+              <a:t>‹#›</a:t>
+            </a:fld>
+            <a:endParaRPr lang="en-US"/>
+          </a:p>
+        </p:txBody>
+      </p:sp>
+    </p:spTree>
+    <p:extLst>
+      <p:ext uri="{BB962C8B-B14F-4D97-AF65-F5344CB8AC3E}">
+        <p14:creationId xmlns:p14="http://schemas.microsoft.com/office/powerpoint/2010/main" val="2623252185"/>
+      </p:ext>
+    </p:extLst>
+  </p:cSld>
+  <p:clrMap bg1="lt1" tx1="dk1" bg2="lt2" tx2="dk2" accent1="accent1" accent2="accent2" accent3="accent3" accent4="accent4" accent5="accent5" accent6="accent6" hlink="hlink" folHlink="folHlink"/>
+  <p:notesStyle>
+    <a:lvl1pPr marL="0" algn="l" defTabSz="457200" rtl="0" eaLnBrk="1" latinLnBrk="0" hangingPunct="1">
+      <a:defRPr sz="1200" kern="1200">
+        <a:solidFill>
+          <a:schemeClr val="tx1"/>
+        </a:solidFill>
+        <a:latin typeface="+mn-lt"/>
+        <a:ea typeface="+mn-ea"/>
+        <a:cs typeface="+mn-cs"/>
+      </a:defRPr>
+    </a:lvl1pPr>
+    <a:lvl2pPr marL="457200" algn="l" defTabSz="457200" rtl="0" eaLnBrk="1" latinLnBrk="0" hangingPunct="1">
+      <a:defRPr sz="1200" kern="1200">
+        <a:solidFill>
+          <a:schemeClr val="tx1"/>
+        </a:solidFill>
+        <a:latin typeface="+mn-lt"/>
+        <a:ea typeface="+mn-ea"/>
+        <a:cs typeface="+mn-cs"/>
+      </a:defRPr>
+    </a:lvl2pPr>
+    <a:lvl3pPr marL="914400" algn="l" defTabSz="457200" rtl="0" eaLnBrk="1" latinLnBrk="0" hangingPunct="1">
+      <a:defRPr sz="1200" kern="1200">
+        <a:solidFill>
+          <a:schemeClr val="tx1"/>
+        </a:solidFill>
+        <a:latin typeface="+mn-lt"/>
+        <a:ea typeface="+mn-ea"/>
+        <a:cs typeface="+mn-cs"/>
+      </a:defRPr>
+    </a:lvl3pPr>
+    <a:lvl4pPr marL="1371600" algn="l" defTabSz="457200" rtl="0" eaLnBrk="1" latinLnBrk="0" hangingPunct="1">
+      <a:defRPr sz="1200" kern="1200">
+        <a:solidFill>
+          <a:schemeClr val="tx1"/>
+        </a:solidFill>
+        <a:latin typeface="+mn-lt"/>
+        <a:ea typeface="+mn-ea"/>
+        <a:cs typeface="+mn-cs"/>
+      </a:defRPr>
+    </a:lvl4pPr>
+    <a:lvl5pPr marL="1828800" algn="l" defTabSz="457200" rtl="0" eaLnBrk="1" latinLnBrk="0" hangingPunct="1">
+      <a:defRPr sz="1200" kern="1200">
+        <a:solidFill>
+          <a:schemeClr val="tx1"/>
+        </a:solidFill>
+        <a:latin typeface="+mn-lt"/>
+        <a:ea typeface="+mn-ea"/>
+        <a:cs typeface="+mn-cs"/>
+      </a:defRPr>
+    </a:lvl5pPr>
+    <a:lvl6pPr marL="2286000" algn="l" defTabSz="457200" rtl="0" eaLnBrk="1" latinLnBrk="0" hangingPunct="1">
+      <a:defRPr sz="1200" kern="1200">
+        <a:solidFill>
+          <a:schemeClr val="tx1"/>
+        </a:solidFill>
+        <a:latin typeface="+mn-lt"/>
+        <a:ea typeface="+mn-ea"/>
+        <a:cs typeface="+mn-cs"/>
+      </a:defRPr>
+    </a:lvl6pPr>
+    <a:lvl7pPr marL="2743200" algn="l" defTabSz="457200" rtl="0" eaLnBrk="1" latinLnBrk="0" hangingPunct="1">
+      <a:defRPr sz="1200" kern="1200">
+        <a:solidFill>
+          <a:schemeClr val="tx1"/>
+        </a:solidFill>
+        <a:latin typeface="+mn-lt"/>
+        <a:ea typeface="+mn-ea"/>
+        <a:cs typeface="+mn-cs"/>
+      </a:defRPr>
+    </a:lvl7pPr>
+    <a:lvl8pPr marL="3200400" algn="l" defTabSz="457200" rtl="0" eaLnBrk="1" latinLnBrk="0" hangingPunct="1">
+      <a:defRPr sz="1200" kern="1200">
+        <a:solidFill>
+          <a:schemeClr val="tx1"/>
+        </a:solidFill>
+        <a:latin typeface="+mn-lt"/>
+        <a:ea typeface="+mn-ea"/>
+        <a:cs typeface="+mn-cs"/>
+      </a:defRPr>
+    </a:lvl8pPr>
+    <a:lvl9pPr marL="3657600" algn="l" defTabSz="457200" rtl="0" eaLnBrk="1" latinLnBrk="0" hangingPunct="1">
+      <a:defRPr sz="1200" kern="1200">
+        <a:solidFill>
+          <a:schemeClr val="tx1"/>
+        </a:solidFill>
+        <a:latin typeface="+mn-lt"/>
+        <a:ea typeface="+mn-ea"/>
+        <a:cs typeface="+mn-cs"/>
+      </a:defRPr>
+    </a:lvl9pPr>
+  </p:notesStyle>
+</p:notesMaster>
+</file>
+
+<file path=ppt/notesSlides/notesSlide1.xml><?xml version="1.0" encoding="utf-8"?>
+<p:notes xmlns:a="http://schemas.openxmlformats.org/drawingml/2006/main" xmlns:p="http://schemas.openxmlformats.org/presentationml/2006/main" xmlns:r="http://schemas.openxmlformats.org/officeDocument/2006/relationships">
+  <p:cSld>
+    <p:spTree>
+      <p:nvGrpSpPr>
+        <p:cNvPr id="1" name=""/>
+        <p:cNvGrpSpPr/>
+        <p:nvPr/>
+      </p:nvGrpSpPr>
+      <p:grpSpPr>
+        <a:xfrm>
+          <a:off x="0" y="0"/>
+          <a:ext cx="0" cy="0"/>
+          <a:chOff x="0" y="0"/>
+          <a:chExt cx="0" cy="0"/>
+        </a:xfrm>
+      </p:grpSpPr>
+      <p:sp>
+        <p:nvSpPr>
+          <p:cNvPr id="2" name="Slide Image Placeholder 1"/>
+          <p:cNvSpPr>
+            <a:spLocks noGrp="1"/>
+          </p:cNvSpPr>
+          <p:nvPr>
+            <p:ph type="sldImg" idx="2"/>
+          </p:nvPr>
+        </p:nvSpPr>
+        <p:spPr/>
+      </p:sp>
+      <p:sp>
+        <p:nvSpPr>
+          <p:cNvPr id="3" name="Notes Placeholder 2"/>
+          <p:cNvSpPr>
+            <a:spLocks noGrp="1"/>
+          </p:cNvSpPr>
+          <p:nvPr>
+            <p:ph type="body" idx="3" sz="quarter"/>
+          </p:nvPr>
+        </p:nvSpPr>
+        <p:spPr/>
+        <p:txBody>
+          <a:bodyPr/>
+          <a:lstStyle/>
+          <a:p>
+            <a:r>
+              <a:t>(1분) 인사 후: "혹시 AI 코딩 도구, 자동완성까지만 써보신 분?" 손들게 하며 시작.</a:t>
+            </a:r>
+          </a:p>
+          <a:p>
+            <a:r>
+              <a:t>오늘 목표는 단 하나 — 끝나고 자리로 돌아가서 바로 claude를 켜게 만드는 것.</a:t>
+            </a:r>
+          </a:p>
+        </p:txBody>
+      </p:sp>
+      <p:sp>
+        <p:nvSpPr>
+          <p:cNvPr id="4" name="Slide Number Placeholder 3"/>
+          <p:cNvSpPr>
+            <a:spLocks noGrp="1"/>
+          </p:cNvSpPr>
+          <p:nvPr>
+            <p:ph type="sldNum" idx="5" sz="quarter"/>
+          </p:nvPr>
+        </p:nvSpPr>
+        <p:spPr/>
+      </p:sp>
+    </p:spTree>
+  </p:cSld>
+  <p:clrMapOvr>
+    <a:masterClrMapping/>
+  </p:clrMapOvr>
+</p:notes>
+</file>
+
+<file path=ppt/notesSlides/notesSlide10.xml><?xml version="1.0" encoding="utf-8"?>
+<p:notes xmlns:a="http://schemas.openxmlformats.org/drawingml/2006/main" xmlns:p="http://schemas.openxmlformats.org/presentationml/2006/main" xmlns:r="http://schemas.openxmlformats.org/officeDocument/2006/relationships">
+  <p:cSld>
+    <p:spTree>
+      <p:nvGrpSpPr>
+        <p:cNvPr id="1" name=""/>
+        <p:cNvGrpSpPr/>
+        <p:nvPr/>
+      </p:nvGrpSpPr>
+      <p:grpSpPr>
+        <a:xfrm>
+          <a:off x="0" y="0"/>
+          <a:ext cx="0" cy="0"/>
+          <a:chOff x="0" y="0"/>
+          <a:chExt cx="0" cy="0"/>
+        </a:xfrm>
+      </p:grpSpPr>
+      <p:sp>
+        <p:nvSpPr>
+          <p:cNvPr id="2" name="Slide Image Placeholder 1"/>
+          <p:cNvSpPr>
+            <a:spLocks noGrp="1"/>
+          </p:cNvSpPr>
+          <p:nvPr>
+            <p:ph type="sldImg" idx="2"/>
+          </p:nvPr>
+        </p:nvSpPr>
+        <p:spPr/>
+      </p:sp>
+      <p:sp>
+        <p:nvSpPr>
+          <p:cNvPr id="3" name="Notes Placeholder 2"/>
+          <p:cNvSpPr>
+            <a:spLocks noGrp="1"/>
+          </p:cNvSpPr>
+          <p:nvPr>
+            <p:ph type="body" idx="3" sz="quarter"/>
+          </p:nvPr>
+        </p:nvSpPr>
+        <p:spPr/>
+        <p:txBody>
+          <a:bodyPr/>
+          <a:lstStyle/>
+          <a:p>
+            <a:r>
+              <a:t>(30초) "여기서부터 30분 코스입니다. 오늘 이것만 가져가셔도 성공."</a:t>
+            </a:r>
+          </a:p>
+        </p:txBody>
+      </p:sp>
+      <p:sp>
+        <p:nvSpPr>
+          <p:cNvPr id="4" name="Slide Number Placeholder 3"/>
+          <p:cNvSpPr>
+            <a:spLocks noGrp="1"/>
+          </p:cNvSpPr>
+          <p:nvPr>
+            <p:ph type="sldNum" idx="5" sz="quarter"/>
+          </p:nvPr>
+        </p:nvSpPr>
+        <p:spPr/>
+      </p:sp>
+    </p:spTree>
+  </p:cSld>
+  <p:clrMapOvr>
+    <a:masterClrMapping/>
+  </p:clrMapOvr>
+</p:notes>
+</file>
+
+<file path=ppt/notesSlides/notesSlide11.xml><?xml version="1.0" encoding="utf-8"?>
+<p:notes xmlns:a="http://schemas.openxmlformats.org/drawingml/2006/main" xmlns:p="http://schemas.openxmlformats.org/presentationml/2006/main" xmlns:r="http://schemas.openxmlformats.org/officeDocument/2006/relationships">
+  <p:cSld>
+    <p:spTree>
+      <p:nvGrpSpPr>
+        <p:cNvPr id="1" name=""/>
+        <p:cNvGrpSpPr/>
+        <p:nvPr/>
+      </p:nvGrpSpPr>
+      <p:grpSpPr>
+        <a:xfrm>
+          <a:off x="0" y="0"/>
+          <a:ext cx="0" cy="0"/>
+          <a:chOff x="0" y="0"/>
+          <a:chExt cx="0" cy="0"/>
+        </a:xfrm>
+      </p:grpSpPr>
+      <p:sp>
+        <p:nvSpPr>
+          <p:cNvPr id="2" name="Slide Image Placeholder 1"/>
+          <p:cNvSpPr>
+            <a:spLocks noGrp="1"/>
+          </p:cNvSpPr>
+          <p:nvPr>
+            <p:ph type="sldImg" idx="2"/>
+          </p:nvPr>
+        </p:nvSpPr>
+        <p:spPr/>
+      </p:sp>
+      <p:sp>
+        <p:nvSpPr>
+          <p:cNvPr id="3" name="Notes Placeholder 2"/>
+          <p:cNvSpPr>
+            <a:spLocks noGrp="1"/>
+          </p:cNvSpPr>
+          <p:nvPr>
+            <p:ph type="body" idx="3" sz="quarter"/>
+          </p:nvPr>
+        </p:nvSpPr>
+        <p:spPr/>
+        <p:txBody>
+          <a:bodyPr/>
+          <a:lstStyle/>
+          <a:p>
+            <a:r>
+              <a:t>(2분) 신규 입사자 온보딩 사례로 공감 유도 — "코드 파악 2주 → 이틀".</a:t>
+            </a:r>
+          </a:p>
+          <a:p>
+            <a:r>
+              <a:t>활용 예 3개 중 청중 업무에 가장 가까운 것을 골라 부연.</a:t>
+            </a:r>
+          </a:p>
+        </p:txBody>
+      </p:sp>
+      <p:sp>
+        <p:nvSpPr>
+          <p:cNvPr id="4" name="Slide Number Placeholder 3"/>
+          <p:cNvSpPr>
+            <a:spLocks noGrp="1"/>
+          </p:cNvSpPr>
+          <p:nvPr>
+            <p:ph type="sldNum" idx="5" sz="quarter"/>
+          </p:nvPr>
+        </p:nvSpPr>
+        <p:spPr/>
+      </p:sp>
+    </p:spTree>
+  </p:cSld>
+  <p:clrMapOvr>
+    <a:masterClrMapping/>
+  </p:clrMapOvr>
+</p:notes>
+</file>
+
+<file path=ppt/notesSlides/notesSlide12.xml><?xml version="1.0" encoding="utf-8"?>
+<p:notes xmlns:a="http://schemas.openxmlformats.org/drawingml/2006/main" xmlns:p="http://schemas.openxmlformats.org/presentationml/2006/main" xmlns:r="http://schemas.openxmlformats.org/officeDocument/2006/relationships">
+  <p:cSld>
+    <p:spTree>
+      <p:nvGrpSpPr>
+        <p:cNvPr id="1" name=""/>
+        <p:cNvGrpSpPr/>
+        <p:nvPr/>
+      </p:nvGrpSpPr>
+      <p:grpSpPr>
+        <a:xfrm>
+          <a:off x="0" y="0"/>
+          <a:ext cx="0" cy="0"/>
+          <a:chOff x="0" y="0"/>
+          <a:chExt cx="0" cy="0"/>
+        </a:xfrm>
+      </p:grpSpPr>
+      <p:sp>
+        <p:nvSpPr>
+          <p:cNvPr id="2" name="Slide Image Placeholder 1"/>
+          <p:cNvSpPr>
+            <a:spLocks noGrp="1"/>
+          </p:cNvSpPr>
+          <p:nvPr>
+            <p:ph type="sldImg" idx="2"/>
+          </p:nvPr>
+        </p:nvSpPr>
+        <p:spPr/>
+      </p:sp>
+      <p:sp>
+        <p:nvSpPr>
+          <p:cNvPr id="3" name="Notes Placeholder 2"/>
+          <p:cNvSpPr>
+            <a:spLocks noGrp="1"/>
+          </p:cNvSpPr>
+          <p:nvPr>
+            <p:ph type="body" idx="3" sz="quarter"/>
+          </p:nvPr>
+        </p:nvSpPr>
+        <p:spPr/>
+        <p:txBody>
+          <a:bodyPr/>
+          <a:lstStyle/>
+          <a:p>
+            <a:r>
+              <a:t>(2분) 좌우 대비가 핵심 슬라이드. 왼쪽 요청도 '되긴 되지만' 왕복이 늘어난다고 설명.</a:t>
+            </a:r>
+          </a:p>
+          <a:p>
+            <a:r>
+              <a:t>TIP 공식(대상·동작·제약)을 소리 내어 읽고 예시 하나 즉석에서 만들어 보이기.</a:t>
+            </a:r>
+          </a:p>
+        </p:txBody>
+      </p:sp>
+      <p:sp>
+        <p:nvSpPr>
+          <p:cNvPr id="4" name="Slide Number Placeholder 3"/>
+          <p:cNvSpPr>
+            <a:spLocks noGrp="1"/>
+          </p:cNvSpPr>
+          <p:nvPr>
+            <p:ph type="sldNum" idx="5" sz="quarter"/>
+          </p:nvPr>
+        </p:nvSpPr>
+        <p:spPr/>
+      </p:sp>
+    </p:spTree>
+  </p:cSld>
+  <p:clrMapOvr>
+    <a:masterClrMapping/>
+  </p:clrMapOvr>
+</p:notes>
+</file>
+
+<file path=ppt/notesSlides/notesSlide13.xml><?xml version="1.0" encoding="utf-8"?>
+<p:notes xmlns:a="http://schemas.openxmlformats.org/drawingml/2006/main" xmlns:p="http://schemas.openxmlformats.org/presentationml/2006/main" xmlns:r="http://schemas.openxmlformats.org/officeDocument/2006/relationships">
+  <p:cSld>
+    <p:spTree>
+      <p:nvGrpSpPr>
+        <p:cNvPr id="1" name=""/>
+        <p:cNvGrpSpPr/>
+        <p:nvPr/>
+      </p:nvGrpSpPr>
+      <p:grpSpPr>
+        <a:xfrm>
+          <a:off x="0" y="0"/>
+          <a:ext cx="0" cy="0"/>
+          <a:chOff x="0" y="0"/>
+          <a:chExt cx="0" cy="0"/>
+        </a:xfrm>
+      </p:grpSpPr>
+      <p:sp>
+        <p:nvSpPr>
+          <p:cNvPr id="2" name="Slide Image Placeholder 1"/>
+          <p:cNvSpPr>
+            <a:spLocks noGrp="1"/>
+          </p:cNvSpPr>
+          <p:nvPr>
+            <p:ph type="sldImg" idx="2"/>
+          </p:nvPr>
+        </p:nvSpPr>
+        <p:spPr/>
+      </p:sp>
+      <p:sp>
+        <p:nvSpPr>
+          <p:cNvPr id="3" name="Notes Placeholder 2"/>
+          <p:cNvSpPr>
+            <a:spLocks noGrp="1"/>
+          </p:cNvSpPr>
+          <p:nvPr>
+            <p:ph type="body" idx="3" sz="quarter"/>
+          </p:nvPr>
+        </p:nvSpPr>
+        <p:spPr/>
+        <p:txBody>
+          <a:bodyPr/>
+          <a:lstStyle/>
+          <a:p>
+            <a:r>
+              <a:t>(1분) 다 외울 필요 없음 — "/ 만 치면 목록이 뜹니다."</a:t>
+            </a:r>
+          </a:p>
+          <a:p>
+            <a:r>
+              <a:t>/init은 Level 2 예고편으로만 언급하고 넘어가기.</a:t>
+            </a:r>
+          </a:p>
+        </p:txBody>
+      </p:sp>
+      <p:sp>
+        <p:nvSpPr>
+          <p:cNvPr id="4" name="Slide Number Placeholder 3"/>
+          <p:cNvSpPr>
+            <a:spLocks noGrp="1"/>
+          </p:cNvSpPr>
+          <p:nvPr>
+            <p:ph type="sldNum" idx="5" sz="quarter"/>
+          </p:nvPr>
+        </p:nvSpPr>
+        <p:spPr/>
+      </p:sp>
+    </p:spTree>
+  </p:cSld>
+  <p:clrMapOvr>
+    <a:masterClrMapping/>
+  </p:clrMapOvr>
+</p:notes>
+</file>
+
+<file path=ppt/notesSlides/notesSlide14.xml><?xml version="1.0" encoding="utf-8"?>
+<p:notes xmlns:a="http://schemas.openxmlformats.org/drawingml/2006/main" xmlns:p="http://schemas.openxmlformats.org/presentationml/2006/main" xmlns:r="http://schemas.openxmlformats.org/officeDocument/2006/relationships">
+  <p:cSld>
+    <p:spTree>
+      <p:nvGrpSpPr>
+        <p:cNvPr id="1" name=""/>
+        <p:cNvGrpSpPr/>
+        <p:nvPr/>
+      </p:nvGrpSpPr>
+      <p:grpSpPr>
+        <a:xfrm>
+          <a:off x="0" y="0"/>
+          <a:ext cx="0" cy="0"/>
+          <a:chOff x="0" y="0"/>
+          <a:chExt cx="0" cy="0"/>
+        </a:xfrm>
+      </p:grpSpPr>
+      <p:sp>
+        <p:nvSpPr>
+          <p:cNvPr id="2" name="Slide Image Placeholder 1"/>
+          <p:cNvSpPr>
+            <a:spLocks noGrp="1"/>
+          </p:cNvSpPr>
+          <p:nvPr>
+            <p:ph type="sldImg" idx="2"/>
+          </p:nvPr>
+        </p:nvSpPr>
+        <p:spPr/>
+      </p:sp>
+      <p:sp>
+        <p:nvSpPr>
+          <p:cNvPr id="3" name="Notes Placeholder 2"/>
+          <p:cNvSpPr>
+            <a:spLocks noGrp="1"/>
+          </p:cNvSpPr>
+          <p:nvPr>
+            <p:ph type="body" idx="3" sz="quarter"/>
+          </p:nvPr>
+        </p:nvSpPr>
+        <p:spPr/>
+        <p:txBody>
+          <a:bodyPr/>
+          <a:lstStyle/>
+          <a:p>
+            <a:r>
+              <a:t>(2분) Esc Esc(되돌리기)가 오늘 발표에서 가장 박수 받는 기능 — 시연 가치 높음.</a:t>
+            </a:r>
+          </a:p>
+          <a:p>
+            <a:r>
+              <a:t>claude -c는 "터미널 껐다고 대화가 사라지지 않는다"는 안심 포인트.</a:t>
+            </a:r>
+          </a:p>
+        </p:txBody>
+      </p:sp>
+      <p:sp>
+        <p:nvSpPr>
+          <p:cNvPr id="4" name="Slide Number Placeholder 3"/>
+          <p:cNvSpPr>
+            <a:spLocks noGrp="1"/>
+          </p:cNvSpPr>
+          <p:nvPr>
+            <p:ph type="sldNum" idx="5" sz="quarter"/>
+          </p:nvPr>
+        </p:nvSpPr>
+        <p:spPr/>
+      </p:sp>
+    </p:spTree>
+  </p:cSld>
+  <p:clrMapOvr>
+    <a:masterClrMapping/>
+  </p:clrMapOvr>
+</p:notes>
+</file>
+
+<file path=ppt/notesSlides/notesSlide15.xml><?xml version="1.0" encoding="utf-8"?>
+<p:notes xmlns:a="http://schemas.openxmlformats.org/drawingml/2006/main" xmlns:p="http://schemas.openxmlformats.org/presentationml/2006/main" xmlns:r="http://schemas.openxmlformats.org/officeDocument/2006/relationships">
+  <p:cSld>
+    <p:spTree>
+      <p:nvGrpSpPr>
+        <p:cNvPr id="1" name=""/>
+        <p:cNvGrpSpPr/>
+        <p:nvPr/>
+      </p:nvGrpSpPr>
+      <p:grpSpPr>
+        <a:xfrm>
+          <a:off x="0" y="0"/>
+          <a:ext cx="0" cy="0"/>
+          <a:chOff x="0" y="0"/>
+          <a:chExt cx="0" cy="0"/>
+        </a:xfrm>
+      </p:grpSpPr>
+      <p:sp>
+        <p:nvSpPr>
+          <p:cNvPr id="2" name="Slide Image Placeholder 1"/>
+          <p:cNvSpPr>
+            <a:spLocks noGrp="1"/>
+          </p:cNvSpPr>
+          <p:nvPr>
+            <p:ph type="sldImg" idx="2"/>
+          </p:nvPr>
+        </p:nvSpPr>
+        <p:spPr/>
+      </p:sp>
+      <p:sp>
+        <p:nvSpPr>
+          <p:cNvPr id="3" name="Notes Placeholder 2"/>
+          <p:cNvSpPr>
+            <a:spLocks noGrp="1"/>
+          </p:cNvSpPr>
+          <p:nvPr>
+            <p:ph type="body" idx="3" sz="quarter"/>
+          </p:nvPr>
+        </p:nvSpPr>
+        <p:spPr/>
+        <p:txBody>
+          <a:bodyPr/>
+          <a:lstStyle/>
+          <a:p>
+            <a:r>
+              <a:t>(5분) 라이브 데모. 실패 대비 백업 GIF 준비 필수.</a:t>
+            </a:r>
+          </a:p>
+          <a:p>
+            <a:r>
+              <a:t>시나리오: 구조 질문 → 결과 표시 기능 추가 → 브라우저 확인. 승인 프롬프트에서 잠깐 멈추고 diff를 청중과 같이 읽기.</a:t>
+            </a:r>
+          </a:p>
+        </p:txBody>
+      </p:sp>
+      <p:sp>
+        <p:nvSpPr>
+          <p:cNvPr id="4" name="Slide Number Placeholder 3"/>
+          <p:cNvSpPr>
+            <a:spLocks noGrp="1"/>
+          </p:cNvSpPr>
+          <p:nvPr>
+            <p:ph type="sldNum" idx="5" sz="quarter"/>
+          </p:nvPr>
+        </p:nvSpPr>
+        <p:spPr/>
+      </p:sp>
+    </p:spTree>
+  </p:cSld>
+  <p:clrMapOvr>
+    <a:masterClrMapping/>
+  </p:clrMapOvr>
+</p:notes>
+</file>
+
+<file path=ppt/notesSlides/notesSlide16.xml><?xml version="1.0" encoding="utf-8"?>
+<p:notes xmlns:a="http://schemas.openxmlformats.org/drawingml/2006/main" xmlns:p="http://schemas.openxmlformats.org/presentationml/2006/main" xmlns:r="http://schemas.openxmlformats.org/officeDocument/2006/relationships">
+  <p:cSld>
+    <p:spTree>
+      <p:nvGrpSpPr>
+        <p:cNvPr id="1" name=""/>
+        <p:cNvGrpSpPr/>
+        <p:nvPr/>
+      </p:nvGrpSpPr>
+      <p:grpSpPr>
+        <a:xfrm>
+          <a:off x="0" y="0"/>
+          <a:ext cx="0" cy="0"/>
+          <a:chOff x="0" y="0"/>
+          <a:chExt cx="0" cy="0"/>
+        </a:xfrm>
+      </p:grpSpPr>
+      <p:sp>
+        <p:nvSpPr>
+          <p:cNvPr id="2" name="Slide Image Placeholder 1"/>
+          <p:cNvSpPr>
+            <a:spLocks noGrp="1"/>
+          </p:cNvSpPr>
+          <p:nvPr>
+            <p:ph type="sldImg" idx="2"/>
+          </p:nvPr>
+        </p:nvSpPr>
+        <p:spPr/>
+      </p:sp>
+      <p:sp>
+        <p:nvSpPr>
+          <p:cNvPr id="3" name="Notes Placeholder 2"/>
+          <p:cNvSpPr>
+            <a:spLocks noGrp="1"/>
+          </p:cNvSpPr>
+          <p:nvPr>
+            <p:ph type="body" idx="3" sz="quarter"/>
+          </p:nvPr>
+        </p:nvSpPr>
+        <p:spPr/>
+        <p:txBody>
+          <a:bodyPr/>
+          <a:lstStyle/>
+          <a:p>
+            <a:r>
+              <a:t>(1분) 실습 과제를 소리 내어 읽고 "오늘 퇴근 전에 딱 15분"이라고 구체적 시간 제시.</a:t>
+            </a:r>
+          </a:p>
+          <a:p>
+            <a:r>
+              <a:t>여기서 1차 질문 받기 (2~3개만).</a:t>
+            </a:r>
+          </a:p>
+        </p:txBody>
+      </p:sp>
+      <p:sp>
+        <p:nvSpPr>
+          <p:cNvPr id="4" name="Slide Number Placeholder 3"/>
+          <p:cNvSpPr>
+            <a:spLocks noGrp="1"/>
+          </p:cNvSpPr>
+          <p:nvPr>
+            <p:ph type="sldNum" idx="5" sz="quarter"/>
+          </p:nvPr>
+        </p:nvSpPr>
+        <p:spPr/>
+      </p:sp>
+    </p:spTree>
+  </p:cSld>
+  <p:clrMapOvr>
+    <a:masterClrMapping/>
+  </p:clrMapOvr>
+</p:notes>
+</file>
+
+<file path=ppt/notesSlides/notesSlide17.xml><?xml version="1.0" encoding="utf-8"?>
+<p:notes xmlns:a="http://schemas.openxmlformats.org/drawingml/2006/main" xmlns:p="http://schemas.openxmlformats.org/presentationml/2006/main" xmlns:r="http://schemas.openxmlformats.org/officeDocument/2006/relationships">
+  <p:cSld>
+    <p:spTree>
+      <p:nvGrpSpPr>
+        <p:cNvPr id="1" name=""/>
+        <p:cNvGrpSpPr/>
+        <p:nvPr/>
+      </p:nvGrpSpPr>
+      <p:grpSpPr>
+        <a:xfrm>
+          <a:off x="0" y="0"/>
+          <a:ext cx="0" cy="0"/>
+          <a:chOff x="0" y="0"/>
+          <a:chExt cx="0" cy="0"/>
+        </a:xfrm>
+      </p:grpSpPr>
+      <p:sp>
+        <p:nvSpPr>
+          <p:cNvPr id="2" name="Slide Image Placeholder 1"/>
+          <p:cNvSpPr>
+            <a:spLocks noGrp="1"/>
+          </p:cNvSpPr>
+          <p:nvPr>
+            <p:ph type="sldImg" idx="2"/>
+          </p:nvPr>
+        </p:nvSpPr>
+        <p:spPr/>
+      </p:sp>
+      <p:sp>
+        <p:nvSpPr>
+          <p:cNvPr id="3" name="Notes Placeholder 2"/>
+          <p:cNvSpPr>
+            <a:spLocks noGrp="1"/>
+          </p:cNvSpPr>
+          <p:nvPr>
+            <p:ph type="body" idx="3" sz="quarter"/>
+          </p:nvPr>
+        </p:nvSpPr>
+        <p:spPr/>
+        <p:txBody>
+          <a:bodyPr/>
+          <a:lstStyle/>
+          <a:p>
+            <a:r>
+              <a:t>(30초) "여기서부터는 '장난감'이 '업무 도구'가 되는 구간입니다."</a:t>
+            </a:r>
+          </a:p>
+        </p:txBody>
+      </p:sp>
+      <p:sp>
+        <p:nvSpPr>
+          <p:cNvPr id="4" name="Slide Number Placeholder 3"/>
+          <p:cNvSpPr>
+            <a:spLocks noGrp="1"/>
+          </p:cNvSpPr>
+          <p:nvPr>
+            <p:ph type="sldNum" idx="5" sz="quarter"/>
+          </p:nvPr>
+        </p:nvSpPr>
+        <p:spPr/>
+      </p:sp>
+    </p:spTree>
+  </p:cSld>
+  <p:clrMapOvr>
+    <a:masterClrMapping/>
+  </p:clrMapOvr>
+</p:notes>
+</file>
+
+<file path=ppt/notesSlides/notesSlide18.xml><?xml version="1.0" encoding="utf-8"?>
+<p:notes xmlns:a="http://schemas.openxmlformats.org/drawingml/2006/main" xmlns:p="http://schemas.openxmlformats.org/presentationml/2006/main" xmlns:r="http://schemas.openxmlformats.org/officeDocument/2006/relationships">
+  <p:cSld>
+    <p:spTree>
+      <p:nvGrpSpPr>
+        <p:cNvPr id="1" name=""/>
+        <p:cNvGrpSpPr/>
+        <p:nvPr/>
+      </p:nvGrpSpPr>
+      <p:grpSpPr>
+        <a:xfrm>
+          <a:off x="0" y="0"/>
+          <a:ext cx="0" cy="0"/>
+          <a:chOff x="0" y="0"/>
+          <a:chExt cx="0" cy="0"/>
+        </a:xfrm>
+      </p:grpSpPr>
+      <p:sp>
+        <p:nvSpPr>
+          <p:cNvPr id="2" name="Slide Image Placeholder 1"/>
+          <p:cNvSpPr>
+            <a:spLocks noGrp="1"/>
+          </p:cNvSpPr>
+          <p:nvPr>
+            <p:ph type="sldImg" idx="2"/>
+          </p:nvPr>
+        </p:nvSpPr>
+        <p:spPr/>
+      </p:sp>
+      <p:sp>
+        <p:nvSpPr>
+          <p:cNvPr id="3" name="Notes Placeholder 2"/>
+          <p:cNvSpPr>
+            <a:spLocks noGrp="1"/>
+          </p:cNvSpPr>
+          <p:nvPr>
+            <p:ph type="body" idx="3" sz="quarter"/>
+          </p:nvPr>
+        </p:nvSpPr>
+        <p:spPr/>
+        <p:txBody>
+          <a:bodyPr/>
+          <a:lstStyle/>
+          <a:p>
+            <a:r>
+              <a:t>(3분) 오늘 발표에서 가장 실용적인 슬라이드.</a:t>
+            </a:r>
+          </a:p>
+          <a:p>
+            <a:r>
+              <a:t>"매번 같은 설명을 반복하고 있다면 그게 CLAUDE.md에 들어갈 내용" — 팀 프로젝트라면 커밋해서 공유하라고 강조.</a:t>
+            </a:r>
+          </a:p>
+        </p:txBody>
+      </p:sp>
+      <p:sp>
+        <p:nvSpPr>
+          <p:cNvPr id="4" name="Slide Number Placeholder 3"/>
+          <p:cNvSpPr>
+            <a:spLocks noGrp="1"/>
+          </p:cNvSpPr>
+          <p:nvPr>
+            <p:ph type="sldNum" idx="5" sz="quarter"/>
+          </p:nvPr>
+        </p:nvSpPr>
+        <p:spPr/>
+      </p:sp>
+    </p:spTree>
+  </p:cSld>
+  <p:clrMapOvr>
+    <a:masterClrMapping/>
+  </p:clrMapOvr>
+</p:notes>
+</file>
+
+<file path=ppt/notesSlides/notesSlide19.xml><?xml version="1.0" encoding="utf-8"?>
+<p:notes xmlns:a="http://schemas.openxmlformats.org/drawingml/2006/main" xmlns:p="http://schemas.openxmlformats.org/presentationml/2006/main" xmlns:r="http://schemas.openxmlformats.org/officeDocument/2006/relationships">
+  <p:cSld>
+    <p:spTree>
+      <p:nvGrpSpPr>
+        <p:cNvPr id="1" name=""/>
+        <p:cNvGrpSpPr/>
+        <p:nvPr/>
+      </p:nvGrpSpPr>
+      <p:grpSpPr>
+        <a:xfrm>
+          <a:off x="0" y="0"/>
+          <a:ext cx="0" cy="0"/>
+          <a:chOff x="0" y="0"/>
+          <a:chExt cx="0" cy="0"/>
+        </a:xfrm>
+      </p:grpSpPr>
+      <p:sp>
+        <p:nvSpPr>
+          <p:cNvPr id="2" name="Slide Image Placeholder 1"/>
+          <p:cNvSpPr>
+            <a:spLocks noGrp="1"/>
+          </p:cNvSpPr>
+          <p:nvPr>
+            <p:ph type="sldImg" idx="2"/>
+          </p:nvPr>
+        </p:nvSpPr>
+        <p:spPr/>
+      </p:sp>
+      <p:sp>
+        <p:nvSpPr>
+          <p:cNvPr id="3" name="Notes Placeholder 2"/>
+          <p:cNvSpPr>
+            <a:spLocks noGrp="1"/>
+          </p:cNvSpPr>
+          <p:nvPr>
+            <p:ph type="body" idx="3" sz="quarter"/>
+          </p:nvPr>
+        </p:nvSpPr>
+        <p:spPr/>
+        <p:txBody>
+          <a:bodyPr/>
+          <a:lstStyle/>
+          <a:p>
+            <a:r>
+              <a:t>(2분) "큰 작업은 Plan Mode가 기본값"이라는 습관을 심는 게 목표.</a:t>
+            </a:r>
+          </a:p>
+          <a:p>
+            <a:r>
+              <a:t>계획 단계에서는 코드가 안 바뀌므로 부담 없이 퇴짜 놓아도 된다는 점 강조.</a:t>
+            </a:r>
+          </a:p>
+        </p:txBody>
+      </p:sp>
+      <p:sp>
+        <p:nvSpPr>
+          <p:cNvPr id="4" name="Slide Number Placeholder 3"/>
+          <p:cNvSpPr>
+            <a:spLocks noGrp="1"/>
+          </p:cNvSpPr>
+          <p:nvPr>
+            <p:ph type="sldNum" idx="5" sz="quarter"/>
+          </p:nvPr>
+        </p:nvSpPr>
+        <p:spPr/>
+      </p:sp>
+    </p:spTree>
+  </p:cSld>
+  <p:clrMapOvr>
+    <a:masterClrMapping/>
+  </p:clrMapOvr>
+</p:notes>
+</file>
+
+<file path=ppt/notesSlides/notesSlide2.xml><?xml version="1.0" encoding="utf-8"?>
+<p:notes xmlns:a="http://schemas.openxmlformats.org/drawingml/2006/main" xmlns:p="http://schemas.openxmlformats.org/presentationml/2006/main" xmlns:r="http://schemas.openxmlformats.org/officeDocument/2006/relationships">
+  <p:cSld>
+    <p:spTree>
+      <p:nvGrpSpPr>
+        <p:cNvPr id="1" name=""/>
+        <p:cNvGrpSpPr/>
+        <p:nvPr/>
+      </p:nvGrpSpPr>
+      <p:grpSpPr>
+        <a:xfrm>
+          <a:off x="0" y="0"/>
+          <a:ext cx="0" cy="0"/>
+          <a:chOff x="0" y="0"/>
+          <a:chExt cx="0" cy="0"/>
+        </a:xfrm>
+      </p:grpSpPr>
+      <p:sp>
+        <p:nvSpPr>
+          <p:cNvPr id="2" name="Slide Image Placeholder 1"/>
+          <p:cNvSpPr>
+            <a:spLocks noGrp="1"/>
+          </p:cNvSpPr>
+          <p:nvPr>
+            <p:ph type="sldImg" idx="2"/>
+          </p:nvPr>
+        </p:nvSpPr>
+        <p:spPr/>
+      </p:sp>
+      <p:sp>
+        <p:nvSpPr>
+          <p:cNvPr id="3" name="Notes Placeholder 2"/>
+          <p:cNvSpPr>
+            <a:spLocks noGrp="1"/>
+          </p:cNvSpPr>
+          <p:nvPr>
+            <p:ph type="body" idx="3" sz="quarter"/>
+          </p:nvPr>
+        </p:nvSpPr>
+        <p:spPr/>
+        <p:txBody>
+          <a:bodyPr/>
+          <a:lstStyle/>
+          <a:p>
+            <a:r>
+              <a:t>(1분) 기능이 많아 보여도 오늘 다 외울 필요 없다고 안심시키기.</a:t>
+            </a:r>
+          </a:p>
+          <a:p>
+            <a:r>
+              <a:t>"Level 1만 따라 하면 오늘부터 씁니다. 2·3은 필요할 때 이 자료로 돌아오세요." — 심리적 부담 낮추는 게 목적.</a:t>
+            </a:r>
+          </a:p>
+        </p:txBody>
+      </p:sp>
+      <p:sp>
+        <p:nvSpPr>
+          <p:cNvPr id="4" name="Slide Number Placeholder 3"/>
+          <p:cNvSpPr>
+            <a:spLocks noGrp="1"/>
+          </p:cNvSpPr>
+          <p:nvPr>
+            <p:ph type="sldNum" idx="5" sz="quarter"/>
+          </p:nvPr>
+        </p:nvSpPr>
+        <p:spPr/>
+      </p:sp>
+    </p:spTree>
+  </p:cSld>
+  <p:clrMapOvr>
+    <a:masterClrMapping/>
+  </p:clrMapOvr>
+</p:notes>
+</file>
+
+<file path=ppt/notesSlides/notesSlide20.xml><?xml version="1.0" encoding="utf-8"?>
+<p:notes xmlns:a="http://schemas.openxmlformats.org/drawingml/2006/main" xmlns:p="http://schemas.openxmlformats.org/presentationml/2006/main" xmlns:r="http://schemas.openxmlformats.org/officeDocument/2006/relationships">
+  <p:cSld>
+    <p:spTree>
+      <p:nvGrpSpPr>
+        <p:cNvPr id="1" name=""/>
+        <p:cNvGrpSpPr/>
+        <p:nvPr/>
+      </p:nvGrpSpPr>
+      <p:grpSpPr>
+        <a:xfrm>
+          <a:off x="0" y="0"/>
+          <a:ext cx="0" cy="0"/>
+          <a:chOff x="0" y="0"/>
+          <a:chExt cx="0" cy="0"/>
+        </a:xfrm>
+      </p:grpSpPr>
+      <p:sp>
+        <p:nvSpPr>
+          <p:cNvPr id="2" name="Slide Image Placeholder 1"/>
+          <p:cNvSpPr>
+            <a:spLocks noGrp="1"/>
+          </p:cNvSpPr>
+          <p:nvPr>
+            <p:ph type="sldImg" idx="2"/>
+          </p:nvPr>
+        </p:nvSpPr>
+        <p:spPr/>
+      </p:sp>
+      <p:sp>
+        <p:nvSpPr>
+          <p:cNvPr id="3" name="Notes Placeholder 2"/>
+          <p:cNvSpPr>
+            <a:spLocks noGrp="1"/>
+          </p:cNvSpPr>
+          <p:nvPr>
+            <p:ph type="body" idx="3" sz="quarter"/>
+          </p:nvPr>
+        </p:nvSpPr>
+        <p:spPr/>
+        <p:txBody>
+          <a:bodyPr/>
+          <a:lstStyle/>
+          <a:p>
+            <a:r>
+              <a:t>(2분) 3개 카드 순서대로. Auto-accept는 "신뢰가 쌓인 뒤" — 첫 주부터 켜지 말라고 조언.</a:t>
+            </a:r>
+          </a:p>
+          <a:p>
+            <a:r>
+              <a:t>하단 주의 문구 읽기: 자동 모드에서도 위험 명령은 다시 물어봄.</a:t>
+            </a:r>
+          </a:p>
+        </p:txBody>
+      </p:sp>
+      <p:sp>
+        <p:nvSpPr>
+          <p:cNvPr id="4" name="Slide Number Placeholder 3"/>
+          <p:cNvSpPr>
+            <a:spLocks noGrp="1"/>
+          </p:cNvSpPr>
+          <p:nvPr>
+            <p:ph type="sldNum" idx="5" sz="quarter"/>
+          </p:nvPr>
+        </p:nvSpPr>
+        <p:spPr/>
+      </p:sp>
+    </p:spTree>
+  </p:cSld>
+  <p:clrMapOvr>
+    <a:masterClrMapping/>
+  </p:clrMapOvr>
+</p:notes>
+</file>
+
+<file path=ppt/notesSlides/notesSlide21.xml><?xml version="1.0" encoding="utf-8"?>
+<p:notes xmlns:a="http://schemas.openxmlformats.org/drawingml/2006/main" xmlns:p="http://schemas.openxmlformats.org/presentationml/2006/main" xmlns:r="http://schemas.openxmlformats.org/officeDocument/2006/relationships">
+  <p:cSld>
+    <p:spTree>
+      <p:nvGrpSpPr>
+        <p:cNvPr id="1" name=""/>
+        <p:cNvGrpSpPr/>
+        <p:nvPr/>
+      </p:nvGrpSpPr>
+      <p:grpSpPr>
+        <a:xfrm>
+          <a:off x="0" y="0"/>
+          <a:ext cx="0" cy="0"/>
+          <a:chOff x="0" y="0"/>
+          <a:chExt cx="0" cy="0"/>
+        </a:xfrm>
+      </p:grpSpPr>
+      <p:sp>
+        <p:nvSpPr>
+          <p:cNvPr id="2" name="Slide Image Placeholder 1"/>
+          <p:cNvSpPr>
+            <a:spLocks noGrp="1"/>
+          </p:cNvSpPr>
+          <p:nvPr>
+            <p:ph type="sldImg" idx="2"/>
+          </p:nvPr>
+        </p:nvSpPr>
+        <p:spPr/>
+      </p:sp>
+      <p:sp>
+        <p:nvSpPr>
+          <p:cNvPr id="3" name="Notes Placeholder 2"/>
+          <p:cNvSpPr>
+            <a:spLocks noGrp="1"/>
+          </p:cNvSpPr>
+          <p:nvPr>
+            <p:ph type="body" idx="3" sz="quarter"/>
+          </p:nvPr>
+        </p:nvSpPr>
+        <p:spPr/>
+        <p:txBody>
+          <a:bodyPr/>
+          <a:lstStyle/>
+          <a:p>
+            <a:r>
+              <a:t>(2분) 다이어그램의 요청 문장을 그대로 읽기 — "이 한 문장이 전부입니다."</a:t>
+            </a:r>
+          </a:p>
+          <a:p>
+            <a:r>
+              <a:t>커밋 메시지 품질이 좋은 이유: diff를 실제로 읽고 쓰기 때문.</a:t>
+            </a:r>
+          </a:p>
+        </p:txBody>
+      </p:sp>
+      <p:sp>
+        <p:nvSpPr>
+          <p:cNvPr id="4" name="Slide Number Placeholder 3"/>
+          <p:cNvSpPr>
+            <a:spLocks noGrp="1"/>
+          </p:cNvSpPr>
+          <p:nvPr>
+            <p:ph type="sldNum" idx="5" sz="quarter"/>
+          </p:nvPr>
+        </p:nvSpPr>
+        <p:spPr/>
+      </p:sp>
+    </p:spTree>
+  </p:cSld>
+  <p:clrMapOvr>
+    <a:masterClrMapping/>
+  </p:clrMapOvr>
+</p:notes>
+</file>
+
+<file path=ppt/notesSlides/notesSlide22.xml><?xml version="1.0" encoding="utf-8"?>
+<p:notes xmlns:a="http://schemas.openxmlformats.org/drawingml/2006/main" xmlns:p="http://schemas.openxmlformats.org/presentationml/2006/main" xmlns:r="http://schemas.openxmlformats.org/officeDocument/2006/relationships">
+  <p:cSld>
+    <p:spTree>
+      <p:nvGrpSpPr>
+        <p:cNvPr id="1" name=""/>
+        <p:cNvGrpSpPr/>
+        <p:nvPr/>
+      </p:nvGrpSpPr>
+      <p:grpSpPr>
+        <a:xfrm>
+          <a:off x="0" y="0"/>
+          <a:ext cx="0" cy="0"/>
+          <a:chOff x="0" y="0"/>
+          <a:chExt cx="0" cy="0"/>
+        </a:xfrm>
+      </p:grpSpPr>
+      <p:sp>
+        <p:nvSpPr>
+          <p:cNvPr id="2" name="Slide Image Placeholder 1"/>
+          <p:cNvSpPr>
+            <a:spLocks noGrp="1"/>
+          </p:cNvSpPr>
+          <p:nvPr>
+            <p:ph type="sldImg" idx="2"/>
+          </p:nvPr>
+        </p:nvSpPr>
+        <p:spPr/>
+      </p:sp>
+      <p:sp>
+        <p:nvSpPr>
+          <p:cNvPr id="3" name="Notes Placeholder 2"/>
+          <p:cNvSpPr>
+            <a:spLocks noGrp="1"/>
+          </p:cNvSpPr>
+          <p:nvPr>
+            <p:ph type="body" idx="3" sz="quarter"/>
+          </p:nvPr>
+        </p:nvSpPr>
+        <p:spPr/>
+        <p:txBody>
+          <a:bodyPr/>
+          <a:lstStyle/>
+          <a:p>
+            <a:r>
+              <a:t>(2분) 의외로 모르는 사람이 많은 기능. Ctrl+V로 터미널에 붙여넣기 가능.</a:t>
+            </a:r>
+          </a:p>
+          <a:p>
+            <a:r>
+              <a:t>디자이너 시안 → 구현 사례가 가장 반응 좋음.</a:t>
+            </a:r>
+          </a:p>
+        </p:txBody>
+      </p:sp>
+      <p:sp>
+        <p:nvSpPr>
+          <p:cNvPr id="4" name="Slide Number Placeholder 3"/>
+          <p:cNvSpPr>
+            <a:spLocks noGrp="1"/>
+          </p:cNvSpPr>
+          <p:nvPr>
+            <p:ph type="sldNum" idx="5" sz="quarter"/>
+          </p:nvPr>
+        </p:nvSpPr>
+        <p:spPr/>
+      </p:sp>
+    </p:spTree>
+  </p:cSld>
+  <p:clrMapOvr>
+    <a:masterClrMapping/>
+  </p:clrMapOvr>
+</p:notes>
+</file>
+
+<file path=ppt/notesSlides/notesSlide23.xml><?xml version="1.0" encoding="utf-8"?>
+<p:notes xmlns:a="http://schemas.openxmlformats.org/drawingml/2006/main" xmlns:p="http://schemas.openxmlformats.org/presentationml/2006/main" xmlns:r="http://schemas.openxmlformats.org/officeDocument/2006/relationships">
+  <p:cSld>
+    <p:spTree>
+      <p:nvGrpSpPr>
+        <p:cNvPr id="1" name=""/>
+        <p:cNvGrpSpPr/>
+        <p:nvPr/>
+      </p:nvGrpSpPr>
+      <p:grpSpPr>
+        <a:xfrm>
+          <a:off x="0" y="0"/>
+          <a:ext cx="0" cy="0"/>
+          <a:chOff x="0" y="0"/>
+          <a:chExt cx="0" cy="0"/>
+        </a:xfrm>
+      </p:grpSpPr>
+      <p:sp>
+        <p:nvSpPr>
+          <p:cNvPr id="2" name="Slide Image Placeholder 1"/>
+          <p:cNvSpPr>
+            <a:spLocks noGrp="1"/>
+          </p:cNvSpPr>
+          <p:nvPr>
+            <p:ph type="sldImg" idx="2"/>
+          </p:nvPr>
+        </p:nvSpPr>
+        <p:spPr/>
+      </p:sp>
+      <p:sp>
+        <p:nvSpPr>
+          <p:cNvPr id="3" name="Notes Placeholder 2"/>
+          <p:cNvSpPr>
+            <a:spLocks noGrp="1"/>
+          </p:cNvSpPr>
+          <p:nvPr>
+            <p:ph type="body" idx="3" sz="quarter"/>
+          </p:nvPr>
+        </p:nvSpPr>
+        <p:spPr/>
+        <p:txBody>
+          <a:bodyPr/>
+          <a:lstStyle/>
+          <a:p>
+            <a:r>
+              <a:t>(2분) "한 대화 = 한 가지 목표" 공식만 기억시키기.</a:t>
+            </a:r>
+          </a:p>
+          <a:p>
+            <a:r>
+              <a:t>길어지면 /compact, 주제 바뀌면 /clear. think hard는 어려운 버그에서 시도해 보라고.</a:t>
+            </a:r>
+          </a:p>
+        </p:txBody>
+      </p:sp>
+      <p:sp>
+        <p:nvSpPr>
+          <p:cNvPr id="4" name="Slide Number Placeholder 3"/>
+          <p:cNvSpPr>
+            <a:spLocks noGrp="1"/>
+          </p:cNvSpPr>
+          <p:nvPr>
+            <p:ph type="sldNum" idx="5" sz="quarter"/>
+          </p:nvPr>
+        </p:nvSpPr>
+        <p:spPr/>
+      </p:sp>
+    </p:spTree>
+  </p:cSld>
+  <p:clrMapOvr>
+    <a:masterClrMapping/>
+  </p:clrMapOvr>
+</p:notes>
+</file>
+
+<file path=ppt/notesSlides/notesSlide24.xml><?xml version="1.0" encoding="utf-8"?>
+<p:notes xmlns:a="http://schemas.openxmlformats.org/drawingml/2006/main" xmlns:p="http://schemas.openxmlformats.org/presentationml/2006/main" xmlns:r="http://schemas.openxmlformats.org/officeDocument/2006/relationships">
+  <p:cSld>
+    <p:spTree>
+      <p:nvGrpSpPr>
+        <p:cNvPr id="1" name=""/>
+        <p:cNvGrpSpPr/>
+        <p:nvPr/>
+      </p:nvGrpSpPr>
+      <p:grpSpPr>
+        <a:xfrm>
+          <a:off x="0" y="0"/>
+          <a:ext cx="0" cy="0"/>
+          <a:chOff x="0" y="0"/>
+          <a:chExt cx="0" cy="0"/>
+        </a:xfrm>
+      </p:grpSpPr>
+      <p:sp>
+        <p:nvSpPr>
+          <p:cNvPr id="2" name="Slide Image Placeholder 1"/>
+          <p:cNvSpPr>
+            <a:spLocks noGrp="1"/>
+          </p:cNvSpPr>
+          <p:nvPr>
+            <p:ph type="sldImg" idx="2"/>
+          </p:nvPr>
+        </p:nvSpPr>
+        <p:spPr/>
+      </p:sp>
+      <p:sp>
+        <p:nvSpPr>
+          <p:cNvPr id="3" name="Notes Placeholder 2"/>
+          <p:cNvSpPr>
+            <a:spLocks noGrp="1"/>
+          </p:cNvSpPr>
+          <p:nvPr>
+            <p:ph type="body" idx="3" sz="quarter"/>
+          </p:nvPr>
+        </p:nvSpPr>
+        <p:spPr/>
+        <p:txBody>
+          <a:bodyPr/>
+          <a:lstStyle/>
+          <a:p>
+            <a:r>
+              <a:t>(8분) 두 번째 라이브 데모 — Plan Mode 전환부터 PR 링크 열기까지.</a:t>
+            </a:r>
+          </a:p>
+          <a:p>
+            <a:r>
+              <a:t>계획을 일부러 한 번 수정시키는 장면을 보여주면 Plan Mode의 가치가 확실히 전달됨.</a:t>
+            </a:r>
+          </a:p>
+        </p:txBody>
+      </p:sp>
+      <p:sp>
+        <p:nvSpPr>
+          <p:cNvPr id="4" name="Slide Number Placeholder 3"/>
+          <p:cNvSpPr>
+            <a:spLocks noGrp="1"/>
+          </p:cNvSpPr>
+          <p:nvPr>
+            <p:ph type="sldNum" idx="5" sz="quarter"/>
+          </p:nvPr>
+        </p:nvSpPr>
+        <p:spPr/>
+      </p:sp>
+    </p:spTree>
+  </p:cSld>
+  <p:clrMapOvr>
+    <a:masterClrMapping/>
+  </p:clrMapOvr>
+</p:notes>
+</file>
+
+<file path=ppt/notesSlides/notesSlide25.xml><?xml version="1.0" encoding="utf-8"?>
+<p:notes xmlns:a="http://schemas.openxmlformats.org/drawingml/2006/main" xmlns:p="http://schemas.openxmlformats.org/presentationml/2006/main" xmlns:r="http://schemas.openxmlformats.org/officeDocument/2006/relationships">
+  <p:cSld>
+    <p:spTree>
+      <p:nvGrpSpPr>
+        <p:cNvPr id="1" name=""/>
+        <p:cNvGrpSpPr/>
+        <p:nvPr/>
+      </p:nvGrpSpPr>
+      <p:grpSpPr>
+        <a:xfrm>
+          <a:off x="0" y="0"/>
+          <a:ext cx="0" cy="0"/>
+          <a:chOff x="0" y="0"/>
+          <a:chExt cx="0" cy="0"/>
+        </a:xfrm>
+      </p:grpSpPr>
+      <p:sp>
+        <p:nvSpPr>
+          <p:cNvPr id="2" name="Slide Image Placeholder 1"/>
+          <p:cNvSpPr>
+            <a:spLocks noGrp="1"/>
+          </p:cNvSpPr>
+          <p:nvPr>
+            <p:ph type="sldImg" idx="2"/>
+          </p:nvPr>
+        </p:nvSpPr>
+        <p:spPr/>
+      </p:sp>
+      <p:sp>
+        <p:nvSpPr>
+          <p:cNvPr id="3" name="Notes Placeholder 2"/>
+          <p:cNvSpPr>
+            <a:spLocks noGrp="1"/>
+          </p:cNvSpPr>
+          <p:nvPr>
+            <p:ph type="body" idx="3" sz="quarter"/>
+          </p:nvPr>
+        </p:nvSpPr>
+        <p:spPr/>
+        <p:txBody>
+          <a:bodyPr/>
+          <a:lstStyle/>
+          <a:p>
+            <a:r>
+              <a:t>(1분) "/init은 오늘 바로"가 핵심 행동 유도.</a:t>
+            </a:r>
+          </a:p>
+          <a:p>
+            <a:r>
+              <a:t>2차 질문 받기.</a:t>
+            </a:r>
+          </a:p>
+        </p:txBody>
+      </p:sp>
+      <p:sp>
+        <p:nvSpPr>
+          <p:cNvPr id="4" name="Slide Number Placeholder 3"/>
+          <p:cNvSpPr>
+            <a:spLocks noGrp="1"/>
+          </p:cNvSpPr>
+          <p:nvPr>
+            <p:ph type="sldNum" idx="5" sz="quarter"/>
+          </p:nvPr>
+        </p:nvSpPr>
+        <p:spPr/>
+      </p:sp>
+    </p:spTree>
+  </p:cSld>
+  <p:clrMapOvr>
+    <a:masterClrMapping/>
+  </p:clrMapOvr>
+</p:notes>
+</file>
+
+<file path=ppt/notesSlides/notesSlide26.xml><?xml version="1.0" encoding="utf-8"?>
+<p:notes xmlns:a="http://schemas.openxmlformats.org/drawingml/2006/main" xmlns:p="http://schemas.openxmlformats.org/presentationml/2006/main" xmlns:r="http://schemas.openxmlformats.org/officeDocument/2006/relationships">
+  <p:cSld>
+    <p:spTree>
+      <p:nvGrpSpPr>
+        <p:cNvPr id="1" name=""/>
+        <p:cNvGrpSpPr/>
+        <p:nvPr/>
+      </p:nvGrpSpPr>
+      <p:grpSpPr>
+        <a:xfrm>
+          <a:off x="0" y="0"/>
+          <a:ext cx="0" cy="0"/>
+          <a:chOff x="0" y="0"/>
+          <a:chExt cx="0" cy="0"/>
+        </a:xfrm>
+      </p:grpSpPr>
+      <p:sp>
+        <p:nvSpPr>
+          <p:cNvPr id="2" name="Slide Image Placeholder 1"/>
+          <p:cNvSpPr>
+            <a:spLocks noGrp="1"/>
+          </p:cNvSpPr>
+          <p:nvPr>
+            <p:ph type="sldImg" idx="2"/>
+          </p:nvPr>
+        </p:nvSpPr>
+        <p:spPr/>
+      </p:sp>
+      <p:sp>
+        <p:nvSpPr>
+          <p:cNvPr id="3" name="Notes Placeholder 2"/>
+          <p:cNvSpPr>
+            <a:spLocks noGrp="1"/>
+          </p:cNvSpPr>
+          <p:nvPr>
+            <p:ph type="body" idx="3" sz="quarter"/>
+          </p:nvPr>
+        </p:nvSpPr>
+        <p:spPr/>
+        <p:txBody>
+          <a:bodyPr/>
+          <a:lstStyle/>
+          <a:p>
+            <a:r>
+              <a:t>(30초) "지금부터는 카탈로그입니다 — 뭐가 있는지만 알아 두세요." 속도 올리기.</a:t>
+            </a:r>
+          </a:p>
+        </p:txBody>
+      </p:sp>
+      <p:sp>
+        <p:nvSpPr>
+          <p:cNvPr id="4" name="Slide Number Placeholder 3"/>
+          <p:cNvSpPr>
+            <a:spLocks noGrp="1"/>
+          </p:cNvSpPr>
+          <p:nvPr>
+            <p:ph type="sldNum" idx="5" sz="quarter"/>
+          </p:nvPr>
+        </p:nvSpPr>
+        <p:spPr/>
+      </p:sp>
+    </p:spTree>
+  </p:cSld>
+  <p:clrMapOvr>
+    <a:masterClrMapping/>
+  </p:clrMapOvr>
+</p:notes>
+</file>
+
+<file path=ppt/notesSlides/notesSlide27.xml><?xml version="1.0" encoding="utf-8"?>
+<p:notes xmlns:a="http://schemas.openxmlformats.org/drawingml/2006/main" xmlns:p="http://schemas.openxmlformats.org/presentationml/2006/main" xmlns:r="http://schemas.openxmlformats.org/officeDocument/2006/relationships">
+  <p:cSld>
+    <p:spTree>
+      <p:nvGrpSpPr>
+        <p:cNvPr id="1" name=""/>
+        <p:cNvGrpSpPr/>
+        <p:nvPr/>
+      </p:nvGrpSpPr>
+      <p:grpSpPr>
+        <a:xfrm>
+          <a:off x="0" y="0"/>
+          <a:ext cx="0" cy="0"/>
+          <a:chOff x="0" y="0"/>
+          <a:chExt cx="0" cy="0"/>
+        </a:xfrm>
+      </p:grpSpPr>
+      <p:sp>
+        <p:nvSpPr>
+          <p:cNvPr id="2" name="Slide Image Placeholder 1"/>
+          <p:cNvSpPr>
+            <a:spLocks noGrp="1"/>
+          </p:cNvSpPr>
+          <p:nvPr>
+            <p:ph type="sldImg" idx="2"/>
+          </p:nvPr>
+        </p:nvSpPr>
+        <p:spPr/>
+      </p:sp>
+      <p:sp>
+        <p:nvSpPr>
+          <p:cNvPr id="3" name="Notes Placeholder 2"/>
+          <p:cNvSpPr>
+            <a:spLocks noGrp="1"/>
+          </p:cNvSpPr>
+          <p:nvPr>
+            <p:ph type="body" idx="3" sz="quarter"/>
+          </p:nvPr>
+        </p:nvSpPr>
+        <p:spPr/>
+        <p:txBody>
+          <a:bodyPr/>
+          <a:lstStyle/>
+          <a:p>
+            <a:r>
+              <a:t>(2분) "같은 요청을 3번 타이핑했다면 커맨드로 만들 때" — 파일 하나면 끝이라는 가벼움 강조.</a:t>
+            </a:r>
+          </a:p>
+        </p:txBody>
+      </p:sp>
+      <p:sp>
+        <p:nvSpPr>
+          <p:cNvPr id="4" name="Slide Number Placeholder 3"/>
+          <p:cNvSpPr>
+            <a:spLocks noGrp="1"/>
+          </p:cNvSpPr>
+          <p:nvPr>
+            <p:ph type="sldNum" idx="5" sz="quarter"/>
+          </p:nvPr>
+        </p:nvSpPr>
+        <p:spPr/>
+      </p:sp>
+    </p:spTree>
+  </p:cSld>
+  <p:clrMapOvr>
+    <a:masterClrMapping/>
+  </p:clrMapOvr>
+</p:notes>
+</file>
+
+<file path=ppt/notesSlides/notesSlide28.xml><?xml version="1.0" encoding="utf-8"?>
+<p:notes xmlns:a="http://schemas.openxmlformats.org/drawingml/2006/main" xmlns:p="http://schemas.openxmlformats.org/presentationml/2006/main" xmlns:r="http://schemas.openxmlformats.org/officeDocument/2006/relationships">
+  <p:cSld>
+    <p:spTree>
+      <p:nvGrpSpPr>
+        <p:cNvPr id="1" name=""/>
+        <p:cNvGrpSpPr/>
+        <p:nvPr/>
+      </p:nvGrpSpPr>
+      <p:grpSpPr>
+        <a:xfrm>
+          <a:off x="0" y="0"/>
+          <a:ext cx="0" cy="0"/>
+          <a:chOff x="0" y="0"/>
+          <a:chExt cx="0" cy="0"/>
+        </a:xfrm>
+      </p:grpSpPr>
+      <p:sp>
+        <p:nvSpPr>
+          <p:cNvPr id="2" name="Slide Image Placeholder 1"/>
+          <p:cNvSpPr>
+            <a:spLocks noGrp="1"/>
+          </p:cNvSpPr>
+          <p:nvPr>
+            <p:ph type="sldImg" idx="2"/>
+          </p:nvPr>
+        </p:nvSpPr>
+        <p:spPr/>
+      </p:sp>
+      <p:sp>
+        <p:nvSpPr>
+          <p:cNvPr id="3" name="Notes Placeholder 2"/>
+          <p:cNvSpPr>
+            <a:spLocks noGrp="1"/>
+          </p:cNvSpPr>
+          <p:nvPr>
+            <p:ph type="body" idx="3" sz="quarter"/>
+          </p:nvPr>
+        </p:nvSpPr>
+        <p:spPr/>
+        <p:txBody>
+          <a:bodyPr/>
+          <a:lstStyle/>
+          <a:p>
+            <a:r>
+              <a:t>(2분) '보조 Claude'라는 비유 하나로 충분. 깊이 들어가지 말 것.</a:t>
+            </a:r>
+          </a:p>
+          <a:p>
+            <a:r>
+              <a:t>관심 있는 분은 튜토리얼 영상 EP6 참조 안내.</a:t>
+            </a:r>
+          </a:p>
+        </p:txBody>
+      </p:sp>
+      <p:sp>
+        <p:nvSpPr>
+          <p:cNvPr id="4" name="Slide Number Placeholder 3"/>
+          <p:cNvSpPr>
+            <a:spLocks noGrp="1"/>
+          </p:cNvSpPr>
+          <p:nvPr>
+            <p:ph type="sldNum" idx="5" sz="quarter"/>
+          </p:nvPr>
+        </p:nvSpPr>
+        <p:spPr/>
+      </p:sp>
+    </p:spTree>
+  </p:cSld>
+  <p:clrMapOvr>
+    <a:masterClrMapping/>
+  </p:clrMapOvr>
+</p:notes>
+</file>
+
+<file path=ppt/notesSlides/notesSlide29.xml><?xml version="1.0" encoding="utf-8"?>
+<p:notes xmlns:a="http://schemas.openxmlformats.org/drawingml/2006/main" xmlns:p="http://schemas.openxmlformats.org/presentationml/2006/main" xmlns:r="http://schemas.openxmlformats.org/officeDocument/2006/relationships">
+  <p:cSld>
+    <p:spTree>
+      <p:nvGrpSpPr>
+        <p:cNvPr id="1" name=""/>
+        <p:cNvGrpSpPr/>
+        <p:nvPr/>
+      </p:nvGrpSpPr>
+      <p:grpSpPr>
+        <a:xfrm>
+          <a:off x="0" y="0"/>
+          <a:ext cx="0" cy="0"/>
+          <a:chOff x="0" y="0"/>
+          <a:chExt cx="0" cy="0"/>
+        </a:xfrm>
+      </p:grpSpPr>
+      <p:sp>
+        <p:nvSpPr>
+          <p:cNvPr id="2" name="Slide Image Placeholder 1"/>
+          <p:cNvSpPr>
+            <a:spLocks noGrp="1"/>
+          </p:cNvSpPr>
+          <p:nvPr>
+            <p:ph type="sldImg" idx="2"/>
+          </p:nvPr>
+        </p:nvSpPr>
+        <p:spPr/>
+      </p:sp>
+      <p:sp>
+        <p:nvSpPr>
+          <p:cNvPr id="3" name="Notes Placeholder 2"/>
+          <p:cNvSpPr>
+            <a:spLocks noGrp="1"/>
+          </p:cNvSpPr>
+          <p:nvPr>
+            <p:ph type="body" idx="3" sz="quarter"/>
+          </p:nvPr>
+        </p:nvSpPr>
+        <p:spPr/>
+        <p:txBody>
+          <a:bodyPr/>
+          <a:lstStyle/>
+          <a:p>
+            <a:r>
+              <a:t>(2분) USB 포트 비유. 청중의 실제 도구(Slack? Jira?)를 물어보고 "그거 연결됩니다"로 연결.</a:t>
+            </a:r>
+          </a:p>
+          <a:p>
+            <a:r>
+              <a:t>보안 유의사항 한 줄: 신뢰할 수 있는 서버만.</a:t>
+            </a:r>
+          </a:p>
+        </p:txBody>
+      </p:sp>
+      <p:sp>
+        <p:nvSpPr>
+          <p:cNvPr id="4" name="Slide Number Placeholder 3"/>
+          <p:cNvSpPr>
+            <a:spLocks noGrp="1"/>
+          </p:cNvSpPr>
+          <p:nvPr>
+            <p:ph type="sldNum" idx="5" sz="quarter"/>
+          </p:nvPr>
+        </p:nvSpPr>
+        <p:spPr/>
+      </p:sp>
+    </p:spTree>
+  </p:cSld>
+  <p:clrMapOvr>
+    <a:masterClrMapping/>
+  </p:clrMapOvr>
+</p:notes>
+</file>
+
+<file path=ppt/notesSlides/notesSlide3.xml><?xml version="1.0" encoding="utf-8"?>
+<p:notes xmlns:a="http://schemas.openxmlformats.org/drawingml/2006/main" xmlns:p="http://schemas.openxmlformats.org/presentationml/2006/main" xmlns:r="http://schemas.openxmlformats.org/officeDocument/2006/relationships">
+  <p:cSld>
+    <p:spTree>
+      <p:nvGrpSpPr>
+        <p:cNvPr id="1" name=""/>
+        <p:cNvGrpSpPr/>
+        <p:nvPr/>
+      </p:nvGrpSpPr>
+      <p:grpSpPr>
+        <a:xfrm>
+          <a:off x="0" y="0"/>
+          <a:ext cx="0" cy="0"/>
+          <a:chOff x="0" y="0"/>
+          <a:chExt cx="0" cy="0"/>
+        </a:xfrm>
+      </p:grpSpPr>
+      <p:sp>
+        <p:nvSpPr>
+          <p:cNvPr id="2" name="Slide Image Placeholder 1"/>
+          <p:cNvSpPr>
+            <a:spLocks noGrp="1"/>
+          </p:cNvSpPr>
+          <p:nvPr>
+            <p:ph type="sldImg" idx="2"/>
+          </p:nvPr>
+        </p:nvSpPr>
+        <p:spPr/>
+      </p:sp>
+      <p:sp>
+        <p:nvSpPr>
+          <p:cNvPr id="3" name="Notes Placeholder 2"/>
+          <p:cNvSpPr>
+            <a:spLocks noGrp="1"/>
+          </p:cNvSpPr>
+          <p:nvPr>
+            <p:ph type="body" idx="3" sz="quarter"/>
+          </p:nvPr>
+        </p:nvSpPr>
+        <p:spPr/>
+        <p:txBody>
+          <a:bodyPr/>
+          <a:lstStyle/>
+          <a:p>
+            <a:r>
+              <a:t>(2분) 핵심 문장 강조: 자연어로 말하면 '직접 일하는' 도구.</a:t>
+            </a:r>
+          </a:p>
+          <a:p>
+            <a:r>
+              <a:t>마지막 불릿(승인 기반)을 힘줘서 — "여러분 허락 없이는 한 글자도 안 바뀝니다." 불안감 해소가 도입부의 최우선 과제.</a:t>
+            </a:r>
+          </a:p>
+        </p:txBody>
+      </p:sp>
+      <p:sp>
+        <p:nvSpPr>
+          <p:cNvPr id="4" name="Slide Number Placeholder 3"/>
+          <p:cNvSpPr>
+            <a:spLocks noGrp="1"/>
+          </p:cNvSpPr>
+          <p:nvPr>
+            <p:ph type="sldNum" idx="5" sz="quarter"/>
+          </p:nvPr>
+        </p:nvSpPr>
+        <p:spPr/>
+      </p:sp>
+    </p:spTree>
+  </p:cSld>
+  <p:clrMapOvr>
+    <a:masterClrMapping/>
+  </p:clrMapOvr>
+</p:notes>
+</file>
+
+<file path=ppt/notesSlides/notesSlide30.xml><?xml version="1.0" encoding="utf-8"?>
+<p:notes xmlns:a="http://schemas.openxmlformats.org/drawingml/2006/main" xmlns:p="http://schemas.openxmlformats.org/presentationml/2006/main" xmlns:r="http://schemas.openxmlformats.org/officeDocument/2006/relationships">
+  <p:cSld>
+    <p:spTree>
+      <p:nvGrpSpPr>
+        <p:cNvPr id="1" name=""/>
+        <p:cNvGrpSpPr/>
+        <p:nvPr/>
+      </p:nvGrpSpPr>
+      <p:grpSpPr>
+        <a:xfrm>
+          <a:off x="0" y="0"/>
+          <a:ext cx="0" cy="0"/>
+          <a:chOff x="0" y="0"/>
+          <a:chExt cx="0" cy="0"/>
+        </a:xfrm>
+      </p:grpSpPr>
+      <p:sp>
+        <p:nvSpPr>
+          <p:cNvPr id="2" name="Slide Image Placeholder 1"/>
+          <p:cNvSpPr>
+            <a:spLocks noGrp="1"/>
+          </p:cNvSpPr>
+          <p:nvPr>
+            <p:ph type="sldImg" idx="2"/>
+          </p:nvPr>
+        </p:nvSpPr>
+        <p:spPr/>
+      </p:sp>
+      <p:sp>
+        <p:nvSpPr>
+          <p:cNvPr id="3" name="Notes Placeholder 2"/>
+          <p:cNvSpPr>
+            <a:spLocks noGrp="1"/>
+          </p:cNvSpPr>
+          <p:nvPr>
+            <p:ph type="body" idx="3" sz="quarter"/>
+          </p:nvPr>
+        </p:nvSpPr>
+        <p:spPr/>
+        <p:txBody>
+          <a:bodyPr/>
+          <a:lstStyle/>
+          <a:p>
+            <a:r>
+              <a:t>(2분) 핵심 문장: "CLAUDE.md는 권고, Hooks는 강제."</a:t>
+            </a:r>
+          </a:p>
+          <a:p>
+            <a:r>
+              <a:t>포매터 자동 실행 예가 가장 직관적.</a:t>
+            </a:r>
+          </a:p>
+        </p:txBody>
+      </p:sp>
+      <p:sp>
+        <p:nvSpPr>
+          <p:cNvPr id="4" name="Slide Number Placeholder 3"/>
+          <p:cNvSpPr>
+            <a:spLocks noGrp="1"/>
+          </p:cNvSpPr>
+          <p:nvPr>
+            <p:ph type="sldNum" idx="5" sz="quarter"/>
+          </p:nvPr>
+        </p:nvSpPr>
+        <p:spPr/>
+      </p:sp>
+    </p:spTree>
+  </p:cSld>
+  <p:clrMapOvr>
+    <a:masterClrMapping/>
+  </p:clrMapOvr>
+</p:notes>
+</file>
+
+<file path=ppt/notesSlides/notesSlide31.xml><?xml version="1.0" encoding="utf-8"?>
+<p:notes xmlns:a="http://schemas.openxmlformats.org/drawingml/2006/main" xmlns:p="http://schemas.openxmlformats.org/presentationml/2006/main" xmlns:r="http://schemas.openxmlformats.org/officeDocument/2006/relationships">
+  <p:cSld>
+    <p:spTree>
+      <p:nvGrpSpPr>
+        <p:cNvPr id="1" name=""/>
+        <p:cNvGrpSpPr/>
+        <p:nvPr/>
+      </p:nvGrpSpPr>
+      <p:grpSpPr>
+        <a:xfrm>
+          <a:off x="0" y="0"/>
+          <a:ext cx="0" cy="0"/>
+          <a:chOff x="0" y="0"/>
+          <a:chExt cx="0" cy="0"/>
+        </a:xfrm>
+      </p:grpSpPr>
+      <p:sp>
+        <p:nvSpPr>
+          <p:cNvPr id="2" name="Slide Image Placeholder 1"/>
+          <p:cNvSpPr>
+            <a:spLocks noGrp="1"/>
+          </p:cNvSpPr>
+          <p:nvPr>
+            <p:ph type="sldImg" idx="2"/>
+          </p:nvPr>
+        </p:nvSpPr>
+        <p:spPr/>
+      </p:sp>
+      <p:sp>
+        <p:nvSpPr>
+          <p:cNvPr id="3" name="Notes Placeholder 2"/>
+          <p:cNvSpPr>
+            <a:spLocks noGrp="1"/>
+          </p:cNvSpPr>
+          <p:nvPr>
+            <p:ph type="body" idx="3" sz="quarter"/>
+          </p:nvPr>
+        </p:nvSpPr>
+        <p:spPr/>
+        <p:txBody>
+          <a:bodyPr/>
+          <a:lstStyle/>
+          <a:p>
+            <a:r>
+              <a:t>(2분) 각자 스타일대로: 터미널이 어색하면 IDE 확장부터, 자리를 비울 땐 웹.</a:t>
+            </a:r>
+          </a:p>
+          <a:p>
+            <a:r>
+              <a:t>GitHub Actions @claude 멘션은 팀 도입 시 가장 파급력 큰 기능.</a:t>
+            </a:r>
+          </a:p>
+        </p:txBody>
+      </p:sp>
+      <p:sp>
+        <p:nvSpPr>
+          <p:cNvPr id="4" name="Slide Number Placeholder 3"/>
+          <p:cNvSpPr>
+            <a:spLocks noGrp="1"/>
+          </p:cNvSpPr>
+          <p:nvPr>
+            <p:ph type="sldNum" idx="5" sz="quarter"/>
+          </p:nvPr>
+        </p:nvSpPr>
+        <p:spPr/>
+      </p:sp>
+    </p:spTree>
+  </p:cSld>
+  <p:clrMapOvr>
+    <a:masterClrMapping/>
+  </p:clrMapOvr>
+</p:notes>
+</file>
+
+<file path=ppt/notesSlides/notesSlide32.xml><?xml version="1.0" encoding="utf-8"?>
+<p:notes xmlns:a="http://schemas.openxmlformats.org/drawingml/2006/main" xmlns:p="http://schemas.openxmlformats.org/presentationml/2006/main" xmlns:r="http://schemas.openxmlformats.org/officeDocument/2006/relationships">
+  <p:cSld>
+    <p:spTree>
+      <p:nvGrpSpPr>
+        <p:cNvPr id="1" name=""/>
+        <p:cNvGrpSpPr/>
+        <p:nvPr/>
+      </p:nvGrpSpPr>
+      <p:grpSpPr>
+        <a:xfrm>
+          <a:off x="0" y="0"/>
+          <a:ext cx="0" cy="0"/>
+          <a:chOff x="0" y="0"/>
+          <a:chExt cx="0" cy="0"/>
+        </a:xfrm>
+      </p:grpSpPr>
+      <p:sp>
+        <p:nvSpPr>
+          <p:cNvPr id="2" name="Slide Image Placeholder 1"/>
+          <p:cNvSpPr>
+            <a:spLocks noGrp="1"/>
+          </p:cNvSpPr>
+          <p:nvPr>
+            <p:ph type="sldImg" idx="2"/>
+          </p:nvPr>
+        </p:nvSpPr>
+        <p:spPr/>
+      </p:sp>
+      <p:sp>
+        <p:nvSpPr>
+          <p:cNvPr id="3" name="Notes Placeholder 2"/>
+          <p:cNvSpPr>
+            <a:spLocks noGrp="1"/>
+          </p:cNvSpPr>
+          <p:nvPr>
+            <p:ph type="body" idx="3" sz="quarter"/>
+          </p:nvPr>
+        </p:nvSpPr>
+        <p:spPr/>
+        <p:txBody>
+          <a:bodyPr/>
+          <a:lstStyle/>
+          <a:p>
+            <a:r>
+              <a:t>(1분) 표를 위에서 아래로 빠르게 — "상황이 오면 이 표만 다시 보세요."</a:t>
+            </a:r>
+          </a:p>
+        </p:txBody>
+      </p:sp>
+      <p:sp>
+        <p:nvSpPr>
+          <p:cNvPr id="4" name="Slide Number Placeholder 3"/>
+          <p:cNvSpPr>
+            <a:spLocks noGrp="1"/>
+          </p:cNvSpPr>
+          <p:nvPr>
+            <p:ph type="sldNum" idx="5" sz="quarter"/>
+          </p:nvPr>
+        </p:nvSpPr>
+        <p:spPr/>
+      </p:sp>
+    </p:spTree>
+  </p:cSld>
+  <p:clrMapOvr>
+    <a:masterClrMapping/>
+  </p:clrMapOvr>
+</p:notes>
+</file>
+
+<file path=ppt/notesSlides/notesSlide33.xml><?xml version="1.0" encoding="utf-8"?>
+<p:notes xmlns:a="http://schemas.openxmlformats.org/drawingml/2006/main" xmlns:p="http://schemas.openxmlformats.org/presentationml/2006/main" xmlns:r="http://schemas.openxmlformats.org/officeDocument/2006/relationships">
+  <p:cSld>
+    <p:spTree>
+      <p:nvGrpSpPr>
+        <p:cNvPr id="1" name=""/>
+        <p:cNvGrpSpPr/>
+        <p:nvPr/>
+      </p:nvGrpSpPr>
+      <p:grpSpPr>
+        <a:xfrm>
+          <a:off x="0" y="0"/>
+          <a:ext cx="0" cy="0"/>
+          <a:chOff x="0" y="0"/>
+          <a:chExt cx="0" cy="0"/>
+        </a:xfrm>
+      </p:grpSpPr>
+      <p:sp>
+        <p:nvSpPr>
+          <p:cNvPr id="2" name="Slide Image Placeholder 1"/>
+          <p:cNvSpPr>
+            <a:spLocks noGrp="1"/>
+          </p:cNvSpPr>
+          <p:nvPr>
+            <p:ph type="sldImg" idx="2"/>
+          </p:nvPr>
+        </p:nvSpPr>
+        <p:spPr/>
+      </p:sp>
+      <p:sp>
+        <p:nvSpPr>
+          <p:cNvPr id="3" name="Notes Placeholder 2"/>
+          <p:cNvSpPr>
+            <a:spLocks noGrp="1"/>
+          </p:cNvSpPr>
+          <p:nvPr>
+            <p:ph type="body" idx="3" sz="quarter"/>
+          </p:nvPr>
+        </p:nvSpPr>
+        <p:spPr/>
+        <p:txBody>
+          <a:bodyPr/>
+          <a:lstStyle/>
+          <a:p>
+            <a:r>
+              <a:t>(2분) ①(작게 시작)과 ④(커밋 자주)만 힘줘서. 나머지는 배포 자료로 읽게.</a:t>
+            </a:r>
+          </a:p>
+        </p:txBody>
+      </p:sp>
+      <p:sp>
+        <p:nvSpPr>
+          <p:cNvPr id="4" name="Slide Number Placeholder 3"/>
+          <p:cNvSpPr>
+            <a:spLocks noGrp="1"/>
+          </p:cNvSpPr>
+          <p:nvPr>
+            <p:ph type="sldNum" idx="5" sz="quarter"/>
+          </p:nvPr>
+        </p:nvSpPr>
+        <p:spPr/>
+      </p:sp>
+    </p:spTree>
+  </p:cSld>
+  <p:clrMapOvr>
+    <a:masterClrMapping/>
+  </p:clrMapOvr>
+</p:notes>
+</file>
+
+<file path=ppt/notesSlides/notesSlide34.xml><?xml version="1.0" encoding="utf-8"?>
+<p:notes xmlns:a="http://schemas.openxmlformats.org/drawingml/2006/main" xmlns:p="http://schemas.openxmlformats.org/presentationml/2006/main" xmlns:r="http://schemas.openxmlformats.org/officeDocument/2006/relationships">
+  <p:cSld>
+    <p:spTree>
+      <p:nvGrpSpPr>
+        <p:cNvPr id="1" name=""/>
+        <p:cNvGrpSpPr/>
+        <p:nvPr/>
+      </p:nvGrpSpPr>
+      <p:grpSpPr>
+        <a:xfrm>
+          <a:off x="0" y="0"/>
+          <a:ext cx="0" cy="0"/>
+          <a:chOff x="0" y="0"/>
+          <a:chExt cx="0" cy="0"/>
+        </a:xfrm>
+      </p:grpSpPr>
+      <p:sp>
+        <p:nvSpPr>
+          <p:cNvPr id="2" name="Slide Image Placeholder 1"/>
+          <p:cNvSpPr>
+            <a:spLocks noGrp="1"/>
+          </p:cNvSpPr>
+          <p:nvPr>
+            <p:ph type="sldImg" idx="2"/>
+          </p:nvPr>
+        </p:nvSpPr>
+        <p:spPr/>
+      </p:sp>
+      <p:sp>
+        <p:nvSpPr>
+          <p:cNvPr id="3" name="Notes Placeholder 2"/>
+          <p:cNvSpPr>
+            <a:spLocks noGrp="1"/>
+          </p:cNvSpPr>
+          <p:nvPr>
+            <p:ph type="body" idx="3" sz="quarter"/>
+          </p:nvPr>
+        </p:nvSpPr>
+        <p:spPr/>
+        <p:txBody>
+          <a:bodyPr/>
+          <a:lstStyle/>
+          <a:p>
+            <a:r>
+              <a:t>(2분) 1번(diff 안 읽고 승인)이 가장 중요 — "AI 시대의 기술 부채는 이해 못 한 채 머지한 코드."</a:t>
+            </a:r>
+          </a:p>
+          <a:p>
+            <a:r>
+              <a:t>4번(비밀키) 는 보안팀 대신 전달하는 마음으로.</a:t>
+            </a:r>
+          </a:p>
+        </p:txBody>
+      </p:sp>
+      <p:sp>
+        <p:nvSpPr>
+          <p:cNvPr id="4" name="Slide Number Placeholder 3"/>
+          <p:cNvSpPr>
+            <a:spLocks noGrp="1"/>
+          </p:cNvSpPr>
+          <p:nvPr>
+            <p:ph type="sldNum" idx="5" sz="quarter"/>
+          </p:nvPr>
+        </p:nvSpPr>
+        <p:spPr/>
+      </p:sp>
+    </p:spTree>
+  </p:cSld>
+  <p:clrMapOvr>
+    <a:masterClrMapping/>
+  </p:clrMapOvr>
+</p:notes>
+</file>
+
+<file path=ppt/notesSlides/notesSlide35.xml><?xml version="1.0" encoding="utf-8"?>
+<p:notes xmlns:a="http://schemas.openxmlformats.org/drawingml/2006/main" xmlns:p="http://schemas.openxmlformats.org/presentationml/2006/main" xmlns:r="http://schemas.openxmlformats.org/officeDocument/2006/relationships">
+  <p:cSld>
+    <p:spTree>
+      <p:nvGrpSpPr>
+        <p:cNvPr id="1" name=""/>
+        <p:cNvGrpSpPr/>
+        <p:nvPr/>
+      </p:nvGrpSpPr>
+      <p:grpSpPr>
+        <a:xfrm>
+          <a:off x="0" y="0"/>
+          <a:ext cx="0" cy="0"/>
+          <a:chOff x="0" y="0"/>
+          <a:chExt cx="0" cy="0"/>
+        </a:xfrm>
+      </p:grpSpPr>
+      <p:sp>
+        <p:nvSpPr>
+          <p:cNvPr id="2" name="Slide Image Placeholder 1"/>
+          <p:cNvSpPr>
+            <a:spLocks noGrp="1"/>
+          </p:cNvSpPr>
+          <p:nvPr>
+            <p:ph type="sldImg" idx="2"/>
+          </p:nvPr>
+        </p:nvSpPr>
+        <p:spPr/>
+      </p:sp>
+      <p:sp>
+        <p:nvSpPr>
+          <p:cNvPr id="3" name="Notes Placeholder 2"/>
+          <p:cNvSpPr>
+            <a:spLocks noGrp="1"/>
+          </p:cNvSpPr>
+          <p:nvPr>
+            <p:ph type="body" idx="3" sz="quarter"/>
+          </p:nvPr>
+        </p:nvSpPr>
+        <p:spPr/>
+        <p:txBody>
+          <a:bodyPr/>
+          <a:lstStyle/>
+          <a:p>
+            <a:r>
+              <a:t>(1분) "이 장은 인쇄해서 모니터에 붙이세요." 배포용 파일 위치 안내.</a:t>
+            </a:r>
+          </a:p>
+        </p:txBody>
+      </p:sp>
+      <p:sp>
+        <p:nvSpPr>
+          <p:cNvPr id="4" name="Slide Number Placeholder 3"/>
+          <p:cNvSpPr>
+            <a:spLocks noGrp="1"/>
+          </p:cNvSpPr>
+          <p:nvPr>
+            <p:ph type="sldNum" idx="5" sz="quarter"/>
+          </p:nvPr>
+        </p:nvSpPr>
+        <p:spPr/>
+      </p:sp>
+    </p:spTree>
+  </p:cSld>
+  <p:clrMapOvr>
+    <a:masterClrMapping/>
+  </p:clrMapOvr>
+</p:notes>
+</file>
+
+<file path=ppt/notesSlides/notesSlide36.xml><?xml version="1.0" encoding="utf-8"?>
+<p:notes xmlns:a="http://schemas.openxmlformats.org/drawingml/2006/main" xmlns:p="http://schemas.openxmlformats.org/presentationml/2006/main" xmlns:r="http://schemas.openxmlformats.org/officeDocument/2006/relationships">
+  <p:cSld>
+    <p:spTree>
+      <p:nvGrpSpPr>
+        <p:cNvPr id="1" name=""/>
+        <p:cNvGrpSpPr/>
+        <p:nvPr/>
+      </p:nvGrpSpPr>
+      <p:grpSpPr>
+        <a:xfrm>
+          <a:off x="0" y="0"/>
+          <a:ext cx="0" cy="0"/>
+          <a:chOff x="0" y="0"/>
+          <a:chExt cx="0" cy="0"/>
+        </a:xfrm>
+      </p:grpSpPr>
+      <p:sp>
+        <p:nvSpPr>
+          <p:cNvPr id="2" name="Slide Image Placeholder 1"/>
+          <p:cNvSpPr>
+            <a:spLocks noGrp="1"/>
+          </p:cNvSpPr>
+          <p:nvPr>
+            <p:ph type="sldImg" idx="2"/>
+          </p:nvPr>
+        </p:nvSpPr>
+        <p:spPr/>
+      </p:sp>
+      <p:sp>
+        <p:nvSpPr>
+          <p:cNvPr id="3" name="Notes Placeholder 2"/>
+          <p:cNvSpPr>
+            <a:spLocks noGrp="1"/>
+          </p:cNvSpPr>
+          <p:nvPr>
+            <p:ph type="body" idx="3" sz="quarter"/>
+          </p:nvPr>
+        </p:nvSpPr>
+        <p:spPr/>
+        <p:txBody>
+          <a:bodyPr/>
+          <a:lstStyle/>
+          <a:p>
+            <a:r>
+              <a:t>(1분) 오늘/이번 주/이번 달 3단계 행동 계획 읽기.</a:t>
+            </a:r>
+          </a:p>
+          <a:p>
+            <a:r>
+              <a:t>튜토리얼 영상 시리즈(EP1~8) 링크 공유 예고.</a:t>
+            </a:r>
+          </a:p>
+        </p:txBody>
+      </p:sp>
+      <p:sp>
+        <p:nvSpPr>
+          <p:cNvPr id="4" name="Slide Number Placeholder 3"/>
+          <p:cNvSpPr>
+            <a:spLocks noGrp="1"/>
+          </p:cNvSpPr>
+          <p:nvPr>
+            <p:ph type="sldNum" idx="5" sz="quarter"/>
+          </p:nvPr>
+        </p:nvSpPr>
+        <p:spPr/>
+      </p:sp>
+    </p:spTree>
+  </p:cSld>
+  <p:clrMapOvr>
+    <a:masterClrMapping/>
+  </p:clrMapOvr>
+</p:notes>
+</file>
+
+<file path=ppt/notesSlides/notesSlide37.xml><?xml version="1.0" encoding="utf-8"?>
+<p:notes xmlns:a="http://schemas.openxmlformats.org/drawingml/2006/main" xmlns:p="http://schemas.openxmlformats.org/presentationml/2006/main" xmlns:r="http://schemas.openxmlformats.org/officeDocument/2006/relationships">
+  <p:cSld>
+    <p:spTree>
+      <p:nvGrpSpPr>
+        <p:cNvPr id="1" name=""/>
+        <p:cNvGrpSpPr/>
+        <p:nvPr/>
+      </p:nvGrpSpPr>
+      <p:grpSpPr>
+        <a:xfrm>
+          <a:off x="0" y="0"/>
+          <a:ext cx="0" cy="0"/>
+          <a:chOff x="0" y="0"/>
+          <a:chExt cx="0" cy="0"/>
+        </a:xfrm>
+      </p:grpSpPr>
+      <p:sp>
+        <p:nvSpPr>
+          <p:cNvPr id="2" name="Slide Image Placeholder 1"/>
+          <p:cNvSpPr>
+            <a:spLocks noGrp="1"/>
+          </p:cNvSpPr>
+          <p:nvPr>
+            <p:ph type="sldImg" idx="2"/>
+          </p:nvPr>
+        </p:nvSpPr>
+        <p:spPr/>
+      </p:sp>
+      <p:sp>
+        <p:nvSpPr>
+          <p:cNvPr id="3" name="Notes Placeholder 2"/>
+          <p:cNvSpPr>
+            <a:spLocks noGrp="1"/>
+          </p:cNvSpPr>
+          <p:nvPr>
+            <p:ph type="body" idx="3" sz="quarter"/>
+          </p:nvPr>
+        </p:nvSpPr>
+        <p:spPr/>
+        <p:txBody>
+          <a:bodyPr/>
+          <a:lstStyle/>
+          <a:p>
+            <a:r>
+              <a:t>마무리 멘트: "가장 좋은 시작은 지금 터미널을 열고 claude 라고 치는 것."</a:t>
+            </a:r>
+          </a:p>
+          <a:p>
+            <a:r>
+              <a:t>Q&amp;A 후 실습 세션이 있다면 안내.</a:t>
+            </a:r>
+          </a:p>
+        </p:txBody>
+      </p:sp>
+      <p:sp>
+        <p:nvSpPr>
+          <p:cNvPr id="4" name="Slide Number Placeholder 3"/>
+          <p:cNvSpPr>
+            <a:spLocks noGrp="1"/>
+          </p:cNvSpPr>
+          <p:nvPr>
+            <p:ph type="sldNum" idx="5" sz="quarter"/>
+          </p:nvPr>
+        </p:nvSpPr>
+        <p:spPr/>
+      </p:sp>
+    </p:spTree>
+  </p:cSld>
+  <p:clrMapOvr>
+    <a:masterClrMapping/>
+  </p:clrMapOvr>
+</p:notes>
+</file>
+
+<file path=ppt/notesSlides/notesSlide4.xml><?xml version="1.0" encoding="utf-8"?>
+<p:notes xmlns:a="http://schemas.openxmlformats.org/drawingml/2006/main" xmlns:p="http://schemas.openxmlformats.org/presentationml/2006/main" xmlns:r="http://schemas.openxmlformats.org/officeDocument/2006/relationships">
+  <p:cSld>
+    <p:spTree>
+      <p:nvGrpSpPr>
+        <p:cNvPr id="1" name=""/>
+        <p:cNvGrpSpPr/>
+        <p:nvPr/>
+      </p:nvGrpSpPr>
+      <p:grpSpPr>
+        <a:xfrm>
+          <a:off x="0" y="0"/>
+          <a:ext cx="0" cy="0"/>
+          <a:chOff x="0" y="0"/>
+          <a:chExt cx="0" cy="0"/>
+        </a:xfrm>
+      </p:grpSpPr>
+      <p:sp>
+        <p:nvSpPr>
+          <p:cNvPr id="2" name="Slide Image Placeholder 1"/>
+          <p:cNvSpPr>
+            <a:spLocks noGrp="1"/>
+          </p:cNvSpPr>
+          <p:nvPr>
+            <p:ph type="sldImg" idx="2"/>
+          </p:nvPr>
+        </p:nvSpPr>
+        <p:spPr/>
+      </p:sp>
+      <p:sp>
+        <p:nvSpPr>
+          <p:cNvPr id="3" name="Notes Placeholder 2"/>
+          <p:cNvSpPr>
+            <a:spLocks noGrp="1"/>
+          </p:cNvSpPr>
+          <p:nvPr>
+            <p:ph type="body" idx="3" sz="quarter"/>
+          </p:nvPr>
+        </p:nvSpPr>
+        <p:spPr/>
+        <p:txBody>
+          <a:bodyPr/>
+          <a:lstStyle/>
+          <a:p>
+            <a:r>
+              <a:t>(2분) 왼쪽(자동완성)은 '타자 도우미', 오른쪽(에이전트)은 '주니어 동료'에 비유.</a:t>
+            </a:r>
+          </a:p>
+          <a:p>
+            <a:r>
+              <a:t>하단 플로우(계획→탐색→수정→검증→커밋)를 손으로 짚으며 "이 전체 루프를 돈다"고 설명.</a:t>
+            </a:r>
+          </a:p>
+        </p:txBody>
+      </p:sp>
+      <p:sp>
+        <p:nvSpPr>
+          <p:cNvPr id="4" name="Slide Number Placeholder 3"/>
+          <p:cNvSpPr>
+            <a:spLocks noGrp="1"/>
+          </p:cNvSpPr>
+          <p:nvPr>
+            <p:ph type="sldNum" idx="5" sz="quarter"/>
+          </p:nvPr>
+        </p:nvSpPr>
+        <p:spPr/>
+      </p:sp>
+    </p:spTree>
+  </p:cSld>
+  <p:clrMapOvr>
+    <a:masterClrMapping/>
+  </p:clrMapOvr>
+</p:notes>
+</file>
+
+<file path=ppt/notesSlides/notesSlide5.xml><?xml version="1.0" encoding="utf-8"?>
+<p:notes xmlns:a="http://schemas.openxmlformats.org/drawingml/2006/main" xmlns:p="http://schemas.openxmlformats.org/presentationml/2006/main" xmlns:r="http://schemas.openxmlformats.org/officeDocument/2006/relationships">
+  <p:cSld>
+    <p:spTree>
+      <p:nvGrpSpPr>
+        <p:cNvPr id="1" name=""/>
+        <p:cNvGrpSpPr/>
+        <p:nvPr/>
+      </p:nvGrpSpPr>
+      <p:grpSpPr>
+        <a:xfrm>
+          <a:off x="0" y="0"/>
+          <a:ext cx="0" cy="0"/>
+          <a:chOff x="0" y="0"/>
+          <a:chExt cx="0" cy="0"/>
+        </a:xfrm>
+      </p:grpSpPr>
+      <p:sp>
+        <p:nvSpPr>
+          <p:cNvPr id="2" name="Slide Image Placeholder 1"/>
+          <p:cNvSpPr>
+            <a:spLocks noGrp="1"/>
+          </p:cNvSpPr>
+          <p:nvPr>
+            <p:ph type="sldImg" idx="2"/>
+          </p:nvPr>
+        </p:nvSpPr>
+        <p:spPr/>
+      </p:sp>
+      <p:sp>
+        <p:nvSpPr>
+          <p:cNvPr id="3" name="Notes Placeholder 2"/>
+          <p:cNvSpPr>
+            <a:spLocks noGrp="1"/>
+          </p:cNvSpPr>
+          <p:nvPr>
+            <p:ph type="body" idx="3" sz="quarter"/>
+          </p:nvPr>
+        </p:nvSpPr>
+        <p:spPr/>
+        <p:txBody>
+          <a:bodyPr/>
+          <a:lstStyle/>
+          <a:p>
+            <a:r>
+              <a:t>(30초) 전환 멘트: "백문이 불여일견. 5분 안에 세팅 끝내겠습니다."</a:t>
+            </a:r>
+          </a:p>
+        </p:txBody>
+      </p:sp>
+      <p:sp>
+        <p:nvSpPr>
+          <p:cNvPr id="4" name="Slide Number Placeholder 3"/>
+          <p:cNvSpPr>
+            <a:spLocks noGrp="1"/>
+          </p:cNvSpPr>
+          <p:nvPr>
+            <p:ph type="sldNum" idx="5" sz="quarter"/>
+          </p:nvPr>
+        </p:nvSpPr>
+        <p:spPr/>
+      </p:sp>
+    </p:spTree>
+  </p:cSld>
+  <p:clrMapOvr>
+    <a:masterClrMapping/>
+  </p:clrMapOvr>
+</p:notes>
+</file>
+
+<file path=ppt/notesSlides/notesSlide6.xml><?xml version="1.0" encoding="utf-8"?>
+<p:notes xmlns:a="http://schemas.openxmlformats.org/drawingml/2006/main" xmlns:p="http://schemas.openxmlformats.org/presentationml/2006/main" xmlns:r="http://schemas.openxmlformats.org/officeDocument/2006/relationships">
+  <p:cSld>
+    <p:spTree>
+      <p:nvGrpSpPr>
+        <p:cNvPr id="1" name=""/>
+        <p:cNvGrpSpPr/>
+        <p:nvPr/>
+      </p:nvGrpSpPr>
+      <p:grpSpPr>
+        <a:xfrm>
+          <a:off x="0" y="0"/>
+          <a:ext cx="0" cy="0"/>
+          <a:chOff x="0" y="0"/>
+          <a:chExt cx="0" cy="0"/>
+        </a:xfrm>
+      </p:grpSpPr>
+      <p:sp>
+        <p:nvSpPr>
+          <p:cNvPr id="2" name="Slide Image Placeholder 1"/>
+          <p:cNvSpPr>
+            <a:spLocks noGrp="1"/>
+          </p:cNvSpPr>
+          <p:nvPr>
+            <p:ph type="sldImg" idx="2"/>
+          </p:nvPr>
+        </p:nvSpPr>
+        <p:spPr/>
+      </p:sp>
+      <p:sp>
+        <p:nvSpPr>
+          <p:cNvPr id="3" name="Notes Placeholder 2"/>
+          <p:cNvSpPr>
+            <a:spLocks noGrp="1"/>
+          </p:cNvSpPr>
+          <p:nvPr>
+            <p:ph type="body" idx="3" sz="quarter"/>
+          </p:nvPr>
+        </p:nvSpPr>
+        <p:spPr/>
+        <p:txBody>
+          <a:bodyPr/>
+          <a:lstStyle/>
+          <a:p>
+            <a:r>
+              <a:t>(2분) npm 한 줄 강조. Node가 없는 청중이 있으면 nodejs.org에서 LTS 설치 안내.</a:t>
+            </a:r>
+          </a:p>
+          <a:p>
+            <a:r>
+              <a:t>"프로젝트 폴더에서 실행"이 포인트 — 그 폴더가 Claude의 작업 범위가 된다고 설명.</a:t>
+            </a:r>
+          </a:p>
+        </p:txBody>
+      </p:sp>
+      <p:sp>
+        <p:nvSpPr>
+          <p:cNvPr id="4" name="Slide Number Placeholder 3"/>
+          <p:cNvSpPr>
+            <a:spLocks noGrp="1"/>
+          </p:cNvSpPr>
+          <p:nvPr>
+            <p:ph type="sldNum" idx="5" sz="quarter"/>
+          </p:nvPr>
+        </p:nvSpPr>
+        <p:spPr/>
+      </p:sp>
+    </p:spTree>
+  </p:cSld>
+  <p:clrMapOvr>
+    <a:masterClrMapping/>
+  </p:clrMapOvr>
+</p:notes>
+</file>
+
+<file path=ppt/notesSlides/notesSlide7.xml><?xml version="1.0" encoding="utf-8"?>
+<p:notes xmlns:a="http://schemas.openxmlformats.org/drawingml/2006/main" xmlns:p="http://schemas.openxmlformats.org/presentationml/2006/main" xmlns:r="http://schemas.openxmlformats.org/officeDocument/2006/relationships">
+  <p:cSld>
+    <p:spTree>
+      <p:nvGrpSpPr>
+        <p:cNvPr id="1" name=""/>
+        <p:cNvGrpSpPr/>
+        <p:nvPr/>
+      </p:nvGrpSpPr>
+      <p:grpSpPr>
+        <a:xfrm>
+          <a:off x="0" y="0"/>
+          <a:ext cx="0" cy="0"/>
+          <a:chOff x="0" y="0"/>
+          <a:chExt cx="0" cy="0"/>
+        </a:xfrm>
+      </p:grpSpPr>
+      <p:sp>
+        <p:nvSpPr>
+          <p:cNvPr id="2" name="Slide Image Placeholder 1"/>
+          <p:cNvSpPr>
+            <a:spLocks noGrp="1"/>
+          </p:cNvSpPr>
+          <p:nvPr>
+            <p:ph type="sldImg" idx="2"/>
+          </p:nvPr>
+        </p:nvSpPr>
+        <p:spPr/>
+      </p:sp>
+      <p:sp>
+        <p:nvSpPr>
+          <p:cNvPr id="3" name="Notes Placeholder 2"/>
+          <p:cNvSpPr>
+            <a:spLocks noGrp="1"/>
+          </p:cNvSpPr>
+          <p:nvPr>
+            <p:ph type="body" idx="3" sz="quarter"/>
+          </p:nvPr>
+        </p:nvSpPr>
+        <p:spPr/>
+        <p:txBody>
+          <a:bodyPr/>
+          <a:lstStyle/>
+          <a:p>
+            <a:r>
+              <a:t>(2분) 요금 질문은 반드시 나옴 — 선제 대응: Pro/Max 구독자는 추가 결제 없음, API는 종량제.</a:t>
+            </a:r>
+          </a:p>
+          <a:p>
+            <a:r>
+              <a:t>사내 규정이 있다면 여기서 언급 (회사 계정 / 개인 계정 정책).</a:t>
+            </a:r>
+          </a:p>
+        </p:txBody>
+      </p:sp>
+      <p:sp>
+        <p:nvSpPr>
+          <p:cNvPr id="4" name="Slide Number Placeholder 3"/>
+          <p:cNvSpPr>
+            <a:spLocks noGrp="1"/>
+          </p:cNvSpPr>
+          <p:nvPr>
+            <p:ph type="sldNum" idx="5" sz="quarter"/>
+          </p:nvPr>
+        </p:nvSpPr>
+        <p:spPr/>
+      </p:sp>
+    </p:spTree>
+  </p:cSld>
+  <p:clrMapOvr>
+    <a:masterClrMapping/>
+  </p:clrMapOvr>
+</p:notes>
+</file>
+
+<file path=ppt/notesSlides/notesSlide8.xml><?xml version="1.0" encoding="utf-8"?>
+<p:notes xmlns:a="http://schemas.openxmlformats.org/drawingml/2006/main" xmlns:p="http://schemas.openxmlformats.org/presentationml/2006/main" xmlns:r="http://schemas.openxmlformats.org/officeDocument/2006/relationships">
+  <p:cSld>
+    <p:spTree>
+      <p:nvGrpSpPr>
+        <p:cNvPr id="1" name=""/>
+        <p:cNvGrpSpPr/>
+        <p:nvPr/>
+      </p:nvGrpSpPr>
+      <p:grpSpPr>
+        <a:xfrm>
+          <a:off x="0" y="0"/>
+          <a:ext cx="0" cy="0"/>
+          <a:chOff x="0" y="0"/>
+          <a:chExt cx="0" cy="0"/>
+        </a:xfrm>
+      </p:grpSpPr>
+      <p:sp>
+        <p:nvSpPr>
+          <p:cNvPr id="2" name="Slide Image Placeholder 1"/>
+          <p:cNvSpPr>
+            <a:spLocks noGrp="1"/>
+          </p:cNvSpPr>
+          <p:nvPr>
+            <p:ph type="sldImg" idx="2"/>
+          </p:nvPr>
+        </p:nvSpPr>
+        <p:spPr/>
+      </p:sp>
+      <p:sp>
+        <p:nvSpPr>
+          <p:cNvPr id="3" name="Notes Placeholder 2"/>
+          <p:cNvSpPr>
+            <a:spLocks noGrp="1"/>
+          </p:cNvSpPr>
+          <p:nvPr>
+            <p:ph type="body" idx="3" sz="quarter"/>
+          </p:nvPr>
+        </p:nvSpPr>
+        <p:spPr/>
+        <p:txBody>
+          <a:bodyPr/>
+          <a:lstStyle/>
+          <a:p>
+            <a:r>
+              <a:t>(2분) "읽기 질문은 코드를 안 바꾼다"를 반복 강조 — 심리적 진입장벽 제거.</a:t>
+            </a:r>
+          </a:p>
+          <a:p>
+            <a:r>
+              <a:t>청중에게 자기 프로젝트에 던질 질문 하나씩 생각해 보게 하기.</a:t>
+            </a:r>
+          </a:p>
+        </p:txBody>
+      </p:sp>
+      <p:sp>
+        <p:nvSpPr>
+          <p:cNvPr id="4" name="Slide Number Placeholder 3"/>
+          <p:cNvSpPr>
+            <a:spLocks noGrp="1"/>
+          </p:cNvSpPr>
+          <p:nvPr>
+            <p:ph type="sldNum" idx="5" sz="quarter"/>
+          </p:nvPr>
+        </p:nvSpPr>
+        <p:spPr/>
+      </p:sp>
+    </p:spTree>
+  </p:cSld>
+  <p:clrMapOvr>
+    <a:masterClrMapping/>
+  </p:clrMapOvr>
+</p:notes>
+</file>
+
+<file path=ppt/notesSlides/notesSlide9.xml><?xml version="1.0" encoding="utf-8"?>
+<p:notes xmlns:a="http://schemas.openxmlformats.org/drawingml/2006/main" xmlns:p="http://schemas.openxmlformats.org/presentationml/2006/main" xmlns:r="http://schemas.openxmlformats.org/officeDocument/2006/relationships">
+  <p:cSld>
+    <p:spTree>
+      <p:nvGrpSpPr>
+        <p:cNvPr id="1" name=""/>
+        <p:cNvGrpSpPr/>
+        <p:nvPr/>
+      </p:nvGrpSpPr>
+      <p:grpSpPr>
+        <a:xfrm>
+          <a:off x="0" y="0"/>
+          <a:ext cx="0" cy="0"/>
+          <a:chOff x="0" y="0"/>
+          <a:chExt cx="0" cy="0"/>
+        </a:xfrm>
+      </p:grpSpPr>
+      <p:sp>
+        <p:nvSpPr>
+          <p:cNvPr id="2" name="Slide Image Placeholder 1"/>
+          <p:cNvSpPr>
+            <a:spLocks noGrp="1"/>
+          </p:cNvSpPr>
+          <p:nvPr>
+            <p:ph type="sldImg" idx="2"/>
+          </p:nvPr>
+        </p:nvSpPr>
+        <p:spPr/>
+      </p:sp>
+      <p:sp>
+        <p:nvSpPr>
+          <p:cNvPr id="3" name="Notes Placeholder 2"/>
+          <p:cNvSpPr>
+            <a:spLocks noGrp="1"/>
+          </p:cNvSpPr>
+          <p:nvPr>
+            <p:ph type="body" idx="3" sz="quarter"/>
+          </p:nvPr>
+        </p:nvSpPr>
+        <p:spPr/>
+        <p:txBody>
+          <a:bodyPr/>
+          <a:lstStyle/>
+          <a:p>
+            <a:r>
+              <a:t>(2분) 스크린샷의 3가지 선택지를 하나씩 읽기.</a:t>
+            </a:r>
+          </a:p>
+          <a:p>
+            <a:r>
+              <a:t>"diff를 읽는 습관이 실력입니다" — 이해 못 한 코드를 쌓지 말라는 메시지. Esc Esc는 뒤에서 다시 다룸.</a:t>
+            </a:r>
+          </a:p>
+        </p:txBody>
+      </p:sp>
+      <p:sp>
+        <p:nvSpPr>
+          <p:cNvPr id="4" name="Slide Number Placeholder 3"/>
+          <p:cNvSpPr>
+            <a:spLocks noGrp="1"/>
+          </p:cNvSpPr>
+          <p:nvPr>
+            <p:ph type="sldNum" idx="5" sz="quarter"/>
+          </p:nvPr>
+        </p:nvSpPr>
+        <p:spPr/>
+      </p:sp>
+    </p:spTree>
+  </p:cSld>
+  <p:clrMapOvr>
+    <a:masterClrMapping/>
+  </p:clrMapOvr>
+</p:notes>
 </file>
 
 <file path=ppt/slideLayouts/slideLayout1.xml><?xml version="1.0" encoding="utf-8"?>
@@ -19652,4 +22737,324 @@
   </a:objectDefaults>
   <a:extraClrSchemeLst/>
 </a:theme>
+</file>
+
+<file path=ppt/theme/theme2.xml><?xml version="1.0" encoding="utf-8"?>
+<a:theme xmlns:a="http://schemas.openxmlformats.org/drawingml/2006/main" name="Office Theme">
+  <a:themeElements>
+    <a:clrScheme name="Office">
+      <a:dk1>
+        <a:sysClr val="windowText" lastClr="000000"/>
+      </a:dk1>
+      <a:lt1>
+        <a:sysClr val="window" lastClr="FFFFFF"/>
+      </a:lt1>
+      <a:dk2>
+        <a:srgbClr val="1F497D"/>
+      </a:dk2>
+      <a:lt2>
+        <a:srgbClr val="EEECE1"/>
+      </a:lt2>
+      <a:accent1>
+        <a:srgbClr val="4F81BD"/>
+      </a:accent1>
+      <a:accent2>
+        <a:srgbClr val="C0504D"/>
+      </a:accent2>
+      <a:accent3>
+        <a:srgbClr val="9BBB59"/>
+      </a:accent3>
+      <a:accent4>
+        <a:srgbClr val="8064A2"/>
+      </a:accent4>
+      <a:accent5>
+        <a:srgbClr val="4BACC6"/>
+      </a:accent5>
+      <a:accent6>
+        <a:srgbClr val="F79646"/>
+      </a:accent6>
+      <a:hlink>
+        <a:srgbClr val="0000FF"/>
+      </a:hlink>
+      <a:folHlink>
+        <a:srgbClr val="800080"/>
+      </a:folHlink>
+    </a:clrScheme>
+    <a:fontScheme name="Office">
+      <a:majorFont>
+        <a:latin typeface="Calibri"/>
+        <a:ea typeface=""/>
+        <a:cs typeface=""/>
+        <a:font script="Jpan" typeface="ＭＳ Ｐゴシック"/>
+        <a:font script="Hang" typeface="맑은 고딕"/>
+        <a:font script="Hans" typeface="宋体"/>
+        <a:font script="Hant" typeface="新細明體"/>
+        <a:font script="Arab" typeface="Times New Roman"/>
+        <a:font script="Hebr" typeface="Times New Roman"/>
+        <a:font script="Thai" typeface="Angsana New"/>
+        <a:font script="Ethi" typeface="Nyala"/>
+        <a:font script="Beng" typeface="Vrinda"/>
+        <a:font script="Gujr" typeface="Shruti"/>
+        <a:font script="Khmr" typeface="MoolBoran"/>
+        <a:font script="Knda" typeface="Tunga"/>
+        <a:font script="Guru" typeface="Raavi"/>
+        <a:font script="Cans" typeface="Euphemia"/>
+        <a:font script="Cher" typeface="Plantagenet Cherokee"/>
+        <a:font script="Yiii" typeface="Microsoft Yi Baiti"/>
+        <a:font script="Tibt" typeface="Microsoft Himalaya"/>
+        <a:font script="Thaa" typeface="MV Boli"/>
+        <a:font script="Deva" typeface="Mangal"/>
+        <a:font script="Telu" typeface="Gautami"/>
+        <a:font script="Taml" typeface="Latha"/>
+        <a:font script="Syrc" typeface="Estrangelo Edessa"/>
+        <a:font script="Orya" typeface="Kalinga"/>
+        <a:font script="Mlym" typeface="Kartika"/>
+        <a:font script="Laoo" typeface="DokChampa"/>
+        <a:font script="Sinh" typeface="Iskoola Pota"/>
+        <a:font script="Mong" typeface="Mongolian Baiti"/>
+        <a:font script="Viet" typeface="Times New Roman"/>
+        <a:font script="Uigh" typeface="Microsoft Uighur"/>
+        <a:font script="Geor" typeface="Sylfaen"/>
+      </a:majorFont>
+      <a:minorFont>
+        <a:latin typeface="Calibri"/>
+        <a:ea typeface=""/>
+        <a:cs typeface=""/>
+        <a:font script="Jpan" typeface="ＭＳ Ｐゴシック"/>
+        <a:font script="Hang" typeface="맑은 고딕"/>
+        <a:font script="Hans" typeface="宋体"/>
+        <a:font script="Hant" typeface="新細明體"/>
+        <a:font script="Arab" typeface="Arial"/>
+        <a:font script="Hebr" typeface="Arial"/>
+        <a:font script="Thai" typeface="Cordia New"/>
+        <a:font script="Ethi" typeface="Nyala"/>
+        <a:font script="Beng" typeface="Vrinda"/>
+        <a:font script="Gujr" typeface="Shruti"/>
+        <a:font script="Khmr" typeface="DaunPenh"/>
+        <a:font script="Knda" typeface="Tunga"/>
+        <a:font script="Guru" typeface="Raavi"/>
+        <a:font script="Cans" typeface="Euphemia"/>
+        <a:font script="Cher" typeface="Plantagenet Cherokee"/>
+        <a:font script="Yiii" typeface="Microsoft Yi Baiti"/>
+        <a:font script="Tibt" typeface="Microsoft Himalaya"/>
+        <a:font script="Thaa" typeface="MV Boli"/>
+        <a:font script="Deva" typeface="Mangal"/>
+        <a:font script="Telu" typeface="Gautami"/>
+        <a:font script="Taml" typeface="Latha"/>
+        <a:font script="Syrc" typeface="Estrangelo Edessa"/>
+        <a:font script="Orya" typeface="Kalinga"/>
+        <a:font script="Mlym" typeface="Kartika"/>
+        <a:font script="Laoo" typeface="DokChampa"/>
+        <a:font script="Sinh" typeface="Iskoola Pota"/>
+        <a:font script="Mong" typeface="Mongolian Baiti"/>
+        <a:font script="Viet" typeface="Arial"/>
+        <a:font script="Uigh" typeface="Microsoft Uighur"/>
+        <a:font script="Geor" typeface="Sylfaen"/>
+      </a:minorFont>
+    </a:fontScheme>
+    <a:fmtScheme name="Office">
+      <a:fillStyleLst>
+        <a:solidFill>
+          <a:schemeClr val="phClr"/>
+        </a:solidFill>
+        <a:gradFill rotWithShape="1">
+          <a:gsLst>
+            <a:gs pos="0">
+              <a:schemeClr val="phClr">
+                <a:tint val="50000"/>
+                <a:satMod val="300000"/>
+              </a:schemeClr>
+            </a:gs>
+            <a:gs pos="35000">
+              <a:schemeClr val="phClr">
+                <a:tint val="37000"/>
+                <a:satMod val="300000"/>
+              </a:schemeClr>
+            </a:gs>
+            <a:gs pos="100000">
+              <a:schemeClr val="phClr">
+                <a:tint val="15000"/>
+                <a:satMod val="350000"/>
+              </a:schemeClr>
+            </a:gs>
+          </a:gsLst>
+          <a:lin ang="16200000" scaled="1"/>
+        </a:gradFill>
+        <a:gradFill rotWithShape="1">
+          <a:gsLst>
+            <a:gs pos="0">
+              <a:schemeClr val="phClr">
+                <a:tint val="100000"/>
+                <a:shade val="100000"/>
+                <a:satMod val="130000"/>
+              </a:schemeClr>
+            </a:gs>
+            <a:gs pos="100000">
+              <a:schemeClr val="phClr">
+                <a:tint val="50000"/>
+                <a:shade val="100000"/>
+                <a:satMod val="350000"/>
+              </a:schemeClr>
+            </a:gs>
+          </a:gsLst>
+          <a:lin ang="16200000" scaled="0"/>
+        </a:gradFill>
+      </a:fillStyleLst>
+      <a:lnStyleLst>
+        <a:ln w="9525" cap="flat" cmpd="sng" algn="ctr">
+          <a:solidFill>
+            <a:schemeClr val="phClr">
+              <a:shade val="95000"/>
+              <a:satMod val="105000"/>
+            </a:schemeClr>
+          </a:solidFill>
+          <a:prstDash val="solid"/>
+        </a:ln>
+        <a:ln w="25400" cap="flat" cmpd="sng" algn="ctr">
+          <a:solidFill>
+            <a:schemeClr val="phClr"/>
+          </a:solidFill>
+          <a:prstDash val="solid"/>
+        </a:ln>
+        <a:ln w="38100" cap="flat" cmpd="sng" algn="ctr">
+          <a:solidFill>
+            <a:schemeClr val="phClr"/>
+          </a:solidFill>
+          <a:prstDash val="solid"/>
+        </a:ln>
+      </a:lnStyleLst>
+      <a:effectStyleLst>
+        <a:effectStyle>
+          <a:effectLst>
+            <a:outerShdw blurRad="40000" dist="20000" dir="5400000" rotWithShape="0">
+              <a:srgbClr val="000000">
+                <a:alpha val="38000"/>
+              </a:srgbClr>
+            </a:outerShdw>
+          </a:effectLst>
+        </a:effectStyle>
+        <a:effectStyle>
+          <a:effectLst>
+            <a:outerShdw blurRad="40000" dist="23000" dir="5400000" rotWithShape="0">
+              <a:srgbClr val="000000">
+                <a:alpha val="35000"/>
+              </a:srgbClr>
+            </a:outerShdw>
+          </a:effectLst>
+        </a:effectStyle>
+        <a:effectStyle>
+          <a:effectLst>
+            <a:outerShdw blurRad="40000" dist="23000" dir="5400000" rotWithShape="0">
+              <a:srgbClr val="000000">
+                <a:alpha val="35000"/>
+              </a:srgbClr>
+            </a:outerShdw>
+          </a:effectLst>
+          <a:scene3d>
+            <a:camera prst="orthographicFront">
+              <a:rot lat="0" lon="0" rev="0"/>
+            </a:camera>
+            <a:lightRig rig="threePt" dir="t">
+              <a:rot lat="0" lon="0" rev="1200000"/>
+            </a:lightRig>
+          </a:scene3d>
+          <a:sp3d>
+            <a:bevelT w="63500" h="25400"/>
+          </a:sp3d>
+        </a:effectStyle>
+      </a:effectStyleLst>
+      <a:bgFillStyleLst>
+        <a:solidFill>
+          <a:schemeClr val="phClr"/>
+        </a:solidFill>
+        <a:gradFill rotWithShape="1">
+          <a:gsLst>
+            <a:gs pos="0">
+              <a:schemeClr val="phClr">
+                <a:tint val="40000"/>
+                <a:satMod val="350000"/>
+              </a:schemeClr>
+            </a:gs>
+            <a:gs pos="40000">
+              <a:schemeClr val="phClr">
+                <a:tint val="45000"/>
+                <a:shade val="99000"/>
+                <a:satMod val="350000"/>
+              </a:schemeClr>
+            </a:gs>
+            <a:gs pos="100000">
+              <a:schemeClr val="phClr">
+                <a:shade val="20000"/>
+                <a:satMod val="255000"/>
+              </a:schemeClr>
+            </a:gs>
+          </a:gsLst>
+          <a:path path="circle">
+            <a:fillToRect l="50000" t="-80000" r="50000" b="180000"/>
+          </a:path>
+        </a:gradFill>
+        <a:gradFill rotWithShape="1">
+          <a:gsLst>
+            <a:gs pos="0">
+              <a:schemeClr val="phClr">
+                <a:tint val="80000"/>
+                <a:satMod val="300000"/>
+              </a:schemeClr>
+            </a:gs>
+            <a:gs pos="100000">
+              <a:schemeClr val="phClr">
+                <a:shade val="30000"/>
+                <a:satMod val="200000"/>
+              </a:schemeClr>
+            </a:gs>
+          </a:gsLst>
+          <a:path path="circle">
+            <a:fillToRect l="50000" t="50000" r="50000" b="50000"/>
+          </a:path>
+        </a:gradFill>
+      </a:bgFillStyleLst>
+    </a:fmtScheme>
+  </a:themeElements>
+  <a:objectDefaults>
+    <a:spDef>
+      <a:spPr/>
+      <a:bodyPr/>
+      <a:lstStyle/>
+      <a:style>
+        <a:lnRef idx="1">
+          <a:schemeClr val="accent1"/>
+        </a:lnRef>
+        <a:fillRef idx="3">
+          <a:schemeClr val="accent1"/>
+        </a:fillRef>
+        <a:effectRef idx="2">
+          <a:schemeClr val="accent1"/>
+        </a:effectRef>
+        <a:fontRef idx="minor">
+          <a:schemeClr val="lt1"/>
+        </a:fontRef>
+      </a:style>
+    </a:spDef>
+    <a:lnDef>
+      <a:spPr/>
+      <a:bodyPr/>
+      <a:lstStyle/>
+      <a:style>
+        <a:lnRef idx="2">
+          <a:schemeClr val="accent1"/>
+        </a:lnRef>
+        <a:fillRef idx="0">
+          <a:schemeClr val="accent1"/>
+        </a:fillRef>
+        <a:effectRef idx="1">
+          <a:schemeClr val="accent1"/>
+        </a:effectRef>
+        <a:fontRef idx="minor">
+          <a:schemeClr val="tx1"/>
+        </a:fontRef>
+      </a:style>
+    </a:lnDef>
+  </a:objectDefaults>
+  <a:extraClrSchemeLst/>
+</a:theme>
 </file>
--- a/docs/onboarding/claude-code-onboarding.pptx
+++ b/docs/onboarding/claude-code-onboarding.pptx
@@ -42,6 +42,7 @@
     <p:sldId id="290" r:id="rId41"/>
     <p:sldId id="291" r:id="rId42"/>
     <p:sldId id="292" r:id="rId43"/>
+    <p:sldId id="293" r:id="rId44"/>
   </p:sldIdLst>
   <p:sldSz cx="12191695" cy="6858000" type="screen4x3"/>
   <p:notesSz cx="6858000" cy="9144000"/>
@@ -1653,12 +1654,12 @@
           <a:lstStyle/>
           <a:p>
             <a:r>
-              <a:t>(2분) "한 대화 = 한 가지 목표" 공식만 기억시키기.</a:t>
-            </a:r>
-          </a:p>
-          <a:p>
-            <a:r>
-              <a:t>길어지면 /compact, 주제 바뀌면 /clear. think hard는 어려운 버그에서 시도해 보라고.</a:t>
+              <a:t>(2분) 교사·비개발자 청중에게 가장 반응 좋은 슬라이드. "만들었으면 아이들 폰에서 열려야죠."</a:t>
+            </a:r>
+          </a:p>
+          <a:p>
+            <a:r>
+              <a:t>Netlify Drop 드래그 한 번 시연 가치 있음. 개인정보 주의(학생 실명 코드에 넣지 않기)는 꼭 소리 내어 읽기.</a:t>
             </a:r>
           </a:p>
         </p:txBody>
@@ -1728,12 +1729,12 @@
           <a:lstStyle/>
           <a:p>
             <a:r>
-              <a:t>(8분) 두 번째 라이브 데모 — Plan Mode 전환부터 PR 링크 열기까지.</a:t>
-            </a:r>
-          </a:p>
-          <a:p>
-            <a:r>
-              <a:t>계획을 일부러 한 번 수정시키는 장면을 보여주면 Plan Mode의 가치가 확실히 전달됨.</a:t>
+              <a:t>(2분) "한 대화 = 한 가지 목표" 공식만 기억시키기.</a:t>
+            </a:r>
+          </a:p>
+          <a:p>
+            <a:r>
+              <a:t>길어지면 /compact, 주제 바뀌면 /clear. think hard는 어려운 버그에서 시도해 보라고.</a:t>
             </a:r>
           </a:p>
         </p:txBody>
@@ -1803,12 +1804,12 @@
           <a:lstStyle/>
           <a:p>
             <a:r>
-              <a:t>(1분) "/init은 오늘 바로"가 핵심 행동 유도.</a:t>
-            </a:r>
-          </a:p>
-          <a:p>
-            <a:r>
-              <a:t>2차 질문 받기.</a:t>
+              <a:t>(8분) 두 번째 라이브 데모 — Plan Mode 전환부터 PR 링크 열기까지.</a:t>
+            </a:r>
+          </a:p>
+          <a:p>
+            <a:r>
+              <a:t>계획을 일부러 한 번 수정시키는 장면을 보여주면 Plan Mode의 가치가 확실히 전달됨.</a:t>
             </a:r>
           </a:p>
         </p:txBody>
@@ -1878,7 +1879,12 @@
           <a:lstStyle/>
           <a:p>
             <a:r>
-              <a:t>(30초) "지금부터는 카탈로그입니다 — 뭐가 있는지만 알아 두세요." 속도 올리기.</a:t>
+              <a:t>(1분) "/init은 오늘 바로"가 핵심 행동 유도.</a:t>
+            </a:r>
+          </a:p>
+          <a:p>
+            <a:r>
+              <a:t>2차 질문 받기.</a:t>
             </a:r>
           </a:p>
         </p:txBody>
@@ -1948,7 +1954,7 @@
           <a:lstStyle/>
           <a:p>
             <a:r>
-              <a:t>(2분) "같은 요청을 3번 타이핑했다면 커맨드로 만들 때" — 파일 하나면 끝이라는 가벼움 강조.</a:t>
+              <a:t>(30초) "지금부터는 카탈로그입니다 — 뭐가 있는지만 알아 두세요." 속도 올리기.</a:t>
             </a:r>
           </a:p>
         </p:txBody>
@@ -2018,12 +2024,7 @@
           <a:lstStyle/>
           <a:p>
             <a:r>
-              <a:t>(2분) '보조 Claude'라는 비유 하나로 충분. 깊이 들어가지 말 것.</a:t>
-            </a:r>
-          </a:p>
-          <a:p>
-            <a:r>
-              <a:t>관심 있는 분은 튜토리얼 영상 EP6 참조 안내.</a:t>
+              <a:t>(2분) "같은 요청을 3번 타이핑했다면 커맨드로 만들 때" — 파일 하나면 끝이라는 가벼움 강조.</a:t>
             </a:r>
           </a:p>
         </p:txBody>
@@ -2093,12 +2094,12 @@
           <a:lstStyle/>
           <a:p>
             <a:r>
-              <a:t>(2분) USB 포트 비유. 청중의 실제 도구(Slack? Jira?)를 물어보고 "그거 연결됩니다"로 연결.</a:t>
-            </a:r>
-          </a:p>
-          <a:p>
-            <a:r>
-              <a:t>보안 유의사항 한 줄: 신뢰할 수 있는 서버만.</a:t>
+              <a:t>(2분) '보조 Claude'라는 비유 하나로 충분. 깊이 들어가지 말 것.</a:t>
+            </a:r>
+          </a:p>
+          <a:p>
+            <a:r>
+              <a:t>관심 있는 분은 튜토리얼 영상 EP6 참조 안내.</a:t>
             </a:r>
           </a:p>
         </p:txBody>
@@ -2243,12 +2244,12 @@
           <a:lstStyle/>
           <a:p>
             <a:r>
-              <a:t>(2분) 핵심 문장: "CLAUDE.md는 권고, Hooks는 강제."</a:t>
-            </a:r>
-          </a:p>
-          <a:p>
-            <a:r>
-              <a:t>포매터 자동 실행 예가 가장 직관적.</a:t>
+              <a:t>(2분) USB 포트 비유. 청중의 실제 도구(Slack? Jira?)를 물어보고 "그거 연결됩니다"로 연결.</a:t>
+            </a:r>
+          </a:p>
+          <a:p>
+            <a:r>
+              <a:t>보안 유의사항 한 줄: 신뢰할 수 있는 서버만.</a:t>
             </a:r>
           </a:p>
         </p:txBody>
@@ -2318,12 +2319,12 @@
           <a:lstStyle/>
           <a:p>
             <a:r>
-              <a:t>(2분) 각자 스타일대로: 터미널이 어색하면 IDE 확장부터, 자리를 비울 땐 웹.</a:t>
-            </a:r>
-          </a:p>
-          <a:p>
-            <a:r>
-              <a:t>GitHub Actions @claude 멘션은 팀 도입 시 가장 파급력 큰 기능.</a:t>
+              <a:t>(2분) 핵심 문장: "CLAUDE.md는 권고, Hooks는 강제."</a:t>
+            </a:r>
+          </a:p>
+          <a:p>
+            <a:r>
+              <a:t>포매터 자동 실행 예가 가장 직관적.</a:t>
             </a:r>
           </a:p>
         </p:txBody>
@@ -2393,7 +2394,12 @@
           <a:lstStyle/>
           <a:p>
             <a:r>
-              <a:t>(1분) 표를 위에서 아래로 빠르게 — "상황이 오면 이 표만 다시 보세요."</a:t>
+              <a:t>(2분) 각자 스타일대로: 터미널이 어색하면 IDE 확장부터, 자리를 비울 땐 웹.</a:t>
+            </a:r>
+          </a:p>
+          <a:p>
+            <a:r>
+              <a:t>GitHub Actions @claude 멘션은 팀 도입 시 가장 파급력 큰 기능.</a:t>
             </a:r>
           </a:p>
         </p:txBody>
@@ -2463,7 +2469,7 @@
           <a:lstStyle/>
           <a:p>
             <a:r>
-              <a:t>(2분) ①(작게 시작)과 ④(커밋 자주)만 힘줘서. 나머지는 배포 자료로 읽게.</a:t>
+              <a:t>(1분) 표를 위에서 아래로 빠르게 — "상황이 오면 이 표만 다시 보세요."</a:t>
             </a:r>
           </a:p>
         </p:txBody>
@@ -2533,12 +2539,7 @@
           <a:lstStyle/>
           <a:p>
             <a:r>
-              <a:t>(2분) 1번(diff 안 읽고 승인)이 가장 중요 — "AI 시대의 기술 부채는 이해 못 한 채 머지한 코드."</a:t>
-            </a:r>
-          </a:p>
-          <a:p>
-            <a:r>
-              <a:t>4번(비밀키) 는 보안팀 대신 전달하는 마음으로.</a:t>
+              <a:t>(2분) ①(작게 시작)과 ④(커밋 자주)만 힘줘서. 나머지는 배포 자료로 읽게.</a:t>
             </a:r>
           </a:p>
         </p:txBody>
@@ -2608,7 +2609,12 @@
           <a:lstStyle/>
           <a:p>
             <a:r>
-              <a:t>(1분) "이 장은 인쇄해서 모니터에 붙이세요." 배포용 파일 위치 안내.</a:t>
+              <a:t>(2분) 1번(diff 안 읽고 승인)이 가장 중요 — "AI 시대의 기술 부채는 이해 못 한 채 머지한 코드."</a:t>
+            </a:r>
+          </a:p>
+          <a:p>
+            <a:r>
+              <a:t>4번(비밀키) 는 보안팀 대신 전달하는 마음으로.</a:t>
             </a:r>
           </a:p>
         </p:txBody>
@@ -2678,12 +2684,7 @@
           <a:lstStyle/>
           <a:p>
             <a:r>
-              <a:t>(1분) 오늘/이번 주/이번 달 3단계 행동 계획 읽기.</a:t>
-            </a:r>
-          </a:p>
-          <a:p>
-            <a:r>
-              <a:t>튜토리얼 영상 시리즈(EP1~8) 링크 공유 예고.</a:t>
+              <a:t>(1분) "이 장은 인쇄해서 모니터에 붙이세요." 배포용 파일 위치 안내.</a:t>
             </a:r>
           </a:p>
         </p:txBody>
@@ -2709,6 +2710,81 @@
 </file>
 
 <file path=ppt/notesSlides/notesSlide37.xml><?xml version="1.0" encoding="utf-8"?>
+<p:notes xmlns:a="http://schemas.openxmlformats.org/drawingml/2006/main" xmlns:p="http://schemas.openxmlformats.org/presentationml/2006/main" xmlns:r="http://schemas.openxmlformats.org/officeDocument/2006/relationships">
+  <p:cSld>
+    <p:spTree>
+      <p:nvGrpSpPr>
+        <p:cNvPr id="1" name=""/>
+        <p:cNvGrpSpPr/>
+        <p:nvPr/>
+      </p:nvGrpSpPr>
+      <p:grpSpPr>
+        <a:xfrm>
+          <a:off x="0" y="0"/>
+          <a:ext cx="0" cy="0"/>
+          <a:chOff x="0" y="0"/>
+          <a:chExt cx="0" cy="0"/>
+        </a:xfrm>
+      </p:grpSpPr>
+      <p:sp>
+        <p:nvSpPr>
+          <p:cNvPr id="2" name="Slide Image Placeholder 1"/>
+          <p:cNvSpPr>
+            <a:spLocks noGrp="1"/>
+          </p:cNvSpPr>
+          <p:nvPr>
+            <p:ph type="sldImg" idx="2"/>
+          </p:nvPr>
+        </p:nvSpPr>
+        <p:spPr/>
+      </p:sp>
+      <p:sp>
+        <p:nvSpPr>
+          <p:cNvPr id="3" name="Notes Placeholder 2"/>
+          <p:cNvSpPr>
+            <a:spLocks noGrp="1"/>
+          </p:cNvSpPr>
+          <p:nvPr>
+            <p:ph type="body" idx="3" sz="quarter"/>
+          </p:nvPr>
+        </p:nvSpPr>
+        <p:spPr/>
+        <p:txBody>
+          <a:bodyPr/>
+          <a:lstStyle/>
+          <a:p>
+            <a:r>
+              <a:t>(1분) 오늘/이번 주/이번 달 3단계 행동 계획 읽기.</a:t>
+            </a:r>
+          </a:p>
+          <a:p>
+            <a:r>
+              <a:t>튜토리얼 영상 시리즈(EP1~8) 링크 공유 예고.</a:t>
+            </a:r>
+          </a:p>
+        </p:txBody>
+      </p:sp>
+      <p:sp>
+        <p:nvSpPr>
+          <p:cNvPr id="4" name="Slide Number Placeholder 3"/>
+          <p:cNvSpPr>
+            <a:spLocks noGrp="1"/>
+          </p:cNvSpPr>
+          <p:nvPr>
+            <p:ph type="sldNum" idx="5" sz="quarter"/>
+          </p:nvPr>
+        </p:nvSpPr>
+        <p:spPr/>
+      </p:sp>
+    </p:spTree>
+  </p:cSld>
+  <p:clrMapOvr>
+    <a:masterClrMapping/>
+  </p:clrMapOvr>
+</p:notes>
+</file>
+
+<file path=ppt/notesSlides/notesSlide38.xml><?xml version="1.0" encoding="utf-8"?>
 <p:notes xmlns:a="http://schemas.openxmlformats.org/drawingml/2006/main" xmlns:p="http://schemas.openxmlformats.org/presentationml/2006/main" xmlns:r="http://schemas.openxmlformats.org/officeDocument/2006/relationships">
   <p:cSld>
     <p:spTree>
@@ -9480,50 +9556,30 @@
           </a:p>
         </p:txBody>
       </p:sp>
-      <p:sp>
-        <p:nvSpPr>
-          <p:cNvPr id="5" name="Rounded Rectangle 4"/>
-          <p:cNvSpPr/>
-          <p:nvPr/>
-        </p:nvSpPr>
-        <p:spPr>
-          <a:xfrm>
-            <a:off x="6492240" y="1828800"/>
-            <a:ext cx="5212080" cy="3931920"/>
-          </a:xfrm>
-          <a:prstGeom prst="roundRect">
-            <a:avLst/>
-          </a:prstGeom>
-          <a:solidFill>
-            <a:srgbClr val="222229"/>
-          </a:solidFill>
-          <a:ln>
-            <a:noFill/>
-          </a:ln>
-          <a:effectLst/>
-        </p:spPr>
-        <p:style>
-          <a:lnRef idx="1">
-            <a:schemeClr val="accent1"/>
-          </a:lnRef>
-          <a:fillRef idx="3">
-            <a:schemeClr val="accent1"/>
-          </a:fillRef>
-          <a:effectRef idx="2">
-            <a:schemeClr val="accent1"/>
-          </a:effectRef>
-          <a:fontRef idx="minor">
-            <a:schemeClr val="lt1"/>
-          </a:fontRef>
-        </p:style>
-        <p:txBody>
-          <a:bodyPr rtlCol="0" anchor="ctr"/>
-          <a:lstStyle/>
-          <a:p>
-            <a:pPr algn="ctr"/>
-          </a:p>
-        </p:txBody>
-      </p:sp>
+      <p:pic>
+        <p:nvPicPr>
+          <p:cNvPr id="5" name="Picture 4" descr="shot-19-170006-app-winner.png"/>
+          <p:cNvPicPr>
+            <a:picLocks noChangeAspect="1"/>
+          </p:cNvPicPr>
+          <p:nvPr/>
+        </p:nvPicPr>
+        <p:blipFill>
+          <a:blip r:embed="rId2"/>
+          <a:stretch>
+            <a:fillRect/>
+          </a:stretch>
+        </p:blipFill>
+        <p:spPr>
+          <a:xfrm>
+            <a:off x="6492240" y="1691640"/>
+            <a:ext cx="5055165" cy="4297680"/>
+          </a:xfrm>
+          <a:prstGeom prst="rect">
+            <a:avLst/>
+          </a:prstGeom>
+        </p:spPr>
+      </p:pic>
       <p:sp>
         <p:nvSpPr>
           <p:cNvPr id="6" name="TextBox 5"/>
@@ -9532,23 +9588,22 @@
         </p:nvSpPr>
         <p:spPr>
           <a:xfrm>
-            <a:off x="6492240" y="3474720"/>
-            <a:ext cx="5212080" cy="731520"/>
-          </a:xfrm>
-          <a:prstGeom prst="rect">
-            <a:avLst/>
-          </a:prstGeom>
-          <a:noFill/>
-        </p:spPr>
-        <p:txBody>
-          <a:bodyPr wrap="square" anchor="ctr">
-            <a:spAutoFit/>
-          </a:bodyPr>
-          <a:lstStyle/>
-          <a:p>
-            <a:pPr algn="ctr"/>
-            <a:r>
-              <a:rPr sz="1400" b="0" i="0">
+            <a:off x="6492240" y="6035040"/>
+            <a:ext cx="5212080" cy="365760"/>
+          </a:xfrm>
+          <a:prstGeom prst="rect">
+            <a:avLst/>
+          </a:prstGeom>
+          <a:noFill/>
+        </p:spPr>
+        <p:txBody>
+          <a:bodyPr wrap="square" anchor="t">
+            <a:spAutoFit/>
+          </a:bodyPr>
+          <a:lstStyle/>
+          <a:p>
+            <a:r>
+              <a:rPr sz="1100" b="0" i="0">
                 <a:solidFill>
                   <a:srgbClr val="9B9B93"/>
                 </a:solidFill>
@@ -9556,8 +9611,7 @@
                 <a:ea typeface="Malgun Gothic"/>
                 <a:cs typeface="Malgun Gothic"/>
               </a:rPr>
-              <a:t>[ 데모 실패 대비 백업 GIF 자리 ]
-assets/demo1-backup.gif</a:t>
+              <a:t>실제 수업에서 만든 결과 화면 (백업 GIF: assets/demo1-backup.gif)</a:t>
             </a:r>
           </a:p>
         </p:txBody>
@@ -12979,7 +13033,7 @@
                 <a:ea typeface="Malgun Gothic"/>
                 <a:cs typeface="Malgun Gothic"/>
               </a:rPr>
-              <a:t>컨텍스트 관리 — 길어진 대화 다루기</a:t>
+              <a:t>만든 것을 세상에 공개하기 — 배포</a:t>
             </a:r>
           </a:p>
         </p:txBody>
@@ -12992,8 +13046,44 @@
         </p:nvSpPr>
         <p:spPr>
           <a:xfrm>
-            <a:off x="640080" y="2011680"/>
-            <a:ext cx="10972800" cy="4572000"/>
+            <a:off x="429768" y="1298448"/>
+            <a:ext cx="11338560" cy="457200"/>
+          </a:xfrm>
+          <a:prstGeom prst="rect">
+            <a:avLst/>
+          </a:prstGeom>
+          <a:noFill/>
+        </p:spPr>
+        <p:txBody>
+          <a:bodyPr wrap="square" anchor="t">
+            <a:spAutoFit/>
+          </a:bodyPr>
+          <a:lstStyle/>
+          <a:p>
+            <a:r>
+              <a:rPr sz="1500" b="0" i="0">
+                <a:solidFill>
+                  <a:srgbClr val="9B9B93"/>
+                </a:solidFill>
+                <a:latin typeface="Malgun Gothic"/>
+                <a:ea typeface="Malgun Gothic"/>
+                <a:cs typeface="Malgun Gothic"/>
+              </a:rPr>
+              <a:t>코드를 몰라도 됩니다. 무료이고, 학생들 폰에서도 열립니다.</a:t>
+            </a:r>
+          </a:p>
+        </p:txBody>
+      </p:sp>
+      <p:sp>
+        <p:nvSpPr>
+          <p:cNvPr id="5" name="TextBox 4"/>
+          <p:cNvSpPr txBox="1"/>
+          <p:nvPr/>
+        </p:nvSpPr>
+        <p:spPr>
+          <a:xfrm>
+            <a:off x="548640" y="1874519"/>
+            <a:ext cx="5943600" cy="4572000"/>
           </a:xfrm>
           <a:prstGeom prst="rect">
             <a:avLst/>
@@ -13008,11 +13098,11 @@
           <a:p>
             <a:pPr>
               <a:spcAft>
-                <a:spcPts val="1500"/>
+                <a:spcPts val="1200"/>
               </a:spcAft>
             </a:pPr>
             <a:r>
-              <a:rPr sz="1700" b="1" i="0">
+              <a:rPr sz="1500" b="1" i="0">
                 <a:solidFill>
                   <a:srgbClr val="D97757"/>
                 </a:solidFill>
@@ -13023,7 +13113,18 @@
               <a:t>•  </a:t>
             </a:r>
             <a:r>
-              <a:rPr sz="1700" b="0" i="0">
+              <a:rPr sz="1500" b="1" i="0">
+                <a:solidFill>
+                  <a:srgbClr val="D97757"/>
+                </a:solidFill>
+                <a:latin typeface="Malgun Gothic"/>
+                <a:ea typeface="Malgun Gothic"/>
+                <a:cs typeface="Malgun Gothic"/>
+              </a:rPr>
+              <a:t>① Netlify Drop</a:t>
+            </a:r>
+            <a:r>
+              <a:rPr sz="1500" b="0" i="0">
                 <a:solidFill>
                   <a:srgbClr val="ECECEA"/>
                 </a:solidFill>
@@ -13031,17 +13132,17 @@
                 <a:ea typeface="Malgun Gothic"/>
                 <a:cs typeface="Malgun Gothic"/>
               </a:rPr>
-              <a:t>대화가 길어지면 응답이 느려지고 초점이 흐려집니다</a:t>
+              <a:t>  app.netlify.com/drop 에 폴더를 드래그 — 몇 초면 주소 완성</a:t>
             </a:r>
           </a:p>
           <a:p>
             <a:pPr>
               <a:spcAft>
-                <a:spcPts val="1500"/>
+                <a:spcPts val="1200"/>
               </a:spcAft>
             </a:pPr>
             <a:r>
-              <a:rPr sz="1700" b="1" i="0">
+              <a:rPr sz="1500" b="1" i="0">
                 <a:solidFill>
                   <a:srgbClr val="D97757"/>
                 </a:solidFill>
@@ -13052,7 +13153,7 @@
               <a:t>•  </a:t>
             </a:r>
             <a:r>
-              <a:rPr sz="1700" b="1" i="0">
+              <a:rPr sz="1500" b="1" i="0">
                 <a:solidFill>
                   <a:srgbClr val="D97757"/>
                 </a:solidFill>
@@ -13060,10 +13161,10 @@
                 <a:ea typeface="Malgun Gothic"/>
                 <a:cs typeface="Malgun Gothic"/>
               </a:rPr>
-              <a:t>/clear</a:t>
-            </a:r>
-            <a:r>
-              <a:rPr sz="1700" b="0" i="0">
+              <a:t>② GitHub Pages</a:t>
+            </a:r>
+            <a:r>
+              <a:rPr sz="1500" b="0" i="0">
                 <a:solidFill>
                   <a:srgbClr val="ECECEA"/>
                 </a:solidFill>
@@ -13071,17 +13172,17 @@
                 <a:ea typeface="Malgun Gothic"/>
                 <a:cs typeface="Malgun Gothic"/>
               </a:rPr>
-              <a:t>  주제가 바뀔 때 — 새 작업은 새 대화로</a:t>
+              <a:t>  저장소 Settings → Pages — 오래 쓸 안정적인 주소</a:t>
             </a:r>
           </a:p>
           <a:p>
             <a:pPr>
               <a:spcAft>
-                <a:spcPts val="1500"/>
+                <a:spcPts val="1200"/>
               </a:spcAft>
             </a:pPr>
             <a:r>
-              <a:rPr sz="1700" b="1" i="0">
+              <a:rPr sz="1500" b="1" i="0">
                 <a:solidFill>
                   <a:srgbClr val="D97757"/>
                 </a:solidFill>
@@ -13092,18 +13193,7 @@
               <a:t>•  </a:t>
             </a:r>
             <a:r>
-              <a:rPr sz="1700" b="1" i="0">
-                <a:solidFill>
-                  <a:srgbClr val="D97757"/>
-                </a:solidFill>
-                <a:latin typeface="Malgun Gothic"/>
-                <a:ea typeface="Malgun Gothic"/>
-                <a:cs typeface="Malgun Gothic"/>
-              </a:rPr>
-              <a:t>/compact</a:t>
-            </a:r>
-            <a:r>
-              <a:rPr sz="1700" b="0" i="0">
+              <a:rPr sz="1500" b="0" i="0">
                 <a:solidFill>
                   <a:srgbClr val="ECECEA"/>
                 </a:solidFill>
@@ -13111,17 +13201,17 @@
                 <a:ea typeface="Malgun Gothic"/>
                 <a:cs typeface="Malgun Gothic"/>
               </a:rPr>
-              <a:t>  이어가야 할 때 — 지금까지를 요약하고 계속</a:t>
+              <a:t>둘 다 무료 · HTTPS — 주소만 알면 교실 어느 기기에서든 열림</a:t>
             </a:r>
           </a:p>
           <a:p>
             <a:pPr>
               <a:spcAft>
-                <a:spcPts val="1500"/>
+                <a:spcPts val="1200"/>
               </a:spcAft>
             </a:pPr>
             <a:r>
-              <a:rPr sz="1700" b="1" i="0">
+              <a:rPr sz="1500" b="1" i="0">
                 <a:solidFill>
                   <a:srgbClr val="D97757"/>
                 </a:solidFill>
@@ -13132,7 +13222,18 @@
               <a:t>•  </a:t>
             </a:r>
             <a:r>
-              <a:rPr sz="1700" b="1" i="0">
+              <a:rPr sz="1500" b="1" i="0">
+                <a:solidFill>
+                  <a:srgbClr val="D9B45B"/>
+                </a:solidFill>
+                <a:latin typeface="Malgun Gothic"/>
+                <a:ea typeface="Malgun Gothic"/>
+                <a:cs typeface="Malgun Gothic"/>
+              </a:rPr>
+              <a:t>주의  </a:t>
+            </a:r>
+            <a:r>
+              <a:rPr sz="1500" b="0" i="0">
                 <a:solidFill>
                   <a:srgbClr val="ECECEA"/>
                 </a:solidFill>
@@ -13140,28 +13241,17 @@
                 <a:ea typeface="Malgun Gothic"/>
                 <a:cs typeface="Malgun Gothic"/>
               </a:rPr>
-              <a:t>어려운 문제엔 확장 사고 </a:t>
-            </a:r>
-            <a:r>
-              <a:rPr sz="1700" b="0" i="0">
-                <a:solidFill>
-                  <a:srgbClr val="ECECEA"/>
-                </a:solidFill>
-                <a:latin typeface="Malgun Gothic"/>
-                <a:ea typeface="Malgun Gothic"/>
-                <a:cs typeface="Malgun Gothic"/>
-              </a:rPr>
-              <a:t>— 요청에 “think hard”를 붙이면 더 깊이 고민합니다</a:t>
+              <a:t>공개 페이지에는 학생 실명을 코드에 넣지 마세요 — 수업 때 입력창에 직접 입력</a:t>
             </a:r>
           </a:p>
           <a:p>
             <a:pPr>
               <a:spcAft>
-                <a:spcPts val="1500"/>
+                <a:spcPts val="1200"/>
               </a:spcAft>
             </a:pPr>
             <a:r>
-              <a:rPr sz="1700" b="1" i="0">
+              <a:rPr sz="1500" b="1" i="0">
                 <a:solidFill>
                   <a:srgbClr val="D97757"/>
                 </a:solidFill>
@@ -13172,7 +13262,7 @@
               <a:t>•  </a:t>
             </a:r>
             <a:r>
-              <a:rPr sz="1700" b="1" i="0">
+              <a:rPr sz="1500" b="0" i="0">
                 <a:solidFill>
                   <a:srgbClr val="ECECEA"/>
                 </a:solidFill>
@@ -13180,25 +13270,74 @@
                 <a:ea typeface="Malgun Gothic"/>
                 <a:cs typeface="Malgun Gothic"/>
               </a:rPr>
-              <a:t>작업 단위로 끊기</a:t>
-            </a:r>
-            <a:r>
-              <a:rPr sz="1700" b="0" i="0">
-                <a:solidFill>
-                  <a:srgbClr val="ECECEA"/>
-                </a:solidFill>
-                <a:latin typeface="Malgun Gothic"/>
-                <a:ea typeface="Malgun Gothic"/>
-                <a:cs typeface="Malgun Gothic"/>
-              </a:rPr>
-              <a:t> — 한 대화 = 한 가지 목표가 가장 정확합니다</a:t>
-            </a:r>
-          </a:p>
-        </p:txBody>
-      </p:sp>
-      <p:sp>
-        <p:nvSpPr>
-          <p:cNvPr id="5" name="TextBox 4"/>
+              <a:t>Claude에게 “배포하는 방법 알려줘”라고 물으면 단계별로 안내해 줍니다</a:t>
+            </a:r>
+          </a:p>
+        </p:txBody>
+      </p:sp>
+      <p:pic>
+        <p:nvPicPr>
+          <p:cNvPr id="6" name="Picture 5" descr="shot-23-170453-deploy-guide.png"/>
+          <p:cNvPicPr>
+            <a:picLocks noChangeAspect="1"/>
+          </p:cNvPicPr>
+          <p:nvPr/>
+        </p:nvPicPr>
+        <p:blipFill>
+          <a:blip r:embed="rId2"/>
+          <a:stretch>
+            <a:fillRect/>
+          </a:stretch>
+        </p:blipFill>
+        <p:spPr>
+          <a:xfrm>
+            <a:off x="6858000" y="1691640"/>
+            <a:ext cx="4081606" cy="4480560"/>
+          </a:xfrm>
+          <a:prstGeom prst="rect">
+            <a:avLst/>
+          </a:prstGeom>
+        </p:spPr>
+      </p:pic>
+      <p:sp>
+        <p:nvSpPr>
+          <p:cNvPr id="7" name="TextBox 6"/>
+          <p:cNvSpPr txBox="1"/>
+          <p:nvPr/>
+        </p:nvSpPr>
+        <p:spPr>
+          <a:xfrm>
+            <a:off x="6858000" y="6217920"/>
+            <a:ext cx="4846320" cy="365760"/>
+          </a:xfrm>
+          <a:prstGeom prst="rect">
+            <a:avLst/>
+          </a:prstGeom>
+          <a:noFill/>
+        </p:spPr>
+        <p:txBody>
+          <a:bodyPr wrap="square" anchor="t">
+            <a:spAutoFit/>
+          </a:bodyPr>
+          <a:lstStyle/>
+          <a:p>
+            <a:r>
+              <a:rPr sz="1100" b="0" i="0">
+                <a:solidFill>
+                  <a:srgbClr val="9B9B93"/>
+                </a:solidFill>
+                <a:latin typeface="Malgun Gothic"/>
+                <a:ea typeface="Malgun Gothic"/>
+                <a:cs typeface="Malgun Gothic"/>
+              </a:rPr>
+              <a:t>실제 수업에서 Claude가 안내한 배포 방법</a:t>
+            </a:r>
+          </a:p>
+        </p:txBody>
+      </p:sp>
+      <p:sp>
+        <p:nvSpPr>
+          <p:cNvPr id="8" name="TextBox 7"/>
           <p:cNvSpPr txBox="1"/>
           <p:nvPr/>
         </p:nvSpPr>
@@ -13234,7 +13373,7 @@
       </p:sp>
       <p:sp>
         <p:nvSpPr>
-          <p:cNvPr id="6" name="TextBox 5"/>
+          <p:cNvPr id="9" name="TextBox 8"/>
           <p:cNvSpPr txBox="1"/>
           <p:nvPr/>
         </p:nvSpPr>
@@ -13369,7 +13508,7 @@
                 <a:ea typeface="Malgun Gothic"/>
                 <a:cs typeface="Malgun Gothic"/>
               </a:rPr>
-              <a:t>라이브 데모 ②  —  Plan Mode로 개선하고 PR까지</a:t>
+              <a:t>컨텍스트 관리 — 길어진 대화 다루기</a:t>
             </a:r>
           </a:p>
         </p:txBody>
@@ -13382,8 +13521,8 @@
         </p:nvSpPr>
         <p:spPr>
           <a:xfrm>
-            <a:off x="548640" y="1828800"/>
-            <a:ext cx="5669280" cy="4572000"/>
+            <a:off x="640080" y="2011680"/>
+            <a:ext cx="10972800" cy="4572000"/>
           </a:xfrm>
           <a:prstGeom prst="rect">
             <a:avLst/>
@@ -13398,7 +13537,7 @@
           <a:p>
             <a:pPr>
               <a:spcAft>
-                <a:spcPts val="1200"/>
+                <a:spcPts val="1500"/>
               </a:spcAft>
             </a:pPr>
             <a:r>
@@ -13413,7 +13552,7 @@
               <a:t>•  </a:t>
             </a:r>
             <a:r>
-              <a:rPr sz="1700" b="1" i="0">
+              <a:rPr sz="1700" b="0" i="0">
                 <a:solidFill>
                   <a:srgbClr val="ECECEA"/>
                 </a:solidFill>
@@ -13421,88 +13560,136 @@
                 <a:ea typeface="Malgun Gothic"/>
                 <a:cs typeface="Malgun Gothic"/>
               </a:rPr>
-              <a:t>시나리오</a:t>
+              <a:t>대화가 길어지면 응답이 느려지고 초점이 흐려집니다</a:t>
             </a:r>
           </a:p>
           <a:p>
             <a:pPr>
               <a:spcAft>
-                <a:spcPts val="1200"/>
+                <a:spcPts val="1500"/>
               </a:spcAft>
             </a:pPr>
             <a:r>
-              <a:rPr sz="1400" b="0" i="0">
-                <a:solidFill>
-                  <a:srgbClr val="9B9B93"/>
-                </a:solidFill>
-                <a:latin typeface="Malgun Gothic"/>
-                <a:ea typeface="Malgun Gothic"/>
-                <a:cs typeface="Malgun Gothic"/>
-              </a:rPr>
-              <a:t>     1) Shift+Tab → Plan Mode 전환</a:t>
+              <a:rPr sz="1700" b="1" i="0">
+                <a:solidFill>
+                  <a:srgbClr val="D97757"/>
+                </a:solidFill>
+                <a:latin typeface="Malgun Gothic"/>
+                <a:ea typeface="Malgun Gothic"/>
+                <a:cs typeface="Malgun Gothic"/>
+              </a:rPr>
+              <a:t>•  </a:t>
+            </a:r>
+            <a:r>
+              <a:rPr sz="1700" b="1" i="0">
+                <a:solidFill>
+                  <a:srgbClr val="D97757"/>
+                </a:solidFill>
+                <a:latin typeface="Malgun Gothic"/>
+                <a:ea typeface="Malgun Gothic"/>
+                <a:cs typeface="Malgun Gothic"/>
+              </a:rPr>
+              <a:t>/clear</a:t>
+            </a:r>
+            <a:r>
+              <a:rPr sz="1700" b="0" i="0">
+                <a:solidFill>
+                  <a:srgbClr val="ECECEA"/>
+                </a:solidFill>
+                <a:latin typeface="Malgun Gothic"/>
+                <a:ea typeface="Malgun Gothic"/>
+                <a:cs typeface="Malgun Gothic"/>
+              </a:rPr>
+              <a:t>  주제가 바뀔 때 — 새 작업은 새 대화로</a:t>
             </a:r>
           </a:p>
           <a:p>
             <a:pPr>
               <a:spcAft>
-                <a:spcPts val="1200"/>
+                <a:spcPts val="1500"/>
               </a:spcAft>
             </a:pPr>
             <a:r>
-              <a:rPr sz="1400" b="0" i="0">
-                <a:solidFill>
-                  <a:srgbClr val="9B9B93"/>
-                </a:solidFill>
-                <a:latin typeface="Malgun Gothic"/>
-                <a:ea typeface="Malgun Gothic"/>
-                <a:cs typeface="Malgun Gothic"/>
-              </a:rPr>
-              <a:t>     2) “같은 학생이 연속으로 안 뽑히게 개선해줘” — 계획 검토</a:t>
+              <a:rPr sz="1700" b="1" i="0">
+                <a:solidFill>
+                  <a:srgbClr val="D97757"/>
+                </a:solidFill>
+                <a:latin typeface="Malgun Gothic"/>
+                <a:ea typeface="Malgun Gothic"/>
+                <a:cs typeface="Malgun Gothic"/>
+              </a:rPr>
+              <a:t>•  </a:t>
+            </a:r>
+            <a:r>
+              <a:rPr sz="1700" b="1" i="0">
+                <a:solidFill>
+                  <a:srgbClr val="D97757"/>
+                </a:solidFill>
+                <a:latin typeface="Malgun Gothic"/>
+                <a:ea typeface="Malgun Gothic"/>
+                <a:cs typeface="Malgun Gothic"/>
+              </a:rPr>
+              <a:t>/compact</a:t>
+            </a:r>
+            <a:r>
+              <a:rPr sz="1700" b="0" i="0">
+                <a:solidFill>
+                  <a:srgbClr val="ECECEA"/>
+                </a:solidFill>
+                <a:latin typeface="Malgun Gothic"/>
+                <a:ea typeface="Malgun Gothic"/>
+                <a:cs typeface="Malgun Gothic"/>
+              </a:rPr>
+              <a:t>  이어가야 할 때 — 지금까지를 요약하고 계속</a:t>
             </a:r>
           </a:p>
           <a:p>
             <a:pPr>
               <a:spcAft>
-                <a:spcPts val="1200"/>
+                <a:spcPts val="1500"/>
               </a:spcAft>
             </a:pPr>
             <a:r>
-              <a:rPr sz="1400" b="0" i="0">
-                <a:solidFill>
-                  <a:srgbClr val="9B9B93"/>
-                </a:solidFill>
-                <a:latin typeface="Malgun Gothic"/>
-                <a:ea typeface="Malgun Gothic"/>
-                <a:cs typeface="Malgun Gothic"/>
-              </a:rPr>
-              <a:t>     3) 승인 → 구현 → “브랜치 만들어서 PR 올려줘”</a:t>
+              <a:rPr sz="1700" b="1" i="0">
+                <a:solidFill>
+                  <a:srgbClr val="D97757"/>
+                </a:solidFill>
+                <a:latin typeface="Malgun Gothic"/>
+                <a:ea typeface="Malgun Gothic"/>
+                <a:cs typeface="Malgun Gothic"/>
+              </a:rPr>
+              <a:t>•  </a:t>
+            </a:r>
+            <a:r>
+              <a:rPr sz="1700" b="1" i="0">
+                <a:solidFill>
+                  <a:srgbClr val="ECECEA"/>
+                </a:solidFill>
+                <a:latin typeface="Malgun Gothic"/>
+                <a:ea typeface="Malgun Gothic"/>
+                <a:cs typeface="Malgun Gothic"/>
+              </a:rPr>
+              <a:t>어려운 문제엔 확장 사고 </a:t>
+            </a:r>
+            <a:r>
+              <a:rPr sz="1700" b="0" i="0">
+                <a:solidFill>
+                  <a:srgbClr val="ECECEA"/>
+                </a:solidFill>
+                <a:latin typeface="Malgun Gothic"/>
+                <a:ea typeface="Malgun Gothic"/>
+                <a:cs typeface="Malgun Gothic"/>
+              </a:rPr>
+              <a:t>— 요청에 “think hard”를 붙이면 더 깊이 고민합니다</a:t>
             </a:r>
           </a:p>
           <a:p>
             <a:pPr>
               <a:spcAft>
-                <a:spcPts val="1200"/>
+                <a:spcPts val="1500"/>
               </a:spcAft>
             </a:pPr>
             <a:r>
-              <a:rPr sz="1400" b="0" i="0">
-                <a:solidFill>
-                  <a:srgbClr val="9B9B93"/>
-                </a:solidFill>
-                <a:latin typeface="Malgun Gothic"/>
-                <a:ea typeface="Malgun Gothic"/>
-                <a:cs typeface="Malgun Gothic"/>
-              </a:rPr>
-              <a:t>     4) GitHub에서 PR 확인</a:t>
-            </a:r>
-          </a:p>
-          <a:p>
-            <a:pPr>
-              <a:spcAft>
-                <a:spcPts val="1200"/>
-              </a:spcAft>
-            </a:pPr>
-            <a:r>
               <a:rPr sz="1700" b="1" i="0">
                 <a:solidFill>
                   <a:srgbClr val="D97757"/>
@@ -13514,6 +13701,17 @@
               <a:t>•  </a:t>
             </a:r>
             <a:r>
+              <a:rPr sz="1700" b="1" i="0">
+                <a:solidFill>
+                  <a:srgbClr val="ECECEA"/>
+                </a:solidFill>
+                <a:latin typeface="Malgun Gothic"/>
+                <a:ea typeface="Malgun Gothic"/>
+                <a:cs typeface="Malgun Gothic"/>
+              </a:rPr>
+              <a:t>작업 단위로 끊기</a:t>
+            </a:r>
+            <a:r>
               <a:rPr sz="1700" b="0" i="0">
                 <a:solidFill>
                   <a:srgbClr val="ECECEA"/>
@@ -13522,107 +13720,14 @@
                 <a:ea typeface="Malgun Gothic"/>
                 <a:cs typeface="Malgun Gothic"/>
               </a:rPr>
-              <a:t>예상 소요: </a:t>
-            </a:r>
-            <a:r>
-              <a:rPr sz="1700" b="1" i="0">
-                <a:solidFill>
-                  <a:srgbClr val="D97757"/>
-                </a:solidFill>
-                <a:latin typeface="Malgun Gothic"/>
-                <a:ea typeface="Malgun Gothic"/>
-                <a:cs typeface="Malgun Gothic"/>
-              </a:rPr>
-              <a:t>8분</a:t>
-            </a:r>
-          </a:p>
-        </p:txBody>
-      </p:sp>
-      <p:sp>
-        <p:nvSpPr>
-          <p:cNvPr id="5" name="Rounded Rectangle 4"/>
-          <p:cNvSpPr/>
-          <p:nvPr/>
-        </p:nvSpPr>
-        <p:spPr>
-          <a:xfrm>
-            <a:off x="6492240" y="1828800"/>
-            <a:ext cx="5212080" cy="3931920"/>
-          </a:xfrm>
-          <a:prstGeom prst="roundRect">
-            <a:avLst/>
-          </a:prstGeom>
-          <a:solidFill>
-            <a:srgbClr val="222229"/>
-          </a:solidFill>
-          <a:ln>
-            <a:noFill/>
-          </a:ln>
-          <a:effectLst/>
-        </p:spPr>
-        <p:style>
-          <a:lnRef idx="1">
-            <a:schemeClr val="accent1"/>
-          </a:lnRef>
-          <a:fillRef idx="3">
-            <a:schemeClr val="accent1"/>
-          </a:fillRef>
-          <a:effectRef idx="2">
-            <a:schemeClr val="accent1"/>
-          </a:effectRef>
-          <a:fontRef idx="minor">
-            <a:schemeClr val="lt1"/>
-          </a:fontRef>
-        </p:style>
-        <p:txBody>
-          <a:bodyPr rtlCol="0" anchor="ctr"/>
-          <a:lstStyle/>
-          <a:p>
-            <a:pPr algn="ctr"/>
-          </a:p>
-        </p:txBody>
-      </p:sp>
-      <p:sp>
-        <p:nvSpPr>
-          <p:cNvPr id="6" name="TextBox 5"/>
-          <p:cNvSpPr txBox="1"/>
-          <p:nvPr/>
-        </p:nvSpPr>
-        <p:spPr>
-          <a:xfrm>
-            <a:off x="6492240" y="3474720"/>
-            <a:ext cx="5212080" cy="731520"/>
-          </a:xfrm>
-          <a:prstGeom prst="rect">
-            <a:avLst/>
-          </a:prstGeom>
-          <a:noFill/>
-        </p:spPr>
-        <p:txBody>
-          <a:bodyPr wrap="square" anchor="ctr">
-            <a:spAutoFit/>
-          </a:bodyPr>
-          <a:lstStyle/>
-          <a:p>
-            <a:pPr algn="ctr"/>
-            <a:r>
-              <a:rPr sz="1400" b="0" i="0">
-                <a:solidFill>
-                  <a:srgbClr val="9B9B93"/>
-                </a:solidFill>
-                <a:latin typeface="Malgun Gothic"/>
-                <a:ea typeface="Malgun Gothic"/>
-                <a:cs typeface="Malgun Gothic"/>
-              </a:rPr>
-              <a:t>[ 데모 실패 대비 백업 GIF 자리 ]
-assets/demo2-backup.gif</a:t>
-            </a:r>
-          </a:p>
-        </p:txBody>
-      </p:sp>
-      <p:sp>
-        <p:nvSpPr>
-          <p:cNvPr id="7" name="TextBox 6"/>
+              <a:t> — 한 대화 = 한 가지 목표가 가장 정확합니다</a:t>
+            </a:r>
+          </a:p>
+        </p:txBody>
+      </p:sp>
+      <p:sp>
+        <p:nvSpPr>
+          <p:cNvPr id="5" name="TextBox 4"/>
           <p:cNvSpPr txBox="1"/>
           <p:nvPr/>
         </p:nvSpPr>
@@ -13658,7 +13763,7 @@
       </p:sp>
       <p:sp>
         <p:nvSpPr>
-          <p:cNvPr id="8" name="TextBox 7"/>
+          <p:cNvPr id="6" name="TextBox 5"/>
           <p:cNvSpPr txBox="1"/>
           <p:nvPr/>
         </p:nvSpPr>
@@ -13793,7 +13898,7 @@
                 <a:ea typeface="Malgun Gothic"/>
                 <a:cs typeface="Malgun Gothic"/>
               </a:rPr>
-              <a:t>Level 2 정리</a:t>
+              <a:t>라이브 데모 ②  —  Plan Mode로 개선하고 PR까지</a:t>
             </a:r>
           </a:p>
         </p:txBody>
@@ -13806,8 +13911,8 @@
         </p:nvSpPr>
         <p:spPr>
           <a:xfrm>
-            <a:off x="640080" y="2103120"/>
-            <a:ext cx="10972800" cy="4572000"/>
+            <a:off x="548640" y="1828800"/>
+            <a:ext cx="5669280" cy="4572000"/>
           </a:xfrm>
           <a:prstGeom prst="rect">
             <a:avLst/>
@@ -13822,11 +13927,11 @@
           <a:p>
             <a:pPr>
               <a:spcAft>
-                <a:spcPts val="1800"/>
+                <a:spcPts val="1200"/>
               </a:spcAft>
             </a:pPr>
             <a:r>
-              <a:rPr sz="1800" b="1" i="0">
+              <a:rPr sz="1700" b="1" i="0">
                 <a:solidFill>
                   <a:srgbClr val="D97757"/>
                 </a:solidFill>
@@ -13837,18 +13942,7 @@
               <a:t>•  </a:t>
             </a:r>
             <a:r>
-              <a:rPr sz="1800" b="1" i="0">
-                <a:solidFill>
-                  <a:srgbClr val="D97757"/>
-                </a:solidFill>
-                <a:latin typeface="Malgun Gothic"/>
-                <a:ea typeface="Malgun Gothic"/>
-                <a:cs typeface="Malgun Gothic"/>
-              </a:rPr>
-              <a:t>/init</a:t>
-            </a:r>
-            <a:r>
-              <a:rPr sz="1800" b="0" i="0">
+              <a:rPr sz="1700" b="1" i="0">
                 <a:solidFill>
                   <a:srgbClr val="ECECEA"/>
                 </a:solidFill>
@@ -13856,97 +13950,89 @@
                 <a:ea typeface="Malgun Gothic"/>
                 <a:cs typeface="Malgun Gothic"/>
               </a:rPr>
-              <a:t> 은 오늘 바로 — 팀 프로젝트라면 CLAUDE.md를 커밋해서 공유</a:t>
+              <a:t>시나리오</a:t>
             </a:r>
           </a:p>
           <a:p>
             <a:pPr>
               <a:spcAft>
-                <a:spcPts val="1800"/>
+                <a:spcPts val="1200"/>
               </a:spcAft>
             </a:pPr>
             <a:r>
-              <a:rPr sz="1800" b="1" i="0">
-                <a:solidFill>
-                  <a:srgbClr val="D97757"/>
-                </a:solidFill>
-                <a:latin typeface="Malgun Gothic"/>
-                <a:ea typeface="Malgun Gothic"/>
-                <a:cs typeface="Malgun Gothic"/>
-              </a:rPr>
-              <a:t>•  </a:t>
-            </a:r>
-            <a:r>
-              <a:rPr sz="1800" b="0" i="0">
-                <a:solidFill>
-                  <a:srgbClr val="ECECEA"/>
-                </a:solidFill>
-                <a:latin typeface="Malgun Gothic"/>
-                <a:ea typeface="Malgun Gothic"/>
-                <a:cs typeface="Malgun Gothic"/>
-              </a:rPr>
-              <a:t>큰 작업은 </a:t>
-            </a:r>
-            <a:r>
-              <a:rPr sz="1800" b="1" i="0">
-                <a:solidFill>
-                  <a:srgbClr val="D97757"/>
-                </a:solidFill>
-                <a:latin typeface="Malgun Gothic"/>
-                <a:ea typeface="Malgun Gothic"/>
-                <a:cs typeface="Malgun Gothic"/>
-              </a:rPr>
-              <a:t>Plan Mode가 기본값</a:t>
-            </a:r>
-            <a:r>
-              <a:rPr sz="1800" b="0" i="0">
-                <a:solidFill>
-                  <a:srgbClr val="ECECEA"/>
-                </a:solidFill>
-                <a:latin typeface="Malgun Gothic"/>
-                <a:ea typeface="Malgun Gothic"/>
-                <a:cs typeface="Malgun Gothic"/>
-              </a:rPr>
-              <a:t> 이라고 생각하세요</a:t>
+              <a:rPr sz="1400" b="0" i="0">
+                <a:solidFill>
+                  <a:srgbClr val="9B9B93"/>
+                </a:solidFill>
+                <a:latin typeface="Malgun Gothic"/>
+                <a:ea typeface="Malgun Gothic"/>
+                <a:cs typeface="Malgun Gothic"/>
+              </a:rPr>
+              <a:t>     1) Shift+Tab → Plan Mode 전환</a:t>
             </a:r>
           </a:p>
           <a:p>
             <a:pPr>
               <a:spcAft>
-                <a:spcPts val="1800"/>
+                <a:spcPts val="1200"/>
               </a:spcAft>
             </a:pPr>
             <a:r>
-              <a:rPr sz="1800" b="1" i="0">
-                <a:solidFill>
-                  <a:srgbClr val="D97757"/>
-                </a:solidFill>
-                <a:latin typeface="Malgun Gothic"/>
-                <a:ea typeface="Malgun Gothic"/>
-                <a:cs typeface="Malgun Gothic"/>
-              </a:rPr>
-              <a:t>•  </a:t>
-            </a:r>
-            <a:r>
-              <a:rPr sz="1800" b="0" i="0">
-                <a:solidFill>
-                  <a:srgbClr val="ECECEA"/>
-                </a:solidFill>
-                <a:latin typeface="Malgun Gothic"/>
-                <a:ea typeface="Malgun Gothic"/>
-                <a:cs typeface="Malgun Gothic"/>
-              </a:rPr>
-              <a:t>커밋 메시지 · PR 설명은 이제 Claude의 일</a:t>
+              <a:rPr sz="1400" b="0" i="0">
+                <a:solidFill>
+                  <a:srgbClr val="9B9B93"/>
+                </a:solidFill>
+                <a:latin typeface="Malgun Gothic"/>
+                <a:ea typeface="Malgun Gothic"/>
+                <a:cs typeface="Malgun Gothic"/>
+              </a:rPr>
+              <a:t>     2) “같은 학생이 연속으로 안 뽑히게 개선해줘” — 계획 검토</a:t>
             </a:r>
           </a:p>
           <a:p>
             <a:pPr>
               <a:spcAft>
-                <a:spcPts val="1800"/>
+                <a:spcPts val="1200"/>
               </a:spcAft>
             </a:pPr>
             <a:r>
-              <a:rPr sz="1800" b="1" i="0">
+              <a:rPr sz="1400" b="0" i="0">
+                <a:solidFill>
+                  <a:srgbClr val="9B9B93"/>
+                </a:solidFill>
+                <a:latin typeface="Malgun Gothic"/>
+                <a:ea typeface="Malgun Gothic"/>
+                <a:cs typeface="Malgun Gothic"/>
+              </a:rPr>
+              <a:t>     3) 승인 → 구현 → “브랜치 만들어서 PR 올려줘”</a:t>
+            </a:r>
+          </a:p>
+          <a:p>
+            <a:pPr>
+              <a:spcAft>
+                <a:spcPts val="1200"/>
+              </a:spcAft>
+            </a:pPr>
+            <a:r>
+              <a:rPr sz="1400" b="0" i="0">
+                <a:solidFill>
+                  <a:srgbClr val="9B9B93"/>
+                </a:solidFill>
+                <a:latin typeface="Malgun Gothic"/>
+                <a:ea typeface="Malgun Gothic"/>
+                <a:cs typeface="Malgun Gothic"/>
+              </a:rPr>
+              <a:t>     4) GitHub에서 PR 확인</a:t>
+            </a:r>
+          </a:p>
+          <a:p>
+            <a:pPr>
+              <a:spcAft>
+                <a:spcPts val="1200"/>
+              </a:spcAft>
+            </a:pPr>
+            <a:r>
+              <a:rPr sz="1700" b="1" i="0">
                 <a:solidFill>
                   <a:srgbClr val="D97757"/>
                 </a:solidFill>
@@ -13957,18 +14043,7 @@
               <a:t>•  </a:t>
             </a:r>
             <a:r>
-              <a:rPr sz="1800" b="1" i="0">
-                <a:solidFill>
-                  <a:srgbClr val="8FBC6F"/>
-                </a:solidFill>
-                <a:latin typeface="Malgun Gothic"/>
-                <a:ea typeface="Malgun Gothic"/>
-                <a:cs typeface="Malgun Gothic"/>
-              </a:rPr>
-              <a:t>실습 과제</a:t>
-            </a:r>
-            <a:r>
-              <a:rPr sz="1800" b="0" i="0">
+              <a:rPr sz="1700" b="0" i="0">
                 <a:solidFill>
                   <a:srgbClr val="ECECEA"/>
                 </a:solidFill>
@@ -13976,14 +14051,85 @@
                 <a:ea typeface="Malgun Gothic"/>
                 <a:cs typeface="Malgun Gothic"/>
               </a:rPr>
-              <a:t>  ① /init 실행 후 CLAUDE.md 다듬기 ② Plan Mode로 작은 리팩터링 ③ PR 1건 생성</a:t>
-            </a:r>
-          </a:p>
-        </p:txBody>
-      </p:sp>
-      <p:sp>
-        <p:nvSpPr>
-          <p:cNvPr id="5" name="TextBox 4"/>
+              <a:t>예상 소요: </a:t>
+            </a:r>
+            <a:r>
+              <a:rPr sz="1700" b="1" i="0">
+                <a:solidFill>
+                  <a:srgbClr val="D97757"/>
+                </a:solidFill>
+                <a:latin typeface="Malgun Gothic"/>
+                <a:ea typeface="Malgun Gothic"/>
+                <a:cs typeface="Malgun Gothic"/>
+              </a:rPr>
+              <a:t>8분</a:t>
+            </a:r>
+          </a:p>
+        </p:txBody>
+      </p:sp>
+      <p:pic>
+        <p:nvPicPr>
+          <p:cNvPr id="5" name="Picture 4" descr="shot-14-165313-app-full-ui.png"/>
+          <p:cNvPicPr>
+            <a:picLocks noChangeAspect="1"/>
+          </p:cNvPicPr>
+          <p:nvPr/>
+        </p:nvPicPr>
+        <p:blipFill>
+          <a:blip r:embed="rId2"/>
+          <a:stretch>
+            <a:fillRect/>
+          </a:stretch>
+        </p:blipFill>
+        <p:spPr>
+          <a:xfrm>
+            <a:off x="6766560" y="1691640"/>
+            <a:ext cx="4517095" cy="4297680"/>
+          </a:xfrm>
+          <a:prstGeom prst="rect">
+            <a:avLst/>
+          </a:prstGeom>
+        </p:spPr>
+      </p:pic>
+      <p:sp>
+        <p:nvSpPr>
+          <p:cNvPr id="6" name="TextBox 5"/>
+          <p:cNvSpPr txBox="1"/>
+          <p:nvPr/>
+        </p:nvSpPr>
+        <p:spPr>
+          <a:xfrm>
+            <a:off x="6766560" y="6035040"/>
+            <a:ext cx="5212080" cy="365760"/>
+          </a:xfrm>
+          <a:prstGeom prst="rect">
+            <a:avLst/>
+          </a:prstGeom>
+          <a:noFill/>
+        </p:spPr>
+        <p:txBody>
+          <a:bodyPr wrap="square" anchor="t">
+            <a:spAutoFit/>
+          </a:bodyPr>
+          <a:lstStyle/>
+          <a:p>
+            <a:r>
+              <a:rPr sz="1100" b="0" i="0">
+                <a:solidFill>
+                  <a:srgbClr val="9B9B93"/>
+                </a:solidFill>
+                <a:latin typeface="Malgun Gothic"/>
+                <a:ea typeface="Malgun Gothic"/>
+                <a:cs typeface="Malgun Gothic"/>
+              </a:rPr>
+              <a:t>실제 수업에서 만든 앱 화면 (백업 GIF: assets/demo2-backup.gif)</a:t>
+            </a:r>
+          </a:p>
+        </p:txBody>
+      </p:sp>
+      <p:sp>
+        <p:nvSpPr>
+          <p:cNvPr id="7" name="TextBox 6"/>
           <p:cNvSpPr txBox="1"/>
           <p:nvPr/>
         </p:nvSpPr>
@@ -14019,7 +14165,7 @@
       </p:sp>
       <p:sp>
         <p:nvSpPr>
-          <p:cNvPr id="6" name="TextBox 5"/>
+          <p:cNvPr id="8" name="TextBox 7"/>
           <p:cNvSpPr txBox="1"/>
           <p:nvPr/>
         </p:nvSpPr>
@@ -14082,16 +14228,16 @@
       <p:grpSpPr/>
       <p:sp>
         <p:nvSpPr>
-          <p:cNvPr id="2" name="Rectangle 1"/>
+          <p:cNvPr id="2" name="Rounded Rectangle 1"/>
           <p:cNvSpPr/>
           <p:nvPr/>
         </p:nvSpPr>
         <p:spPr>
           <a:xfrm>
-            <a:off x="0" y="1828800"/>
-            <a:ext cx="164592" cy="3200400"/>
-          </a:xfrm>
-          <a:prstGeom prst="rect">
+            <a:off x="457200" y="566928"/>
+            <a:ext cx="502920" cy="64008"/>
+          </a:xfrm>
+          <a:prstGeom prst="roundRect">
             <a:avLst/>
           </a:prstGeom>
           <a:solidFill>
@@ -14131,8 +14277,8 @@
         </p:nvSpPr>
         <p:spPr>
           <a:xfrm>
-            <a:off x="777240" y="1874519"/>
-            <a:ext cx="10515600" cy="914400"/>
+            <a:off x="411480" y="713232"/>
+            <a:ext cx="11338560" cy="822960"/>
           </a:xfrm>
           <a:prstGeom prst="rect">
             <a:avLst/>
@@ -14146,15 +14292,15 @@
           <a:lstStyle/>
           <a:p>
             <a:r>
-              <a:rPr sz="1700" b="1" i="0">
-                <a:solidFill>
-                  <a:srgbClr val="D97757"/>
-                </a:solidFill>
-                <a:latin typeface="Malgun Gothic"/>
-                <a:ea typeface="Malgun Gothic"/>
-                <a:cs typeface="Malgun Gothic"/>
-              </a:rPr>
-              <a:t>Level 3</a:t>
+              <a:rPr sz="3000" b="1" i="0">
+                <a:solidFill>
+                  <a:srgbClr val="ECECEA"/>
+                </a:solidFill>
+                <a:latin typeface="Malgun Gothic"/>
+                <a:ea typeface="Malgun Gothic"/>
+                <a:cs typeface="Malgun Gothic"/>
+              </a:rPr>
+              <a:t>Level 2 정리</a:t>
             </a:r>
           </a:p>
         </p:txBody>
@@ -14167,80 +14313,8 @@
         </p:nvSpPr>
         <p:spPr>
           <a:xfrm>
-            <a:off x="777240" y="2240280"/>
-            <a:ext cx="10515600" cy="1188720"/>
-          </a:xfrm>
-          <a:prstGeom prst="rect">
-            <a:avLst/>
-          </a:prstGeom>
-          <a:noFill/>
-        </p:spPr>
-        <p:txBody>
-          <a:bodyPr wrap="square" anchor="t">
-            <a:spAutoFit/>
-          </a:bodyPr>
-          <a:lstStyle/>
-          <a:p>
-            <a:r>
-              <a:rPr sz="4000" b="1" i="0">
-                <a:solidFill>
-                  <a:srgbClr val="ECECEA"/>
-                </a:solidFill>
-                <a:latin typeface="Malgun Gothic"/>
-                <a:ea typeface="Malgun Gothic"/>
-                <a:cs typeface="Malgun Gothic"/>
-              </a:rPr>
-              <a:t>확장하기</a:t>
-            </a:r>
-          </a:p>
-        </p:txBody>
-      </p:sp>
-      <p:sp>
-        <p:nvSpPr>
-          <p:cNvPr id="5" name="TextBox 4"/>
-          <p:cNvSpPr txBox="1"/>
-          <p:nvPr/>
-        </p:nvSpPr>
-        <p:spPr>
-          <a:xfrm>
-            <a:off x="795528" y="3200400"/>
-            <a:ext cx="10515600" cy="548640"/>
-          </a:xfrm>
-          <a:prstGeom prst="rect">
-            <a:avLst/>
-          </a:prstGeom>
-          <a:noFill/>
-        </p:spPr>
-        <p:txBody>
-          <a:bodyPr wrap="square" anchor="t">
-            <a:spAutoFit/>
-          </a:bodyPr>
-          <a:lstStyle/>
-          <a:p>
-            <a:r>
-              <a:rPr sz="1700" b="0" i="0">
-                <a:solidFill>
-                  <a:srgbClr val="9B9B93"/>
-                </a:solidFill>
-                <a:latin typeface="Malgun Gothic"/>
-                <a:ea typeface="Malgun Gothic"/>
-                <a:cs typeface="Malgun Gothic"/>
-              </a:rPr>
-              <a:t>"이런 것도 된다" — 필요해졌을 때 돌아와서 깊게 보세요.</a:t>
-            </a:r>
-          </a:p>
-        </p:txBody>
-      </p:sp>
-      <p:sp>
-        <p:nvSpPr>
-          <p:cNvPr id="6" name="TextBox 5"/>
-          <p:cNvSpPr txBox="1"/>
-          <p:nvPr/>
-        </p:nvSpPr>
-        <p:spPr>
-          <a:xfrm>
-            <a:off x="795528" y="3886200"/>
-            <a:ext cx="10515600" cy="4572000"/>
+            <a:off x="640080" y="2103120"/>
+            <a:ext cx="10972800" cy="4572000"/>
           </a:xfrm>
           <a:prstGeom prst="rect">
             <a:avLst/>
@@ -14255,11 +14329,11 @@
           <a:p>
             <a:pPr>
               <a:spcAft>
-                <a:spcPts val="800"/>
+                <a:spcPts val="1800"/>
               </a:spcAft>
             </a:pPr>
             <a:r>
-              <a:rPr sz="1600" b="1" i="0">
+              <a:rPr sz="1800" b="1" i="0">
                 <a:solidFill>
                   <a:srgbClr val="D97757"/>
                 </a:solidFill>
@@ -14270,7 +14344,18 @@
               <a:t>•  </a:t>
             </a:r>
             <a:r>
-              <a:rPr sz="1600" b="0" i="0">
+              <a:rPr sz="1800" b="1" i="0">
+                <a:solidFill>
+                  <a:srgbClr val="D97757"/>
+                </a:solidFill>
+                <a:latin typeface="Malgun Gothic"/>
+                <a:ea typeface="Malgun Gothic"/>
+                <a:cs typeface="Malgun Gothic"/>
+              </a:rPr>
+              <a:t>/init</a:t>
+            </a:r>
+            <a:r>
+              <a:rPr sz="1800" b="0" i="0">
                 <a:solidFill>
                   <a:srgbClr val="ECECEA"/>
                 </a:solidFill>
@@ -14278,17 +14363,17 @@
                 <a:ea typeface="Malgun Gothic"/>
                 <a:cs typeface="Malgun Gothic"/>
               </a:rPr>
-              <a:t>반복 작업 자동화 (커스텀 커맨드 · 스킬 · Hooks)</a:t>
+              <a:t> 은 오늘 바로 — 팀 프로젝트라면 CLAUDE.md를 커밋해서 공유</a:t>
             </a:r>
           </a:p>
           <a:p>
             <a:pPr>
               <a:spcAft>
-                <a:spcPts val="800"/>
+                <a:spcPts val="1800"/>
               </a:spcAft>
             </a:pPr>
             <a:r>
-              <a:rPr sz="1600" b="1" i="0">
+              <a:rPr sz="1800" b="1" i="0">
                 <a:solidFill>
                   <a:srgbClr val="D97757"/>
                 </a:solidFill>
@@ -14299,7 +14384,7 @@
               <a:t>•  </a:t>
             </a:r>
             <a:r>
-              <a:rPr sz="1600" b="0" i="0">
+              <a:rPr sz="1800" b="0" i="0">
                 <a:solidFill>
                   <a:srgbClr val="ECECEA"/>
                 </a:solidFill>
@@ -14307,17 +14392,39 @@
                 <a:ea typeface="Malgun Gothic"/>
                 <a:cs typeface="Malgun Gothic"/>
               </a:rPr>
-              <a:t>서브에이전트로 병렬 작업</a:t>
+              <a:t>큰 작업은 </a:t>
+            </a:r>
+            <a:r>
+              <a:rPr sz="1800" b="1" i="0">
+                <a:solidFill>
+                  <a:srgbClr val="D97757"/>
+                </a:solidFill>
+                <a:latin typeface="Malgun Gothic"/>
+                <a:ea typeface="Malgun Gothic"/>
+                <a:cs typeface="Malgun Gothic"/>
+              </a:rPr>
+              <a:t>Plan Mode가 기본값</a:t>
+            </a:r>
+            <a:r>
+              <a:rPr sz="1800" b="0" i="0">
+                <a:solidFill>
+                  <a:srgbClr val="ECECEA"/>
+                </a:solidFill>
+                <a:latin typeface="Malgun Gothic"/>
+                <a:ea typeface="Malgun Gothic"/>
+                <a:cs typeface="Malgun Gothic"/>
+              </a:rPr>
+              <a:t> 이라고 생각하세요</a:t>
             </a:r>
           </a:p>
           <a:p>
             <a:pPr>
               <a:spcAft>
-                <a:spcPts val="800"/>
+                <a:spcPts val="1800"/>
               </a:spcAft>
             </a:pPr>
             <a:r>
-              <a:rPr sz="1600" b="1" i="0">
+              <a:rPr sz="1800" b="1" i="0">
                 <a:solidFill>
                   <a:srgbClr val="D97757"/>
                 </a:solidFill>
@@ -14328,7 +14435,7 @@
               <a:t>•  </a:t>
             </a:r>
             <a:r>
-              <a:rPr sz="1600" b="0" i="0">
+              <a:rPr sz="1800" b="0" i="0">
                 <a:solidFill>
                   <a:srgbClr val="ECECEA"/>
                 </a:solidFill>
@@ -14336,14 +14443,54 @@
                 <a:ea typeface="Malgun Gothic"/>
                 <a:cs typeface="Malgun Gothic"/>
               </a:rPr>
-              <a:t>MCP로 외부 도구 연결 · 어디서든 사용</a:t>
-            </a:r>
-          </a:p>
-        </p:txBody>
-      </p:sp>
-      <p:sp>
-        <p:nvSpPr>
-          <p:cNvPr id="7" name="TextBox 6"/>
+              <a:t>커밋 메시지 · PR 설명은 이제 Claude의 일</a:t>
+            </a:r>
+          </a:p>
+          <a:p>
+            <a:pPr>
+              <a:spcAft>
+                <a:spcPts val="1800"/>
+              </a:spcAft>
+            </a:pPr>
+            <a:r>
+              <a:rPr sz="1800" b="1" i="0">
+                <a:solidFill>
+                  <a:srgbClr val="D97757"/>
+                </a:solidFill>
+                <a:latin typeface="Malgun Gothic"/>
+                <a:ea typeface="Malgun Gothic"/>
+                <a:cs typeface="Malgun Gothic"/>
+              </a:rPr>
+              <a:t>•  </a:t>
+            </a:r>
+            <a:r>
+              <a:rPr sz="1800" b="1" i="0">
+                <a:solidFill>
+                  <a:srgbClr val="8FBC6F"/>
+                </a:solidFill>
+                <a:latin typeface="Malgun Gothic"/>
+                <a:ea typeface="Malgun Gothic"/>
+                <a:cs typeface="Malgun Gothic"/>
+              </a:rPr>
+              <a:t>실습 과제</a:t>
+            </a:r>
+            <a:r>
+              <a:rPr sz="1800" b="0" i="0">
+                <a:solidFill>
+                  <a:srgbClr val="ECECEA"/>
+                </a:solidFill>
+                <a:latin typeface="Malgun Gothic"/>
+                <a:ea typeface="Malgun Gothic"/>
+                <a:cs typeface="Malgun Gothic"/>
+              </a:rPr>
+              <a:t>  ① /init 실행 후 CLAUDE.md 다듬기 ② Plan Mode로 작은 리팩터링 ③ PR 1건 생성</a:t>
+            </a:r>
+          </a:p>
+        </p:txBody>
+      </p:sp>
+      <p:sp>
+        <p:nvSpPr>
+          <p:cNvPr id="5" name="TextBox 4"/>
           <p:cNvSpPr txBox="1"/>
           <p:nvPr/>
         </p:nvSpPr>
@@ -14372,14 +14519,14 @@
                 <a:ea typeface="Malgun Gothic"/>
                 <a:cs typeface="Malgun Gothic"/>
               </a:rPr>
-              <a:t>Level 3</a:t>
-            </a:r>
-          </a:p>
-        </p:txBody>
-      </p:sp>
-      <p:sp>
-        <p:nvSpPr>
-          <p:cNvPr id="8" name="TextBox 7"/>
+              <a:t>Level 2 · 업무에 붙이기</a:t>
+            </a:r>
+          </a:p>
+        </p:txBody>
+      </p:sp>
+      <p:sp>
+        <p:nvSpPr>
+          <p:cNvPr id="6" name="TextBox 5"/>
           <p:cNvSpPr txBox="1"/>
           <p:nvPr/>
         </p:nvSpPr>
@@ -14442,16 +14589,16 @@
       <p:grpSpPr/>
       <p:sp>
         <p:nvSpPr>
-          <p:cNvPr id="2" name="Rounded Rectangle 1"/>
+          <p:cNvPr id="2" name="Rectangle 1"/>
           <p:cNvSpPr/>
           <p:nvPr/>
         </p:nvSpPr>
         <p:spPr>
           <a:xfrm>
-            <a:off x="457200" y="566928"/>
-            <a:ext cx="502920" cy="64008"/>
-          </a:xfrm>
-          <a:prstGeom prst="roundRect">
+            <a:off x="0" y="1828800"/>
+            <a:ext cx="164592" cy="3200400"/>
+          </a:xfrm>
+          <a:prstGeom prst="rect">
             <a:avLst/>
           </a:prstGeom>
           <a:solidFill>
@@ -14491,8 +14638,8 @@
         </p:nvSpPr>
         <p:spPr>
           <a:xfrm>
-            <a:off x="411480" y="713232"/>
-            <a:ext cx="11338560" cy="822960"/>
+            <a:off x="777240" y="1874519"/>
+            <a:ext cx="10515600" cy="914400"/>
           </a:xfrm>
           <a:prstGeom prst="rect">
             <a:avLst/>
@@ -14506,7 +14653,43 @@
           <a:lstStyle/>
           <a:p>
             <a:r>
-              <a:rPr sz="3000" b="1" i="0">
+              <a:rPr sz="1700" b="1" i="0">
+                <a:solidFill>
+                  <a:srgbClr val="D97757"/>
+                </a:solidFill>
+                <a:latin typeface="Malgun Gothic"/>
+                <a:ea typeface="Malgun Gothic"/>
+                <a:cs typeface="Malgun Gothic"/>
+              </a:rPr>
+              <a:t>Level 3</a:t>
+            </a:r>
+          </a:p>
+        </p:txBody>
+      </p:sp>
+      <p:sp>
+        <p:nvSpPr>
+          <p:cNvPr id="4" name="TextBox 3"/>
+          <p:cNvSpPr txBox="1"/>
+          <p:nvPr/>
+        </p:nvSpPr>
+        <p:spPr>
+          <a:xfrm>
+            <a:off x="777240" y="2240280"/>
+            <a:ext cx="10515600" cy="1188720"/>
+          </a:xfrm>
+          <a:prstGeom prst="rect">
+            <a:avLst/>
+          </a:prstGeom>
+          <a:noFill/>
+        </p:spPr>
+        <p:txBody>
+          <a:bodyPr wrap="square" anchor="t">
+            <a:spAutoFit/>
+          </a:bodyPr>
+          <a:lstStyle/>
+          <a:p>
+            <a:r>
+              <a:rPr sz="4000" b="1" i="0">
                 <a:solidFill>
                   <a:srgbClr val="ECECEA"/>
                 </a:solidFill>
@@ -14514,21 +14697,21 @@
                 <a:ea typeface="Malgun Gothic"/>
                 <a:cs typeface="Malgun Gothic"/>
               </a:rPr>
-              <a:t>커스텀 슬래시 커맨드 &amp; 스킬</a:t>
-            </a:r>
-          </a:p>
-        </p:txBody>
-      </p:sp>
-      <p:sp>
-        <p:nvSpPr>
-          <p:cNvPr id="4" name="TextBox 3"/>
-          <p:cNvSpPr txBox="1"/>
-          <p:nvPr/>
-        </p:nvSpPr>
-        <p:spPr>
-          <a:xfrm>
-            <a:off x="429768" y="1298448"/>
-            <a:ext cx="11338560" cy="457200"/>
+              <a:t>확장하기</a:t>
+            </a:r>
+          </a:p>
+        </p:txBody>
+      </p:sp>
+      <p:sp>
+        <p:nvSpPr>
+          <p:cNvPr id="5" name="TextBox 4"/>
+          <p:cNvSpPr txBox="1"/>
+          <p:nvPr/>
+        </p:nvSpPr>
+        <p:spPr>
+          <a:xfrm>
+            <a:off x="795528" y="3200400"/>
+            <a:ext cx="10515600" cy="548640"/>
           </a:xfrm>
           <a:prstGeom prst="rect">
             <a:avLst/>
@@ -14542,7 +14725,7 @@
           <a:lstStyle/>
           <a:p>
             <a:r>
-              <a:rPr sz="1500" b="0" i="0">
+              <a:rPr sz="1700" b="0" i="0">
                 <a:solidFill>
                   <a:srgbClr val="9B9B93"/>
                 </a:solidFill>
@@ -14550,21 +14733,21 @@
                 <a:ea typeface="Malgun Gothic"/>
                 <a:cs typeface="Malgun Gothic"/>
               </a:rPr>
-              <a:t>자주 하는 요청을 나만의 명령으로 저장하세요.</a:t>
-            </a:r>
-          </a:p>
-        </p:txBody>
-      </p:sp>
-      <p:sp>
-        <p:nvSpPr>
-          <p:cNvPr id="5" name="TextBox 4"/>
-          <p:cNvSpPr txBox="1"/>
-          <p:nvPr/>
-        </p:nvSpPr>
-        <p:spPr>
-          <a:xfrm>
-            <a:off x="640080" y="1920240"/>
-            <a:ext cx="10972800" cy="4572000"/>
+              <a:t>"이런 것도 된다" — 필요해졌을 때 돌아와서 깊게 보세요.</a:t>
+            </a:r>
+          </a:p>
+        </p:txBody>
+      </p:sp>
+      <p:sp>
+        <p:nvSpPr>
+          <p:cNvPr id="6" name="TextBox 5"/>
+          <p:cNvSpPr txBox="1"/>
+          <p:nvPr/>
+        </p:nvSpPr>
+        <p:spPr>
+          <a:xfrm>
+            <a:off x="795528" y="3886200"/>
+            <a:ext cx="10515600" cy="4572000"/>
           </a:xfrm>
           <a:prstGeom prst="rect">
             <a:avLst/>
@@ -14579,11 +14762,11 @@
           <a:p>
             <a:pPr>
               <a:spcAft>
-                <a:spcPts val="1300"/>
+                <a:spcPts val="800"/>
               </a:spcAft>
             </a:pPr>
             <a:r>
-              <a:rPr sz="1700" b="1" i="0">
+              <a:rPr sz="1600" b="1" i="0">
                 <a:solidFill>
                   <a:srgbClr val="D97757"/>
                 </a:solidFill>
@@ -14594,18 +14777,7 @@
               <a:t>•  </a:t>
             </a:r>
             <a:r>
-              <a:rPr sz="1700" b="1" i="0">
-                <a:solidFill>
-                  <a:srgbClr val="D97757"/>
-                </a:solidFill>
-                <a:latin typeface="Malgun Gothic"/>
-                <a:ea typeface="Malgun Gothic"/>
-                <a:cs typeface="Malgun Gothic"/>
-              </a:rPr>
-              <a:t>.claude/commands/deploy-check.md</a:t>
-            </a:r>
-            <a:r>
-              <a:rPr sz="1700" b="0" i="0">
+              <a:rPr sz="1600" b="0" i="0">
                 <a:solidFill>
                   <a:srgbClr val="ECECEA"/>
                 </a:solidFill>
@@ -14613,39 +14785,17 @@
                 <a:ea typeface="Malgun Gothic"/>
                 <a:cs typeface="Malgun Gothic"/>
               </a:rPr>
-              <a:t> 파일을 만들면 → </a:t>
-            </a:r>
-            <a:r>
-              <a:rPr sz="1700" b="1" i="0">
-                <a:solidFill>
-                  <a:srgbClr val="D97757"/>
-                </a:solidFill>
-                <a:latin typeface="Malgun Gothic"/>
-                <a:ea typeface="Malgun Gothic"/>
-                <a:cs typeface="Malgun Gothic"/>
-              </a:rPr>
-              <a:t>/deploy-check</a:t>
-            </a:r>
-            <a:r>
-              <a:rPr sz="1700" b="0" i="0">
-                <a:solidFill>
-                  <a:srgbClr val="ECECEA"/>
-                </a:solidFill>
-                <a:latin typeface="Malgun Gothic"/>
-                <a:ea typeface="Malgun Gothic"/>
-                <a:cs typeface="Malgun Gothic"/>
-              </a:rPr>
-              <a:t> 명령 완성</a:t>
+              <a:t>반복 작업 자동화 (커스텀 커맨드 · 스킬 · Hooks)</a:t>
             </a:r>
           </a:p>
           <a:p>
             <a:pPr>
               <a:spcAft>
-                <a:spcPts val="1300"/>
+                <a:spcPts val="800"/>
               </a:spcAft>
             </a:pPr>
             <a:r>
-              <a:rPr sz="1700" b="1" i="0">
+              <a:rPr sz="1600" b="1" i="0">
                 <a:solidFill>
                   <a:srgbClr val="D97757"/>
                 </a:solidFill>
@@ -14656,7 +14806,7 @@
               <a:t>•  </a:t>
             </a:r>
             <a:r>
-              <a:rPr sz="1700" b="0" i="0">
+              <a:rPr sz="1600" b="0" i="0">
                 <a:solidFill>
                   <a:srgbClr val="ECECEA"/>
                 </a:solidFill>
@@ -14664,17 +14814,17 @@
                 <a:ea typeface="Malgun Gothic"/>
                 <a:cs typeface="Malgun Gothic"/>
               </a:rPr>
-              <a:t>프롬프트를 파일로 저장하는 것 — 마크다운만 알면 됩니다</a:t>
+              <a:t>서브에이전트로 병렬 작업</a:t>
             </a:r>
           </a:p>
           <a:p>
             <a:pPr>
               <a:spcAft>
-                <a:spcPts val="1300"/>
+                <a:spcPts val="800"/>
               </a:spcAft>
             </a:pPr>
             <a:r>
-              <a:rPr sz="1700" b="1" i="0">
+              <a:rPr sz="1600" b="1" i="0">
                 <a:solidFill>
                   <a:srgbClr val="D97757"/>
                 </a:solidFill>
@@ -14685,7 +14835,7 @@
               <a:t>•  </a:t>
             </a:r>
             <a:r>
-              <a:rPr sz="1700" b="1" i="0">
+              <a:rPr sz="1600" b="0" i="0">
                 <a:solidFill>
                   <a:srgbClr val="ECECEA"/>
                 </a:solidFill>
@@ -14693,90 +14843,14 @@
                 <a:ea typeface="Malgun Gothic"/>
                 <a:cs typeface="Malgun Gothic"/>
               </a:rPr>
-              <a:t>스킬(Skills)</a:t>
-            </a:r>
-            <a:r>
-              <a:rPr sz="1700" b="0" i="0">
-                <a:solidFill>
-                  <a:srgbClr val="ECECEA"/>
-                </a:solidFill>
-                <a:latin typeface="Malgun Gothic"/>
-                <a:ea typeface="Malgun Gothic"/>
-                <a:cs typeface="Malgun Gothic"/>
-              </a:rPr>
-              <a:t> 은 더 큰 단위 — 절차·체크리스트·스크립트를 묶은 재사용 패키지</a:t>
-            </a:r>
-          </a:p>
-          <a:p>
-            <a:pPr>
-              <a:spcAft>
-                <a:spcPts val="1300"/>
-              </a:spcAft>
-            </a:pPr>
-            <a:r>
-              <a:rPr sz="1700" b="1" i="0">
-                <a:solidFill>
-                  <a:srgbClr val="D97757"/>
-                </a:solidFill>
-                <a:latin typeface="Malgun Gothic"/>
-                <a:ea typeface="Malgun Gothic"/>
-                <a:cs typeface="Malgun Gothic"/>
-              </a:rPr>
-              <a:t>•  </a:t>
-            </a:r>
-            <a:r>
-              <a:rPr sz="1700" b="1" i="0">
-                <a:solidFill>
-                  <a:srgbClr val="ECECEA"/>
-                </a:solidFill>
-                <a:latin typeface="Malgun Gothic"/>
-                <a:ea typeface="Malgun Gothic"/>
-                <a:cs typeface="Malgun Gothic"/>
-              </a:rPr>
-              <a:t>활용 예</a:t>
-            </a:r>
-          </a:p>
-          <a:p>
-            <a:pPr>
-              <a:spcAft>
-                <a:spcPts val="1300"/>
-              </a:spcAft>
-            </a:pPr>
-            <a:r>
-              <a:rPr sz="1400" b="0" i="0">
-                <a:solidFill>
-                  <a:srgbClr val="9B9B93"/>
-                </a:solidFill>
-                <a:latin typeface="Malgun Gothic"/>
-                <a:ea typeface="Malgun Gothic"/>
-                <a:cs typeface="Malgun Gothic"/>
-              </a:rPr>
-              <a:t>     /review-pr — 우리 팀 체크리스트로 코드 리뷰</a:t>
-            </a:r>
-          </a:p>
-          <a:p>
-            <a:pPr>
-              <a:spcAft>
-                <a:spcPts val="1300"/>
-              </a:spcAft>
-            </a:pPr>
-            <a:r>
-              <a:rPr sz="1400" b="0" i="0">
-                <a:solidFill>
-                  <a:srgbClr val="9B9B93"/>
-                </a:solidFill>
-                <a:latin typeface="Malgun Gothic"/>
-                <a:ea typeface="Malgun Gothic"/>
-                <a:cs typeface="Malgun Gothic"/>
-              </a:rPr>
-              <a:t>     /release-note — 커밋 로그에서 릴리스 노트 생성</a:t>
-            </a:r>
-          </a:p>
-        </p:txBody>
-      </p:sp>
-      <p:sp>
-        <p:nvSpPr>
-          <p:cNvPr id="6" name="TextBox 5"/>
+              <a:t>MCP로 외부 도구 연결 · 어디서든 사용</a:t>
+            </a:r>
+          </a:p>
+        </p:txBody>
+      </p:sp>
+      <p:sp>
+        <p:nvSpPr>
+          <p:cNvPr id="7" name="TextBox 6"/>
           <p:cNvSpPr txBox="1"/>
           <p:nvPr/>
         </p:nvSpPr>
@@ -14805,14 +14879,14 @@
                 <a:ea typeface="Malgun Gothic"/>
                 <a:cs typeface="Malgun Gothic"/>
               </a:rPr>
-              <a:t>Level 3 · 확장하기</a:t>
-            </a:r>
-          </a:p>
-        </p:txBody>
-      </p:sp>
-      <p:sp>
-        <p:nvSpPr>
-          <p:cNvPr id="7" name="TextBox 6"/>
+              <a:t>Level 3</a:t>
+            </a:r>
+          </a:p>
+        </p:txBody>
+      </p:sp>
+      <p:sp>
+        <p:nvSpPr>
+          <p:cNvPr id="8" name="TextBox 7"/>
           <p:cNvSpPr txBox="1"/>
           <p:nvPr/>
         </p:nvSpPr>
@@ -14947,7 +15021,7 @@
                 <a:ea typeface="Malgun Gothic"/>
                 <a:cs typeface="Malgun Gothic"/>
               </a:rPr>
-              <a:t>서브에이전트 — 일을 나눠 맡기기</a:t>
+              <a:t>커스텀 슬래시 커맨드 &amp; 스킬</a:t>
             </a:r>
           </a:p>
         </p:txBody>
@@ -14955,6 +15029,42 @@
       <p:sp>
         <p:nvSpPr>
           <p:cNvPr id="4" name="TextBox 3"/>
+          <p:cNvSpPr txBox="1"/>
+          <p:nvPr/>
+        </p:nvSpPr>
+        <p:spPr>
+          <a:xfrm>
+            <a:off x="429768" y="1298448"/>
+            <a:ext cx="11338560" cy="457200"/>
+          </a:xfrm>
+          <a:prstGeom prst="rect">
+            <a:avLst/>
+          </a:prstGeom>
+          <a:noFill/>
+        </p:spPr>
+        <p:txBody>
+          <a:bodyPr wrap="square" anchor="t">
+            <a:spAutoFit/>
+          </a:bodyPr>
+          <a:lstStyle/>
+          <a:p>
+            <a:r>
+              <a:rPr sz="1500" b="0" i="0">
+                <a:solidFill>
+                  <a:srgbClr val="9B9B93"/>
+                </a:solidFill>
+                <a:latin typeface="Malgun Gothic"/>
+                <a:ea typeface="Malgun Gothic"/>
+                <a:cs typeface="Malgun Gothic"/>
+              </a:rPr>
+              <a:t>자주 하는 요청을 나만의 명령으로 저장하세요.</a:t>
+            </a:r>
+          </a:p>
+        </p:txBody>
+      </p:sp>
+      <p:sp>
+        <p:nvSpPr>
+          <p:cNvPr id="5" name="TextBox 4"/>
           <p:cNvSpPr txBox="1"/>
           <p:nvPr/>
         </p:nvSpPr>
@@ -14976,7 +15086,7 @@
           <a:p>
             <a:pPr>
               <a:spcAft>
-                <a:spcPts val="1200"/>
+                <a:spcPts val="1300"/>
               </a:spcAft>
             </a:pPr>
             <a:r>
@@ -14991,6 +15101,17 @@
               <a:t>•  </a:t>
             </a:r>
             <a:r>
+              <a:rPr sz="1700" b="1" i="0">
+                <a:solidFill>
+                  <a:srgbClr val="D97757"/>
+                </a:solidFill>
+                <a:latin typeface="Malgun Gothic"/>
+                <a:ea typeface="Malgun Gothic"/>
+                <a:cs typeface="Malgun Gothic"/>
+              </a:rPr>
+              <a:t>.claude/commands/deploy-check.md</a:t>
+            </a:r>
+            <a:r>
               <a:rPr sz="1700" b="0" i="0">
                 <a:solidFill>
                   <a:srgbClr val="ECECEA"/>
@@ -14999,7 +15120,7 @@
                 <a:ea typeface="Malgun Gothic"/>
                 <a:cs typeface="Malgun Gothic"/>
               </a:rPr>
-              <a:t>별도 컨텍스트에서 도는 </a:t>
+              <a:t> 파일을 만들면 → </a:t>
             </a:r>
             <a:r>
               <a:rPr sz="1700" b="1" i="0">
@@ -15010,7 +15131,7 @@
                 <a:ea typeface="Malgun Gothic"/>
                 <a:cs typeface="Malgun Gothic"/>
               </a:rPr>
-              <a:t>보조 Claude</a:t>
+              <a:t>/deploy-check</a:t>
             </a:r>
             <a:r>
               <a:rPr sz="1700" b="0" i="0">
@@ -15021,13 +15142,13 @@
                 <a:ea typeface="Malgun Gothic"/>
                 <a:cs typeface="Malgun Gothic"/>
               </a:rPr>
-              <a:t> — 역할·도구·모델을 지정해 정의</a:t>
+              <a:t> 명령 완성</a:t>
             </a:r>
           </a:p>
           <a:p>
             <a:pPr>
               <a:spcAft>
-                <a:spcPts val="1200"/>
+                <a:spcPts val="1300"/>
               </a:spcAft>
             </a:pPr>
             <a:r>
@@ -15050,13 +15171,13 @@
                 <a:ea typeface="Malgun Gothic"/>
                 <a:cs typeface="Malgun Gothic"/>
               </a:rPr>
-              <a:t>본 대화를 어지럽히지 않고 큰 탐색·검증 작업을 위임</a:t>
+              <a:t>프롬프트를 파일로 저장하는 것 — 마크다운만 알면 됩니다</a:t>
             </a:r>
           </a:p>
           <a:p>
             <a:pPr>
               <a:spcAft>
-                <a:spcPts val="1200"/>
+                <a:spcPts val="1300"/>
               </a:spcAft>
             </a:pPr>
             <a:r>
@@ -15079,31 +15200,53 @@
                 <a:ea typeface="Malgun Gothic"/>
                 <a:cs typeface="Malgun Gothic"/>
               </a:rPr>
-              <a:t>활용 예</a:t>
+              <a:t>스킬(Skills)</a:t>
+            </a:r>
+            <a:r>
+              <a:rPr sz="1700" b="0" i="0">
+                <a:solidFill>
+                  <a:srgbClr val="ECECEA"/>
+                </a:solidFill>
+                <a:latin typeface="Malgun Gothic"/>
+                <a:ea typeface="Malgun Gothic"/>
+                <a:cs typeface="Malgun Gothic"/>
+              </a:rPr>
+              <a:t> 은 더 큰 단위 — 절차·체크리스트·스크립트를 묶은 재사용 패키지</a:t>
             </a:r>
           </a:p>
           <a:p>
             <a:pPr>
               <a:spcAft>
-                <a:spcPts val="1200"/>
+                <a:spcPts val="1300"/>
               </a:spcAft>
             </a:pPr>
             <a:r>
-              <a:rPr sz="1400" b="0" i="0">
-                <a:solidFill>
-                  <a:srgbClr val="9B9B93"/>
-                </a:solidFill>
-                <a:latin typeface="Malgun Gothic"/>
-                <a:ea typeface="Malgun Gothic"/>
-                <a:cs typeface="Malgun Gothic"/>
-              </a:rPr>
-              <a:t>     코드 리뷰어 에이전트 — 변경마다 자동으로 버그 사냥</a:t>
+              <a:rPr sz="1700" b="1" i="0">
+                <a:solidFill>
+                  <a:srgbClr val="D97757"/>
+                </a:solidFill>
+                <a:latin typeface="Malgun Gothic"/>
+                <a:ea typeface="Malgun Gothic"/>
+                <a:cs typeface="Malgun Gothic"/>
+              </a:rPr>
+              <a:t>•  </a:t>
+            </a:r>
+            <a:r>
+              <a:rPr sz="1700" b="1" i="0">
+                <a:solidFill>
+                  <a:srgbClr val="ECECEA"/>
+                </a:solidFill>
+                <a:latin typeface="Malgun Gothic"/>
+                <a:ea typeface="Malgun Gothic"/>
+                <a:cs typeface="Malgun Gothic"/>
+              </a:rPr>
+              <a:t>활용 예</a:t>
             </a:r>
           </a:p>
           <a:p>
             <a:pPr>
               <a:spcAft>
-                <a:spcPts val="1200"/>
+                <a:spcPts val="1300"/>
               </a:spcAft>
             </a:pPr>
             <a:r>
@@ -15115,13 +15258,13 @@
                 <a:ea typeface="Malgun Gothic"/>
                 <a:cs typeface="Malgun Gothic"/>
               </a:rPr>
-              <a:t>     테스트 러너 에이전트 — 실패한 테스트만 골라 수정 제안</a:t>
+              <a:t>     /review-pr — 우리 팀 체크리스트로 코드 리뷰</a:t>
             </a:r>
           </a:p>
           <a:p>
             <a:pPr>
               <a:spcAft>
-                <a:spcPts val="1200"/>
+                <a:spcPts val="1300"/>
               </a:spcAft>
             </a:pPr>
             <a:r>
@@ -15133,54 +15276,14 @@
                 <a:ea typeface="Malgun Gothic"/>
                 <a:cs typeface="Malgun Gothic"/>
               </a:rPr>
-              <a:t>     탐색 에이전트 — 넓은 코드베이스에서 관련 코드 수집</a:t>
-            </a:r>
-          </a:p>
-          <a:p>
-            <a:pPr>
-              <a:spcAft>
-                <a:spcPts val="1200"/>
-              </a:spcAft>
-            </a:pPr>
-            <a:r>
-              <a:rPr sz="1700" b="1" i="0">
-                <a:solidFill>
-                  <a:srgbClr val="D97757"/>
-                </a:solidFill>
-                <a:latin typeface="Malgun Gothic"/>
-                <a:ea typeface="Malgun Gothic"/>
-                <a:cs typeface="Malgun Gothic"/>
-              </a:rPr>
-              <a:t>•  </a:t>
-            </a:r>
-            <a:r>
-              <a:rPr sz="1700" b="1" i="0">
-                <a:solidFill>
-                  <a:srgbClr val="D97757"/>
-                </a:solidFill>
-                <a:latin typeface="Malgun Gothic"/>
-                <a:ea typeface="Malgun Gothic"/>
-                <a:cs typeface="Malgun Gothic"/>
-              </a:rPr>
-              <a:t>.claude/agents/</a:t>
-            </a:r>
-            <a:r>
-              <a:rPr sz="1700" b="0" i="0">
-                <a:solidFill>
-                  <a:srgbClr val="ECECEA"/>
-                </a:solidFill>
-                <a:latin typeface="Malgun Gothic"/>
-                <a:ea typeface="Malgun Gothic"/>
-                <a:cs typeface="Malgun Gothic"/>
-              </a:rPr>
-              <a:t> 폴더에 마크다운으로 정의합니다</a:t>
-            </a:r>
-          </a:p>
-        </p:txBody>
-      </p:sp>
-      <p:sp>
-        <p:nvSpPr>
-          <p:cNvPr id="5" name="TextBox 4"/>
+              <a:t>     /release-note — 커밋 로그에서 릴리스 노트 생성</a:t>
+            </a:r>
+          </a:p>
+        </p:txBody>
+      </p:sp>
+      <p:sp>
+        <p:nvSpPr>
+          <p:cNvPr id="6" name="TextBox 5"/>
           <p:cNvSpPr txBox="1"/>
           <p:nvPr/>
         </p:nvSpPr>
@@ -15216,7 +15319,7 @@
       </p:sp>
       <p:sp>
         <p:nvSpPr>
-          <p:cNvPr id="6" name="TextBox 5"/>
+          <p:cNvPr id="7" name="TextBox 6"/>
           <p:cNvSpPr txBox="1"/>
           <p:nvPr/>
         </p:nvSpPr>
@@ -15351,35 +15454,237 @@
                 <a:ea typeface="Malgun Gothic"/>
                 <a:cs typeface="Malgun Gothic"/>
               </a:rPr>
-              <a:t>MCP — 외부 도구 연결</a:t>
-            </a:r>
-          </a:p>
-        </p:txBody>
-      </p:sp>
-      <p:pic>
-        <p:nvPicPr>
-          <p:cNvPr id="4" name="Picture 3" descr="diagram-mcp.png"/>
-          <p:cNvPicPr>
-            <a:picLocks noChangeAspect="1"/>
-          </p:cNvPicPr>
-          <p:nvPr/>
-        </p:nvPicPr>
-        <p:blipFill>
-          <a:blip r:embed="rId2"/>
-          <a:stretch>
-            <a:fillRect/>
-          </a:stretch>
-        </p:blipFill>
-        <p:spPr>
-          <a:xfrm>
-            <a:off x="1569567" y="1600200"/>
-            <a:ext cx="9052560" cy="5092065"/>
-          </a:xfrm>
-          <a:prstGeom prst="rect">
-            <a:avLst/>
-          </a:prstGeom>
-        </p:spPr>
-      </p:pic>
+              <a:t>서브에이전트 — 일을 나눠 맡기기</a:t>
+            </a:r>
+          </a:p>
+        </p:txBody>
+      </p:sp>
+      <p:sp>
+        <p:nvSpPr>
+          <p:cNvPr id="4" name="TextBox 3"/>
+          <p:cNvSpPr txBox="1"/>
+          <p:nvPr/>
+        </p:nvSpPr>
+        <p:spPr>
+          <a:xfrm>
+            <a:off x="640080" y="1920240"/>
+            <a:ext cx="10972800" cy="4572000"/>
+          </a:xfrm>
+          <a:prstGeom prst="rect">
+            <a:avLst/>
+          </a:prstGeom>
+          <a:noFill/>
+        </p:spPr>
+        <p:txBody>
+          <a:bodyPr wrap="square" anchor="t">
+            <a:spAutoFit/>
+          </a:bodyPr>
+          <a:lstStyle/>
+          <a:p>
+            <a:pPr>
+              <a:spcAft>
+                <a:spcPts val="1200"/>
+              </a:spcAft>
+            </a:pPr>
+            <a:r>
+              <a:rPr sz="1700" b="1" i="0">
+                <a:solidFill>
+                  <a:srgbClr val="D97757"/>
+                </a:solidFill>
+                <a:latin typeface="Malgun Gothic"/>
+                <a:ea typeface="Malgun Gothic"/>
+                <a:cs typeface="Malgun Gothic"/>
+              </a:rPr>
+              <a:t>•  </a:t>
+            </a:r>
+            <a:r>
+              <a:rPr sz="1700" b="0" i="0">
+                <a:solidFill>
+                  <a:srgbClr val="ECECEA"/>
+                </a:solidFill>
+                <a:latin typeface="Malgun Gothic"/>
+                <a:ea typeface="Malgun Gothic"/>
+                <a:cs typeface="Malgun Gothic"/>
+              </a:rPr>
+              <a:t>별도 컨텍스트에서 도는 </a:t>
+            </a:r>
+            <a:r>
+              <a:rPr sz="1700" b="1" i="0">
+                <a:solidFill>
+                  <a:srgbClr val="D97757"/>
+                </a:solidFill>
+                <a:latin typeface="Malgun Gothic"/>
+                <a:ea typeface="Malgun Gothic"/>
+                <a:cs typeface="Malgun Gothic"/>
+              </a:rPr>
+              <a:t>보조 Claude</a:t>
+            </a:r>
+            <a:r>
+              <a:rPr sz="1700" b="0" i="0">
+                <a:solidFill>
+                  <a:srgbClr val="ECECEA"/>
+                </a:solidFill>
+                <a:latin typeface="Malgun Gothic"/>
+                <a:ea typeface="Malgun Gothic"/>
+                <a:cs typeface="Malgun Gothic"/>
+              </a:rPr>
+              <a:t> — 역할·도구·모델을 지정해 정의</a:t>
+            </a:r>
+          </a:p>
+          <a:p>
+            <a:pPr>
+              <a:spcAft>
+                <a:spcPts val="1200"/>
+              </a:spcAft>
+            </a:pPr>
+            <a:r>
+              <a:rPr sz="1700" b="1" i="0">
+                <a:solidFill>
+                  <a:srgbClr val="D97757"/>
+                </a:solidFill>
+                <a:latin typeface="Malgun Gothic"/>
+                <a:ea typeface="Malgun Gothic"/>
+                <a:cs typeface="Malgun Gothic"/>
+              </a:rPr>
+              <a:t>•  </a:t>
+            </a:r>
+            <a:r>
+              <a:rPr sz="1700" b="0" i="0">
+                <a:solidFill>
+                  <a:srgbClr val="ECECEA"/>
+                </a:solidFill>
+                <a:latin typeface="Malgun Gothic"/>
+                <a:ea typeface="Malgun Gothic"/>
+                <a:cs typeface="Malgun Gothic"/>
+              </a:rPr>
+              <a:t>본 대화를 어지럽히지 않고 큰 탐색·검증 작업을 위임</a:t>
+            </a:r>
+          </a:p>
+          <a:p>
+            <a:pPr>
+              <a:spcAft>
+                <a:spcPts val="1200"/>
+              </a:spcAft>
+            </a:pPr>
+            <a:r>
+              <a:rPr sz="1700" b="1" i="0">
+                <a:solidFill>
+                  <a:srgbClr val="D97757"/>
+                </a:solidFill>
+                <a:latin typeface="Malgun Gothic"/>
+                <a:ea typeface="Malgun Gothic"/>
+                <a:cs typeface="Malgun Gothic"/>
+              </a:rPr>
+              <a:t>•  </a:t>
+            </a:r>
+            <a:r>
+              <a:rPr sz="1700" b="1" i="0">
+                <a:solidFill>
+                  <a:srgbClr val="ECECEA"/>
+                </a:solidFill>
+                <a:latin typeface="Malgun Gothic"/>
+                <a:ea typeface="Malgun Gothic"/>
+                <a:cs typeface="Malgun Gothic"/>
+              </a:rPr>
+              <a:t>활용 예</a:t>
+            </a:r>
+          </a:p>
+          <a:p>
+            <a:pPr>
+              <a:spcAft>
+                <a:spcPts val="1200"/>
+              </a:spcAft>
+            </a:pPr>
+            <a:r>
+              <a:rPr sz="1400" b="0" i="0">
+                <a:solidFill>
+                  <a:srgbClr val="9B9B93"/>
+                </a:solidFill>
+                <a:latin typeface="Malgun Gothic"/>
+                <a:ea typeface="Malgun Gothic"/>
+                <a:cs typeface="Malgun Gothic"/>
+              </a:rPr>
+              <a:t>     코드 리뷰어 에이전트 — 변경마다 자동으로 버그 사냥</a:t>
+            </a:r>
+          </a:p>
+          <a:p>
+            <a:pPr>
+              <a:spcAft>
+                <a:spcPts val="1200"/>
+              </a:spcAft>
+            </a:pPr>
+            <a:r>
+              <a:rPr sz="1400" b="0" i="0">
+                <a:solidFill>
+                  <a:srgbClr val="9B9B93"/>
+                </a:solidFill>
+                <a:latin typeface="Malgun Gothic"/>
+                <a:ea typeface="Malgun Gothic"/>
+                <a:cs typeface="Malgun Gothic"/>
+              </a:rPr>
+              <a:t>     테스트 러너 에이전트 — 실패한 테스트만 골라 수정 제안</a:t>
+            </a:r>
+          </a:p>
+          <a:p>
+            <a:pPr>
+              <a:spcAft>
+                <a:spcPts val="1200"/>
+              </a:spcAft>
+            </a:pPr>
+            <a:r>
+              <a:rPr sz="1400" b="0" i="0">
+                <a:solidFill>
+                  <a:srgbClr val="9B9B93"/>
+                </a:solidFill>
+                <a:latin typeface="Malgun Gothic"/>
+                <a:ea typeface="Malgun Gothic"/>
+                <a:cs typeface="Malgun Gothic"/>
+              </a:rPr>
+              <a:t>     탐색 에이전트 — 넓은 코드베이스에서 관련 코드 수집</a:t>
+            </a:r>
+          </a:p>
+          <a:p>
+            <a:pPr>
+              <a:spcAft>
+                <a:spcPts val="1200"/>
+              </a:spcAft>
+            </a:pPr>
+            <a:r>
+              <a:rPr sz="1700" b="1" i="0">
+                <a:solidFill>
+                  <a:srgbClr val="D97757"/>
+                </a:solidFill>
+                <a:latin typeface="Malgun Gothic"/>
+                <a:ea typeface="Malgun Gothic"/>
+                <a:cs typeface="Malgun Gothic"/>
+              </a:rPr>
+              <a:t>•  </a:t>
+            </a:r>
+            <a:r>
+              <a:rPr sz="1700" b="1" i="0">
+                <a:solidFill>
+                  <a:srgbClr val="D97757"/>
+                </a:solidFill>
+                <a:latin typeface="Malgun Gothic"/>
+                <a:ea typeface="Malgun Gothic"/>
+                <a:cs typeface="Malgun Gothic"/>
+              </a:rPr>
+              <a:t>.claude/agents/</a:t>
+            </a:r>
+            <a:r>
+              <a:rPr sz="1700" b="0" i="0">
+                <a:solidFill>
+                  <a:srgbClr val="ECECEA"/>
+                </a:solidFill>
+                <a:latin typeface="Malgun Gothic"/>
+                <a:ea typeface="Malgun Gothic"/>
+                <a:cs typeface="Malgun Gothic"/>
+              </a:rPr>
+              <a:t> 폴더에 마크다운으로 정의합니다</a:t>
+            </a:r>
+          </a:p>
+        </p:txBody>
+      </p:sp>
       <p:sp>
         <p:nvSpPr>
           <p:cNvPr id="5" name="TextBox 4"/>
@@ -16018,553 +16323,38 @@
                 <a:ea typeface="Malgun Gothic"/>
                 <a:cs typeface="Malgun Gothic"/>
               </a:rPr>
-              <a:t>Hooks — 규칙을 자동으로 강제하기</a:t>
-            </a:r>
-          </a:p>
-        </p:txBody>
-      </p:sp>
-      <p:sp>
-        <p:nvSpPr>
-          <p:cNvPr id="4" name="TextBox 3"/>
-          <p:cNvSpPr txBox="1"/>
-          <p:nvPr/>
-        </p:nvSpPr>
-        <p:spPr>
-          <a:xfrm>
-            <a:off x="429768" y="1298448"/>
-            <a:ext cx="11338560" cy="457200"/>
-          </a:xfrm>
-          <a:prstGeom prst="rect">
-            <a:avLst/>
-          </a:prstGeom>
-          <a:noFill/>
-        </p:spPr>
-        <p:txBody>
-          <a:bodyPr wrap="square" anchor="t">
-            <a:spAutoFit/>
-          </a:bodyPr>
-          <a:lstStyle/>
-          <a:p>
-            <a:r>
-              <a:rPr sz="1500" b="0" i="0">
-                <a:solidFill>
-                  <a:srgbClr val="9B9B93"/>
-                </a:solidFill>
-                <a:latin typeface="Malgun Gothic"/>
-                <a:ea typeface="Malgun Gothic"/>
-                <a:cs typeface="Malgun Gothic"/>
-              </a:rPr>
-              <a:t>Claude의 특정 동작 전후에 내 스크립트를 실행합니다.</a:t>
-            </a:r>
-          </a:p>
-        </p:txBody>
-      </p:sp>
-      <p:sp>
-        <p:nvSpPr>
-          <p:cNvPr id="5" name="Rounded Rectangle 4"/>
-          <p:cNvSpPr/>
-          <p:nvPr/>
-        </p:nvSpPr>
-        <p:spPr>
-          <a:xfrm>
-            <a:off x="548640" y="2011680"/>
-            <a:ext cx="3611880" cy="2377440"/>
-          </a:xfrm>
-          <a:prstGeom prst="roundRect">
-            <a:avLst/>
-          </a:prstGeom>
-          <a:solidFill>
-            <a:srgbClr val="222229"/>
-          </a:solidFill>
-          <a:ln>
-            <a:noFill/>
-          </a:ln>
-          <a:effectLst/>
-        </p:spPr>
-        <p:style>
-          <a:lnRef idx="1">
-            <a:schemeClr val="accent1"/>
-          </a:lnRef>
-          <a:fillRef idx="3">
-            <a:schemeClr val="accent1"/>
-          </a:fillRef>
-          <a:effectRef idx="2">
-            <a:schemeClr val="accent1"/>
-          </a:effectRef>
-          <a:fontRef idx="minor">
-            <a:schemeClr val="lt1"/>
-          </a:fontRef>
-        </p:style>
-        <p:txBody>
-          <a:bodyPr rtlCol="0" anchor="ctr"/>
-          <a:lstStyle/>
-          <a:p>
-            <a:pPr algn="ctr"/>
-          </a:p>
-        </p:txBody>
-      </p:sp>
-      <p:sp>
-        <p:nvSpPr>
-          <p:cNvPr id="6" name="TextBox 5"/>
-          <p:cNvSpPr txBox="1"/>
-          <p:nvPr/>
-        </p:nvSpPr>
-        <p:spPr>
-          <a:xfrm>
-            <a:off x="822960" y="2286000"/>
-            <a:ext cx="3063240" cy="457200"/>
-          </a:xfrm>
-          <a:prstGeom prst="rect">
-            <a:avLst/>
-          </a:prstGeom>
-          <a:noFill/>
-        </p:spPr>
-        <p:txBody>
-          <a:bodyPr wrap="square" anchor="t">
-            <a:spAutoFit/>
-          </a:bodyPr>
-          <a:lstStyle/>
-          <a:p>
-            <a:r>
-              <a:rPr sz="1400" b="1" i="0">
-                <a:solidFill>
-                  <a:srgbClr val="9B9B93"/>
-                </a:solidFill>
-                <a:latin typeface="Malgun Gothic"/>
-                <a:ea typeface="Malgun Gothic"/>
-                <a:cs typeface="Malgun Gothic"/>
-              </a:rPr>
-              <a:t>파일 수정 후</a:t>
-            </a:r>
-          </a:p>
-        </p:txBody>
-      </p:sp>
-      <p:sp>
-        <p:nvSpPr>
-          <p:cNvPr id="7" name="TextBox 6"/>
-          <p:cNvSpPr txBox="1"/>
-          <p:nvPr/>
-        </p:nvSpPr>
-        <p:spPr>
-          <a:xfrm>
-            <a:off x="822960" y="2743200"/>
-            <a:ext cx="3063240" cy="822960"/>
-          </a:xfrm>
-          <a:prstGeom prst="rect">
-            <a:avLst/>
-          </a:prstGeom>
-          <a:noFill/>
-        </p:spPr>
-        <p:txBody>
-          <a:bodyPr wrap="square" anchor="t">
-            <a:spAutoFit/>
-          </a:bodyPr>
-          <a:lstStyle/>
-          <a:p>
-            <a:r>
-              <a:rPr sz="1700" b="1" i="0">
-                <a:solidFill>
-                  <a:srgbClr val="ECECEA"/>
-                </a:solidFill>
-                <a:latin typeface="Malgun Gothic"/>
-                <a:ea typeface="Malgun Gothic"/>
-                <a:cs typeface="Malgun Gothic"/>
-              </a:rPr>
-              <a:t>자동으로 포매터 실행</a:t>
-            </a:r>
-          </a:p>
-        </p:txBody>
-      </p:sp>
-      <p:sp>
-        <p:nvSpPr>
-          <p:cNvPr id="8" name="TextBox 7"/>
-          <p:cNvSpPr txBox="1"/>
-          <p:nvPr/>
-        </p:nvSpPr>
-        <p:spPr>
-          <a:xfrm>
-            <a:off x="822960" y="3703320"/>
-            <a:ext cx="3063240" cy="548640"/>
-          </a:xfrm>
-          <a:prstGeom prst="rect">
-            <a:avLst/>
-          </a:prstGeom>
-          <a:noFill/>
-        </p:spPr>
-        <p:txBody>
-          <a:bodyPr wrap="square" anchor="t">
-            <a:spAutoFit/>
-          </a:bodyPr>
-          <a:lstStyle/>
-          <a:p>
-            <a:r>
-              <a:rPr sz="1300" b="0" i="0">
-                <a:solidFill>
-                  <a:srgbClr val="D97757"/>
-                </a:solidFill>
-                <a:latin typeface="Consolas"/>
-                <a:ea typeface="Consolas"/>
-                <a:cs typeface="Consolas"/>
-              </a:rPr>
-              <a:t>PostToolUse → prettier</a:t>
-            </a:r>
-          </a:p>
-        </p:txBody>
-      </p:sp>
-      <p:sp>
-        <p:nvSpPr>
-          <p:cNvPr id="9" name="Rounded Rectangle 8"/>
-          <p:cNvSpPr/>
-          <p:nvPr/>
-        </p:nvSpPr>
-        <p:spPr>
-          <a:xfrm>
-            <a:off x="4343400" y="2011680"/>
-            <a:ext cx="3611880" cy="2377440"/>
-          </a:xfrm>
-          <a:prstGeom prst="roundRect">
-            <a:avLst/>
-          </a:prstGeom>
-          <a:solidFill>
-            <a:srgbClr val="222229"/>
-          </a:solidFill>
-          <a:ln>
-            <a:noFill/>
-          </a:ln>
-          <a:effectLst/>
-        </p:spPr>
-        <p:style>
-          <a:lnRef idx="1">
-            <a:schemeClr val="accent1"/>
-          </a:lnRef>
-          <a:fillRef idx="3">
-            <a:schemeClr val="accent1"/>
-          </a:fillRef>
-          <a:effectRef idx="2">
-            <a:schemeClr val="accent1"/>
-          </a:effectRef>
-          <a:fontRef idx="minor">
-            <a:schemeClr val="lt1"/>
-          </a:fontRef>
-        </p:style>
-        <p:txBody>
-          <a:bodyPr rtlCol="0" anchor="ctr"/>
-          <a:lstStyle/>
-          <a:p>
-            <a:pPr algn="ctr"/>
-          </a:p>
-        </p:txBody>
-      </p:sp>
-      <p:sp>
-        <p:nvSpPr>
-          <p:cNvPr id="10" name="TextBox 9"/>
-          <p:cNvSpPr txBox="1"/>
-          <p:nvPr/>
-        </p:nvSpPr>
-        <p:spPr>
-          <a:xfrm>
-            <a:off x="4617720" y="2286000"/>
-            <a:ext cx="3063240" cy="457200"/>
-          </a:xfrm>
-          <a:prstGeom prst="rect">
-            <a:avLst/>
-          </a:prstGeom>
-          <a:noFill/>
-        </p:spPr>
-        <p:txBody>
-          <a:bodyPr wrap="square" anchor="t">
-            <a:spAutoFit/>
-          </a:bodyPr>
-          <a:lstStyle/>
-          <a:p>
-            <a:r>
-              <a:rPr sz="1400" b="1" i="0">
-                <a:solidFill>
-                  <a:srgbClr val="9B9B93"/>
-                </a:solidFill>
-                <a:latin typeface="Malgun Gothic"/>
-                <a:ea typeface="Malgun Gothic"/>
-                <a:cs typeface="Malgun Gothic"/>
-              </a:rPr>
-              <a:t>명령 실행 전</a:t>
-            </a:r>
-          </a:p>
-        </p:txBody>
-      </p:sp>
-      <p:sp>
-        <p:nvSpPr>
-          <p:cNvPr id="11" name="TextBox 10"/>
-          <p:cNvSpPr txBox="1"/>
-          <p:nvPr/>
-        </p:nvSpPr>
-        <p:spPr>
-          <a:xfrm>
-            <a:off x="4617720" y="2743200"/>
-            <a:ext cx="3063240" cy="822960"/>
-          </a:xfrm>
-          <a:prstGeom prst="rect">
-            <a:avLst/>
-          </a:prstGeom>
-          <a:noFill/>
-        </p:spPr>
-        <p:txBody>
-          <a:bodyPr wrap="square" anchor="t">
-            <a:spAutoFit/>
-          </a:bodyPr>
-          <a:lstStyle/>
-          <a:p>
-            <a:r>
-              <a:rPr sz="1700" b="1" i="0">
-                <a:solidFill>
-                  <a:srgbClr val="ECECEA"/>
-                </a:solidFill>
-                <a:latin typeface="Malgun Gothic"/>
-                <a:ea typeface="Malgun Gothic"/>
-                <a:cs typeface="Malgun Gothic"/>
-              </a:rPr>
-              <a:t>위험한 명령 차단</a:t>
-            </a:r>
-          </a:p>
-        </p:txBody>
-      </p:sp>
-      <p:sp>
-        <p:nvSpPr>
-          <p:cNvPr id="12" name="TextBox 11"/>
-          <p:cNvSpPr txBox="1"/>
-          <p:nvPr/>
-        </p:nvSpPr>
-        <p:spPr>
-          <a:xfrm>
-            <a:off x="4617720" y="3703320"/>
-            <a:ext cx="3063240" cy="548640"/>
-          </a:xfrm>
-          <a:prstGeom prst="rect">
-            <a:avLst/>
-          </a:prstGeom>
-          <a:noFill/>
-        </p:spPr>
-        <p:txBody>
-          <a:bodyPr wrap="square" anchor="t">
-            <a:spAutoFit/>
-          </a:bodyPr>
-          <a:lstStyle/>
-          <a:p>
-            <a:r>
-              <a:rPr sz="1300" b="0" i="0">
-                <a:solidFill>
-                  <a:srgbClr val="D97757"/>
-                </a:solidFill>
-                <a:latin typeface="Consolas"/>
-                <a:ea typeface="Consolas"/>
-                <a:cs typeface="Consolas"/>
-              </a:rPr>
-              <a:t>PreToolUse → rm -rf 금지</a:t>
-            </a:r>
-          </a:p>
-        </p:txBody>
-      </p:sp>
-      <p:sp>
-        <p:nvSpPr>
-          <p:cNvPr id="13" name="Rounded Rectangle 12"/>
-          <p:cNvSpPr/>
-          <p:nvPr/>
-        </p:nvSpPr>
-        <p:spPr>
-          <a:xfrm>
-            <a:off x="8138160" y="2011680"/>
-            <a:ext cx="3611880" cy="2377440"/>
-          </a:xfrm>
-          <a:prstGeom prst="roundRect">
-            <a:avLst/>
-          </a:prstGeom>
-          <a:solidFill>
-            <a:srgbClr val="222229"/>
-          </a:solidFill>
-          <a:ln>
-            <a:noFill/>
-          </a:ln>
-          <a:effectLst/>
-        </p:spPr>
-        <p:style>
-          <a:lnRef idx="1">
-            <a:schemeClr val="accent1"/>
-          </a:lnRef>
-          <a:fillRef idx="3">
-            <a:schemeClr val="accent1"/>
-          </a:fillRef>
-          <a:effectRef idx="2">
-            <a:schemeClr val="accent1"/>
-          </a:effectRef>
-          <a:fontRef idx="minor">
-            <a:schemeClr val="lt1"/>
-          </a:fontRef>
-        </p:style>
-        <p:txBody>
-          <a:bodyPr rtlCol="0" anchor="ctr"/>
-          <a:lstStyle/>
-          <a:p>
-            <a:pPr algn="ctr"/>
-          </a:p>
-        </p:txBody>
-      </p:sp>
-      <p:sp>
-        <p:nvSpPr>
-          <p:cNvPr id="14" name="TextBox 13"/>
-          <p:cNvSpPr txBox="1"/>
-          <p:nvPr/>
-        </p:nvSpPr>
-        <p:spPr>
-          <a:xfrm>
-            <a:off x="8412480" y="2286000"/>
-            <a:ext cx="3063240" cy="457200"/>
-          </a:xfrm>
-          <a:prstGeom prst="rect">
-            <a:avLst/>
-          </a:prstGeom>
-          <a:noFill/>
-        </p:spPr>
-        <p:txBody>
-          <a:bodyPr wrap="square" anchor="t">
-            <a:spAutoFit/>
-          </a:bodyPr>
-          <a:lstStyle/>
-          <a:p>
-            <a:r>
-              <a:rPr sz="1400" b="1" i="0">
-                <a:solidFill>
-                  <a:srgbClr val="9B9B93"/>
-                </a:solidFill>
-                <a:latin typeface="Malgun Gothic"/>
-                <a:ea typeface="Malgun Gothic"/>
-                <a:cs typeface="Malgun Gothic"/>
-              </a:rPr>
-              <a:t>작업 완료 시</a:t>
-            </a:r>
-          </a:p>
-        </p:txBody>
-      </p:sp>
-      <p:sp>
-        <p:nvSpPr>
-          <p:cNvPr id="15" name="TextBox 14"/>
-          <p:cNvSpPr txBox="1"/>
-          <p:nvPr/>
-        </p:nvSpPr>
-        <p:spPr>
-          <a:xfrm>
-            <a:off x="8412480" y="2743200"/>
-            <a:ext cx="3063240" cy="822960"/>
-          </a:xfrm>
-          <a:prstGeom prst="rect">
-            <a:avLst/>
-          </a:prstGeom>
-          <a:noFill/>
-        </p:spPr>
-        <p:txBody>
-          <a:bodyPr wrap="square" anchor="t">
-            <a:spAutoFit/>
-          </a:bodyPr>
-          <a:lstStyle/>
-          <a:p>
-            <a:r>
-              <a:rPr sz="1700" b="1" i="0">
-                <a:solidFill>
-                  <a:srgbClr val="ECECEA"/>
-                </a:solidFill>
-                <a:latin typeface="Malgun Gothic"/>
-                <a:ea typeface="Malgun Gothic"/>
-                <a:cs typeface="Malgun Gothic"/>
-              </a:rPr>
-              <a:t>알림 보내기</a:t>
-            </a:r>
-          </a:p>
-        </p:txBody>
-      </p:sp>
-      <p:sp>
-        <p:nvSpPr>
-          <p:cNvPr id="16" name="TextBox 15"/>
-          <p:cNvSpPr txBox="1"/>
-          <p:nvPr/>
-        </p:nvSpPr>
-        <p:spPr>
-          <a:xfrm>
-            <a:off x="8412480" y="3703320"/>
-            <a:ext cx="3063240" cy="548640"/>
-          </a:xfrm>
-          <a:prstGeom prst="rect">
-            <a:avLst/>
-          </a:prstGeom>
-          <a:noFill/>
-        </p:spPr>
-        <p:txBody>
-          <a:bodyPr wrap="square" anchor="t">
-            <a:spAutoFit/>
-          </a:bodyPr>
-          <a:lstStyle/>
-          <a:p>
-            <a:r>
-              <a:rPr sz="1300" b="0" i="0">
-                <a:solidFill>
-                  <a:srgbClr val="D97757"/>
-                </a:solidFill>
-                <a:latin typeface="Consolas"/>
-                <a:ea typeface="Consolas"/>
-                <a:cs typeface="Consolas"/>
-              </a:rPr>
-              <a:t>Stop → 슬랙/데스크톱 알림</a:t>
-            </a:r>
-          </a:p>
-        </p:txBody>
-      </p:sp>
-      <p:sp>
-        <p:nvSpPr>
-          <p:cNvPr id="17" name="TextBox 16"/>
-          <p:cNvSpPr txBox="1"/>
-          <p:nvPr/>
-        </p:nvSpPr>
-        <p:spPr>
-          <a:xfrm>
-            <a:off x="548640" y="4846320"/>
-            <a:ext cx="10972800" cy="548640"/>
-          </a:xfrm>
-          <a:prstGeom prst="rect">
-            <a:avLst/>
-          </a:prstGeom>
-          <a:noFill/>
-        </p:spPr>
-        <p:txBody>
-          <a:bodyPr wrap="square" anchor="t">
-            <a:spAutoFit/>
-          </a:bodyPr>
-          <a:lstStyle/>
-          <a:p>
-            <a:r>
-              <a:rPr sz="1500" b="1" i="0">
-                <a:solidFill>
-                  <a:srgbClr val="ECECEA"/>
-                </a:solidFill>
-                <a:latin typeface="Malgun Gothic"/>
-                <a:ea typeface="Malgun Gothic"/>
-                <a:cs typeface="Malgun Gothic"/>
-              </a:rPr>
-              <a:t>“부탁"이 아니라 "보장" — </a:t>
-            </a:r>
-            <a:r>
-              <a:rPr sz="1500" b="0" i="0">
-                <a:solidFill>
-                  <a:srgbClr val="9B9B93"/>
-                </a:solidFill>
-                <a:latin typeface="Malgun Gothic"/>
-                <a:ea typeface="Malgun Gothic"/>
-                <a:cs typeface="Malgun Gothic"/>
-              </a:rPr>
-              <a:t>CLAUDE.md의 규칙은 권고, Hooks는 강제입니다.</a:t>
-            </a:r>
-          </a:p>
-        </p:txBody>
-      </p:sp>
-      <p:sp>
-        <p:nvSpPr>
-          <p:cNvPr id="18" name="TextBox 17"/>
+              <a:t>MCP — 외부 도구 연결</a:t>
+            </a:r>
+          </a:p>
+        </p:txBody>
+      </p:sp>
+      <p:pic>
+        <p:nvPicPr>
+          <p:cNvPr id="4" name="Picture 3" descr="diagram-mcp.png"/>
+          <p:cNvPicPr>
+            <a:picLocks noChangeAspect="1"/>
+          </p:cNvPicPr>
+          <p:nvPr/>
+        </p:nvPicPr>
+        <p:blipFill>
+          <a:blip r:embed="rId2"/>
+          <a:stretch>
+            <a:fillRect/>
+          </a:stretch>
+        </p:blipFill>
+        <p:spPr>
+          <a:xfrm>
+            <a:off x="1569567" y="1600200"/>
+            <a:ext cx="9052560" cy="5092065"/>
+          </a:xfrm>
+          <a:prstGeom prst="rect">
+            <a:avLst/>
+          </a:prstGeom>
+        </p:spPr>
+      </p:pic>
+      <p:sp>
+        <p:nvSpPr>
+          <p:cNvPr id="5" name="TextBox 4"/>
           <p:cNvSpPr txBox="1"/>
           <p:nvPr/>
         </p:nvSpPr>
@@ -16600,7 +16390,7 @@
       </p:sp>
       <p:sp>
         <p:nvSpPr>
-          <p:cNvPr id="19" name="TextBox 18"/>
+          <p:cNvPr id="6" name="TextBox 5"/>
           <p:cNvSpPr txBox="1"/>
           <p:nvPr/>
         </p:nvSpPr>
@@ -16735,38 +16525,553 @@
                 <a:ea typeface="Malgun Gothic"/>
                 <a:cs typeface="Malgun Gothic"/>
               </a:rPr>
-              <a:t>어디서든 쓰기</a:t>
-            </a:r>
-          </a:p>
-        </p:txBody>
-      </p:sp>
-      <p:pic>
-        <p:nvPicPr>
-          <p:cNvPr id="4" name="Picture 3" descr="diagram-ecosystem.png"/>
-          <p:cNvPicPr>
-            <a:picLocks noChangeAspect="1"/>
-          </p:cNvPicPr>
-          <p:nvPr/>
-        </p:nvPicPr>
-        <p:blipFill>
-          <a:blip r:embed="rId2"/>
-          <a:stretch>
-            <a:fillRect/>
-          </a:stretch>
-        </p:blipFill>
-        <p:spPr>
-          <a:xfrm>
-            <a:off x="1432407" y="1645920"/>
-            <a:ext cx="9326880" cy="5246370"/>
-          </a:xfrm>
-          <a:prstGeom prst="rect">
-            <a:avLst/>
-          </a:prstGeom>
-        </p:spPr>
-      </p:pic>
-      <p:sp>
-        <p:nvSpPr>
-          <p:cNvPr id="5" name="TextBox 4"/>
+              <a:t>Hooks — 규칙을 자동으로 강제하기</a:t>
+            </a:r>
+          </a:p>
+        </p:txBody>
+      </p:sp>
+      <p:sp>
+        <p:nvSpPr>
+          <p:cNvPr id="4" name="TextBox 3"/>
+          <p:cNvSpPr txBox="1"/>
+          <p:nvPr/>
+        </p:nvSpPr>
+        <p:spPr>
+          <a:xfrm>
+            <a:off x="429768" y="1298448"/>
+            <a:ext cx="11338560" cy="457200"/>
+          </a:xfrm>
+          <a:prstGeom prst="rect">
+            <a:avLst/>
+          </a:prstGeom>
+          <a:noFill/>
+        </p:spPr>
+        <p:txBody>
+          <a:bodyPr wrap="square" anchor="t">
+            <a:spAutoFit/>
+          </a:bodyPr>
+          <a:lstStyle/>
+          <a:p>
+            <a:r>
+              <a:rPr sz="1500" b="0" i="0">
+                <a:solidFill>
+                  <a:srgbClr val="9B9B93"/>
+                </a:solidFill>
+                <a:latin typeface="Malgun Gothic"/>
+                <a:ea typeface="Malgun Gothic"/>
+                <a:cs typeface="Malgun Gothic"/>
+              </a:rPr>
+              <a:t>Claude의 특정 동작 전후에 내 스크립트를 실행합니다.</a:t>
+            </a:r>
+          </a:p>
+        </p:txBody>
+      </p:sp>
+      <p:sp>
+        <p:nvSpPr>
+          <p:cNvPr id="5" name="Rounded Rectangle 4"/>
+          <p:cNvSpPr/>
+          <p:nvPr/>
+        </p:nvSpPr>
+        <p:spPr>
+          <a:xfrm>
+            <a:off x="548640" y="2011680"/>
+            <a:ext cx="3611880" cy="2377440"/>
+          </a:xfrm>
+          <a:prstGeom prst="roundRect">
+            <a:avLst/>
+          </a:prstGeom>
+          <a:solidFill>
+            <a:srgbClr val="222229"/>
+          </a:solidFill>
+          <a:ln>
+            <a:noFill/>
+          </a:ln>
+          <a:effectLst/>
+        </p:spPr>
+        <p:style>
+          <a:lnRef idx="1">
+            <a:schemeClr val="accent1"/>
+          </a:lnRef>
+          <a:fillRef idx="3">
+            <a:schemeClr val="accent1"/>
+          </a:fillRef>
+          <a:effectRef idx="2">
+            <a:schemeClr val="accent1"/>
+          </a:effectRef>
+          <a:fontRef idx="minor">
+            <a:schemeClr val="lt1"/>
+          </a:fontRef>
+        </p:style>
+        <p:txBody>
+          <a:bodyPr rtlCol="0" anchor="ctr"/>
+          <a:lstStyle/>
+          <a:p>
+            <a:pPr algn="ctr"/>
+          </a:p>
+        </p:txBody>
+      </p:sp>
+      <p:sp>
+        <p:nvSpPr>
+          <p:cNvPr id="6" name="TextBox 5"/>
+          <p:cNvSpPr txBox="1"/>
+          <p:nvPr/>
+        </p:nvSpPr>
+        <p:spPr>
+          <a:xfrm>
+            <a:off x="822960" y="2286000"/>
+            <a:ext cx="3063240" cy="457200"/>
+          </a:xfrm>
+          <a:prstGeom prst="rect">
+            <a:avLst/>
+          </a:prstGeom>
+          <a:noFill/>
+        </p:spPr>
+        <p:txBody>
+          <a:bodyPr wrap="square" anchor="t">
+            <a:spAutoFit/>
+          </a:bodyPr>
+          <a:lstStyle/>
+          <a:p>
+            <a:r>
+              <a:rPr sz="1400" b="1" i="0">
+                <a:solidFill>
+                  <a:srgbClr val="9B9B93"/>
+                </a:solidFill>
+                <a:latin typeface="Malgun Gothic"/>
+                <a:ea typeface="Malgun Gothic"/>
+                <a:cs typeface="Malgun Gothic"/>
+              </a:rPr>
+              <a:t>파일 수정 후</a:t>
+            </a:r>
+          </a:p>
+        </p:txBody>
+      </p:sp>
+      <p:sp>
+        <p:nvSpPr>
+          <p:cNvPr id="7" name="TextBox 6"/>
+          <p:cNvSpPr txBox="1"/>
+          <p:nvPr/>
+        </p:nvSpPr>
+        <p:spPr>
+          <a:xfrm>
+            <a:off x="822960" y="2743200"/>
+            <a:ext cx="3063240" cy="822960"/>
+          </a:xfrm>
+          <a:prstGeom prst="rect">
+            <a:avLst/>
+          </a:prstGeom>
+          <a:noFill/>
+        </p:spPr>
+        <p:txBody>
+          <a:bodyPr wrap="square" anchor="t">
+            <a:spAutoFit/>
+          </a:bodyPr>
+          <a:lstStyle/>
+          <a:p>
+            <a:r>
+              <a:rPr sz="1700" b="1" i="0">
+                <a:solidFill>
+                  <a:srgbClr val="ECECEA"/>
+                </a:solidFill>
+                <a:latin typeface="Malgun Gothic"/>
+                <a:ea typeface="Malgun Gothic"/>
+                <a:cs typeface="Malgun Gothic"/>
+              </a:rPr>
+              <a:t>자동으로 포매터 실행</a:t>
+            </a:r>
+          </a:p>
+        </p:txBody>
+      </p:sp>
+      <p:sp>
+        <p:nvSpPr>
+          <p:cNvPr id="8" name="TextBox 7"/>
+          <p:cNvSpPr txBox="1"/>
+          <p:nvPr/>
+        </p:nvSpPr>
+        <p:spPr>
+          <a:xfrm>
+            <a:off x="822960" y="3703320"/>
+            <a:ext cx="3063240" cy="548640"/>
+          </a:xfrm>
+          <a:prstGeom prst="rect">
+            <a:avLst/>
+          </a:prstGeom>
+          <a:noFill/>
+        </p:spPr>
+        <p:txBody>
+          <a:bodyPr wrap="square" anchor="t">
+            <a:spAutoFit/>
+          </a:bodyPr>
+          <a:lstStyle/>
+          <a:p>
+            <a:r>
+              <a:rPr sz="1300" b="0" i="0">
+                <a:solidFill>
+                  <a:srgbClr val="D97757"/>
+                </a:solidFill>
+                <a:latin typeface="Consolas"/>
+                <a:ea typeface="Consolas"/>
+                <a:cs typeface="Consolas"/>
+              </a:rPr>
+              <a:t>PostToolUse → prettier</a:t>
+            </a:r>
+          </a:p>
+        </p:txBody>
+      </p:sp>
+      <p:sp>
+        <p:nvSpPr>
+          <p:cNvPr id="9" name="Rounded Rectangle 8"/>
+          <p:cNvSpPr/>
+          <p:nvPr/>
+        </p:nvSpPr>
+        <p:spPr>
+          <a:xfrm>
+            <a:off x="4343400" y="2011680"/>
+            <a:ext cx="3611880" cy="2377440"/>
+          </a:xfrm>
+          <a:prstGeom prst="roundRect">
+            <a:avLst/>
+          </a:prstGeom>
+          <a:solidFill>
+            <a:srgbClr val="222229"/>
+          </a:solidFill>
+          <a:ln>
+            <a:noFill/>
+          </a:ln>
+          <a:effectLst/>
+        </p:spPr>
+        <p:style>
+          <a:lnRef idx="1">
+            <a:schemeClr val="accent1"/>
+          </a:lnRef>
+          <a:fillRef idx="3">
+            <a:schemeClr val="accent1"/>
+          </a:fillRef>
+          <a:effectRef idx="2">
+            <a:schemeClr val="accent1"/>
+          </a:effectRef>
+          <a:fontRef idx="minor">
+            <a:schemeClr val="lt1"/>
+          </a:fontRef>
+        </p:style>
+        <p:txBody>
+          <a:bodyPr rtlCol="0" anchor="ctr"/>
+          <a:lstStyle/>
+          <a:p>
+            <a:pPr algn="ctr"/>
+          </a:p>
+        </p:txBody>
+      </p:sp>
+      <p:sp>
+        <p:nvSpPr>
+          <p:cNvPr id="10" name="TextBox 9"/>
+          <p:cNvSpPr txBox="1"/>
+          <p:nvPr/>
+        </p:nvSpPr>
+        <p:spPr>
+          <a:xfrm>
+            <a:off x="4617720" y="2286000"/>
+            <a:ext cx="3063240" cy="457200"/>
+          </a:xfrm>
+          <a:prstGeom prst="rect">
+            <a:avLst/>
+          </a:prstGeom>
+          <a:noFill/>
+        </p:spPr>
+        <p:txBody>
+          <a:bodyPr wrap="square" anchor="t">
+            <a:spAutoFit/>
+          </a:bodyPr>
+          <a:lstStyle/>
+          <a:p>
+            <a:r>
+              <a:rPr sz="1400" b="1" i="0">
+                <a:solidFill>
+                  <a:srgbClr val="9B9B93"/>
+                </a:solidFill>
+                <a:latin typeface="Malgun Gothic"/>
+                <a:ea typeface="Malgun Gothic"/>
+                <a:cs typeface="Malgun Gothic"/>
+              </a:rPr>
+              <a:t>명령 실행 전</a:t>
+            </a:r>
+          </a:p>
+        </p:txBody>
+      </p:sp>
+      <p:sp>
+        <p:nvSpPr>
+          <p:cNvPr id="11" name="TextBox 10"/>
+          <p:cNvSpPr txBox="1"/>
+          <p:nvPr/>
+        </p:nvSpPr>
+        <p:spPr>
+          <a:xfrm>
+            <a:off x="4617720" y="2743200"/>
+            <a:ext cx="3063240" cy="822960"/>
+          </a:xfrm>
+          <a:prstGeom prst="rect">
+            <a:avLst/>
+          </a:prstGeom>
+          <a:noFill/>
+        </p:spPr>
+        <p:txBody>
+          <a:bodyPr wrap="square" anchor="t">
+            <a:spAutoFit/>
+          </a:bodyPr>
+          <a:lstStyle/>
+          <a:p>
+            <a:r>
+              <a:rPr sz="1700" b="1" i="0">
+                <a:solidFill>
+                  <a:srgbClr val="ECECEA"/>
+                </a:solidFill>
+                <a:latin typeface="Malgun Gothic"/>
+                <a:ea typeface="Malgun Gothic"/>
+                <a:cs typeface="Malgun Gothic"/>
+              </a:rPr>
+              <a:t>위험한 명령 차단</a:t>
+            </a:r>
+          </a:p>
+        </p:txBody>
+      </p:sp>
+      <p:sp>
+        <p:nvSpPr>
+          <p:cNvPr id="12" name="TextBox 11"/>
+          <p:cNvSpPr txBox="1"/>
+          <p:nvPr/>
+        </p:nvSpPr>
+        <p:spPr>
+          <a:xfrm>
+            <a:off x="4617720" y="3703320"/>
+            <a:ext cx="3063240" cy="548640"/>
+          </a:xfrm>
+          <a:prstGeom prst="rect">
+            <a:avLst/>
+          </a:prstGeom>
+          <a:noFill/>
+        </p:spPr>
+        <p:txBody>
+          <a:bodyPr wrap="square" anchor="t">
+            <a:spAutoFit/>
+          </a:bodyPr>
+          <a:lstStyle/>
+          <a:p>
+            <a:r>
+              <a:rPr sz="1300" b="0" i="0">
+                <a:solidFill>
+                  <a:srgbClr val="D97757"/>
+                </a:solidFill>
+                <a:latin typeface="Consolas"/>
+                <a:ea typeface="Consolas"/>
+                <a:cs typeface="Consolas"/>
+              </a:rPr>
+              <a:t>PreToolUse → rm -rf 금지</a:t>
+            </a:r>
+          </a:p>
+        </p:txBody>
+      </p:sp>
+      <p:sp>
+        <p:nvSpPr>
+          <p:cNvPr id="13" name="Rounded Rectangle 12"/>
+          <p:cNvSpPr/>
+          <p:nvPr/>
+        </p:nvSpPr>
+        <p:spPr>
+          <a:xfrm>
+            <a:off x="8138160" y="2011680"/>
+            <a:ext cx="3611880" cy="2377440"/>
+          </a:xfrm>
+          <a:prstGeom prst="roundRect">
+            <a:avLst/>
+          </a:prstGeom>
+          <a:solidFill>
+            <a:srgbClr val="222229"/>
+          </a:solidFill>
+          <a:ln>
+            <a:noFill/>
+          </a:ln>
+          <a:effectLst/>
+        </p:spPr>
+        <p:style>
+          <a:lnRef idx="1">
+            <a:schemeClr val="accent1"/>
+          </a:lnRef>
+          <a:fillRef idx="3">
+            <a:schemeClr val="accent1"/>
+          </a:fillRef>
+          <a:effectRef idx="2">
+            <a:schemeClr val="accent1"/>
+          </a:effectRef>
+          <a:fontRef idx="minor">
+            <a:schemeClr val="lt1"/>
+          </a:fontRef>
+        </p:style>
+        <p:txBody>
+          <a:bodyPr rtlCol="0" anchor="ctr"/>
+          <a:lstStyle/>
+          <a:p>
+            <a:pPr algn="ctr"/>
+          </a:p>
+        </p:txBody>
+      </p:sp>
+      <p:sp>
+        <p:nvSpPr>
+          <p:cNvPr id="14" name="TextBox 13"/>
+          <p:cNvSpPr txBox="1"/>
+          <p:nvPr/>
+        </p:nvSpPr>
+        <p:spPr>
+          <a:xfrm>
+            <a:off x="8412480" y="2286000"/>
+            <a:ext cx="3063240" cy="457200"/>
+          </a:xfrm>
+          <a:prstGeom prst="rect">
+            <a:avLst/>
+          </a:prstGeom>
+          <a:noFill/>
+        </p:spPr>
+        <p:txBody>
+          <a:bodyPr wrap="square" anchor="t">
+            <a:spAutoFit/>
+          </a:bodyPr>
+          <a:lstStyle/>
+          <a:p>
+            <a:r>
+              <a:rPr sz="1400" b="1" i="0">
+                <a:solidFill>
+                  <a:srgbClr val="9B9B93"/>
+                </a:solidFill>
+                <a:latin typeface="Malgun Gothic"/>
+                <a:ea typeface="Malgun Gothic"/>
+                <a:cs typeface="Malgun Gothic"/>
+              </a:rPr>
+              <a:t>작업 완료 시</a:t>
+            </a:r>
+          </a:p>
+        </p:txBody>
+      </p:sp>
+      <p:sp>
+        <p:nvSpPr>
+          <p:cNvPr id="15" name="TextBox 14"/>
+          <p:cNvSpPr txBox="1"/>
+          <p:nvPr/>
+        </p:nvSpPr>
+        <p:spPr>
+          <a:xfrm>
+            <a:off x="8412480" y="2743200"/>
+            <a:ext cx="3063240" cy="822960"/>
+          </a:xfrm>
+          <a:prstGeom prst="rect">
+            <a:avLst/>
+          </a:prstGeom>
+          <a:noFill/>
+        </p:spPr>
+        <p:txBody>
+          <a:bodyPr wrap="square" anchor="t">
+            <a:spAutoFit/>
+          </a:bodyPr>
+          <a:lstStyle/>
+          <a:p>
+            <a:r>
+              <a:rPr sz="1700" b="1" i="0">
+                <a:solidFill>
+                  <a:srgbClr val="ECECEA"/>
+                </a:solidFill>
+                <a:latin typeface="Malgun Gothic"/>
+                <a:ea typeface="Malgun Gothic"/>
+                <a:cs typeface="Malgun Gothic"/>
+              </a:rPr>
+              <a:t>알림 보내기</a:t>
+            </a:r>
+          </a:p>
+        </p:txBody>
+      </p:sp>
+      <p:sp>
+        <p:nvSpPr>
+          <p:cNvPr id="16" name="TextBox 15"/>
+          <p:cNvSpPr txBox="1"/>
+          <p:nvPr/>
+        </p:nvSpPr>
+        <p:spPr>
+          <a:xfrm>
+            <a:off x="8412480" y="3703320"/>
+            <a:ext cx="3063240" cy="548640"/>
+          </a:xfrm>
+          <a:prstGeom prst="rect">
+            <a:avLst/>
+          </a:prstGeom>
+          <a:noFill/>
+        </p:spPr>
+        <p:txBody>
+          <a:bodyPr wrap="square" anchor="t">
+            <a:spAutoFit/>
+          </a:bodyPr>
+          <a:lstStyle/>
+          <a:p>
+            <a:r>
+              <a:rPr sz="1300" b="0" i="0">
+                <a:solidFill>
+                  <a:srgbClr val="D97757"/>
+                </a:solidFill>
+                <a:latin typeface="Consolas"/>
+                <a:ea typeface="Consolas"/>
+                <a:cs typeface="Consolas"/>
+              </a:rPr>
+              <a:t>Stop → 슬랙/데스크톱 알림</a:t>
+            </a:r>
+          </a:p>
+        </p:txBody>
+      </p:sp>
+      <p:sp>
+        <p:nvSpPr>
+          <p:cNvPr id="17" name="TextBox 16"/>
+          <p:cNvSpPr txBox="1"/>
+          <p:nvPr/>
+        </p:nvSpPr>
+        <p:spPr>
+          <a:xfrm>
+            <a:off x="548640" y="4846320"/>
+            <a:ext cx="10972800" cy="548640"/>
+          </a:xfrm>
+          <a:prstGeom prst="rect">
+            <a:avLst/>
+          </a:prstGeom>
+          <a:noFill/>
+        </p:spPr>
+        <p:txBody>
+          <a:bodyPr wrap="square" anchor="t">
+            <a:spAutoFit/>
+          </a:bodyPr>
+          <a:lstStyle/>
+          <a:p>
+            <a:r>
+              <a:rPr sz="1500" b="1" i="0">
+                <a:solidFill>
+                  <a:srgbClr val="ECECEA"/>
+                </a:solidFill>
+                <a:latin typeface="Malgun Gothic"/>
+                <a:ea typeface="Malgun Gothic"/>
+                <a:cs typeface="Malgun Gothic"/>
+              </a:rPr>
+              <a:t>“부탁"이 아니라 "보장" — </a:t>
+            </a:r>
+            <a:r>
+              <a:rPr sz="1500" b="0" i="0">
+                <a:solidFill>
+                  <a:srgbClr val="9B9B93"/>
+                </a:solidFill>
+                <a:latin typeface="Malgun Gothic"/>
+                <a:ea typeface="Malgun Gothic"/>
+                <a:cs typeface="Malgun Gothic"/>
+              </a:rPr>
+              <a:t>CLAUDE.md의 규칙은 권고, Hooks는 강제입니다.</a:t>
+            </a:r>
+          </a:p>
+        </p:txBody>
+      </p:sp>
+      <p:sp>
+        <p:nvSpPr>
+          <p:cNvPr id="18" name="TextBox 17"/>
           <p:cNvSpPr txBox="1"/>
           <p:nvPr/>
         </p:nvSpPr>
@@ -16802,7 +17107,7 @@
       </p:sp>
       <p:sp>
         <p:nvSpPr>
-          <p:cNvPr id="6" name="TextBox 5"/>
+          <p:cNvPr id="19" name="TextBox 18"/>
           <p:cNvSpPr txBox="1"/>
           <p:nvPr/>
         </p:nvSpPr>
@@ -16937,594 +17242,38 @@
                 <a:ea typeface="Malgun Gothic"/>
                 <a:cs typeface="Malgun Gothic"/>
               </a:rPr>
-              <a:t>Level 3 정리 — 언제 무엇을 꺼내 쓸까</a:t>
-            </a:r>
-          </a:p>
-        </p:txBody>
-      </p:sp>
-      <p:sp>
-        <p:nvSpPr>
-          <p:cNvPr id="4" name="Rounded Rectangle 3"/>
-          <p:cNvSpPr/>
-          <p:nvPr/>
-        </p:nvSpPr>
-        <p:spPr>
-          <a:xfrm>
-            <a:off x="548640" y="1828800"/>
-            <a:ext cx="11064240" cy="777240"/>
-          </a:xfrm>
-          <a:prstGeom prst="roundRect">
-            <a:avLst/>
-          </a:prstGeom>
-          <a:solidFill>
-            <a:srgbClr val="222229"/>
-          </a:solidFill>
-          <a:ln>
-            <a:noFill/>
-          </a:ln>
-          <a:effectLst/>
-        </p:spPr>
-        <p:style>
-          <a:lnRef idx="1">
-            <a:schemeClr val="accent1"/>
-          </a:lnRef>
-          <a:fillRef idx="3">
-            <a:schemeClr val="accent1"/>
-          </a:fillRef>
-          <a:effectRef idx="2">
-            <a:schemeClr val="accent1"/>
-          </a:effectRef>
-          <a:fontRef idx="minor">
-            <a:schemeClr val="lt1"/>
-          </a:fontRef>
-        </p:style>
-        <p:txBody>
-          <a:bodyPr rtlCol="0" anchor="ctr"/>
-          <a:lstStyle/>
-          <a:p>
-            <a:pPr algn="ctr"/>
-          </a:p>
-        </p:txBody>
-      </p:sp>
+              <a:t>어디서든 쓰기</a:t>
+            </a:r>
+          </a:p>
+        </p:txBody>
+      </p:sp>
+      <p:pic>
+        <p:nvPicPr>
+          <p:cNvPr id="4" name="Picture 3" descr="diagram-ecosystem.png"/>
+          <p:cNvPicPr>
+            <a:picLocks noChangeAspect="1"/>
+          </p:cNvPicPr>
+          <p:nvPr/>
+        </p:nvPicPr>
+        <p:blipFill>
+          <a:blip r:embed="rId2"/>
+          <a:stretch>
+            <a:fillRect/>
+          </a:stretch>
+        </p:blipFill>
+        <p:spPr>
+          <a:xfrm>
+            <a:off x="1432407" y="1645920"/>
+            <a:ext cx="9326880" cy="5246370"/>
+          </a:xfrm>
+          <a:prstGeom prst="rect">
+            <a:avLst/>
+          </a:prstGeom>
+        </p:spPr>
+      </p:pic>
       <p:sp>
         <p:nvSpPr>
           <p:cNvPr id="5" name="TextBox 4"/>
-          <p:cNvSpPr txBox="1"/>
-          <p:nvPr/>
-        </p:nvSpPr>
-        <p:spPr>
-          <a:xfrm>
-            <a:off x="868680" y="1828800"/>
-            <a:ext cx="6035040" cy="777240"/>
-          </a:xfrm>
-          <a:prstGeom prst="rect">
-            <a:avLst/>
-          </a:prstGeom>
-          <a:noFill/>
-        </p:spPr>
-        <p:txBody>
-          <a:bodyPr wrap="square" anchor="ctr">
-            <a:spAutoFit/>
-          </a:bodyPr>
-          <a:lstStyle/>
-          <a:p>
-            <a:r>
-              <a:rPr sz="1500" b="0" i="0">
-                <a:solidFill>
-                  <a:srgbClr val="ECECEA"/>
-                </a:solidFill>
-                <a:latin typeface="Malgun Gothic"/>
-                <a:ea typeface="Malgun Gothic"/>
-                <a:cs typeface="Malgun Gothic"/>
-              </a:rPr>
-              <a:t>같은 요청을 3번째 타이핑할 때</a:t>
-            </a:r>
-          </a:p>
-        </p:txBody>
-      </p:sp>
-      <p:sp>
-        <p:nvSpPr>
-          <p:cNvPr id="6" name="TextBox 5"/>
-          <p:cNvSpPr txBox="1"/>
-          <p:nvPr/>
-        </p:nvSpPr>
-        <p:spPr>
-          <a:xfrm>
-            <a:off x="7132320" y="1828800"/>
-            <a:ext cx="4297680" cy="777240"/>
-          </a:xfrm>
-          <a:prstGeom prst="rect">
-            <a:avLst/>
-          </a:prstGeom>
-          <a:noFill/>
-        </p:spPr>
-        <p:txBody>
-          <a:bodyPr wrap="square" anchor="ctr">
-            <a:spAutoFit/>
-          </a:bodyPr>
-          <a:lstStyle/>
-          <a:p>
-            <a:r>
-              <a:rPr sz="1500" b="1" i="0">
-                <a:solidFill>
-                  <a:srgbClr val="D97757"/>
-                </a:solidFill>
-                <a:latin typeface="Malgun Gothic"/>
-                <a:ea typeface="Malgun Gothic"/>
-                <a:cs typeface="Malgun Gothic"/>
-              </a:rPr>
-              <a:t>→  커스텀 커맨드</a:t>
-            </a:r>
-          </a:p>
-        </p:txBody>
-      </p:sp>
-      <p:sp>
-        <p:nvSpPr>
-          <p:cNvPr id="7" name="Rounded Rectangle 6"/>
-          <p:cNvSpPr/>
-          <p:nvPr/>
-        </p:nvSpPr>
-        <p:spPr>
-          <a:xfrm>
-            <a:off x="548640" y="2724912"/>
-            <a:ext cx="11064240" cy="777240"/>
-          </a:xfrm>
-          <a:prstGeom prst="roundRect">
-            <a:avLst/>
-          </a:prstGeom>
-          <a:solidFill>
-            <a:srgbClr val="222229"/>
-          </a:solidFill>
-          <a:ln>
-            <a:noFill/>
-          </a:ln>
-          <a:effectLst/>
-        </p:spPr>
-        <p:style>
-          <a:lnRef idx="1">
-            <a:schemeClr val="accent1"/>
-          </a:lnRef>
-          <a:fillRef idx="3">
-            <a:schemeClr val="accent1"/>
-          </a:fillRef>
-          <a:effectRef idx="2">
-            <a:schemeClr val="accent1"/>
-          </a:effectRef>
-          <a:fontRef idx="minor">
-            <a:schemeClr val="lt1"/>
-          </a:fontRef>
-        </p:style>
-        <p:txBody>
-          <a:bodyPr rtlCol="0" anchor="ctr"/>
-          <a:lstStyle/>
-          <a:p>
-            <a:pPr algn="ctr"/>
-          </a:p>
-        </p:txBody>
-      </p:sp>
-      <p:sp>
-        <p:nvSpPr>
-          <p:cNvPr id="8" name="TextBox 7"/>
-          <p:cNvSpPr txBox="1"/>
-          <p:nvPr/>
-        </p:nvSpPr>
-        <p:spPr>
-          <a:xfrm>
-            <a:off x="868680" y="2724912"/>
-            <a:ext cx="6035040" cy="777240"/>
-          </a:xfrm>
-          <a:prstGeom prst="rect">
-            <a:avLst/>
-          </a:prstGeom>
-          <a:noFill/>
-        </p:spPr>
-        <p:txBody>
-          <a:bodyPr wrap="square" anchor="ctr">
-            <a:spAutoFit/>
-          </a:bodyPr>
-          <a:lstStyle/>
-          <a:p>
-            <a:r>
-              <a:rPr sz="1500" b="0" i="0">
-                <a:solidFill>
-                  <a:srgbClr val="ECECEA"/>
-                </a:solidFill>
-                <a:latin typeface="Malgun Gothic"/>
-                <a:ea typeface="Malgun Gothic"/>
-                <a:cs typeface="Malgun Gothic"/>
-              </a:rPr>
-              <a:t>“매번 이것 좀 지켜줬으면” 할 때</a:t>
-            </a:r>
-          </a:p>
-        </p:txBody>
-      </p:sp>
-      <p:sp>
-        <p:nvSpPr>
-          <p:cNvPr id="9" name="TextBox 8"/>
-          <p:cNvSpPr txBox="1"/>
-          <p:nvPr/>
-        </p:nvSpPr>
-        <p:spPr>
-          <a:xfrm>
-            <a:off x="7132320" y="2724912"/>
-            <a:ext cx="4297680" cy="777240"/>
-          </a:xfrm>
-          <a:prstGeom prst="rect">
-            <a:avLst/>
-          </a:prstGeom>
-          <a:noFill/>
-        </p:spPr>
-        <p:txBody>
-          <a:bodyPr wrap="square" anchor="ctr">
-            <a:spAutoFit/>
-          </a:bodyPr>
-          <a:lstStyle/>
-          <a:p>
-            <a:r>
-              <a:rPr sz="1500" b="1" i="0">
-                <a:solidFill>
-                  <a:srgbClr val="D97757"/>
-                </a:solidFill>
-                <a:latin typeface="Malgun Gothic"/>
-                <a:ea typeface="Malgun Gothic"/>
-                <a:cs typeface="Malgun Gothic"/>
-              </a:rPr>
-              <a:t>→  CLAUDE.md → 안 지켜지면 Hooks</a:t>
-            </a:r>
-          </a:p>
-        </p:txBody>
-      </p:sp>
-      <p:sp>
-        <p:nvSpPr>
-          <p:cNvPr id="10" name="Rounded Rectangle 9"/>
-          <p:cNvSpPr/>
-          <p:nvPr/>
-        </p:nvSpPr>
-        <p:spPr>
-          <a:xfrm>
-            <a:off x="548640" y="3621024"/>
-            <a:ext cx="11064240" cy="777240"/>
-          </a:xfrm>
-          <a:prstGeom prst="roundRect">
-            <a:avLst/>
-          </a:prstGeom>
-          <a:solidFill>
-            <a:srgbClr val="222229"/>
-          </a:solidFill>
-          <a:ln>
-            <a:noFill/>
-          </a:ln>
-          <a:effectLst/>
-        </p:spPr>
-        <p:style>
-          <a:lnRef idx="1">
-            <a:schemeClr val="accent1"/>
-          </a:lnRef>
-          <a:fillRef idx="3">
-            <a:schemeClr val="accent1"/>
-          </a:fillRef>
-          <a:effectRef idx="2">
-            <a:schemeClr val="accent1"/>
-          </a:effectRef>
-          <a:fontRef idx="minor">
-            <a:schemeClr val="lt1"/>
-          </a:fontRef>
-        </p:style>
-        <p:txBody>
-          <a:bodyPr rtlCol="0" anchor="ctr"/>
-          <a:lstStyle/>
-          <a:p>
-            <a:pPr algn="ctr"/>
-          </a:p>
-        </p:txBody>
-      </p:sp>
-      <p:sp>
-        <p:nvSpPr>
-          <p:cNvPr id="11" name="TextBox 10"/>
-          <p:cNvSpPr txBox="1"/>
-          <p:nvPr/>
-        </p:nvSpPr>
-        <p:spPr>
-          <a:xfrm>
-            <a:off x="868680" y="3621024"/>
-            <a:ext cx="6035040" cy="777240"/>
-          </a:xfrm>
-          <a:prstGeom prst="rect">
-            <a:avLst/>
-          </a:prstGeom>
-          <a:noFill/>
-        </p:spPr>
-        <p:txBody>
-          <a:bodyPr wrap="square" anchor="ctr">
-            <a:spAutoFit/>
-          </a:bodyPr>
-          <a:lstStyle/>
-          <a:p>
-            <a:r>
-              <a:rPr sz="1500" b="0" i="0">
-                <a:solidFill>
-                  <a:srgbClr val="ECECEA"/>
-                </a:solidFill>
-                <a:latin typeface="Malgun Gothic"/>
-                <a:ea typeface="Malgun Gothic"/>
-                <a:cs typeface="Malgun Gothic"/>
-              </a:rPr>
-              <a:t>작업이 크고 검증도 필요할 때</a:t>
-            </a:r>
-          </a:p>
-        </p:txBody>
-      </p:sp>
-      <p:sp>
-        <p:nvSpPr>
-          <p:cNvPr id="12" name="TextBox 11"/>
-          <p:cNvSpPr txBox="1"/>
-          <p:nvPr/>
-        </p:nvSpPr>
-        <p:spPr>
-          <a:xfrm>
-            <a:off x="7132320" y="3621024"/>
-            <a:ext cx="4297680" cy="777240"/>
-          </a:xfrm>
-          <a:prstGeom prst="rect">
-            <a:avLst/>
-          </a:prstGeom>
-          <a:noFill/>
-        </p:spPr>
-        <p:txBody>
-          <a:bodyPr wrap="square" anchor="ctr">
-            <a:spAutoFit/>
-          </a:bodyPr>
-          <a:lstStyle/>
-          <a:p>
-            <a:r>
-              <a:rPr sz="1500" b="1" i="0">
-                <a:solidFill>
-                  <a:srgbClr val="D97757"/>
-                </a:solidFill>
-                <a:latin typeface="Malgun Gothic"/>
-                <a:ea typeface="Malgun Gothic"/>
-                <a:cs typeface="Malgun Gothic"/>
-              </a:rPr>
-              <a:t>→  서브에이전트</a:t>
-            </a:r>
-          </a:p>
-        </p:txBody>
-      </p:sp>
-      <p:sp>
-        <p:nvSpPr>
-          <p:cNvPr id="13" name="Rounded Rectangle 12"/>
-          <p:cNvSpPr/>
-          <p:nvPr/>
-        </p:nvSpPr>
-        <p:spPr>
-          <a:xfrm>
-            <a:off x="548640" y="4517136"/>
-            <a:ext cx="11064240" cy="777240"/>
-          </a:xfrm>
-          <a:prstGeom prst="roundRect">
-            <a:avLst/>
-          </a:prstGeom>
-          <a:solidFill>
-            <a:srgbClr val="222229"/>
-          </a:solidFill>
-          <a:ln>
-            <a:noFill/>
-          </a:ln>
-          <a:effectLst/>
-        </p:spPr>
-        <p:style>
-          <a:lnRef idx="1">
-            <a:schemeClr val="accent1"/>
-          </a:lnRef>
-          <a:fillRef idx="3">
-            <a:schemeClr val="accent1"/>
-          </a:fillRef>
-          <a:effectRef idx="2">
-            <a:schemeClr val="accent1"/>
-          </a:effectRef>
-          <a:fontRef idx="minor">
-            <a:schemeClr val="lt1"/>
-          </a:fontRef>
-        </p:style>
-        <p:txBody>
-          <a:bodyPr rtlCol="0" anchor="ctr"/>
-          <a:lstStyle/>
-          <a:p>
-            <a:pPr algn="ctr"/>
-          </a:p>
-        </p:txBody>
-      </p:sp>
-      <p:sp>
-        <p:nvSpPr>
-          <p:cNvPr id="14" name="TextBox 13"/>
-          <p:cNvSpPr txBox="1"/>
-          <p:nvPr/>
-        </p:nvSpPr>
-        <p:spPr>
-          <a:xfrm>
-            <a:off x="868680" y="4517136"/>
-            <a:ext cx="6035040" cy="777240"/>
-          </a:xfrm>
-          <a:prstGeom prst="rect">
-            <a:avLst/>
-          </a:prstGeom>
-          <a:noFill/>
-        </p:spPr>
-        <p:txBody>
-          <a:bodyPr wrap="square" anchor="ctr">
-            <a:spAutoFit/>
-          </a:bodyPr>
-          <a:lstStyle/>
-          <a:p>
-            <a:r>
-              <a:rPr sz="1500" b="0" i="0">
-                <a:solidFill>
-                  <a:srgbClr val="ECECEA"/>
-                </a:solidFill>
-                <a:latin typeface="Malgun Gothic"/>
-                <a:ea typeface="Malgun Gothic"/>
-                <a:cs typeface="Malgun Gothic"/>
-              </a:rPr>
-              <a:t>Slack·Notion·DB가 필요한 작업</a:t>
-            </a:r>
-          </a:p>
-        </p:txBody>
-      </p:sp>
-      <p:sp>
-        <p:nvSpPr>
-          <p:cNvPr id="15" name="TextBox 14"/>
-          <p:cNvSpPr txBox="1"/>
-          <p:nvPr/>
-        </p:nvSpPr>
-        <p:spPr>
-          <a:xfrm>
-            <a:off x="7132320" y="4517136"/>
-            <a:ext cx="4297680" cy="777240"/>
-          </a:xfrm>
-          <a:prstGeom prst="rect">
-            <a:avLst/>
-          </a:prstGeom>
-          <a:noFill/>
-        </p:spPr>
-        <p:txBody>
-          <a:bodyPr wrap="square" anchor="ctr">
-            <a:spAutoFit/>
-          </a:bodyPr>
-          <a:lstStyle/>
-          <a:p>
-            <a:r>
-              <a:rPr sz="1500" b="1" i="0">
-                <a:solidFill>
-                  <a:srgbClr val="D97757"/>
-                </a:solidFill>
-                <a:latin typeface="Malgun Gothic"/>
-                <a:ea typeface="Malgun Gothic"/>
-                <a:cs typeface="Malgun Gothic"/>
-              </a:rPr>
-              <a:t>→  MCP</a:t>
-            </a:r>
-          </a:p>
-        </p:txBody>
-      </p:sp>
-      <p:sp>
-        <p:nvSpPr>
-          <p:cNvPr id="16" name="Rounded Rectangle 15"/>
-          <p:cNvSpPr/>
-          <p:nvPr/>
-        </p:nvSpPr>
-        <p:spPr>
-          <a:xfrm>
-            <a:off x="548640" y="5413248"/>
-            <a:ext cx="11064240" cy="777240"/>
-          </a:xfrm>
-          <a:prstGeom prst="roundRect">
-            <a:avLst/>
-          </a:prstGeom>
-          <a:solidFill>
-            <a:srgbClr val="222229"/>
-          </a:solidFill>
-          <a:ln>
-            <a:noFill/>
-          </a:ln>
-          <a:effectLst/>
-        </p:spPr>
-        <p:style>
-          <a:lnRef idx="1">
-            <a:schemeClr val="accent1"/>
-          </a:lnRef>
-          <a:fillRef idx="3">
-            <a:schemeClr val="accent1"/>
-          </a:fillRef>
-          <a:effectRef idx="2">
-            <a:schemeClr val="accent1"/>
-          </a:effectRef>
-          <a:fontRef idx="minor">
-            <a:schemeClr val="lt1"/>
-          </a:fontRef>
-        </p:style>
-        <p:txBody>
-          <a:bodyPr rtlCol="0" anchor="ctr"/>
-          <a:lstStyle/>
-          <a:p>
-            <a:pPr algn="ctr"/>
-          </a:p>
-        </p:txBody>
-      </p:sp>
-      <p:sp>
-        <p:nvSpPr>
-          <p:cNvPr id="17" name="TextBox 16"/>
-          <p:cNvSpPr txBox="1"/>
-          <p:nvPr/>
-        </p:nvSpPr>
-        <p:spPr>
-          <a:xfrm>
-            <a:off x="868680" y="5413248"/>
-            <a:ext cx="6035040" cy="777240"/>
-          </a:xfrm>
-          <a:prstGeom prst="rect">
-            <a:avLst/>
-          </a:prstGeom>
-          <a:noFill/>
-        </p:spPr>
-        <p:txBody>
-          <a:bodyPr wrap="square" anchor="ctr">
-            <a:spAutoFit/>
-          </a:bodyPr>
-          <a:lstStyle/>
-          <a:p>
-            <a:r>
-              <a:rPr sz="1500" b="0" i="0">
-                <a:solidFill>
-                  <a:srgbClr val="ECECEA"/>
-                </a:solidFill>
-                <a:latin typeface="Malgun Gothic"/>
-                <a:ea typeface="Malgun Gothic"/>
-                <a:cs typeface="Malgun Gothic"/>
-              </a:rPr>
-              <a:t>자리를 떠나야 할 때</a:t>
-            </a:r>
-          </a:p>
-        </p:txBody>
-      </p:sp>
-      <p:sp>
-        <p:nvSpPr>
-          <p:cNvPr id="18" name="TextBox 17"/>
-          <p:cNvSpPr txBox="1"/>
-          <p:nvPr/>
-        </p:nvSpPr>
-        <p:spPr>
-          <a:xfrm>
-            <a:off x="7132320" y="5413248"/>
-            <a:ext cx="4297680" cy="777240"/>
-          </a:xfrm>
-          <a:prstGeom prst="rect">
-            <a:avLst/>
-          </a:prstGeom>
-          <a:noFill/>
-        </p:spPr>
-        <p:txBody>
-          <a:bodyPr wrap="square" anchor="ctr">
-            <a:spAutoFit/>
-          </a:bodyPr>
-          <a:lstStyle/>
-          <a:p>
-            <a:r>
-              <a:rPr sz="1500" b="1" i="0">
-                <a:solidFill>
-                  <a:srgbClr val="D97757"/>
-                </a:solidFill>
-                <a:latin typeface="Malgun Gothic"/>
-                <a:ea typeface="Malgun Gothic"/>
-                <a:cs typeface="Malgun Gothic"/>
-              </a:rPr>
-              <a:t>→  웹(claude.ai/code) · GitHub Actions</a:t>
-            </a:r>
-          </a:p>
-        </p:txBody>
-      </p:sp>
-      <p:sp>
-        <p:nvSpPr>
-          <p:cNvPr id="19" name="TextBox 18"/>
           <p:cNvSpPr txBox="1"/>
           <p:nvPr/>
         </p:nvSpPr>
@@ -17560,7 +17309,7 @@
       </p:sp>
       <p:sp>
         <p:nvSpPr>
-          <p:cNvPr id="20" name="TextBox 19"/>
+          <p:cNvPr id="6" name="TextBox 5"/>
           <p:cNvSpPr txBox="1"/>
           <p:nvPr/>
         </p:nvSpPr>
@@ -17695,40 +17444,115 @@
                 <a:ea typeface="Malgun Gothic"/>
                 <a:cs typeface="Malgun Gothic"/>
               </a:rPr>
-              <a:t>실전 팁 5가지</a:t>
-            </a:r>
-          </a:p>
-        </p:txBody>
-      </p:sp>
-      <p:sp>
-        <p:nvSpPr>
-          <p:cNvPr id="4" name="TextBox 3"/>
-          <p:cNvSpPr txBox="1"/>
-          <p:nvPr/>
-        </p:nvSpPr>
-        <p:spPr>
-          <a:xfrm>
-            <a:off x="640080" y="1920240"/>
-            <a:ext cx="10972800" cy="4572000"/>
-          </a:xfrm>
-          <a:prstGeom prst="rect">
-            <a:avLst/>
-          </a:prstGeom>
-          <a:noFill/>
-        </p:spPr>
-        <p:txBody>
-          <a:bodyPr wrap="square" anchor="t">
-            <a:spAutoFit/>
-          </a:bodyPr>
-          <a:lstStyle/>
-          <a:p>
-            <a:pPr>
-              <a:spcAft>
-                <a:spcPts val="1600"/>
-              </a:spcAft>
-            </a:pPr>
-            <a:r>
-              <a:rPr sz="1800" b="1" i="0">
+              <a:t>Level 3 정리 — 언제 무엇을 꺼내 쓸까</a:t>
+            </a:r>
+          </a:p>
+        </p:txBody>
+      </p:sp>
+      <p:sp>
+        <p:nvSpPr>
+          <p:cNvPr id="4" name="Rounded Rectangle 3"/>
+          <p:cNvSpPr/>
+          <p:nvPr/>
+        </p:nvSpPr>
+        <p:spPr>
+          <a:xfrm>
+            <a:off x="548640" y="1828800"/>
+            <a:ext cx="11064240" cy="777240"/>
+          </a:xfrm>
+          <a:prstGeom prst="roundRect">
+            <a:avLst/>
+          </a:prstGeom>
+          <a:solidFill>
+            <a:srgbClr val="222229"/>
+          </a:solidFill>
+          <a:ln>
+            <a:noFill/>
+          </a:ln>
+          <a:effectLst/>
+        </p:spPr>
+        <p:style>
+          <a:lnRef idx="1">
+            <a:schemeClr val="accent1"/>
+          </a:lnRef>
+          <a:fillRef idx="3">
+            <a:schemeClr val="accent1"/>
+          </a:fillRef>
+          <a:effectRef idx="2">
+            <a:schemeClr val="accent1"/>
+          </a:effectRef>
+          <a:fontRef idx="minor">
+            <a:schemeClr val="lt1"/>
+          </a:fontRef>
+        </p:style>
+        <p:txBody>
+          <a:bodyPr rtlCol="0" anchor="ctr"/>
+          <a:lstStyle/>
+          <a:p>
+            <a:pPr algn="ctr"/>
+          </a:p>
+        </p:txBody>
+      </p:sp>
+      <p:sp>
+        <p:nvSpPr>
+          <p:cNvPr id="5" name="TextBox 4"/>
+          <p:cNvSpPr txBox="1"/>
+          <p:nvPr/>
+        </p:nvSpPr>
+        <p:spPr>
+          <a:xfrm>
+            <a:off x="868680" y="1828800"/>
+            <a:ext cx="6035040" cy="777240"/>
+          </a:xfrm>
+          <a:prstGeom prst="rect">
+            <a:avLst/>
+          </a:prstGeom>
+          <a:noFill/>
+        </p:spPr>
+        <p:txBody>
+          <a:bodyPr wrap="square" anchor="ctr">
+            <a:spAutoFit/>
+          </a:bodyPr>
+          <a:lstStyle/>
+          <a:p>
+            <a:r>
+              <a:rPr sz="1500" b="0" i="0">
+                <a:solidFill>
+                  <a:srgbClr val="ECECEA"/>
+                </a:solidFill>
+                <a:latin typeface="Malgun Gothic"/>
+                <a:ea typeface="Malgun Gothic"/>
+                <a:cs typeface="Malgun Gothic"/>
+              </a:rPr>
+              <a:t>같은 요청을 3번째 타이핑할 때</a:t>
+            </a:r>
+          </a:p>
+        </p:txBody>
+      </p:sp>
+      <p:sp>
+        <p:nvSpPr>
+          <p:cNvPr id="6" name="TextBox 5"/>
+          <p:cNvSpPr txBox="1"/>
+          <p:nvPr/>
+        </p:nvSpPr>
+        <p:spPr>
+          <a:xfrm>
+            <a:off x="7132320" y="1828800"/>
+            <a:ext cx="4297680" cy="777240"/>
+          </a:xfrm>
+          <a:prstGeom prst="rect">
+            <a:avLst/>
+          </a:prstGeom>
+          <a:noFill/>
+        </p:spPr>
+        <p:txBody>
+          <a:bodyPr wrap="square" anchor="ctr">
+            <a:spAutoFit/>
+          </a:bodyPr>
+          <a:lstStyle/>
+          <a:p>
+            <a:r>
+              <a:rPr sz="1500" b="1" i="0">
                 <a:solidFill>
                   <a:srgbClr val="D97757"/>
                 </a:solidFill>
@@ -17736,10 +17560,79 @@
                 <a:ea typeface="Malgun Gothic"/>
                 <a:cs typeface="Malgun Gothic"/>
               </a:rPr>
-              <a:t>•  </a:t>
-            </a:r>
-            <a:r>
-              <a:rPr sz="1800" b="1" i="0">
+              <a:t>→  커스텀 커맨드</a:t>
+            </a:r>
+          </a:p>
+        </p:txBody>
+      </p:sp>
+      <p:sp>
+        <p:nvSpPr>
+          <p:cNvPr id="7" name="Rounded Rectangle 6"/>
+          <p:cNvSpPr/>
+          <p:nvPr/>
+        </p:nvSpPr>
+        <p:spPr>
+          <a:xfrm>
+            <a:off x="548640" y="2724912"/>
+            <a:ext cx="11064240" cy="777240"/>
+          </a:xfrm>
+          <a:prstGeom prst="roundRect">
+            <a:avLst/>
+          </a:prstGeom>
+          <a:solidFill>
+            <a:srgbClr val="222229"/>
+          </a:solidFill>
+          <a:ln>
+            <a:noFill/>
+          </a:ln>
+          <a:effectLst/>
+        </p:spPr>
+        <p:style>
+          <a:lnRef idx="1">
+            <a:schemeClr val="accent1"/>
+          </a:lnRef>
+          <a:fillRef idx="3">
+            <a:schemeClr val="accent1"/>
+          </a:fillRef>
+          <a:effectRef idx="2">
+            <a:schemeClr val="accent1"/>
+          </a:effectRef>
+          <a:fontRef idx="minor">
+            <a:schemeClr val="lt1"/>
+          </a:fontRef>
+        </p:style>
+        <p:txBody>
+          <a:bodyPr rtlCol="0" anchor="ctr"/>
+          <a:lstStyle/>
+          <a:p>
+            <a:pPr algn="ctr"/>
+          </a:p>
+        </p:txBody>
+      </p:sp>
+      <p:sp>
+        <p:nvSpPr>
+          <p:cNvPr id="8" name="TextBox 7"/>
+          <p:cNvSpPr txBox="1"/>
+          <p:nvPr/>
+        </p:nvSpPr>
+        <p:spPr>
+          <a:xfrm>
+            <a:off x="868680" y="2724912"/>
+            <a:ext cx="6035040" cy="777240"/>
+          </a:xfrm>
+          <a:prstGeom prst="rect">
+            <a:avLst/>
+          </a:prstGeom>
+          <a:noFill/>
+        </p:spPr>
+        <p:txBody>
+          <a:bodyPr wrap="square" anchor="ctr">
+            <a:spAutoFit/>
+          </a:bodyPr>
+          <a:lstStyle/>
+          <a:p>
+            <a:r>
+              <a:rPr sz="1500" b="0" i="0">
                 <a:solidFill>
                   <a:srgbClr val="ECECEA"/>
                 </a:solidFill>
@@ -17747,28 +17640,35 @@
                 <a:ea typeface="Malgun Gothic"/>
                 <a:cs typeface="Malgun Gothic"/>
               </a:rPr>
-              <a:t>① 작게 시작해서 신뢰 쌓기</a:t>
-            </a:r>
-            <a:r>
-              <a:rPr sz="1800" b="0" i="0">
-                <a:solidFill>
-                  <a:srgbClr val="9B9B93"/>
-                </a:solidFill>
-                <a:latin typeface="Malgun Gothic"/>
-                <a:ea typeface="Malgun Gothic"/>
-                <a:cs typeface="Malgun Gothic"/>
-              </a:rPr>
-              <a:t> — 작은 수정 → 기능 → 리팩터링 순서로</a:t>
-            </a:r>
-          </a:p>
-          <a:p>
-            <a:pPr>
-              <a:spcAft>
-                <a:spcPts val="1600"/>
-              </a:spcAft>
-            </a:pPr>
-            <a:r>
-              <a:rPr sz="1800" b="1" i="0">
+              <a:t>“매번 이것 좀 지켜줬으면” 할 때</a:t>
+            </a:r>
+          </a:p>
+        </p:txBody>
+      </p:sp>
+      <p:sp>
+        <p:nvSpPr>
+          <p:cNvPr id="9" name="TextBox 8"/>
+          <p:cNvSpPr txBox="1"/>
+          <p:nvPr/>
+        </p:nvSpPr>
+        <p:spPr>
+          <a:xfrm>
+            <a:off x="7132320" y="2724912"/>
+            <a:ext cx="4297680" cy="777240"/>
+          </a:xfrm>
+          <a:prstGeom prst="rect">
+            <a:avLst/>
+          </a:prstGeom>
+          <a:noFill/>
+        </p:spPr>
+        <p:txBody>
+          <a:bodyPr wrap="square" anchor="ctr">
+            <a:spAutoFit/>
+          </a:bodyPr>
+          <a:lstStyle/>
+          <a:p>
+            <a:r>
+              <a:rPr sz="1500" b="1" i="0">
                 <a:solidFill>
                   <a:srgbClr val="D97757"/>
                 </a:solidFill>
@@ -17776,10 +17676,79 @@
                 <a:ea typeface="Malgun Gothic"/>
                 <a:cs typeface="Malgun Gothic"/>
               </a:rPr>
-              <a:t>•  </a:t>
-            </a:r>
-            <a:r>
-              <a:rPr sz="1800" b="1" i="0">
+              <a:t>→  CLAUDE.md → 안 지켜지면 Hooks</a:t>
+            </a:r>
+          </a:p>
+        </p:txBody>
+      </p:sp>
+      <p:sp>
+        <p:nvSpPr>
+          <p:cNvPr id="10" name="Rounded Rectangle 9"/>
+          <p:cNvSpPr/>
+          <p:nvPr/>
+        </p:nvSpPr>
+        <p:spPr>
+          <a:xfrm>
+            <a:off x="548640" y="3621024"/>
+            <a:ext cx="11064240" cy="777240"/>
+          </a:xfrm>
+          <a:prstGeom prst="roundRect">
+            <a:avLst/>
+          </a:prstGeom>
+          <a:solidFill>
+            <a:srgbClr val="222229"/>
+          </a:solidFill>
+          <a:ln>
+            <a:noFill/>
+          </a:ln>
+          <a:effectLst/>
+        </p:spPr>
+        <p:style>
+          <a:lnRef idx="1">
+            <a:schemeClr val="accent1"/>
+          </a:lnRef>
+          <a:fillRef idx="3">
+            <a:schemeClr val="accent1"/>
+          </a:fillRef>
+          <a:effectRef idx="2">
+            <a:schemeClr val="accent1"/>
+          </a:effectRef>
+          <a:fontRef idx="minor">
+            <a:schemeClr val="lt1"/>
+          </a:fontRef>
+        </p:style>
+        <p:txBody>
+          <a:bodyPr rtlCol="0" anchor="ctr"/>
+          <a:lstStyle/>
+          <a:p>
+            <a:pPr algn="ctr"/>
+          </a:p>
+        </p:txBody>
+      </p:sp>
+      <p:sp>
+        <p:nvSpPr>
+          <p:cNvPr id="11" name="TextBox 10"/>
+          <p:cNvSpPr txBox="1"/>
+          <p:nvPr/>
+        </p:nvSpPr>
+        <p:spPr>
+          <a:xfrm>
+            <a:off x="868680" y="3621024"/>
+            <a:ext cx="6035040" cy="777240"/>
+          </a:xfrm>
+          <a:prstGeom prst="rect">
+            <a:avLst/>
+          </a:prstGeom>
+          <a:noFill/>
+        </p:spPr>
+        <p:txBody>
+          <a:bodyPr wrap="square" anchor="ctr">
+            <a:spAutoFit/>
+          </a:bodyPr>
+          <a:lstStyle/>
+          <a:p>
+            <a:r>
+              <a:rPr sz="1500" b="0" i="0">
                 <a:solidFill>
                   <a:srgbClr val="ECECEA"/>
                 </a:solidFill>
@@ -17787,28 +17756,35 @@
                 <a:ea typeface="Malgun Gothic"/>
                 <a:cs typeface="Malgun Gothic"/>
               </a:rPr>
-              <a:t>② 검증 방법을 함께 주기</a:t>
-            </a:r>
-            <a:r>
-              <a:rPr sz="1800" b="0" i="0">
-                <a:solidFill>
-                  <a:srgbClr val="9B9B93"/>
-                </a:solidFill>
-                <a:latin typeface="Malgun Gothic"/>
-                <a:ea typeface="Malgun Gothic"/>
-                <a:cs typeface="Malgun Gothic"/>
-              </a:rPr>
-              <a:t> — “고치고 테스트도 돌려서 확인해줘”</a:t>
-            </a:r>
-          </a:p>
-          <a:p>
-            <a:pPr>
-              <a:spcAft>
-                <a:spcPts val="1600"/>
-              </a:spcAft>
-            </a:pPr>
-            <a:r>
-              <a:rPr sz="1800" b="1" i="0">
+              <a:t>작업이 크고 검증도 필요할 때</a:t>
+            </a:r>
+          </a:p>
+        </p:txBody>
+      </p:sp>
+      <p:sp>
+        <p:nvSpPr>
+          <p:cNvPr id="12" name="TextBox 11"/>
+          <p:cNvSpPr txBox="1"/>
+          <p:nvPr/>
+        </p:nvSpPr>
+        <p:spPr>
+          <a:xfrm>
+            <a:off x="7132320" y="3621024"/>
+            <a:ext cx="4297680" cy="777240"/>
+          </a:xfrm>
+          <a:prstGeom prst="rect">
+            <a:avLst/>
+          </a:prstGeom>
+          <a:noFill/>
+        </p:spPr>
+        <p:txBody>
+          <a:bodyPr wrap="square" anchor="ctr">
+            <a:spAutoFit/>
+          </a:bodyPr>
+          <a:lstStyle/>
+          <a:p>
+            <a:r>
+              <a:rPr sz="1500" b="1" i="0">
                 <a:solidFill>
                   <a:srgbClr val="D97757"/>
                 </a:solidFill>
@@ -17816,10 +17792,79 @@
                 <a:ea typeface="Malgun Gothic"/>
                 <a:cs typeface="Malgun Gothic"/>
               </a:rPr>
-              <a:t>•  </a:t>
-            </a:r>
-            <a:r>
-              <a:rPr sz="1800" b="1" i="0">
+              <a:t>→  서브에이전트</a:t>
+            </a:r>
+          </a:p>
+        </p:txBody>
+      </p:sp>
+      <p:sp>
+        <p:nvSpPr>
+          <p:cNvPr id="13" name="Rounded Rectangle 12"/>
+          <p:cNvSpPr/>
+          <p:nvPr/>
+        </p:nvSpPr>
+        <p:spPr>
+          <a:xfrm>
+            <a:off x="548640" y="4517136"/>
+            <a:ext cx="11064240" cy="777240"/>
+          </a:xfrm>
+          <a:prstGeom prst="roundRect">
+            <a:avLst/>
+          </a:prstGeom>
+          <a:solidFill>
+            <a:srgbClr val="222229"/>
+          </a:solidFill>
+          <a:ln>
+            <a:noFill/>
+          </a:ln>
+          <a:effectLst/>
+        </p:spPr>
+        <p:style>
+          <a:lnRef idx="1">
+            <a:schemeClr val="accent1"/>
+          </a:lnRef>
+          <a:fillRef idx="3">
+            <a:schemeClr val="accent1"/>
+          </a:fillRef>
+          <a:effectRef idx="2">
+            <a:schemeClr val="accent1"/>
+          </a:effectRef>
+          <a:fontRef idx="minor">
+            <a:schemeClr val="lt1"/>
+          </a:fontRef>
+        </p:style>
+        <p:txBody>
+          <a:bodyPr rtlCol="0" anchor="ctr"/>
+          <a:lstStyle/>
+          <a:p>
+            <a:pPr algn="ctr"/>
+          </a:p>
+        </p:txBody>
+      </p:sp>
+      <p:sp>
+        <p:nvSpPr>
+          <p:cNvPr id="14" name="TextBox 13"/>
+          <p:cNvSpPr txBox="1"/>
+          <p:nvPr/>
+        </p:nvSpPr>
+        <p:spPr>
+          <a:xfrm>
+            <a:off x="868680" y="4517136"/>
+            <a:ext cx="6035040" cy="777240"/>
+          </a:xfrm>
+          <a:prstGeom prst="rect">
+            <a:avLst/>
+          </a:prstGeom>
+          <a:noFill/>
+        </p:spPr>
+        <p:txBody>
+          <a:bodyPr wrap="square" anchor="ctr">
+            <a:spAutoFit/>
+          </a:bodyPr>
+          <a:lstStyle/>
+          <a:p>
+            <a:r>
+              <a:rPr sz="1500" b="0" i="0">
                 <a:solidFill>
                   <a:srgbClr val="ECECEA"/>
                 </a:solidFill>
@@ -17827,28 +17872,35 @@
                 <a:ea typeface="Malgun Gothic"/>
                 <a:cs typeface="Malgun Gothic"/>
               </a:rPr>
-              <a:t>③ 중간에 개입하기</a:t>
-            </a:r>
-            <a:r>
-              <a:rPr sz="1800" b="0" i="0">
-                <a:solidFill>
-                  <a:srgbClr val="9B9B93"/>
-                </a:solidFill>
-                <a:latin typeface="Malgun Gothic"/>
-                <a:ea typeface="Malgun Gothic"/>
-                <a:cs typeface="Malgun Gothic"/>
-              </a:rPr>
-              <a:t> — 이상하면 Esc, 방향만 다시 잡아주면 됩니다</a:t>
-            </a:r>
-          </a:p>
-          <a:p>
-            <a:pPr>
-              <a:spcAft>
-                <a:spcPts val="1600"/>
-              </a:spcAft>
-            </a:pPr>
-            <a:r>
-              <a:rPr sz="1800" b="1" i="0">
+              <a:t>Slack·Notion·DB가 필요한 작업</a:t>
+            </a:r>
+          </a:p>
+        </p:txBody>
+      </p:sp>
+      <p:sp>
+        <p:nvSpPr>
+          <p:cNvPr id="15" name="TextBox 14"/>
+          <p:cNvSpPr txBox="1"/>
+          <p:nvPr/>
+        </p:nvSpPr>
+        <p:spPr>
+          <a:xfrm>
+            <a:off x="7132320" y="4517136"/>
+            <a:ext cx="4297680" cy="777240"/>
+          </a:xfrm>
+          <a:prstGeom prst="rect">
+            <a:avLst/>
+          </a:prstGeom>
+          <a:noFill/>
+        </p:spPr>
+        <p:txBody>
+          <a:bodyPr wrap="square" anchor="ctr">
+            <a:spAutoFit/>
+          </a:bodyPr>
+          <a:lstStyle/>
+          <a:p>
+            <a:r>
+              <a:rPr sz="1500" b="1" i="0">
                 <a:solidFill>
                   <a:srgbClr val="D97757"/>
                 </a:solidFill>
@@ -17856,10 +17908,79 @@
                 <a:ea typeface="Malgun Gothic"/>
                 <a:cs typeface="Malgun Gothic"/>
               </a:rPr>
-              <a:t>•  </a:t>
-            </a:r>
-            <a:r>
-              <a:rPr sz="1800" b="1" i="0">
+              <a:t>→  MCP</a:t>
+            </a:r>
+          </a:p>
+        </p:txBody>
+      </p:sp>
+      <p:sp>
+        <p:nvSpPr>
+          <p:cNvPr id="16" name="Rounded Rectangle 15"/>
+          <p:cNvSpPr/>
+          <p:nvPr/>
+        </p:nvSpPr>
+        <p:spPr>
+          <a:xfrm>
+            <a:off x="548640" y="5413248"/>
+            <a:ext cx="11064240" cy="777240"/>
+          </a:xfrm>
+          <a:prstGeom prst="roundRect">
+            <a:avLst/>
+          </a:prstGeom>
+          <a:solidFill>
+            <a:srgbClr val="222229"/>
+          </a:solidFill>
+          <a:ln>
+            <a:noFill/>
+          </a:ln>
+          <a:effectLst/>
+        </p:spPr>
+        <p:style>
+          <a:lnRef idx="1">
+            <a:schemeClr val="accent1"/>
+          </a:lnRef>
+          <a:fillRef idx="3">
+            <a:schemeClr val="accent1"/>
+          </a:fillRef>
+          <a:effectRef idx="2">
+            <a:schemeClr val="accent1"/>
+          </a:effectRef>
+          <a:fontRef idx="minor">
+            <a:schemeClr val="lt1"/>
+          </a:fontRef>
+        </p:style>
+        <p:txBody>
+          <a:bodyPr rtlCol="0" anchor="ctr"/>
+          <a:lstStyle/>
+          <a:p>
+            <a:pPr algn="ctr"/>
+          </a:p>
+        </p:txBody>
+      </p:sp>
+      <p:sp>
+        <p:nvSpPr>
+          <p:cNvPr id="17" name="TextBox 16"/>
+          <p:cNvSpPr txBox="1"/>
+          <p:nvPr/>
+        </p:nvSpPr>
+        <p:spPr>
+          <a:xfrm>
+            <a:off x="868680" y="5413248"/>
+            <a:ext cx="6035040" cy="777240"/>
+          </a:xfrm>
+          <a:prstGeom prst="rect">
+            <a:avLst/>
+          </a:prstGeom>
+          <a:noFill/>
+        </p:spPr>
+        <p:txBody>
+          <a:bodyPr wrap="square" anchor="ctr">
+            <a:spAutoFit/>
+          </a:bodyPr>
+          <a:lstStyle/>
+          <a:p>
+            <a:r>
+              <a:rPr sz="1500" b="0" i="0">
                 <a:solidFill>
                   <a:srgbClr val="ECECEA"/>
                 </a:solidFill>
@@ -17867,28 +17988,35 @@
                 <a:ea typeface="Malgun Gothic"/>
                 <a:cs typeface="Malgun Gothic"/>
               </a:rPr>
-              <a:t>④ 커밋을 자주</a:t>
-            </a:r>
-            <a:r>
-              <a:rPr sz="1800" b="0" i="0">
-                <a:solidFill>
-                  <a:srgbClr val="9B9B93"/>
-                </a:solidFill>
-                <a:latin typeface="Malgun Gothic"/>
-                <a:ea typeface="Malgun Gothic"/>
-                <a:cs typeface="Malgun Gothic"/>
-              </a:rPr>
-              <a:t> — 잘 된 상태를 저장해두면 실험이 두렵지 않습니다</a:t>
-            </a:r>
-          </a:p>
-          <a:p>
-            <a:pPr>
-              <a:spcAft>
-                <a:spcPts val="1600"/>
-              </a:spcAft>
-            </a:pPr>
-            <a:r>
-              <a:rPr sz="1800" b="1" i="0">
+              <a:t>자리를 떠나야 할 때</a:t>
+            </a:r>
+          </a:p>
+        </p:txBody>
+      </p:sp>
+      <p:sp>
+        <p:nvSpPr>
+          <p:cNvPr id="18" name="TextBox 17"/>
+          <p:cNvSpPr txBox="1"/>
+          <p:nvPr/>
+        </p:nvSpPr>
+        <p:spPr>
+          <a:xfrm>
+            <a:off x="7132320" y="5413248"/>
+            <a:ext cx="4297680" cy="777240"/>
+          </a:xfrm>
+          <a:prstGeom prst="rect">
+            <a:avLst/>
+          </a:prstGeom>
+          <a:noFill/>
+        </p:spPr>
+        <p:txBody>
+          <a:bodyPr wrap="square" anchor="ctr">
+            <a:spAutoFit/>
+          </a:bodyPr>
+          <a:lstStyle/>
+          <a:p>
+            <a:r>
+              <a:rPr sz="1500" b="1" i="0">
                 <a:solidFill>
                   <a:srgbClr val="D97757"/>
                 </a:solidFill>
@@ -17896,36 +18024,14 @@
                 <a:ea typeface="Malgun Gothic"/>
                 <a:cs typeface="Malgun Gothic"/>
               </a:rPr>
-              <a:t>•  </a:t>
-            </a:r>
-            <a:r>
-              <a:rPr sz="1800" b="1" i="0">
-                <a:solidFill>
-                  <a:srgbClr val="ECECEA"/>
-                </a:solidFill>
-                <a:latin typeface="Malgun Gothic"/>
-                <a:ea typeface="Malgun Gothic"/>
-                <a:cs typeface="Malgun Gothic"/>
-              </a:rPr>
-              <a:t>⑤ 안 되는 이유를 묻기</a:t>
-            </a:r>
-            <a:r>
-              <a:rPr sz="1800" b="0" i="0">
-                <a:solidFill>
-                  <a:srgbClr val="9B9B93"/>
-                </a:solidFill>
-                <a:latin typeface="Malgun Gothic"/>
-                <a:ea typeface="Malgun Gothic"/>
-                <a:cs typeface="Malgun Gothic"/>
-              </a:rPr>
-              <a:t> — “왜 이 방법을 썼어?” 답을 듣고 배우세요</a:t>
-            </a:r>
-          </a:p>
-        </p:txBody>
-      </p:sp>
-      <p:sp>
-        <p:nvSpPr>
-          <p:cNvPr id="5" name="TextBox 4"/>
+              <a:t>→  웹(claude.ai/code) · GitHub Actions</a:t>
+            </a:r>
+          </a:p>
+        </p:txBody>
+      </p:sp>
+      <p:sp>
+        <p:nvSpPr>
+          <p:cNvPr id="19" name="TextBox 18"/>
           <p:cNvSpPr txBox="1"/>
           <p:nvPr/>
         </p:nvSpPr>
@@ -17954,14 +18060,14 @@
                 <a:ea typeface="Malgun Gothic"/>
                 <a:cs typeface="Malgun Gothic"/>
               </a:rPr>
-              <a:t>실전 팁</a:t>
-            </a:r>
-          </a:p>
-        </p:txBody>
-      </p:sp>
-      <p:sp>
-        <p:nvSpPr>
-          <p:cNvPr id="6" name="TextBox 5"/>
+              <a:t>Level 3 · 확장하기</a:t>
+            </a:r>
+          </a:p>
+        </p:txBody>
+      </p:sp>
+      <p:sp>
+        <p:nvSpPr>
+          <p:cNvPr id="20" name="TextBox 19"/>
           <p:cNvSpPr txBox="1"/>
           <p:nvPr/>
         </p:nvSpPr>
@@ -18096,7 +18202,7 @@
                 <a:ea typeface="Malgun Gothic"/>
                 <a:cs typeface="Malgun Gothic"/>
               </a:rPr>
-              <a:t>이것만은 피하세요</a:t>
+              <a:t>실전 팁 5가지</a:t>
             </a:r>
           </a:p>
         </p:txBody>
@@ -18142,24 +18248,24 @@
             <a:r>
               <a:rPr sz="1800" b="1" i="0">
                 <a:solidFill>
-                  <a:srgbClr val="D9B45B"/>
-                </a:solidFill>
-                <a:latin typeface="Malgun Gothic"/>
-                <a:ea typeface="Malgun Gothic"/>
-                <a:cs typeface="Malgun Gothic"/>
-              </a:rPr>
-              <a:t>diff 안 읽고 전부 승인</a:t>
+                  <a:srgbClr val="ECECEA"/>
+                </a:solidFill>
+                <a:latin typeface="Malgun Gothic"/>
+                <a:ea typeface="Malgun Gothic"/>
+                <a:cs typeface="Malgun Gothic"/>
+              </a:rPr>
+              <a:t>① 작게 시작해서 신뢰 쌓기</a:t>
             </a:r>
             <a:r>
               <a:rPr sz="1800" b="0" i="0">
                 <a:solidFill>
-                  <a:srgbClr val="ECECEA"/>
-                </a:solidFill>
-                <a:latin typeface="Malgun Gothic"/>
-                <a:ea typeface="Malgun Gothic"/>
-                <a:cs typeface="Malgun Gothic"/>
-              </a:rPr>
-              <a:t> — 이해 못 한 코드가 쌓이면 결국 내 빚입니다</a:t>
+                  <a:srgbClr val="9B9B93"/>
+                </a:solidFill>
+                <a:latin typeface="Malgun Gothic"/>
+                <a:ea typeface="Malgun Gothic"/>
+                <a:cs typeface="Malgun Gothic"/>
+              </a:rPr>
+              <a:t> — 작은 수정 → 기능 → 리팩터링 순서로</a:t>
             </a:r>
           </a:p>
           <a:p>
@@ -18182,24 +18288,24 @@
             <a:r>
               <a:rPr sz="1800" b="1" i="0">
                 <a:solidFill>
-                  <a:srgbClr val="D9B45B"/>
-                </a:solidFill>
-                <a:latin typeface="Malgun Gothic"/>
-                <a:ea typeface="Malgun Gothic"/>
-                <a:cs typeface="Malgun Gothic"/>
-              </a:rPr>
-              <a:t>한 대화에서 주제 계속 갈아타기</a:t>
+                  <a:srgbClr val="ECECEA"/>
+                </a:solidFill>
+                <a:latin typeface="Malgun Gothic"/>
+                <a:ea typeface="Malgun Gothic"/>
+                <a:cs typeface="Malgun Gothic"/>
+              </a:rPr>
+              <a:t>② 검증 방법을 함께 주기</a:t>
             </a:r>
             <a:r>
               <a:rPr sz="1800" b="0" i="0">
                 <a:solidFill>
-                  <a:srgbClr val="ECECEA"/>
-                </a:solidFill>
-                <a:latin typeface="Malgun Gothic"/>
-                <a:ea typeface="Malgun Gothic"/>
-                <a:cs typeface="Malgun Gothic"/>
-              </a:rPr>
-              <a:t> — 정확도가 떨어집니다. /clear 하세요</a:t>
+                  <a:srgbClr val="9B9B93"/>
+                </a:solidFill>
+                <a:latin typeface="Malgun Gothic"/>
+                <a:ea typeface="Malgun Gothic"/>
+                <a:cs typeface="Malgun Gothic"/>
+              </a:rPr>
+              <a:t> — “고치고 테스트도 돌려서 확인해줘”</a:t>
             </a:r>
           </a:p>
           <a:p>
@@ -18222,24 +18328,24 @@
             <a:r>
               <a:rPr sz="1800" b="1" i="0">
                 <a:solidFill>
-                  <a:srgbClr val="D9B45B"/>
-                </a:solidFill>
-                <a:latin typeface="Malgun Gothic"/>
-                <a:ea typeface="Malgun Gothic"/>
-                <a:cs typeface="Malgun Gothic"/>
-              </a:rPr>
-              <a:t>모호한 불만 반복</a:t>
+                  <a:srgbClr val="ECECEA"/>
+                </a:solidFill>
+                <a:latin typeface="Malgun Gothic"/>
+                <a:ea typeface="Malgun Gothic"/>
+                <a:cs typeface="Malgun Gothic"/>
+              </a:rPr>
+              <a:t>③ 중간에 개입하기</a:t>
             </a:r>
             <a:r>
               <a:rPr sz="1800" b="0" i="0">
                 <a:solidFill>
-                  <a:srgbClr val="ECECEA"/>
-                </a:solidFill>
-                <a:latin typeface="Malgun Gothic"/>
-                <a:ea typeface="Malgun Gothic"/>
-                <a:cs typeface="Malgun Gothic"/>
-              </a:rPr>
-              <a:t> — “아니 그거 말고” 대신 원하는 결과를 다시 설명</a:t>
+                  <a:srgbClr val="9B9B93"/>
+                </a:solidFill>
+                <a:latin typeface="Malgun Gothic"/>
+                <a:ea typeface="Malgun Gothic"/>
+                <a:cs typeface="Malgun Gothic"/>
+              </a:rPr>
+              <a:t> — 이상하면 Esc, 방향만 다시 잡아주면 됩니다</a:t>
             </a:r>
           </a:p>
           <a:p>
@@ -18262,24 +18368,24 @@
             <a:r>
               <a:rPr sz="1800" b="1" i="0">
                 <a:solidFill>
-                  <a:srgbClr val="D9B45B"/>
-                </a:solidFill>
-                <a:latin typeface="Malgun Gothic"/>
-                <a:ea typeface="Malgun Gothic"/>
-                <a:cs typeface="Malgun Gothic"/>
-              </a:rPr>
-              <a:t>비밀키·개인정보 붙여넣기</a:t>
+                  <a:srgbClr val="ECECEA"/>
+                </a:solidFill>
+                <a:latin typeface="Malgun Gothic"/>
+                <a:ea typeface="Malgun Gothic"/>
+                <a:cs typeface="Malgun Gothic"/>
+              </a:rPr>
+              <a:t>④ 커밋을 자주</a:t>
             </a:r>
             <a:r>
               <a:rPr sz="1800" b="0" i="0">
                 <a:solidFill>
-                  <a:srgbClr val="ECECEA"/>
-                </a:solidFill>
-                <a:latin typeface="Malgun Gothic"/>
-                <a:ea typeface="Malgun Gothic"/>
-                <a:cs typeface="Malgun Gothic"/>
-              </a:rPr>
-              <a:t> — .env 값은 가리고 공유하세요</a:t>
+                  <a:srgbClr val="9B9B93"/>
+                </a:solidFill>
+                <a:latin typeface="Malgun Gothic"/>
+                <a:ea typeface="Malgun Gothic"/>
+                <a:cs typeface="Malgun Gothic"/>
+              </a:rPr>
+              <a:t> — 잘 된 상태를 저장해두면 실험이 두렵지 않습니다</a:t>
             </a:r>
           </a:p>
           <a:p>
@@ -18302,24 +18408,24 @@
             <a:r>
               <a:rPr sz="1800" b="1" i="0">
                 <a:solidFill>
-                  <a:srgbClr val="D9B45B"/>
-                </a:solidFill>
-                <a:latin typeface="Malgun Gothic"/>
-                <a:ea typeface="Malgun Gothic"/>
-                <a:cs typeface="Malgun Gothic"/>
-              </a:rPr>
-              <a:t>백업 없이 대규모 변경</a:t>
+                  <a:srgbClr val="ECECEA"/>
+                </a:solidFill>
+                <a:latin typeface="Malgun Gothic"/>
+                <a:ea typeface="Malgun Gothic"/>
+                <a:cs typeface="Malgun Gothic"/>
+              </a:rPr>
+              <a:t>⑤ 안 되는 이유를 묻기</a:t>
             </a:r>
             <a:r>
               <a:rPr sz="1800" b="0" i="0">
                 <a:solidFill>
-                  <a:srgbClr val="ECECEA"/>
-                </a:solidFill>
-                <a:latin typeface="Malgun Gothic"/>
-                <a:ea typeface="Malgun Gothic"/>
-                <a:cs typeface="Malgun Gothic"/>
-              </a:rPr>
-              <a:t> — 커밋 먼저, 실험은 그 다음</a:t>
+                  <a:srgbClr val="9B9B93"/>
+                </a:solidFill>
+                <a:latin typeface="Malgun Gothic"/>
+                <a:ea typeface="Malgun Gothic"/>
+                <a:cs typeface="Malgun Gothic"/>
+              </a:rPr>
+              <a:t> — “왜 이 방법을 썼어?” 답을 듣고 배우세요</a:t>
             </a:r>
           </a:p>
         </p:txBody>
@@ -18497,942 +18603,237 @@
                 <a:ea typeface="Malgun Gothic"/>
                 <a:cs typeface="Malgun Gothic"/>
               </a:rPr>
-              <a:t>치트시트 — 이것만 기억하세요</a:t>
-            </a:r>
-          </a:p>
-        </p:txBody>
-      </p:sp>
-      <p:sp>
-        <p:nvSpPr>
-          <p:cNvPr id="4" name="Rounded Rectangle 3"/>
-          <p:cNvSpPr/>
-          <p:nvPr/>
-        </p:nvSpPr>
-        <p:spPr>
-          <a:xfrm>
-            <a:off x="548640" y="1783080"/>
-            <a:ext cx="5486400" cy="914400"/>
-          </a:xfrm>
-          <a:prstGeom prst="roundRect">
-            <a:avLst/>
-          </a:prstGeom>
-          <a:solidFill>
-            <a:srgbClr val="222229"/>
-          </a:solidFill>
-          <a:ln>
-            <a:noFill/>
-          </a:ln>
-          <a:effectLst/>
-        </p:spPr>
-        <p:style>
-          <a:lnRef idx="1">
-            <a:schemeClr val="accent1"/>
-          </a:lnRef>
-          <a:fillRef idx="3">
-            <a:schemeClr val="accent1"/>
-          </a:fillRef>
-          <a:effectRef idx="2">
-            <a:schemeClr val="accent1"/>
-          </a:effectRef>
-          <a:fontRef idx="minor">
-            <a:schemeClr val="lt1"/>
-          </a:fontRef>
-        </p:style>
-        <p:txBody>
-          <a:bodyPr rtlCol="0" anchor="ctr"/>
-          <a:lstStyle/>
-          <a:p>
-            <a:pPr algn="ctr"/>
+              <a:t>이것만은 피하세요</a:t>
+            </a:r>
+          </a:p>
+        </p:txBody>
+      </p:sp>
+      <p:sp>
+        <p:nvSpPr>
+          <p:cNvPr id="4" name="TextBox 3"/>
+          <p:cNvSpPr txBox="1"/>
+          <p:nvPr/>
+        </p:nvSpPr>
+        <p:spPr>
+          <a:xfrm>
+            <a:off x="640080" y="1920240"/>
+            <a:ext cx="10972800" cy="4572000"/>
+          </a:xfrm>
+          <a:prstGeom prst="rect">
+            <a:avLst/>
+          </a:prstGeom>
+          <a:noFill/>
+        </p:spPr>
+        <p:txBody>
+          <a:bodyPr wrap="square" anchor="t">
+            <a:spAutoFit/>
+          </a:bodyPr>
+          <a:lstStyle/>
+          <a:p>
+            <a:pPr>
+              <a:spcAft>
+                <a:spcPts val="1600"/>
+              </a:spcAft>
+            </a:pPr>
+            <a:r>
+              <a:rPr sz="1800" b="1" i="0">
+                <a:solidFill>
+                  <a:srgbClr val="D97757"/>
+                </a:solidFill>
+                <a:latin typeface="Malgun Gothic"/>
+                <a:ea typeface="Malgun Gothic"/>
+                <a:cs typeface="Malgun Gothic"/>
+              </a:rPr>
+              <a:t>•  </a:t>
+            </a:r>
+            <a:r>
+              <a:rPr sz="1800" b="1" i="0">
+                <a:solidFill>
+                  <a:srgbClr val="D9B45B"/>
+                </a:solidFill>
+                <a:latin typeface="Malgun Gothic"/>
+                <a:ea typeface="Malgun Gothic"/>
+                <a:cs typeface="Malgun Gothic"/>
+              </a:rPr>
+              <a:t>diff 안 읽고 전부 승인</a:t>
+            </a:r>
+            <a:r>
+              <a:rPr sz="1800" b="0" i="0">
+                <a:solidFill>
+                  <a:srgbClr val="ECECEA"/>
+                </a:solidFill>
+                <a:latin typeface="Malgun Gothic"/>
+                <a:ea typeface="Malgun Gothic"/>
+                <a:cs typeface="Malgun Gothic"/>
+              </a:rPr>
+              <a:t> — 이해 못 한 코드가 쌓이면 결국 내 빚입니다</a:t>
+            </a:r>
+          </a:p>
+          <a:p>
+            <a:pPr>
+              <a:spcAft>
+                <a:spcPts val="1600"/>
+              </a:spcAft>
+            </a:pPr>
+            <a:r>
+              <a:rPr sz="1800" b="1" i="0">
+                <a:solidFill>
+                  <a:srgbClr val="D97757"/>
+                </a:solidFill>
+                <a:latin typeface="Malgun Gothic"/>
+                <a:ea typeface="Malgun Gothic"/>
+                <a:cs typeface="Malgun Gothic"/>
+              </a:rPr>
+              <a:t>•  </a:t>
+            </a:r>
+            <a:r>
+              <a:rPr sz="1800" b="1" i="0">
+                <a:solidFill>
+                  <a:srgbClr val="D9B45B"/>
+                </a:solidFill>
+                <a:latin typeface="Malgun Gothic"/>
+                <a:ea typeface="Malgun Gothic"/>
+                <a:cs typeface="Malgun Gothic"/>
+              </a:rPr>
+              <a:t>한 대화에서 주제 계속 갈아타기</a:t>
+            </a:r>
+            <a:r>
+              <a:rPr sz="1800" b="0" i="0">
+                <a:solidFill>
+                  <a:srgbClr val="ECECEA"/>
+                </a:solidFill>
+                <a:latin typeface="Malgun Gothic"/>
+                <a:ea typeface="Malgun Gothic"/>
+                <a:cs typeface="Malgun Gothic"/>
+              </a:rPr>
+              <a:t> — 정확도가 떨어집니다. /clear 하세요</a:t>
+            </a:r>
+          </a:p>
+          <a:p>
+            <a:pPr>
+              <a:spcAft>
+                <a:spcPts val="1600"/>
+              </a:spcAft>
+            </a:pPr>
+            <a:r>
+              <a:rPr sz="1800" b="1" i="0">
+                <a:solidFill>
+                  <a:srgbClr val="D97757"/>
+                </a:solidFill>
+                <a:latin typeface="Malgun Gothic"/>
+                <a:ea typeface="Malgun Gothic"/>
+                <a:cs typeface="Malgun Gothic"/>
+              </a:rPr>
+              <a:t>•  </a:t>
+            </a:r>
+            <a:r>
+              <a:rPr sz="1800" b="1" i="0">
+                <a:solidFill>
+                  <a:srgbClr val="D9B45B"/>
+                </a:solidFill>
+                <a:latin typeface="Malgun Gothic"/>
+                <a:ea typeface="Malgun Gothic"/>
+                <a:cs typeface="Malgun Gothic"/>
+              </a:rPr>
+              <a:t>모호한 불만 반복</a:t>
+            </a:r>
+            <a:r>
+              <a:rPr sz="1800" b="0" i="0">
+                <a:solidFill>
+                  <a:srgbClr val="ECECEA"/>
+                </a:solidFill>
+                <a:latin typeface="Malgun Gothic"/>
+                <a:ea typeface="Malgun Gothic"/>
+                <a:cs typeface="Malgun Gothic"/>
+              </a:rPr>
+              <a:t> — “아니 그거 말고” 대신 원하는 결과를 다시 설명</a:t>
+            </a:r>
+          </a:p>
+          <a:p>
+            <a:pPr>
+              <a:spcAft>
+                <a:spcPts val="1600"/>
+              </a:spcAft>
+            </a:pPr>
+            <a:r>
+              <a:rPr sz="1800" b="1" i="0">
+                <a:solidFill>
+                  <a:srgbClr val="D97757"/>
+                </a:solidFill>
+                <a:latin typeface="Malgun Gothic"/>
+                <a:ea typeface="Malgun Gothic"/>
+                <a:cs typeface="Malgun Gothic"/>
+              </a:rPr>
+              <a:t>•  </a:t>
+            </a:r>
+            <a:r>
+              <a:rPr sz="1800" b="1" i="0">
+                <a:solidFill>
+                  <a:srgbClr val="D9B45B"/>
+                </a:solidFill>
+                <a:latin typeface="Malgun Gothic"/>
+                <a:ea typeface="Malgun Gothic"/>
+                <a:cs typeface="Malgun Gothic"/>
+              </a:rPr>
+              <a:t>비밀키·개인정보 붙여넣기</a:t>
+            </a:r>
+            <a:r>
+              <a:rPr sz="1800" b="0" i="0">
+                <a:solidFill>
+                  <a:srgbClr val="ECECEA"/>
+                </a:solidFill>
+                <a:latin typeface="Malgun Gothic"/>
+                <a:ea typeface="Malgun Gothic"/>
+                <a:cs typeface="Malgun Gothic"/>
+              </a:rPr>
+              <a:t> — .env 값은 가리고 공유하세요</a:t>
+            </a:r>
+          </a:p>
+          <a:p>
+            <a:pPr>
+              <a:spcAft>
+                <a:spcPts val="1600"/>
+              </a:spcAft>
+            </a:pPr>
+            <a:r>
+              <a:rPr sz="1800" b="1" i="0">
+                <a:solidFill>
+                  <a:srgbClr val="D97757"/>
+                </a:solidFill>
+                <a:latin typeface="Malgun Gothic"/>
+                <a:ea typeface="Malgun Gothic"/>
+                <a:cs typeface="Malgun Gothic"/>
+              </a:rPr>
+              <a:t>•  </a:t>
+            </a:r>
+            <a:r>
+              <a:rPr sz="1800" b="1" i="0">
+                <a:solidFill>
+                  <a:srgbClr val="D9B45B"/>
+                </a:solidFill>
+                <a:latin typeface="Malgun Gothic"/>
+                <a:ea typeface="Malgun Gothic"/>
+                <a:cs typeface="Malgun Gothic"/>
+              </a:rPr>
+              <a:t>백업 없이 대규모 변경</a:t>
+            </a:r>
+            <a:r>
+              <a:rPr sz="1800" b="0" i="0">
+                <a:solidFill>
+                  <a:srgbClr val="ECECEA"/>
+                </a:solidFill>
+                <a:latin typeface="Malgun Gothic"/>
+                <a:ea typeface="Malgun Gothic"/>
+                <a:cs typeface="Malgun Gothic"/>
+              </a:rPr>
+              <a:t> — 커밋 먼저, 실험은 그 다음</a:t>
+            </a:r>
           </a:p>
         </p:txBody>
       </p:sp>
       <p:sp>
         <p:nvSpPr>
           <p:cNvPr id="5" name="TextBox 4"/>
-          <p:cNvSpPr txBox="1"/>
-          <p:nvPr/>
-        </p:nvSpPr>
-        <p:spPr>
-          <a:xfrm>
-            <a:off x="822960" y="1783080"/>
-            <a:ext cx="2651760" cy="914400"/>
-          </a:xfrm>
-          <a:prstGeom prst="rect">
-            <a:avLst/>
-          </a:prstGeom>
-          <a:noFill/>
-        </p:spPr>
-        <p:txBody>
-          <a:bodyPr wrap="square" anchor="ctr">
-            <a:spAutoFit/>
-          </a:bodyPr>
-          <a:lstStyle/>
-          <a:p>
-            <a:r>
-              <a:rPr sz="1500" b="1" i="0">
-                <a:solidFill>
-                  <a:srgbClr val="D97757"/>
-                </a:solidFill>
-                <a:latin typeface="Consolas"/>
-                <a:ea typeface="Consolas"/>
-                <a:cs typeface="Consolas"/>
-              </a:rPr>
-              <a:t>claude</a:t>
-            </a:r>
-          </a:p>
-        </p:txBody>
-      </p:sp>
-      <p:sp>
-        <p:nvSpPr>
-          <p:cNvPr id="6" name="TextBox 5"/>
-          <p:cNvSpPr txBox="1"/>
-          <p:nvPr/>
-        </p:nvSpPr>
-        <p:spPr>
-          <a:xfrm>
-            <a:off x="3429000" y="1783080"/>
-            <a:ext cx="2468880" cy="914400"/>
-          </a:xfrm>
-          <a:prstGeom prst="rect">
-            <a:avLst/>
-          </a:prstGeom>
-          <a:noFill/>
-        </p:spPr>
-        <p:txBody>
-          <a:bodyPr wrap="square" anchor="ctr">
-            <a:spAutoFit/>
-          </a:bodyPr>
-          <a:lstStyle/>
-          <a:p>
-            <a:r>
-              <a:rPr sz="1400" b="0" i="0">
-                <a:solidFill>
-                  <a:srgbClr val="ECECEA"/>
-                </a:solidFill>
-                <a:latin typeface="Malgun Gothic"/>
-                <a:ea typeface="Malgun Gothic"/>
-                <a:cs typeface="Malgun Gothic"/>
-              </a:rPr>
-              <a:t>시작</a:t>
-            </a:r>
-          </a:p>
-        </p:txBody>
-      </p:sp>
-      <p:sp>
-        <p:nvSpPr>
-          <p:cNvPr id="7" name="Rounded Rectangle 6"/>
-          <p:cNvSpPr/>
-          <p:nvPr/>
-        </p:nvSpPr>
-        <p:spPr>
-          <a:xfrm>
-            <a:off x="6263640" y="1783080"/>
-            <a:ext cx="5486400" cy="914400"/>
-          </a:xfrm>
-          <a:prstGeom prst="roundRect">
-            <a:avLst/>
-          </a:prstGeom>
-          <a:solidFill>
-            <a:srgbClr val="222229"/>
-          </a:solidFill>
-          <a:ln>
-            <a:noFill/>
-          </a:ln>
-          <a:effectLst/>
-        </p:spPr>
-        <p:style>
-          <a:lnRef idx="1">
-            <a:schemeClr val="accent1"/>
-          </a:lnRef>
-          <a:fillRef idx="3">
-            <a:schemeClr val="accent1"/>
-          </a:fillRef>
-          <a:effectRef idx="2">
-            <a:schemeClr val="accent1"/>
-          </a:effectRef>
-          <a:fontRef idx="minor">
-            <a:schemeClr val="lt1"/>
-          </a:fontRef>
-        </p:style>
-        <p:txBody>
-          <a:bodyPr rtlCol="0" anchor="ctr"/>
-          <a:lstStyle/>
-          <a:p>
-            <a:pPr algn="ctr"/>
-          </a:p>
-        </p:txBody>
-      </p:sp>
-      <p:sp>
-        <p:nvSpPr>
-          <p:cNvPr id="8" name="TextBox 7"/>
-          <p:cNvSpPr txBox="1"/>
-          <p:nvPr/>
-        </p:nvSpPr>
-        <p:spPr>
-          <a:xfrm>
-            <a:off x="6537960" y="1783080"/>
-            <a:ext cx="2651760" cy="914400"/>
-          </a:xfrm>
-          <a:prstGeom prst="rect">
-            <a:avLst/>
-          </a:prstGeom>
-          <a:noFill/>
-        </p:spPr>
-        <p:txBody>
-          <a:bodyPr wrap="square" anchor="ctr">
-            <a:spAutoFit/>
-          </a:bodyPr>
-          <a:lstStyle/>
-          <a:p>
-            <a:r>
-              <a:rPr sz="1500" b="1" i="0">
-                <a:solidFill>
-                  <a:srgbClr val="D97757"/>
-                </a:solidFill>
-                <a:latin typeface="Consolas"/>
-                <a:ea typeface="Consolas"/>
-                <a:cs typeface="Consolas"/>
-              </a:rPr>
-              <a:t>claude -c</a:t>
-            </a:r>
-          </a:p>
-        </p:txBody>
-      </p:sp>
-      <p:sp>
-        <p:nvSpPr>
-          <p:cNvPr id="9" name="TextBox 8"/>
-          <p:cNvSpPr txBox="1"/>
-          <p:nvPr/>
-        </p:nvSpPr>
-        <p:spPr>
-          <a:xfrm>
-            <a:off x="9144000" y="1783080"/>
-            <a:ext cx="2468880" cy="914400"/>
-          </a:xfrm>
-          <a:prstGeom prst="rect">
-            <a:avLst/>
-          </a:prstGeom>
-          <a:noFill/>
-        </p:spPr>
-        <p:txBody>
-          <a:bodyPr wrap="square" anchor="ctr">
-            <a:spAutoFit/>
-          </a:bodyPr>
-          <a:lstStyle/>
-          <a:p>
-            <a:r>
-              <a:rPr sz="1400" b="0" i="0">
-                <a:solidFill>
-                  <a:srgbClr val="ECECEA"/>
-                </a:solidFill>
-                <a:latin typeface="Malgun Gothic"/>
-                <a:ea typeface="Malgun Gothic"/>
-                <a:cs typeface="Malgun Gothic"/>
-              </a:rPr>
-              <a:t>마지막 대화 이어가기</a:t>
-            </a:r>
-          </a:p>
-        </p:txBody>
-      </p:sp>
-      <p:sp>
-        <p:nvSpPr>
-          <p:cNvPr id="10" name="Rounded Rectangle 9"/>
-          <p:cNvSpPr/>
-          <p:nvPr/>
-        </p:nvSpPr>
-        <p:spPr>
-          <a:xfrm>
-            <a:off x="548640" y="2834640"/>
-            <a:ext cx="5486400" cy="914400"/>
-          </a:xfrm>
-          <a:prstGeom prst="roundRect">
-            <a:avLst/>
-          </a:prstGeom>
-          <a:solidFill>
-            <a:srgbClr val="222229"/>
-          </a:solidFill>
-          <a:ln>
-            <a:noFill/>
-          </a:ln>
-          <a:effectLst/>
-        </p:spPr>
-        <p:style>
-          <a:lnRef idx="1">
-            <a:schemeClr val="accent1"/>
-          </a:lnRef>
-          <a:fillRef idx="3">
-            <a:schemeClr val="accent1"/>
-          </a:fillRef>
-          <a:effectRef idx="2">
-            <a:schemeClr val="accent1"/>
-          </a:effectRef>
-          <a:fontRef idx="minor">
-            <a:schemeClr val="lt1"/>
-          </a:fontRef>
-        </p:style>
-        <p:txBody>
-          <a:bodyPr rtlCol="0" anchor="ctr"/>
-          <a:lstStyle/>
-          <a:p>
-            <a:pPr algn="ctr"/>
-          </a:p>
-        </p:txBody>
-      </p:sp>
-      <p:sp>
-        <p:nvSpPr>
-          <p:cNvPr id="11" name="TextBox 10"/>
-          <p:cNvSpPr txBox="1"/>
-          <p:nvPr/>
-        </p:nvSpPr>
-        <p:spPr>
-          <a:xfrm>
-            <a:off x="822960" y="2834640"/>
-            <a:ext cx="2651760" cy="914400"/>
-          </a:xfrm>
-          <a:prstGeom prst="rect">
-            <a:avLst/>
-          </a:prstGeom>
-          <a:noFill/>
-        </p:spPr>
-        <p:txBody>
-          <a:bodyPr wrap="square" anchor="ctr">
-            <a:spAutoFit/>
-          </a:bodyPr>
-          <a:lstStyle/>
-          <a:p>
-            <a:r>
-              <a:rPr sz="1500" b="1" i="0">
-                <a:solidFill>
-                  <a:srgbClr val="D97757"/>
-                </a:solidFill>
-                <a:latin typeface="Consolas"/>
-                <a:ea typeface="Consolas"/>
-                <a:cs typeface="Consolas"/>
-              </a:rPr>
-              <a:t>/init</a:t>
-            </a:r>
-          </a:p>
-        </p:txBody>
-      </p:sp>
-      <p:sp>
-        <p:nvSpPr>
-          <p:cNvPr id="12" name="TextBox 11"/>
-          <p:cNvSpPr txBox="1"/>
-          <p:nvPr/>
-        </p:nvSpPr>
-        <p:spPr>
-          <a:xfrm>
-            <a:off x="3429000" y="2834640"/>
-            <a:ext cx="2468880" cy="914400"/>
-          </a:xfrm>
-          <a:prstGeom prst="rect">
-            <a:avLst/>
-          </a:prstGeom>
-          <a:noFill/>
-        </p:spPr>
-        <p:txBody>
-          <a:bodyPr wrap="square" anchor="ctr">
-            <a:spAutoFit/>
-          </a:bodyPr>
-          <a:lstStyle/>
-          <a:p>
-            <a:r>
-              <a:rPr sz="1400" b="0" i="0">
-                <a:solidFill>
-                  <a:srgbClr val="ECECEA"/>
-                </a:solidFill>
-                <a:latin typeface="Malgun Gothic"/>
-                <a:ea typeface="Malgun Gothic"/>
-                <a:cs typeface="Malgun Gothic"/>
-              </a:rPr>
-              <a:t>CLAUDE.md 생성</a:t>
-            </a:r>
-          </a:p>
-        </p:txBody>
-      </p:sp>
-      <p:sp>
-        <p:nvSpPr>
-          <p:cNvPr id="13" name="Rounded Rectangle 12"/>
-          <p:cNvSpPr/>
-          <p:nvPr/>
-        </p:nvSpPr>
-        <p:spPr>
-          <a:xfrm>
-            <a:off x="6263640" y="2834640"/>
-            <a:ext cx="5486400" cy="914400"/>
-          </a:xfrm>
-          <a:prstGeom prst="roundRect">
-            <a:avLst/>
-          </a:prstGeom>
-          <a:solidFill>
-            <a:srgbClr val="222229"/>
-          </a:solidFill>
-          <a:ln>
-            <a:noFill/>
-          </a:ln>
-          <a:effectLst/>
-        </p:spPr>
-        <p:style>
-          <a:lnRef idx="1">
-            <a:schemeClr val="accent1"/>
-          </a:lnRef>
-          <a:fillRef idx="3">
-            <a:schemeClr val="accent1"/>
-          </a:fillRef>
-          <a:effectRef idx="2">
-            <a:schemeClr val="accent1"/>
-          </a:effectRef>
-          <a:fontRef idx="minor">
-            <a:schemeClr val="lt1"/>
-          </a:fontRef>
-        </p:style>
-        <p:txBody>
-          <a:bodyPr rtlCol="0" anchor="ctr"/>
-          <a:lstStyle/>
-          <a:p>
-            <a:pPr algn="ctr"/>
-          </a:p>
-        </p:txBody>
-      </p:sp>
-      <p:sp>
-        <p:nvSpPr>
-          <p:cNvPr id="14" name="TextBox 13"/>
-          <p:cNvSpPr txBox="1"/>
-          <p:nvPr/>
-        </p:nvSpPr>
-        <p:spPr>
-          <a:xfrm>
-            <a:off x="6537960" y="2834640"/>
-            <a:ext cx="2651760" cy="914400"/>
-          </a:xfrm>
-          <a:prstGeom prst="rect">
-            <a:avLst/>
-          </a:prstGeom>
-          <a:noFill/>
-        </p:spPr>
-        <p:txBody>
-          <a:bodyPr wrap="square" anchor="ctr">
-            <a:spAutoFit/>
-          </a:bodyPr>
-          <a:lstStyle/>
-          <a:p>
-            <a:r>
-              <a:rPr sz="1500" b="1" i="0">
-                <a:solidFill>
-                  <a:srgbClr val="D97757"/>
-                </a:solidFill>
-                <a:latin typeface="Consolas"/>
-                <a:ea typeface="Consolas"/>
-                <a:cs typeface="Consolas"/>
-              </a:rPr>
-              <a:t>/clear · /compact</a:t>
-            </a:r>
-          </a:p>
-        </p:txBody>
-      </p:sp>
-      <p:sp>
-        <p:nvSpPr>
-          <p:cNvPr id="15" name="TextBox 14"/>
-          <p:cNvSpPr txBox="1"/>
-          <p:nvPr/>
-        </p:nvSpPr>
-        <p:spPr>
-          <a:xfrm>
-            <a:off x="9144000" y="2834640"/>
-            <a:ext cx="2468880" cy="914400"/>
-          </a:xfrm>
-          <a:prstGeom prst="rect">
-            <a:avLst/>
-          </a:prstGeom>
-          <a:noFill/>
-        </p:spPr>
-        <p:txBody>
-          <a:bodyPr wrap="square" anchor="ctr">
-            <a:spAutoFit/>
-          </a:bodyPr>
-          <a:lstStyle/>
-          <a:p>
-            <a:r>
-              <a:rPr sz="1400" b="0" i="0">
-                <a:solidFill>
-                  <a:srgbClr val="ECECEA"/>
-                </a:solidFill>
-                <a:latin typeface="Malgun Gothic"/>
-                <a:ea typeface="Malgun Gothic"/>
-                <a:cs typeface="Malgun Gothic"/>
-              </a:rPr>
-              <a:t>초기화 · 요약</a:t>
-            </a:r>
-          </a:p>
-        </p:txBody>
-      </p:sp>
-      <p:sp>
-        <p:nvSpPr>
-          <p:cNvPr id="16" name="Rounded Rectangle 15"/>
-          <p:cNvSpPr/>
-          <p:nvPr/>
-        </p:nvSpPr>
-        <p:spPr>
-          <a:xfrm>
-            <a:off x="548640" y="3886200"/>
-            <a:ext cx="5486400" cy="914400"/>
-          </a:xfrm>
-          <a:prstGeom prst="roundRect">
-            <a:avLst/>
-          </a:prstGeom>
-          <a:solidFill>
-            <a:srgbClr val="222229"/>
-          </a:solidFill>
-          <a:ln>
-            <a:noFill/>
-          </a:ln>
-          <a:effectLst/>
-        </p:spPr>
-        <p:style>
-          <a:lnRef idx="1">
-            <a:schemeClr val="accent1"/>
-          </a:lnRef>
-          <a:fillRef idx="3">
-            <a:schemeClr val="accent1"/>
-          </a:fillRef>
-          <a:effectRef idx="2">
-            <a:schemeClr val="accent1"/>
-          </a:effectRef>
-          <a:fontRef idx="minor">
-            <a:schemeClr val="lt1"/>
-          </a:fontRef>
-        </p:style>
-        <p:txBody>
-          <a:bodyPr rtlCol="0" anchor="ctr"/>
-          <a:lstStyle/>
-          <a:p>
-            <a:pPr algn="ctr"/>
-          </a:p>
-        </p:txBody>
-      </p:sp>
-      <p:sp>
-        <p:nvSpPr>
-          <p:cNvPr id="17" name="TextBox 16"/>
-          <p:cNvSpPr txBox="1"/>
-          <p:nvPr/>
-        </p:nvSpPr>
-        <p:spPr>
-          <a:xfrm>
-            <a:off x="822960" y="3886200"/>
-            <a:ext cx="2651760" cy="914400"/>
-          </a:xfrm>
-          <a:prstGeom prst="rect">
-            <a:avLst/>
-          </a:prstGeom>
-          <a:noFill/>
-        </p:spPr>
-        <p:txBody>
-          <a:bodyPr wrap="square" anchor="ctr">
-            <a:spAutoFit/>
-          </a:bodyPr>
-          <a:lstStyle/>
-          <a:p>
-            <a:r>
-              <a:rPr sz="1500" b="1" i="0">
-                <a:solidFill>
-                  <a:srgbClr val="D97757"/>
-                </a:solidFill>
-                <a:latin typeface="Consolas"/>
-                <a:ea typeface="Consolas"/>
-                <a:cs typeface="Consolas"/>
-              </a:rPr>
-              <a:t>Shift+Tab</a:t>
-            </a:r>
-          </a:p>
-        </p:txBody>
-      </p:sp>
-      <p:sp>
-        <p:nvSpPr>
-          <p:cNvPr id="18" name="TextBox 17"/>
-          <p:cNvSpPr txBox="1"/>
-          <p:nvPr/>
-        </p:nvSpPr>
-        <p:spPr>
-          <a:xfrm>
-            <a:off x="3429000" y="3886200"/>
-            <a:ext cx="2468880" cy="914400"/>
-          </a:xfrm>
-          <a:prstGeom prst="rect">
-            <a:avLst/>
-          </a:prstGeom>
-          <a:noFill/>
-        </p:spPr>
-        <p:txBody>
-          <a:bodyPr wrap="square" anchor="ctr">
-            <a:spAutoFit/>
-          </a:bodyPr>
-          <a:lstStyle/>
-          <a:p>
-            <a:r>
-              <a:rPr sz="1400" b="0" i="0">
-                <a:solidFill>
-                  <a:srgbClr val="ECECEA"/>
-                </a:solidFill>
-                <a:latin typeface="Malgun Gothic"/>
-                <a:ea typeface="Malgun Gothic"/>
-                <a:cs typeface="Malgun Gothic"/>
-              </a:rPr>
-              <a:t>권한 모드 전환 (Plan Mode)</a:t>
-            </a:r>
-          </a:p>
-        </p:txBody>
-      </p:sp>
-      <p:sp>
-        <p:nvSpPr>
-          <p:cNvPr id="19" name="Rounded Rectangle 18"/>
-          <p:cNvSpPr/>
-          <p:nvPr/>
-        </p:nvSpPr>
-        <p:spPr>
-          <a:xfrm>
-            <a:off x="6263640" y="3886200"/>
-            <a:ext cx="5486400" cy="914400"/>
-          </a:xfrm>
-          <a:prstGeom prst="roundRect">
-            <a:avLst/>
-          </a:prstGeom>
-          <a:solidFill>
-            <a:srgbClr val="222229"/>
-          </a:solidFill>
-          <a:ln>
-            <a:noFill/>
-          </a:ln>
-          <a:effectLst/>
-        </p:spPr>
-        <p:style>
-          <a:lnRef idx="1">
-            <a:schemeClr val="accent1"/>
-          </a:lnRef>
-          <a:fillRef idx="3">
-            <a:schemeClr val="accent1"/>
-          </a:fillRef>
-          <a:effectRef idx="2">
-            <a:schemeClr val="accent1"/>
-          </a:effectRef>
-          <a:fontRef idx="minor">
-            <a:schemeClr val="lt1"/>
-          </a:fontRef>
-        </p:style>
-        <p:txBody>
-          <a:bodyPr rtlCol="0" anchor="ctr"/>
-          <a:lstStyle/>
-          <a:p>
-            <a:pPr algn="ctr"/>
-          </a:p>
-        </p:txBody>
-      </p:sp>
-      <p:sp>
-        <p:nvSpPr>
-          <p:cNvPr id="20" name="TextBox 19"/>
-          <p:cNvSpPr txBox="1"/>
-          <p:nvPr/>
-        </p:nvSpPr>
-        <p:spPr>
-          <a:xfrm>
-            <a:off x="6537960" y="3886200"/>
-            <a:ext cx="2651760" cy="914400"/>
-          </a:xfrm>
-          <a:prstGeom prst="rect">
-            <a:avLst/>
-          </a:prstGeom>
-          <a:noFill/>
-        </p:spPr>
-        <p:txBody>
-          <a:bodyPr wrap="square" anchor="ctr">
-            <a:spAutoFit/>
-          </a:bodyPr>
-          <a:lstStyle/>
-          <a:p>
-            <a:r>
-              <a:rPr sz="1500" b="1" i="0">
-                <a:solidFill>
-                  <a:srgbClr val="D97757"/>
-                </a:solidFill>
-                <a:latin typeface="Consolas"/>
-                <a:ea typeface="Consolas"/>
-                <a:cs typeface="Consolas"/>
-              </a:rPr>
-              <a:t>Esc · Esc Esc</a:t>
-            </a:r>
-          </a:p>
-        </p:txBody>
-      </p:sp>
-      <p:sp>
-        <p:nvSpPr>
-          <p:cNvPr id="21" name="TextBox 20"/>
-          <p:cNvSpPr txBox="1"/>
-          <p:nvPr/>
-        </p:nvSpPr>
-        <p:spPr>
-          <a:xfrm>
-            <a:off x="9144000" y="3886200"/>
-            <a:ext cx="2468880" cy="914400"/>
-          </a:xfrm>
-          <a:prstGeom prst="rect">
-            <a:avLst/>
-          </a:prstGeom>
-          <a:noFill/>
-        </p:spPr>
-        <p:txBody>
-          <a:bodyPr wrap="square" anchor="ctr">
-            <a:spAutoFit/>
-          </a:bodyPr>
-          <a:lstStyle/>
-          <a:p>
-            <a:r>
-              <a:rPr sz="1400" b="0" i="0">
-                <a:solidFill>
-                  <a:srgbClr val="ECECEA"/>
-                </a:solidFill>
-                <a:latin typeface="Malgun Gothic"/>
-                <a:ea typeface="Malgun Gothic"/>
-                <a:cs typeface="Malgun Gothic"/>
-              </a:rPr>
-              <a:t>중단 · 되돌리기</a:t>
-            </a:r>
-          </a:p>
-        </p:txBody>
-      </p:sp>
-      <p:sp>
-        <p:nvSpPr>
-          <p:cNvPr id="22" name="Rounded Rectangle 21"/>
-          <p:cNvSpPr/>
-          <p:nvPr/>
-        </p:nvSpPr>
-        <p:spPr>
-          <a:xfrm>
-            <a:off x="548640" y="4937760"/>
-            <a:ext cx="5486400" cy="914400"/>
-          </a:xfrm>
-          <a:prstGeom prst="roundRect">
-            <a:avLst/>
-          </a:prstGeom>
-          <a:solidFill>
-            <a:srgbClr val="222229"/>
-          </a:solidFill>
-          <a:ln>
-            <a:noFill/>
-          </a:ln>
-          <a:effectLst/>
-        </p:spPr>
-        <p:style>
-          <a:lnRef idx="1">
-            <a:schemeClr val="accent1"/>
-          </a:lnRef>
-          <a:fillRef idx="3">
-            <a:schemeClr val="accent1"/>
-          </a:fillRef>
-          <a:effectRef idx="2">
-            <a:schemeClr val="accent1"/>
-          </a:effectRef>
-          <a:fontRef idx="minor">
-            <a:schemeClr val="lt1"/>
-          </a:fontRef>
-        </p:style>
-        <p:txBody>
-          <a:bodyPr rtlCol="0" anchor="ctr"/>
-          <a:lstStyle/>
-          <a:p>
-            <a:pPr algn="ctr"/>
-          </a:p>
-        </p:txBody>
-      </p:sp>
-      <p:sp>
-        <p:nvSpPr>
-          <p:cNvPr id="23" name="TextBox 22"/>
-          <p:cNvSpPr txBox="1"/>
-          <p:nvPr/>
-        </p:nvSpPr>
-        <p:spPr>
-          <a:xfrm>
-            <a:off x="822960" y="4937760"/>
-            <a:ext cx="2651760" cy="914400"/>
-          </a:xfrm>
-          <a:prstGeom prst="rect">
-            <a:avLst/>
-          </a:prstGeom>
-          <a:noFill/>
-        </p:spPr>
-        <p:txBody>
-          <a:bodyPr wrap="square" anchor="ctr">
-            <a:spAutoFit/>
-          </a:bodyPr>
-          <a:lstStyle/>
-          <a:p>
-            <a:r>
-              <a:rPr sz="1500" b="1" i="0">
-                <a:solidFill>
-                  <a:srgbClr val="D97757"/>
-                </a:solidFill>
-                <a:latin typeface="Consolas"/>
-                <a:ea typeface="Consolas"/>
-                <a:cs typeface="Consolas"/>
-              </a:rPr>
-              <a:t>/model · /status</a:t>
-            </a:r>
-          </a:p>
-        </p:txBody>
-      </p:sp>
-      <p:sp>
-        <p:nvSpPr>
-          <p:cNvPr id="24" name="TextBox 23"/>
-          <p:cNvSpPr txBox="1"/>
-          <p:nvPr/>
-        </p:nvSpPr>
-        <p:spPr>
-          <a:xfrm>
-            <a:off x="3429000" y="4937760"/>
-            <a:ext cx="2468880" cy="914400"/>
-          </a:xfrm>
-          <a:prstGeom prst="rect">
-            <a:avLst/>
-          </a:prstGeom>
-          <a:noFill/>
-        </p:spPr>
-        <p:txBody>
-          <a:bodyPr wrap="square" anchor="ctr">
-            <a:spAutoFit/>
-          </a:bodyPr>
-          <a:lstStyle/>
-          <a:p>
-            <a:r>
-              <a:rPr sz="1400" b="0" i="0">
-                <a:solidFill>
-                  <a:srgbClr val="ECECEA"/>
-                </a:solidFill>
-                <a:latin typeface="Malgun Gothic"/>
-                <a:ea typeface="Malgun Gothic"/>
-                <a:cs typeface="Malgun Gothic"/>
-              </a:rPr>
-              <a:t>모델 변경 · 상태 확인</a:t>
-            </a:r>
-          </a:p>
-        </p:txBody>
-      </p:sp>
-      <p:sp>
-        <p:nvSpPr>
-          <p:cNvPr id="25" name="Rounded Rectangle 24"/>
-          <p:cNvSpPr/>
-          <p:nvPr/>
-        </p:nvSpPr>
-        <p:spPr>
-          <a:xfrm>
-            <a:off x="6263640" y="4937760"/>
-            <a:ext cx="5486400" cy="914400"/>
-          </a:xfrm>
-          <a:prstGeom prst="roundRect">
-            <a:avLst/>
-          </a:prstGeom>
-          <a:solidFill>
-            <a:srgbClr val="222229"/>
-          </a:solidFill>
-          <a:ln>
-            <a:noFill/>
-          </a:ln>
-          <a:effectLst/>
-        </p:spPr>
-        <p:style>
-          <a:lnRef idx="1">
-            <a:schemeClr val="accent1"/>
-          </a:lnRef>
-          <a:fillRef idx="3">
-            <a:schemeClr val="accent1"/>
-          </a:fillRef>
-          <a:effectRef idx="2">
-            <a:schemeClr val="accent1"/>
-          </a:effectRef>
-          <a:fontRef idx="minor">
-            <a:schemeClr val="lt1"/>
-          </a:fontRef>
-        </p:style>
-        <p:txBody>
-          <a:bodyPr rtlCol="0" anchor="ctr"/>
-          <a:lstStyle/>
-          <a:p>
-            <a:pPr algn="ctr"/>
-          </a:p>
-        </p:txBody>
-      </p:sp>
-      <p:sp>
-        <p:nvSpPr>
-          <p:cNvPr id="26" name="TextBox 25"/>
-          <p:cNvSpPr txBox="1"/>
-          <p:nvPr/>
-        </p:nvSpPr>
-        <p:spPr>
-          <a:xfrm>
-            <a:off x="6537960" y="4937760"/>
-            <a:ext cx="2651760" cy="914400"/>
-          </a:xfrm>
-          <a:prstGeom prst="rect">
-            <a:avLst/>
-          </a:prstGeom>
-          <a:noFill/>
-        </p:spPr>
-        <p:txBody>
-          <a:bodyPr wrap="square" anchor="ctr">
-            <a:spAutoFit/>
-          </a:bodyPr>
-          <a:lstStyle/>
-          <a:p>
-            <a:r>
-              <a:rPr sz="1500" b="1" i="0">
-                <a:solidFill>
-                  <a:srgbClr val="D97757"/>
-                </a:solidFill>
-                <a:latin typeface="Consolas"/>
-                <a:ea typeface="Consolas"/>
-                <a:cs typeface="Consolas"/>
-              </a:rPr>
-              <a:t>claude mcp add</a:t>
-            </a:r>
-          </a:p>
-        </p:txBody>
-      </p:sp>
-      <p:sp>
-        <p:nvSpPr>
-          <p:cNvPr id="27" name="TextBox 26"/>
-          <p:cNvSpPr txBox="1"/>
-          <p:nvPr/>
-        </p:nvSpPr>
-        <p:spPr>
-          <a:xfrm>
-            <a:off x="9144000" y="4937760"/>
-            <a:ext cx="2468880" cy="914400"/>
-          </a:xfrm>
-          <a:prstGeom prst="rect">
-            <a:avLst/>
-          </a:prstGeom>
-          <a:noFill/>
-        </p:spPr>
-        <p:txBody>
-          <a:bodyPr wrap="square" anchor="ctr">
-            <a:spAutoFit/>
-          </a:bodyPr>
-          <a:lstStyle/>
-          <a:p>
-            <a:r>
-              <a:rPr sz="1400" b="0" i="0">
-                <a:solidFill>
-                  <a:srgbClr val="ECECEA"/>
-                </a:solidFill>
-                <a:latin typeface="Malgun Gothic"/>
-                <a:ea typeface="Malgun Gothic"/>
-                <a:cs typeface="Malgun Gothic"/>
-              </a:rPr>
-              <a:t>MCP 서버 연결</a:t>
-            </a:r>
-          </a:p>
-        </p:txBody>
-      </p:sp>
-      <p:sp>
-        <p:nvSpPr>
-          <p:cNvPr id="28" name="TextBox 27"/>
           <p:cNvSpPr txBox="1"/>
           <p:nvPr/>
         </p:nvSpPr>
@@ -19461,14 +18862,14 @@
                 <a:ea typeface="Malgun Gothic"/>
                 <a:cs typeface="Malgun Gothic"/>
               </a:rPr>
-              <a:t>부록</a:t>
-            </a:r>
-          </a:p>
-        </p:txBody>
-      </p:sp>
-      <p:sp>
-        <p:nvSpPr>
-          <p:cNvPr id="29" name="TextBox 28"/>
+              <a:t>실전 팁</a:t>
+            </a:r>
+          </a:p>
+        </p:txBody>
+      </p:sp>
+      <p:sp>
+        <p:nvSpPr>
+          <p:cNvPr id="6" name="TextBox 5"/>
           <p:cNvSpPr txBox="1"/>
           <p:nvPr/>
         </p:nvSpPr>
@@ -19603,62 +19004,231 @@
                 <a:ea typeface="Malgun Gothic"/>
                 <a:cs typeface="Malgun Gothic"/>
               </a:rPr>
-              <a:t>다음 단계 &amp; 리소스</a:t>
-            </a:r>
-          </a:p>
-        </p:txBody>
-      </p:sp>
-      <p:sp>
-        <p:nvSpPr>
-          <p:cNvPr id="4" name="TextBox 3"/>
-          <p:cNvSpPr txBox="1"/>
-          <p:nvPr/>
-        </p:nvSpPr>
-        <p:spPr>
-          <a:xfrm>
-            <a:off x="640080" y="2011680"/>
-            <a:ext cx="10972800" cy="4572000"/>
-          </a:xfrm>
-          <a:prstGeom prst="rect">
-            <a:avLst/>
-          </a:prstGeom>
-          <a:noFill/>
-        </p:spPr>
-        <p:txBody>
-          <a:bodyPr wrap="square" anchor="t">
-            <a:spAutoFit/>
-          </a:bodyPr>
-          <a:lstStyle/>
-          <a:p>
-            <a:pPr>
-              <a:spcAft>
-                <a:spcPts val="1600"/>
-              </a:spcAft>
-            </a:pPr>
-            <a:r>
-              <a:rPr sz="1800" b="1" i="0">
+              <a:t>치트시트 — 이것만 기억하세요</a:t>
+            </a:r>
+          </a:p>
+        </p:txBody>
+      </p:sp>
+      <p:sp>
+        <p:nvSpPr>
+          <p:cNvPr id="4" name="Rounded Rectangle 3"/>
+          <p:cNvSpPr/>
+          <p:nvPr/>
+        </p:nvSpPr>
+        <p:spPr>
+          <a:xfrm>
+            <a:off x="548640" y="1783080"/>
+            <a:ext cx="5486400" cy="914400"/>
+          </a:xfrm>
+          <a:prstGeom prst="roundRect">
+            <a:avLst/>
+          </a:prstGeom>
+          <a:solidFill>
+            <a:srgbClr val="222229"/>
+          </a:solidFill>
+          <a:ln>
+            <a:noFill/>
+          </a:ln>
+          <a:effectLst/>
+        </p:spPr>
+        <p:style>
+          <a:lnRef idx="1">
+            <a:schemeClr val="accent1"/>
+          </a:lnRef>
+          <a:fillRef idx="3">
+            <a:schemeClr val="accent1"/>
+          </a:fillRef>
+          <a:effectRef idx="2">
+            <a:schemeClr val="accent1"/>
+          </a:effectRef>
+          <a:fontRef idx="minor">
+            <a:schemeClr val="lt1"/>
+          </a:fontRef>
+        </p:style>
+        <p:txBody>
+          <a:bodyPr rtlCol="0" anchor="ctr"/>
+          <a:lstStyle/>
+          <a:p>
+            <a:pPr algn="ctr"/>
+          </a:p>
+        </p:txBody>
+      </p:sp>
+      <p:sp>
+        <p:nvSpPr>
+          <p:cNvPr id="5" name="TextBox 4"/>
+          <p:cNvSpPr txBox="1"/>
+          <p:nvPr/>
+        </p:nvSpPr>
+        <p:spPr>
+          <a:xfrm>
+            <a:off x="822960" y="1783080"/>
+            <a:ext cx="2651760" cy="914400"/>
+          </a:xfrm>
+          <a:prstGeom prst="rect">
+            <a:avLst/>
+          </a:prstGeom>
+          <a:noFill/>
+        </p:spPr>
+        <p:txBody>
+          <a:bodyPr wrap="square" anchor="ctr">
+            <a:spAutoFit/>
+          </a:bodyPr>
+          <a:lstStyle/>
+          <a:p>
+            <a:r>
+              <a:rPr sz="1500" b="1" i="0">
                 <a:solidFill>
                   <a:srgbClr val="D97757"/>
                 </a:solidFill>
-                <a:latin typeface="Malgun Gothic"/>
-                <a:ea typeface="Malgun Gothic"/>
-                <a:cs typeface="Malgun Gothic"/>
-              </a:rPr>
-              <a:t>•  </a:t>
-            </a:r>
-            <a:r>
-              <a:rPr sz="1800" b="1" i="0">
+                <a:latin typeface="Consolas"/>
+                <a:ea typeface="Consolas"/>
+                <a:cs typeface="Consolas"/>
+              </a:rPr>
+              <a:t>claude</a:t>
+            </a:r>
+          </a:p>
+        </p:txBody>
+      </p:sp>
+      <p:sp>
+        <p:nvSpPr>
+          <p:cNvPr id="6" name="TextBox 5"/>
+          <p:cNvSpPr txBox="1"/>
+          <p:nvPr/>
+        </p:nvSpPr>
+        <p:spPr>
+          <a:xfrm>
+            <a:off x="3429000" y="1783080"/>
+            <a:ext cx="2468880" cy="914400"/>
+          </a:xfrm>
+          <a:prstGeom prst="rect">
+            <a:avLst/>
+          </a:prstGeom>
+          <a:noFill/>
+        </p:spPr>
+        <p:txBody>
+          <a:bodyPr wrap="square" anchor="ctr">
+            <a:spAutoFit/>
+          </a:bodyPr>
+          <a:lstStyle/>
+          <a:p>
+            <a:r>
+              <a:rPr sz="1400" b="0" i="0">
+                <a:solidFill>
+                  <a:srgbClr val="ECECEA"/>
+                </a:solidFill>
+                <a:latin typeface="Malgun Gothic"/>
+                <a:ea typeface="Malgun Gothic"/>
+                <a:cs typeface="Malgun Gothic"/>
+              </a:rPr>
+              <a:t>시작</a:t>
+            </a:r>
+          </a:p>
+        </p:txBody>
+      </p:sp>
+      <p:sp>
+        <p:nvSpPr>
+          <p:cNvPr id="7" name="Rounded Rectangle 6"/>
+          <p:cNvSpPr/>
+          <p:nvPr/>
+        </p:nvSpPr>
+        <p:spPr>
+          <a:xfrm>
+            <a:off x="6263640" y="1783080"/>
+            <a:ext cx="5486400" cy="914400"/>
+          </a:xfrm>
+          <a:prstGeom prst="roundRect">
+            <a:avLst/>
+          </a:prstGeom>
+          <a:solidFill>
+            <a:srgbClr val="222229"/>
+          </a:solidFill>
+          <a:ln>
+            <a:noFill/>
+          </a:ln>
+          <a:effectLst/>
+        </p:spPr>
+        <p:style>
+          <a:lnRef idx="1">
+            <a:schemeClr val="accent1"/>
+          </a:lnRef>
+          <a:fillRef idx="3">
+            <a:schemeClr val="accent1"/>
+          </a:fillRef>
+          <a:effectRef idx="2">
+            <a:schemeClr val="accent1"/>
+          </a:effectRef>
+          <a:fontRef idx="minor">
+            <a:schemeClr val="lt1"/>
+          </a:fontRef>
+        </p:style>
+        <p:txBody>
+          <a:bodyPr rtlCol="0" anchor="ctr"/>
+          <a:lstStyle/>
+          <a:p>
+            <a:pPr algn="ctr"/>
+          </a:p>
+        </p:txBody>
+      </p:sp>
+      <p:sp>
+        <p:nvSpPr>
+          <p:cNvPr id="8" name="TextBox 7"/>
+          <p:cNvSpPr txBox="1"/>
+          <p:nvPr/>
+        </p:nvSpPr>
+        <p:spPr>
+          <a:xfrm>
+            <a:off x="6537960" y="1783080"/>
+            <a:ext cx="2651760" cy="914400"/>
+          </a:xfrm>
+          <a:prstGeom prst="rect">
+            <a:avLst/>
+          </a:prstGeom>
+          <a:noFill/>
+        </p:spPr>
+        <p:txBody>
+          <a:bodyPr wrap="square" anchor="ctr">
+            <a:spAutoFit/>
+          </a:bodyPr>
+          <a:lstStyle/>
+          <a:p>
+            <a:r>
+              <a:rPr sz="1500" b="1" i="0">
                 <a:solidFill>
                   <a:srgbClr val="D97757"/>
                 </a:solidFill>
-                <a:latin typeface="Malgun Gothic"/>
-                <a:ea typeface="Malgun Gothic"/>
-                <a:cs typeface="Malgun Gothic"/>
-              </a:rPr>
-              <a:t>오늘</a:t>
-            </a:r>
-            <a:r>
-              <a:rPr sz="1800" b="0" i="0">
+                <a:latin typeface="Consolas"/>
+                <a:ea typeface="Consolas"/>
+                <a:cs typeface="Consolas"/>
+              </a:rPr>
+              <a:t>claude -c</a:t>
+            </a:r>
+          </a:p>
+        </p:txBody>
+      </p:sp>
+      <p:sp>
+        <p:nvSpPr>
+          <p:cNvPr id="9" name="TextBox 8"/>
+          <p:cNvSpPr txBox="1"/>
+          <p:nvPr/>
+        </p:nvSpPr>
+        <p:spPr>
+          <a:xfrm>
+            <a:off x="9144000" y="1783080"/>
+            <a:ext cx="2468880" cy="914400"/>
+          </a:xfrm>
+          <a:prstGeom prst="rect">
+            <a:avLst/>
+          </a:prstGeom>
+          <a:noFill/>
+        </p:spPr>
+        <p:txBody>
+          <a:bodyPr wrap="square" anchor="ctr">
+            <a:spAutoFit/>
+          </a:bodyPr>
+          <a:lstStyle/>
+          <a:p>
+            <a:r>
+              <a:rPr sz="1400" b="0" i="0">
                 <a:solidFill>
                   <a:srgbClr val="ECECEA"/>
                 </a:solidFill>
@@ -19666,39 +19236,231 @@
                 <a:ea typeface="Malgun Gothic"/>
                 <a:cs typeface="Malgun Gothic"/>
               </a:rPr>
-              <a:t>  Level 1 실습 — 내 프로젝트에서 질문 3개, 수정 1건</a:t>
-            </a:r>
-          </a:p>
-          <a:p>
-            <a:pPr>
-              <a:spcAft>
-                <a:spcPts val="1600"/>
-              </a:spcAft>
-            </a:pPr>
-            <a:r>
-              <a:rPr sz="1800" b="1" i="0">
+              <a:t>마지막 대화 이어가기</a:t>
+            </a:r>
+          </a:p>
+        </p:txBody>
+      </p:sp>
+      <p:sp>
+        <p:nvSpPr>
+          <p:cNvPr id="10" name="Rounded Rectangle 9"/>
+          <p:cNvSpPr/>
+          <p:nvPr/>
+        </p:nvSpPr>
+        <p:spPr>
+          <a:xfrm>
+            <a:off x="548640" y="2834640"/>
+            <a:ext cx="5486400" cy="914400"/>
+          </a:xfrm>
+          <a:prstGeom prst="roundRect">
+            <a:avLst/>
+          </a:prstGeom>
+          <a:solidFill>
+            <a:srgbClr val="222229"/>
+          </a:solidFill>
+          <a:ln>
+            <a:noFill/>
+          </a:ln>
+          <a:effectLst/>
+        </p:spPr>
+        <p:style>
+          <a:lnRef idx="1">
+            <a:schemeClr val="accent1"/>
+          </a:lnRef>
+          <a:fillRef idx="3">
+            <a:schemeClr val="accent1"/>
+          </a:fillRef>
+          <a:effectRef idx="2">
+            <a:schemeClr val="accent1"/>
+          </a:effectRef>
+          <a:fontRef idx="minor">
+            <a:schemeClr val="lt1"/>
+          </a:fontRef>
+        </p:style>
+        <p:txBody>
+          <a:bodyPr rtlCol="0" anchor="ctr"/>
+          <a:lstStyle/>
+          <a:p>
+            <a:pPr algn="ctr"/>
+          </a:p>
+        </p:txBody>
+      </p:sp>
+      <p:sp>
+        <p:nvSpPr>
+          <p:cNvPr id="11" name="TextBox 10"/>
+          <p:cNvSpPr txBox="1"/>
+          <p:nvPr/>
+        </p:nvSpPr>
+        <p:spPr>
+          <a:xfrm>
+            <a:off x="822960" y="2834640"/>
+            <a:ext cx="2651760" cy="914400"/>
+          </a:xfrm>
+          <a:prstGeom prst="rect">
+            <a:avLst/>
+          </a:prstGeom>
+          <a:noFill/>
+        </p:spPr>
+        <p:txBody>
+          <a:bodyPr wrap="square" anchor="ctr">
+            <a:spAutoFit/>
+          </a:bodyPr>
+          <a:lstStyle/>
+          <a:p>
+            <a:r>
+              <a:rPr sz="1500" b="1" i="0">
                 <a:solidFill>
                   <a:srgbClr val="D97757"/>
                 </a:solidFill>
-                <a:latin typeface="Malgun Gothic"/>
-                <a:ea typeface="Malgun Gothic"/>
-                <a:cs typeface="Malgun Gothic"/>
-              </a:rPr>
-              <a:t>•  </a:t>
-            </a:r>
-            <a:r>
-              <a:rPr sz="1800" b="1" i="0">
+                <a:latin typeface="Consolas"/>
+                <a:ea typeface="Consolas"/>
+                <a:cs typeface="Consolas"/>
+              </a:rPr>
+              <a:t>/init</a:t>
+            </a:r>
+          </a:p>
+        </p:txBody>
+      </p:sp>
+      <p:sp>
+        <p:nvSpPr>
+          <p:cNvPr id="12" name="TextBox 11"/>
+          <p:cNvSpPr txBox="1"/>
+          <p:nvPr/>
+        </p:nvSpPr>
+        <p:spPr>
+          <a:xfrm>
+            <a:off x="3429000" y="2834640"/>
+            <a:ext cx="2468880" cy="914400"/>
+          </a:xfrm>
+          <a:prstGeom prst="rect">
+            <a:avLst/>
+          </a:prstGeom>
+          <a:noFill/>
+        </p:spPr>
+        <p:txBody>
+          <a:bodyPr wrap="square" anchor="ctr">
+            <a:spAutoFit/>
+          </a:bodyPr>
+          <a:lstStyle/>
+          <a:p>
+            <a:r>
+              <a:rPr sz="1400" b="0" i="0">
+                <a:solidFill>
+                  <a:srgbClr val="ECECEA"/>
+                </a:solidFill>
+                <a:latin typeface="Malgun Gothic"/>
+                <a:ea typeface="Malgun Gothic"/>
+                <a:cs typeface="Malgun Gothic"/>
+              </a:rPr>
+              <a:t>CLAUDE.md 생성</a:t>
+            </a:r>
+          </a:p>
+        </p:txBody>
+      </p:sp>
+      <p:sp>
+        <p:nvSpPr>
+          <p:cNvPr id="13" name="Rounded Rectangle 12"/>
+          <p:cNvSpPr/>
+          <p:nvPr/>
+        </p:nvSpPr>
+        <p:spPr>
+          <a:xfrm>
+            <a:off x="6263640" y="2834640"/>
+            <a:ext cx="5486400" cy="914400"/>
+          </a:xfrm>
+          <a:prstGeom prst="roundRect">
+            <a:avLst/>
+          </a:prstGeom>
+          <a:solidFill>
+            <a:srgbClr val="222229"/>
+          </a:solidFill>
+          <a:ln>
+            <a:noFill/>
+          </a:ln>
+          <a:effectLst/>
+        </p:spPr>
+        <p:style>
+          <a:lnRef idx="1">
+            <a:schemeClr val="accent1"/>
+          </a:lnRef>
+          <a:fillRef idx="3">
+            <a:schemeClr val="accent1"/>
+          </a:fillRef>
+          <a:effectRef idx="2">
+            <a:schemeClr val="accent1"/>
+          </a:effectRef>
+          <a:fontRef idx="minor">
+            <a:schemeClr val="lt1"/>
+          </a:fontRef>
+        </p:style>
+        <p:txBody>
+          <a:bodyPr rtlCol="0" anchor="ctr"/>
+          <a:lstStyle/>
+          <a:p>
+            <a:pPr algn="ctr"/>
+          </a:p>
+        </p:txBody>
+      </p:sp>
+      <p:sp>
+        <p:nvSpPr>
+          <p:cNvPr id="14" name="TextBox 13"/>
+          <p:cNvSpPr txBox="1"/>
+          <p:nvPr/>
+        </p:nvSpPr>
+        <p:spPr>
+          <a:xfrm>
+            <a:off x="6537960" y="2834640"/>
+            <a:ext cx="2651760" cy="914400"/>
+          </a:xfrm>
+          <a:prstGeom prst="rect">
+            <a:avLst/>
+          </a:prstGeom>
+          <a:noFill/>
+        </p:spPr>
+        <p:txBody>
+          <a:bodyPr wrap="square" anchor="ctr">
+            <a:spAutoFit/>
+          </a:bodyPr>
+          <a:lstStyle/>
+          <a:p>
+            <a:r>
+              <a:rPr sz="1500" b="1" i="0">
                 <a:solidFill>
                   <a:srgbClr val="D97757"/>
                 </a:solidFill>
-                <a:latin typeface="Malgun Gothic"/>
-                <a:ea typeface="Malgun Gothic"/>
-                <a:cs typeface="Malgun Gothic"/>
-              </a:rPr>
-              <a:t>이번 주</a:t>
-            </a:r>
-            <a:r>
-              <a:rPr sz="1800" b="0" i="0">
+                <a:latin typeface="Consolas"/>
+                <a:ea typeface="Consolas"/>
+                <a:cs typeface="Consolas"/>
+              </a:rPr>
+              <a:t>/clear · /compact</a:t>
+            </a:r>
+          </a:p>
+        </p:txBody>
+      </p:sp>
+      <p:sp>
+        <p:nvSpPr>
+          <p:cNvPr id="15" name="TextBox 14"/>
+          <p:cNvSpPr txBox="1"/>
+          <p:nvPr/>
+        </p:nvSpPr>
+        <p:spPr>
+          <a:xfrm>
+            <a:off x="9144000" y="2834640"/>
+            <a:ext cx="2468880" cy="914400"/>
+          </a:xfrm>
+          <a:prstGeom prst="rect">
+            <a:avLst/>
+          </a:prstGeom>
+          <a:noFill/>
+        </p:spPr>
+        <p:txBody>
+          <a:bodyPr wrap="square" anchor="ctr">
+            <a:spAutoFit/>
+          </a:bodyPr>
+          <a:lstStyle/>
+          <a:p>
+            <a:r>
+              <a:rPr sz="1400" b="0" i="0">
                 <a:solidFill>
                   <a:srgbClr val="ECECEA"/>
                 </a:solidFill>
@@ -19706,39 +19468,231 @@
                 <a:ea typeface="Malgun Gothic"/>
                 <a:cs typeface="Malgun Gothic"/>
               </a:rPr>
-              <a:t>  /init + Plan Mode로 실제 업무 1건 완료</a:t>
-            </a:r>
-          </a:p>
-          <a:p>
-            <a:pPr>
-              <a:spcAft>
-                <a:spcPts val="1600"/>
-              </a:spcAft>
-            </a:pPr>
-            <a:r>
-              <a:rPr sz="1800" b="1" i="0">
+              <a:t>초기화 · 요약</a:t>
+            </a:r>
+          </a:p>
+        </p:txBody>
+      </p:sp>
+      <p:sp>
+        <p:nvSpPr>
+          <p:cNvPr id="16" name="Rounded Rectangle 15"/>
+          <p:cNvSpPr/>
+          <p:nvPr/>
+        </p:nvSpPr>
+        <p:spPr>
+          <a:xfrm>
+            <a:off x="548640" y="3886200"/>
+            <a:ext cx="5486400" cy="914400"/>
+          </a:xfrm>
+          <a:prstGeom prst="roundRect">
+            <a:avLst/>
+          </a:prstGeom>
+          <a:solidFill>
+            <a:srgbClr val="222229"/>
+          </a:solidFill>
+          <a:ln>
+            <a:noFill/>
+          </a:ln>
+          <a:effectLst/>
+        </p:spPr>
+        <p:style>
+          <a:lnRef idx="1">
+            <a:schemeClr val="accent1"/>
+          </a:lnRef>
+          <a:fillRef idx="3">
+            <a:schemeClr val="accent1"/>
+          </a:fillRef>
+          <a:effectRef idx="2">
+            <a:schemeClr val="accent1"/>
+          </a:effectRef>
+          <a:fontRef idx="minor">
+            <a:schemeClr val="lt1"/>
+          </a:fontRef>
+        </p:style>
+        <p:txBody>
+          <a:bodyPr rtlCol="0" anchor="ctr"/>
+          <a:lstStyle/>
+          <a:p>
+            <a:pPr algn="ctr"/>
+          </a:p>
+        </p:txBody>
+      </p:sp>
+      <p:sp>
+        <p:nvSpPr>
+          <p:cNvPr id="17" name="TextBox 16"/>
+          <p:cNvSpPr txBox="1"/>
+          <p:nvPr/>
+        </p:nvSpPr>
+        <p:spPr>
+          <a:xfrm>
+            <a:off x="822960" y="3886200"/>
+            <a:ext cx="2651760" cy="914400"/>
+          </a:xfrm>
+          <a:prstGeom prst="rect">
+            <a:avLst/>
+          </a:prstGeom>
+          <a:noFill/>
+        </p:spPr>
+        <p:txBody>
+          <a:bodyPr wrap="square" anchor="ctr">
+            <a:spAutoFit/>
+          </a:bodyPr>
+          <a:lstStyle/>
+          <a:p>
+            <a:r>
+              <a:rPr sz="1500" b="1" i="0">
                 <a:solidFill>
                   <a:srgbClr val="D97757"/>
                 </a:solidFill>
-                <a:latin typeface="Malgun Gothic"/>
-                <a:ea typeface="Malgun Gothic"/>
-                <a:cs typeface="Malgun Gothic"/>
-              </a:rPr>
-              <a:t>•  </a:t>
-            </a:r>
-            <a:r>
-              <a:rPr sz="1800" b="1" i="0">
+                <a:latin typeface="Consolas"/>
+                <a:ea typeface="Consolas"/>
+                <a:cs typeface="Consolas"/>
+              </a:rPr>
+              <a:t>Shift+Tab</a:t>
+            </a:r>
+          </a:p>
+        </p:txBody>
+      </p:sp>
+      <p:sp>
+        <p:nvSpPr>
+          <p:cNvPr id="18" name="TextBox 17"/>
+          <p:cNvSpPr txBox="1"/>
+          <p:nvPr/>
+        </p:nvSpPr>
+        <p:spPr>
+          <a:xfrm>
+            <a:off x="3429000" y="3886200"/>
+            <a:ext cx="2468880" cy="914400"/>
+          </a:xfrm>
+          <a:prstGeom prst="rect">
+            <a:avLst/>
+          </a:prstGeom>
+          <a:noFill/>
+        </p:spPr>
+        <p:txBody>
+          <a:bodyPr wrap="square" anchor="ctr">
+            <a:spAutoFit/>
+          </a:bodyPr>
+          <a:lstStyle/>
+          <a:p>
+            <a:r>
+              <a:rPr sz="1400" b="0" i="0">
+                <a:solidFill>
+                  <a:srgbClr val="ECECEA"/>
+                </a:solidFill>
+                <a:latin typeface="Malgun Gothic"/>
+                <a:ea typeface="Malgun Gothic"/>
+                <a:cs typeface="Malgun Gothic"/>
+              </a:rPr>
+              <a:t>권한 모드 전환 (Plan Mode)</a:t>
+            </a:r>
+          </a:p>
+        </p:txBody>
+      </p:sp>
+      <p:sp>
+        <p:nvSpPr>
+          <p:cNvPr id="19" name="Rounded Rectangle 18"/>
+          <p:cNvSpPr/>
+          <p:nvPr/>
+        </p:nvSpPr>
+        <p:spPr>
+          <a:xfrm>
+            <a:off x="6263640" y="3886200"/>
+            <a:ext cx="5486400" cy="914400"/>
+          </a:xfrm>
+          <a:prstGeom prst="roundRect">
+            <a:avLst/>
+          </a:prstGeom>
+          <a:solidFill>
+            <a:srgbClr val="222229"/>
+          </a:solidFill>
+          <a:ln>
+            <a:noFill/>
+          </a:ln>
+          <a:effectLst/>
+        </p:spPr>
+        <p:style>
+          <a:lnRef idx="1">
+            <a:schemeClr val="accent1"/>
+          </a:lnRef>
+          <a:fillRef idx="3">
+            <a:schemeClr val="accent1"/>
+          </a:fillRef>
+          <a:effectRef idx="2">
+            <a:schemeClr val="accent1"/>
+          </a:effectRef>
+          <a:fontRef idx="minor">
+            <a:schemeClr val="lt1"/>
+          </a:fontRef>
+        </p:style>
+        <p:txBody>
+          <a:bodyPr rtlCol="0" anchor="ctr"/>
+          <a:lstStyle/>
+          <a:p>
+            <a:pPr algn="ctr"/>
+          </a:p>
+        </p:txBody>
+      </p:sp>
+      <p:sp>
+        <p:nvSpPr>
+          <p:cNvPr id="20" name="TextBox 19"/>
+          <p:cNvSpPr txBox="1"/>
+          <p:nvPr/>
+        </p:nvSpPr>
+        <p:spPr>
+          <a:xfrm>
+            <a:off x="6537960" y="3886200"/>
+            <a:ext cx="2651760" cy="914400"/>
+          </a:xfrm>
+          <a:prstGeom prst="rect">
+            <a:avLst/>
+          </a:prstGeom>
+          <a:noFill/>
+        </p:spPr>
+        <p:txBody>
+          <a:bodyPr wrap="square" anchor="ctr">
+            <a:spAutoFit/>
+          </a:bodyPr>
+          <a:lstStyle/>
+          <a:p>
+            <a:r>
+              <a:rPr sz="1500" b="1" i="0">
                 <a:solidFill>
                   <a:srgbClr val="D97757"/>
                 </a:solidFill>
-                <a:latin typeface="Malgun Gothic"/>
-                <a:ea typeface="Malgun Gothic"/>
-                <a:cs typeface="Malgun Gothic"/>
-              </a:rPr>
-              <a:t>이번 달</a:t>
-            </a:r>
-            <a:r>
-              <a:rPr sz="1800" b="0" i="0">
+                <a:latin typeface="Consolas"/>
+                <a:ea typeface="Consolas"/>
+                <a:cs typeface="Consolas"/>
+              </a:rPr>
+              <a:t>Esc · Esc Esc</a:t>
+            </a:r>
+          </a:p>
+        </p:txBody>
+      </p:sp>
+      <p:sp>
+        <p:nvSpPr>
+          <p:cNvPr id="21" name="TextBox 20"/>
+          <p:cNvSpPr txBox="1"/>
+          <p:nvPr/>
+        </p:nvSpPr>
+        <p:spPr>
+          <a:xfrm>
+            <a:off x="9144000" y="3886200"/>
+            <a:ext cx="2468880" cy="914400"/>
+          </a:xfrm>
+          <a:prstGeom prst="rect">
+            <a:avLst/>
+          </a:prstGeom>
+          <a:noFill/>
+        </p:spPr>
+        <p:txBody>
+          <a:bodyPr wrap="square" anchor="ctr">
+            <a:spAutoFit/>
+          </a:bodyPr>
+          <a:lstStyle/>
+          <a:p>
+            <a:r>
+              <a:rPr sz="1400" b="0" i="0">
                 <a:solidFill>
                   <a:srgbClr val="ECECEA"/>
                 </a:solidFill>
@@ -19746,28 +19700,115 @@
                 <a:ea typeface="Malgun Gothic"/>
                 <a:cs typeface="Malgun Gothic"/>
               </a:rPr>
-              <a:t>  팀 CLAUDE.md 정착, 커스텀 커맨드 1개 만들기</a:t>
-            </a:r>
-          </a:p>
-          <a:p>
-            <a:pPr>
-              <a:spcAft>
-                <a:spcPts val="1600"/>
-              </a:spcAft>
-            </a:pPr>
-            <a:r>
-              <a:rPr sz="1800" b="1" i="0">
+              <a:t>중단 · 되돌리기</a:t>
+            </a:r>
+          </a:p>
+        </p:txBody>
+      </p:sp>
+      <p:sp>
+        <p:nvSpPr>
+          <p:cNvPr id="22" name="Rounded Rectangle 21"/>
+          <p:cNvSpPr/>
+          <p:nvPr/>
+        </p:nvSpPr>
+        <p:spPr>
+          <a:xfrm>
+            <a:off x="548640" y="4937760"/>
+            <a:ext cx="5486400" cy="914400"/>
+          </a:xfrm>
+          <a:prstGeom prst="roundRect">
+            <a:avLst/>
+          </a:prstGeom>
+          <a:solidFill>
+            <a:srgbClr val="222229"/>
+          </a:solidFill>
+          <a:ln>
+            <a:noFill/>
+          </a:ln>
+          <a:effectLst/>
+        </p:spPr>
+        <p:style>
+          <a:lnRef idx="1">
+            <a:schemeClr val="accent1"/>
+          </a:lnRef>
+          <a:fillRef idx="3">
+            <a:schemeClr val="accent1"/>
+          </a:fillRef>
+          <a:effectRef idx="2">
+            <a:schemeClr val="accent1"/>
+          </a:effectRef>
+          <a:fontRef idx="minor">
+            <a:schemeClr val="lt1"/>
+          </a:fontRef>
+        </p:style>
+        <p:txBody>
+          <a:bodyPr rtlCol="0" anchor="ctr"/>
+          <a:lstStyle/>
+          <a:p>
+            <a:pPr algn="ctr"/>
+          </a:p>
+        </p:txBody>
+      </p:sp>
+      <p:sp>
+        <p:nvSpPr>
+          <p:cNvPr id="23" name="TextBox 22"/>
+          <p:cNvSpPr txBox="1"/>
+          <p:nvPr/>
+        </p:nvSpPr>
+        <p:spPr>
+          <a:xfrm>
+            <a:off x="822960" y="4937760"/>
+            <a:ext cx="2651760" cy="914400"/>
+          </a:xfrm>
+          <a:prstGeom prst="rect">
+            <a:avLst/>
+          </a:prstGeom>
+          <a:noFill/>
+        </p:spPr>
+        <p:txBody>
+          <a:bodyPr wrap="square" anchor="ctr">
+            <a:spAutoFit/>
+          </a:bodyPr>
+          <a:lstStyle/>
+          <a:p>
+            <a:r>
+              <a:rPr sz="1500" b="1" i="0">
                 <a:solidFill>
                   <a:srgbClr val="D97757"/>
                 </a:solidFill>
-                <a:latin typeface="Malgun Gothic"/>
-                <a:ea typeface="Malgun Gothic"/>
-                <a:cs typeface="Malgun Gothic"/>
-              </a:rPr>
-              <a:t>•  </a:t>
-            </a:r>
-            <a:r>
-              <a:rPr sz="1800" b="1" i="0">
+                <a:latin typeface="Consolas"/>
+                <a:ea typeface="Consolas"/>
+                <a:cs typeface="Consolas"/>
+              </a:rPr>
+              <a:t>/model · /status</a:t>
+            </a:r>
+          </a:p>
+        </p:txBody>
+      </p:sp>
+      <p:sp>
+        <p:nvSpPr>
+          <p:cNvPr id="24" name="TextBox 23"/>
+          <p:cNvSpPr txBox="1"/>
+          <p:nvPr/>
+        </p:nvSpPr>
+        <p:spPr>
+          <a:xfrm>
+            <a:off x="3429000" y="4937760"/>
+            <a:ext cx="2468880" cy="914400"/>
+          </a:xfrm>
+          <a:prstGeom prst="rect">
+            <a:avLst/>
+          </a:prstGeom>
+          <a:noFill/>
+        </p:spPr>
+        <p:txBody>
+          <a:bodyPr wrap="square" anchor="ctr">
+            <a:spAutoFit/>
+          </a:bodyPr>
+          <a:lstStyle/>
+          <a:p>
+            <a:r>
+              <a:rPr sz="1400" b="0" i="0">
                 <a:solidFill>
                   <a:srgbClr val="ECECEA"/>
                 </a:solidFill>
@@ -19775,39 +19816,115 @@
                 <a:ea typeface="Malgun Gothic"/>
                 <a:cs typeface="Malgun Gothic"/>
               </a:rPr>
-              <a:t>공식 문서  </a:t>
-            </a:r>
-            <a:r>
-              <a:rPr sz="1800" b="0" i="0">
+              <a:t>모델 변경 · 상태 확인</a:t>
+            </a:r>
+          </a:p>
+        </p:txBody>
+      </p:sp>
+      <p:sp>
+        <p:nvSpPr>
+          <p:cNvPr id="25" name="Rounded Rectangle 24"/>
+          <p:cNvSpPr/>
+          <p:nvPr/>
+        </p:nvSpPr>
+        <p:spPr>
+          <a:xfrm>
+            <a:off x="6263640" y="4937760"/>
+            <a:ext cx="5486400" cy="914400"/>
+          </a:xfrm>
+          <a:prstGeom prst="roundRect">
+            <a:avLst/>
+          </a:prstGeom>
+          <a:solidFill>
+            <a:srgbClr val="222229"/>
+          </a:solidFill>
+          <a:ln>
+            <a:noFill/>
+          </a:ln>
+          <a:effectLst/>
+        </p:spPr>
+        <p:style>
+          <a:lnRef idx="1">
+            <a:schemeClr val="accent1"/>
+          </a:lnRef>
+          <a:fillRef idx="3">
+            <a:schemeClr val="accent1"/>
+          </a:fillRef>
+          <a:effectRef idx="2">
+            <a:schemeClr val="accent1"/>
+          </a:effectRef>
+          <a:fontRef idx="minor">
+            <a:schemeClr val="lt1"/>
+          </a:fontRef>
+        </p:style>
+        <p:txBody>
+          <a:bodyPr rtlCol="0" anchor="ctr"/>
+          <a:lstStyle/>
+          <a:p>
+            <a:pPr algn="ctr"/>
+          </a:p>
+        </p:txBody>
+      </p:sp>
+      <p:sp>
+        <p:nvSpPr>
+          <p:cNvPr id="26" name="TextBox 25"/>
+          <p:cNvSpPr txBox="1"/>
+          <p:nvPr/>
+        </p:nvSpPr>
+        <p:spPr>
+          <a:xfrm>
+            <a:off x="6537960" y="4937760"/>
+            <a:ext cx="2651760" cy="914400"/>
+          </a:xfrm>
+          <a:prstGeom prst="rect">
+            <a:avLst/>
+          </a:prstGeom>
+          <a:noFill/>
+        </p:spPr>
+        <p:txBody>
+          <a:bodyPr wrap="square" anchor="ctr">
+            <a:spAutoFit/>
+          </a:bodyPr>
+          <a:lstStyle/>
+          <a:p>
+            <a:r>
+              <a:rPr sz="1500" b="1" i="0">
                 <a:solidFill>
                   <a:srgbClr val="D97757"/>
                 </a:solidFill>
-                <a:latin typeface="Malgun Gothic"/>
-                <a:ea typeface="Malgun Gothic"/>
-                <a:cs typeface="Malgun Gothic"/>
-              </a:rPr>
-              <a:t>code.claude.com/docs</a:t>
-            </a:r>
-          </a:p>
-          <a:p>
-            <a:pPr>
-              <a:spcAft>
-                <a:spcPts val="1600"/>
-              </a:spcAft>
-            </a:pPr>
-            <a:r>
-              <a:rPr sz="1800" b="1" i="0">
-                <a:solidFill>
-                  <a:srgbClr val="D97757"/>
-                </a:solidFill>
-                <a:latin typeface="Malgun Gothic"/>
-                <a:ea typeface="Malgun Gothic"/>
-                <a:cs typeface="Malgun Gothic"/>
-              </a:rPr>
-              <a:t>•  </a:t>
-            </a:r>
-            <a:r>
-              <a:rPr sz="1800" b="1" i="0">
+                <a:latin typeface="Consolas"/>
+                <a:ea typeface="Consolas"/>
+                <a:cs typeface="Consolas"/>
+              </a:rPr>
+              <a:t>claude mcp add</a:t>
+            </a:r>
+          </a:p>
+        </p:txBody>
+      </p:sp>
+      <p:sp>
+        <p:nvSpPr>
+          <p:cNvPr id="27" name="TextBox 26"/>
+          <p:cNvSpPr txBox="1"/>
+          <p:nvPr/>
+        </p:nvSpPr>
+        <p:spPr>
+          <a:xfrm>
+            <a:off x="9144000" y="4937760"/>
+            <a:ext cx="2468880" cy="914400"/>
+          </a:xfrm>
+          <a:prstGeom prst="rect">
+            <a:avLst/>
+          </a:prstGeom>
+          <a:noFill/>
+        </p:spPr>
+        <p:txBody>
+          <a:bodyPr wrap="square" anchor="ctr">
+            <a:spAutoFit/>
+          </a:bodyPr>
+          <a:lstStyle/>
+          <a:p>
+            <a:r>
+              <a:rPr sz="1400" b="0" i="0">
                 <a:solidFill>
                   <a:srgbClr val="ECECEA"/>
                 </a:solidFill>
@@ -19815,25 +19932,14 @@
                 <a:ea typeface="Malgun Gothic"/>
                 <a:cs typeface="Malgun Gothic"/>
               </a:rPr>
-              <a:t>튜토리얼 영상  </a:t>
-            </a:r>
-            <a:r>
-              <a:rPr sz="1800" b="0" i="0">
-                <a:solidFill>
-                  <a:srgbClr val="D97757"/>
-                </a:solidFill>
-                <a:latin typeface="Malgun Gothic"/>
-                <a:ea typeface="Malgun Gothic"/>
-                <a:cs typeface="Malgun Gothic"/>
-              </a:rPr>
-              <a:t>EP1~EP8 — 이 자료와 같은 커리큘럼으로 제작</a:t>
-            </a:r>
-          </a:p>
-        </p:txBody>
-      </p:sp>
-      <p:sp>
-        <p:nvSpPr>
-          <p:cNvPr id="5" name="TextBox 4"/>
+              <a:t>MCP 서버 연결</a:t>
+            </a:r>
+          </a:p>
+        </p:txBody>
+      </p:sp>
+      <p:sp>
+        <p:nvSpPr>
+          <p:cNvPr id="28" name="TextBox 27"/>
           <p:cNvSpPr txBox="1"/>
           <p:nvPr/>
         </p:nvSpPr>
@@ -19862,14 +19968,14 @@
                 <a:ea typeface="Malgun Gothic"/>
                 <a:cs typeface="Malgun Gothic"/>
               </a:rPr>
-              <a:t>마무리</a:t>
-            </a:r>
-          </a:p>
-        </p:txBody>
-      </p:sp>
-      <p:sp>
-        <p:nvSpPr>
-          <p:cNvPr id="6" name="TextBox 5"/>
+              <a:t>부록</a:t>
+            </a:r>
+          </a:p>
+        </p:txBody>
+      </p:sp>
+      <p:sp>
+        <p:nvSpPr>
+          <p:cNvPr id="29" name="TextBox 28"/>
           <p:cNvSpPr txBox="1"/>
           <p:nvPr/>
         </p:nvSpPr>
@@ -19913,6 +20019,407 @@
 </file>
 
 <file path=ppt/slides/slide37.xml><?xml version="1.0" encoding="utf-8"?>
+<p:sld xmlns:a="http://schemas.openxmlformats.org/drawingml/2006/main" xmlns:p="http://schemas.openxmlformats.org/presentationml/2006/main" xmlns:r="http://schemas.openxmlformats.org/officeDocument/2006/relationships">
+  <p:cSld>
+    <p:bg>
+      <p:bgPr>
+        <a:solidFill>
+          <a:srgbClr val="17171B"/>
+        </a:solidFill>
+        <a:effectLst/>
+      </p:bgPr>
+    </p:bg>
+    <p:spTree>
+      <p:nvGrpSpPr>
+        <p:cNvPr id="1" name=""/>
+        <p:cNvGrpSpPr/>
+        <p:nvPr/>
+      </p:nvGrpSpPr>
+      <p:grpSpPr/>
+      <p:sp>
+        <p:nvSpPr>
+          <p:cNvPr id="2" name="Rounded Rectangle 1"/>
+          <p:cNvSpPr/>
+          <p:nvPr/>
+        </p:nvSpPr>
+        <p:spPr>
+          <a:xfrm>
+            <a:off x="457200" y="566928"/>
+            <a:ext cx="502920" cy="64008"/>
+          </a:xfrm>
+          <a:prstGeom prst="roundRect">
+            <a:avLst/>
+          </a:prstGeom>
+          <a:solidFill>
+            <a:srgbClr val="D97757"/>
+          </a:solidFill>
+          <a:ln>
+            <a:noFill/>
+          </a:ln>
+        </p:spPr>
+        <p:style>
+          <a:lnRef idx="1">
+            <a:schemeClr val="accent1"/>
+          </a:lnRef>
+          <a:fillRef idx="3">
+            <a:schemeClr val="accent1"/>
+          </a:fillRef>
+          <a:effectRef idx="2">
+            <a:schemeClr val="accent1"/>
+          </a:effectRef>
+          <a:fontRef idx="minor">
+            <a:schemeClr val="lt1"/>
+          </a:fontRef>
+        </p:style>
+        <p:txBody>
+          <a:bodyPr rtlCol="0" anchor="ctr"/>
+          <a:lstStyle/>
+          <a:p>
+            <a:pPr algn="ctr"/>
+          </a:p>
+        </p:txBody>
+      </p:sp>
+      <p:sp>
+        <p:nvSpPr>
+          <p:cNvPr id="3" name="TextBox 2"/>
+          <p:cNvSpPr txBox="1"/>
+          <p:nvPr/>
+        </p:nvSpPr>
+        <p:spPr>
+          <a:xfrm>
+            <a:off x="411480" y="713232"/>
+            <a:ext cx="11338560" cy="822960"/>
+          </a:xfrm>
+          <a:prstGeom prst="rect">
+            <a:avLst/>
+          </a:prstGeom>
+          <a:noFill/>
+        </p:spPr>
+        <p:txBody>
+          <a:bodyPr wrap="square" anchor="t">
+            <a:spAutoFit/>
+          </a:bodyPr>
+          <a:lstStyle/>
+          <a:p>
+            <a:r>
+              <a:rPr sz="3000" b="1" i="0">
+                <a:solidFill>
+                  <a:srgbClr val="ECECEA"/>
+                </a:solidFill>
+                <a:latin typeface="Malgun Gothic"/>
+                <a:ea typeface="Malgun Gothic"/>
+                <a:cs typeface="Malgun Gothic"/>
+              </a:rPr>
+              <a:t>다음 단계 &amp; 리소스</a:t>
+            </a:r>
+          </a:p>
+        </p:txBody>
+      </p:sp>
+      <p:sp>
+        <p:nvSpPr>
+          <p:cNvPr id="4" name="TextBox 3"/>
+          <p:cNvSpPr txBox="1"/>
+          <p:nvPr/>
+        </p:nvSpPr>
+        <p:spPr>
+          <a:xfrm>
+            <a:off x="640080" y="2011680"/>
+            <a:ext cx="10972800" cy="4572000"/>
+          </a:xfrm>
+          <a:prstGeom prst="rect">
+            <a:avLst/>
+          </a:prstGeom>
+          <a:noFill/>
+        </p:spPr>
+        <p:txBody>
+          <a:bodyPr wrap="square" anchor="t">
+            <a:spAutoFit/>
+          </a:bodyPr>
+          <a:lstStyle/>
+          <a:p>
+            <a:pPr>
+              <a:spcAft>
+                <a:spcPts val="1600"/>
+              </a:spcAft>
+            </a:pPr>
+            <a:r>
+              <a:rPr sz="1800" b="1" i="0">
+                <a:solidFill>
+                  <a:srgbClr val="D97757"/>
+                </a:solidFill>
+                <a:latin typeface="Malgun Gothic"/>
+                <a:ea typeface="Malgun Gothic"/>
+                <a:cs typeface="Malgun Gothic"/>
+              </a:rPr>
+              <a:t>•  </a:t>
+            </a:r>
+            <a:r>
+              <a:rPr sz="1800" b="1" i="0">
+                <a:solidFill>
+                  <a:srgbClr val="D97757"/>
+                </a:solidFill>
+                <a:latin typeface="Malgun Gothic"/>
+                <a:ea typeface="Malgun Gothic"/>
+                <a:cs typeface="Malgun Gothic"/>
+              </a:rPr>
+              <a:t>오늘</a:t>
+            </a:r>
+            <a:r>
+              <a:rPr sz="1800" b="0" i="0">
+                <a:solidFill>
+                  <a:srgbClr val="ECECEA"/>
+                </a:solidFill>
+                <a:latin typeface="Malgun Gothic"/>
+                <a:ea typeface="Malgun Gothic"/>
+                <a:cs typeface="Malgun Gothic"/>
+              </a:rPr>
+              <a:t>  Level 1 실습 — 내 프로젝트에서 질문 3개, 수정 1건</a:t>
+            </a:r>
+          </a:p>
+          <a:p>
+            <a:pPr>
+              <a:spcAft>
+                <a:spcPts val="1600"/>
+              </a:spcAft>
+            </a:pPr>
+            <a:r>
+              <a:rPr sz="1800" b="1" i="0">
+                <a:solidFill>
+                  <a:srgbClr val="D97757"/>
+                </a:solidFill>
+                <a:latin typeface="Malgun Gothic"/>
+                <a:ea typeface="Malgun Gothic"/>
+                <a:cs typeface="Malgun Gothic"/>
+              </a:rPr>
+              <a:t>•  </a:t>
+            </a:r>
+            <a:r>
+              <a:rPr sz="1800" b="1" i="0">
+                <a:solidFill>
+                  <a:srgbClr val="D97757"/>
+                </a:solidFill>
+                <a:latin typeface="Malgun Gothic"/>
+                <a:ea typeface="Malgun Gothic"/>
+                <a:cs typeface="Malgun Gothic"/>
+              </a:rPr>
+              <a:t>이번 주</a:t>
+            </a:r>
+            <a:r>
+              <a:rPr sz="1800" b="0" i="0">
+                <a:solidFill>
+                  <a:srgbClr val="ECECEA"/>
+                </a:solidFill>
+                <a:latin typeface="Malgun Gothic"/>
+                <a:ea typeface="Malgun Gothic"/>
+                <a:cs typeface="Malgun Gothic"/>
+              </a:rPr>
+              <a:t>  /init + Plan Mode로 실제 업무 1건 완료</a:t>
+            </a:r>
+          </a:p>
+          <a:p>
+            <a:pPr>
+              <a:spcAft>
+                <a:spcPts val="1600"/>
+              </a:spcAft>
+            </a:pPr>
+            <a:r>
+              <a:rPr sz="1800" b="1" i="0">
+                <a:solidFill>
+                  <a:srgbClr val="D97757"/>
+                </a:solidFill>
+                <a:latin typeface="Malgun Gothic"/>
+                <a:ea typeface="Malgun Gothic"/>
+                <a:cs typeface="Malgun Gothic"/>
+              </a:rPr>
+              <a:t>•  </a:t>
+            </a:r>
+            <a:r>
+              <a:rPr sz="1800" b="1" i="0">
+                <a:solidFill>
+                  <a:srgbClr val="D97757"/>
+                </a:solidFill>
+                <a:latin typeface="Malgun Gothic"/>
+                <a:ea typeface="Malgun Gothic"/>
+                <a:cs typeface="Malgun Gothic"/>
+              </a:rPr>
+              <a:t>이번 달</a:t>
+            </a:r>
+            <a:r>
+              <a:rPr sz="1800" b="0" i="0">
+                <a:solidFill>
+                  <a:srgbClr val="ECECEA"/>
+                </a:solidFill>
+                <a:latin typeface="Malgun Gothic"/>
+                <a:ea typeface="Malgun Gothic"/>
+                <a:cs typeface="Malgun Gothic"/>
+              </a:rPr>
+              <a:t>  팀 CLAUDE.md 정착, 커스텀 커맨드 1개 만들기</a:t>
+            </a:r>
+          </a:p>
+          <a:p>
+            <a:pPr>
+              <a:spcAft>
+                <a:spcPts val="1600"/>
+              </a:spcAft>
+            </a:pPr>
+            <a:r>
+              <a:rPr sz="1800" b="1" i="0">
+                <a:solidFill>
+                  <a:srgbClr val="D97757"/>
+                </a:solidFill>
+                <a:latin typeface="Malgun Gothic"/>
+                <a:ea typeface="Malgun Gothic"/>
+                <a:cs typeface="Malgun Gothic"/>
+              </a:rPr>
+              <a:t>•  </a:t>
+            </a:r>
+            <a:r>
+              <a:rPr sz="1800" b="1" i="0">
+                <a:solidFill>
+                  <a:srgbClr val="ECECEA"/>
+                </a:solidFill>
+                <a:latin typeface="Malgun Gothic"/>
+                <a:ea typeface="Malgun Gothic"/>
+                <a:cs typeface="Malgun Gothic"/>
+              </a:rPr>
+              <a:t>공식 문서  </a:t>
+            </a:r>
+            <a:r>
+              <a:rPr sz="1800" b="0" i="0">
+                <a:solidFill>
+                  <a:srgbClr val="D97757"/>
+                </a:solidFill>
+                <a:latin typeface="Malgun Gothic"/>
+                <a:ea typeface="Malgun Gothic"/>
+                <a:cs typeface="Malgun Gothic"/>
+              </a:rPr>
+              <a:t>code.claude.com/docs</a:t>
+            </a:r>
+          </a:p>
+          <a:p>
+            <a:pPr>
+              <a:spcAft>
+                <a:spcPts val="1600"/>
+              </a:spcAft>
+            </a:pPr>
+            <a:r>
+              <a:rPr sz="1800" b="1" i="0">
+                <a:solidFill>
+                  <a:srgbClr val="D97757"/>
+                </a:solidFill>
+                <a:latin typeface="Malgun Gothic"/>
+                <a:ea typeface="Malgun Gothic"/>
+                <a:cs typeface="Malgun Gothic"/>
+              </a:rPr>
+              <a:t>•  </a:t>
+            </a:r>
+            <a:r>
+              <a:rPr sz="1800" b="1" i="0">
+                <a:solidFill>
+                  <a:srgbClr val="ECECEA"/>
+                </a:solidFill>
+                <a:latin typeface="Malgun Gothic"/>
+                <a:ea typeface="Malgun Gothic"/>
+                <a:cs typeface="Malgun Gothic"/>
+              </a:rPr>
+              <a:t>튜토리얼 영상  </a:t>
+            </a:r>
+            <a:r>
+              <a:rPr sz="1800" b="0" i="0">
+                <a:solidFill>
+                  <a:srgbClr val="D97757"/>
+                </a:solidFill>
+                <a:latin typeface="Malgun Gothic"/>
+                <a:ea typeface="Malgun Gothic"/>
+                <a:cs typeface="Malgun Gothic"/>
+              </a:rPr>
+              <a:t>EP1~EP8 — 이 자료와 같은 커리큘럼으로 제작</a:t>
+            </a:r>
+          </a:p>
+        </p:txBody>
+      </p:sp>
+      <p:sp>
+        <p:nvSpPr>
+          <p:cNvPr id="5" name="TextBox 4"/>
+          <p:cNvSpPr txBox="1"/>
+          <p:nvPr/>
+        </p:nvSpPr>
+        <p:spPr>
+          <a:xfrm>
+            <a:off x="411480" y="6446520"/>
+            <a:ext cx="8229600" cy="320040"/>
+          </a:xfrm>
+          <a:prstGeom prst="rect">
+            <a:avLst/>
+          </a:prstGeom>
+          <a:noFill/>
+        </p:spPr>
+        <p:txBody>
+          <a:bodyPr wrap="square" anchor="t">
+            <a:spAutoFit/>
+          </a:bodyPr>
+          <a:lstStyle/>
+          <a:p>
+            <a:r>
+              <a:rPr sz="1100" b="0" i="0">
+                <a:solidFill>
+                  <a:srgbClr val="9B9B93"/>
+                </a:solidFill>
+                <a:latin typeface="Malgun Gothic"/>
+                <a:ea typeface="Malgun Gothic"/>
+                <a:cs typeface="Malgun Gothic"/>
+              </a:rPr>
+              <a:t>마무리</a:t>
+            </a:r>
+          </a:p>
+        </p:txBody>
+      </p:sp>
+      <p:sp>
+        <p:nvSpPr>
+          <p:cNvPr id="6" name="TextBox 5"/>
+          <p:cNvSpPr txBox="1"/>
+          <p:nvPr/>
+        </p:nvSpPr>
+        <p:spPr>
+          <a:xfrm>
+            <a:off x="11247120" y="6446520"/>
+            <a:ext cx="640080" cy="320040"/>
+          </a:xfrm>
+          <a:prstGeom prst="rect">
+            <a:avLst/>
+          </a:prstGeom>
+          <a:noFill/>
+        </p:spPr>
+        <p:txBody>
+          <a:bodyPr wrap="square" anchor="t">
+            <a:spAutoFit/>
+          </a:bodyPr>
+          <a:lstStyle/>
+          <a:p>
+            <a:pPr algn="r"/>
+            <a:r>
+              <a:rPr sz="1100" b="0" i="0">
+                <a:solidFill>
+                  <a:srgbClr val="9B9B93"/>
+                </a:solidFill>
+                <a:latin typeface="Malgun Gothic"/>
+                <a:ea typeface="Malgun Gothic"/>
+                <a:cs typeface="Malgun Gothic"/>
+              </a:rPr>
+              <a:t>37</a:t>
+            </a:r>
+          </a:p>
+        </p:txBody>
+      </p:sp>
+    </p:spTree>
+  </p:cSld>
+  <p:clrMapOvr>
+    <a:masterClrMapping/>
+  </p:clrMapOvr>
+</p:sld>
+</file>
+
+<file path=ppt/slides/slide38.xml><?xml version="1.0" encoding="utf-8"?>
 <p:sld xmlns:a="http://schemas.openxmlformats.org/drawingml/2006/main" xmlns:p="http://schemas.openxmlformats.org/presentationml/2006/main" xmlns:r="http://schemas.openxmlformats.org/officeDocument/2006/relationships">
   <p:cSld>
     <p:bg>
